--- a/Tesla_Model3_Marketing.pptx
+++ b/Tesla_Model3_Marketing.pptx
@@ -1746,7 +1746,7 @@
         </p:nvSpPr>
         <p:spPr>
           <a:xfrm>
-            <a:off x="457200" y="1188720"/>
+            <a:off x="457200" y="1005840"/>
             <a:ext cx="8229600" cy="365760"/>
           </a:xfrm>
           <a:prstGeom prst="rect">
@@ -1785,7 +1785,7 @@
         </p:nvSpPr>
         <p:spPr>
           <a:xfrm>
-            <a:off x="457200" y="1554480"/>
+            <a:off x="457200" y="1371600"/>
             <a:ext cx="8229600" cy="1280160"/>
           </a:xfrm>
           <a:prstGeom prst="rect">
@@ -1824,7 +1824,7 @@
         </p:nvSpPr>
         <p:spPr>
           <a:xfrm>
-            <a:off x="457200" y="2651760"/>
+            <a:off x="457200" y="2514600"/>
             <a:ext cx="8229600" cy="822960"/>
           </a:xfrm>
           <a:prstGeom prst="rect">
@@ -1863,7 +1863,7 @@
         </p:nvSpPr>
         <p:spPr>
           <a:xfrm>
-            <a:off x="3931920" y="3520440"/>
+            <a:off x="3931920" y="3383280"/>
             <a:ext cx="1280160" cy="27432"/>
           </a:xfrm>
           <a:prstGeom prst="rect">
@@ -1883,8 +1883,8 @@
         </p:nvSpPr>
         <p:spPr>
           <a:xfrm>
-            <a:off x="914400" y="3657600"/>
-            <a:ext cx="7315200" cy="457200"/>
+            <a:off x="1371600" y="3520440"/>
+            <a:ext cx="6400800" cy="640080"/>
           </a:xfrm>
           <a:prstGeom prst="rect">
             <a:avLst/>
@@ -1900,17 +1900,34 @@
               <a:buNone/>
             </a:pPr>
             <a:r>
-              <a:rPr lang="en-US" sz="1400" i="1" dirty="0">
+              <a:rPr lang="en-US" sz="1300" i="1" dirty="0">
                 <a:solidFill>
                   <a:srgbClr val="666677"/>
                 </a:solidFill>
-                <a:latin typeface="Arial" pitchFamily="34" charset="0"/>
-                <a:ea typeface="Arial" pitchFamily="34" charset="-122"/>
-                <a:cs typeface="Arial" pitchFamily="34" charset="-120"/>
-              </a:rPr>
-              <a:t>Redefining How Cars Are Sold in America</a:t>
-            </a:r>
-            <a:endParaRPr lang="en-US" sz="1400" dirty="0"/>
+                <a:latin typeface="Georgia" pitchFamily="34" charset="0"/>
+                <a:ea typeface="Georgia" pitchFamily="34" charset="-122"/>
+                <a:cs typeface="Georgia" pitchFamily="34" charset="-120"/>
+              </a:rPr>
+              <a:t>What happens when a company sells 1.8 million cars a year</a:t>
+            </a:r>
+            <a:endParaRPr lang="en-US" sz="1300" dirty="0"/>
+          </a:p>
+          <a:p>
+            <a:pPr algn="ctr" indent="0" marL="0">
+              <a:buNone/>
+            </a:pPr>
+            <a:r>
+              <a:rPr lang="en-US" sz="1300" i="1" dirty="0">
+                <a:solidFill>
+                  <a:srgbClr val="666677"/>
+                </a:solidFill>
+                <a:latin typeface="Georgia" pitchFamily="34" charset="0"/>
+                <a:ea typeface="Georgia" pitchFamily="34" charset="-122"/>
+                <a:cs typeface="Georgia" pitchFamily="34" charset="-120"/>
+              </a:rPr>
+              <a:t>without spending a single dollar on advertising?</a:t>
+            </a:r>
+            <a:endParaRPr lang="en-US" sz="1300" dirty="0"/>
           </a:p>
         </p:txBody>
       </p:sp>
@@ -1930,8 +1947,8 @@
         </p:blipFill>
         <p:spPr>
           <a:xfrm>
-            <a:off x="4251960" y="4206240"/>
-            <a:ext cx="548640" cy="548640"/>
+            <a:off x="4251960" y="4251960"/>
+            <a:ext cx="502920" cy="502920"/>
           </a:xfrm>
           <a:prstGeom prst="rect">
             <a:avLst/>
@@ -2012,14 +2029,36 @@
       </p:sp>
       <p:sp>
         <p:nvSpPr>
-          <p:cNvPr id="4" name="Text 2"/>
-          <p:cNvSpPr/>
-          <p:nvPr/>
-        </p:nvSpPr>
-        <p:spPr>
-          <a:xfrm>
-            <a:off x="548640" y="182880"/>
-            <a:ext cx="1097280" cy="640080"/>
+          <p:cNvPr id="4" name="Shape 2"/>
+          <p:cNvSpPr/>
+          <p:nvPr/>
+        </p:nvSpPr>
+        <p:spPr>
+          <a:xfrm>
+            <a:off x="2286000" y="1371600"/>
+            <a:ext cx="4572000" cy="3200400"/>
+          </a:xfrm>
+          <a:prstGeom prst="ellipse">
+            <a:avLst/>
+          </a:prstGeom>
+          <a:solidFill>
+            <a:srgbClr val="3D0A0C">
+              <a:alpha val="25000"/>
+            </a:srgbClr>
+          </a:solidFill>
+          <a:ln/>
+        </p:spPr>
+      </p:sp>
+      <p:sp>
+        <p:nvSpPr>
+          <p:cNvPr id="5" name="Text 3"/>
+          <p:cNvSpPr/>
+          <p:nvPr/>
+        </p:nvSpPr>
+        <p:spPr>
+          <a:xfrm>
+            <a:off x="457200" y="731520"/>
+            <a:ext cx="8229600" cy="548640"/>
           </a:xfrm>
           <a:prstGeom prst="rect">
             <a:avLst/>
@@ -2031,19 +2070,19 @@
           <a:bodyPr wrap="square" lIns="0" tIns="0" rIns="0" bIns="0" rtlCol="0" anchor="ctr"/>
           <a:lstStyle/>
           <a:p>
-            <a:pPr indent="0" marL="0">
+            <a:pPr algn="ctr" indent="0" marL="0">
               <a:buNone/>
             </a:pPr>
             <a:r>
               <a:rPr lang="en-US" sz="3200" dirty="0">
                 <a:solidFill>
-                  <a:srgbClr val="E82127"/>
+                  <a:srgbClr val="F0F0F0"/>
                 </a:solidFill>
                 <a:latin typeface="Arial Black" pitchFamily="34" charset="0"/>
                 <a:ea typeface="Arial Black" pitchFamily="34" charset="-122"/>
                 <a:cs typeface="Arial Black" pitchFamily="34" charset="-120"/>
               </a:rPr>
-              <a:t>10</a:t>
+              <a:t>The Bottom Line</a:t>
             </a:r>
             <a:endParaRPr lang="en-US" sz="3200" dirty="0"/>
           </a:p>
@@ -2051,14 +2090,70 @@
       </p:sp>
       <p:sp>
         <p:nvSpPr>
-          <p:cNvPr id="5" name="Text 3"/>
-          <p:cNvSpPr/>
-          <p:nvPr/>
-        </p:nvSpPr>
-        <p:spPr>
-          <a:xfrm>
-            <a:off x="548640" y="685800"/>
-            <a:ext cx="5486400" cy="457200"/>
+          <p:cNvPr id="6" name="Text 4"/>
+          <p:cNvSpPr/>
+          <p:nvPr/>
+        </p:nvSpPr>
+        <p:spPr>
+          <a:xfrm>
+            <a:off x="914400" y="1371600"/>
+            <a:ext cx="7315200" cy="731520"/>
+          </a:xfrm>
+          <a:prstGeom prst="rect">
+            <a:avLst/>
+          </a:prstGeom>
+          <a:noFill/>
+          <a:ln/>
+        </p:spPr>
+        <p:txBody>
+          <a:bodyPr wrap="square" rtlCol="0" anchor="ctr"/>
+          <a:lstStyle/>
+          <a:p>
+            <a:pPr algn="ctr" indent="0" marL="0">
+              <a:buNone/>
+            </a:pPr>
+            <a:r>
+              <a:rPr lang="en-US" sz="1600" i="1" dirty="0">
+                <a:solidFill>
+                  <a:srgbClr val="666677"/>
+                </a:solidFill>
+                <a:latin typeface="Georgia" pitchFamily="34" charset="0"/>
+                <a:ea typeface="Georgia" pitchFamily="34" charset="-122"/>
+                <a:cs typeface="Georgia" pitchFamily="34" charset="-120"/>
+              </a:rPr>
+              <a:t>Tesla didn't just build a better car.</a:t>
+            </a:r>
+            <a:endParaRPr lang="en-US" sz="1600" dirty="0"/>
+          </a:p>
+          <a:p>
+            <a:pPr algn="ctr" indent="0" marL="0">
+              <a:buNone/>
+            </a:pPr>
+            <a:r>
+              <a:rPr lang="en-US" sz="1600" i="1" dirty="0">
+                <a:solidFill>
+                  <a:srgbClr val="666677"/>
+                </a:solidFill>
+                <a:latin typeface="Georgia" pitchFamily="34" charset="0"/>
+                <a:ea typeface="Georgia" pitchFamily="34" charset="-122"/>
+                <a:cs typeface="Georgia" pitchFamily="34" charset="-120"/>
+              </a:rPr>
+              <a:t>They built a better way to sell one.</a:t>
+            </a:r>
+            <a:endParaRPr lang="en-US" sz="1600" dirty="0"/>
+          </a:p>
+        </p:txBody>
+      </p:sp>
+      <p:sp>
+        <p:nvSpPr>
+          <p:cNvPr id="7" name="Text 5"/>
+          <p:cNvSpPr/>
+          <p:nvPr/>
+        </p:nvSpPr>
+        <p:spPr>
+          <a:xfrm>
+            <a:off x="1371600" y="2286000"/>
+            <a:ext cx="6400800" cy="347472"/>
           </a:xfrm>
           <a:prstGeom prst="rect">
             <a:avLst/>
@@ -2074,258 +2169,291 @@
               <a:buNone/>
             </a:pPr>
             <a:r>
-              <a:rPr lang="en-US" sz="2600" dirty="0">
-                <a:solidFill>
-                  <a:srgbClr val="F0F0F0"/>
+              <a:rPr lang="en-US" sz="1100" b="1" dirty="0">
+                <a:solidFill>
+                  <a:srgbClr val="E82127"/>
+                </a:solidFill>
+              </a:rPr>
+              <a:t>01  </a:t>
+            </a:r>
+            <a:pPr indent="0" marL="0">
+              <a:buNone/>
+            </a:pPr>
+            <a:r>
+              <a:rPr lang="en-US" sz="1100" dirty="0">
+                <a:solidFill>
+                  <a:srgbClr val="888899"/>
+                </a:solidFill>
+              </a:rPr>
+              <a:t>Zero advertising + 52% market share = the product IS the marketing</a:t>
+            </a:r>
+            <a:endParaRPr lang="en-US" sz="1100" dirty="0"/>
+          </a:p>
+        </p:txBody>
+      </p:sp>
+      <p:sp>
+        <p:nvSpPr>
+          <p:cNvPr id="8" name="Text 6"/>
+          <p:cNvSpPr/>
+          <p:nvPr/>
+        </p:nvSpPr>
+        <p:spPr>
+          <a:xfrm>
+            <a:off x="1371600" y="2670048"/>
+            <a:ext cx="6400800" cy="347472"/>
+          </a:xfrm>
+          <a:prstGeom prst="rect">
+            <a:avLst/>
+          </a:prstGeom>
+          <a:noFill/>
+          <a:ln/>
+        </p:spPr>
+        <p:txBody>
+          <a:bodyPr wrap="square" lIns="0" tIns="0" rIns="0" bIns="0" rtlCol="0" anchor="ctr"/>
+          <a:lstStyle/>
+          <a:p>
+            <a:pPr indent="0" marL="0">
+              <a:buNone/>
+            </a:pPr>
+            <a:r>
+              <a:rPr lang="en-US" sz="1100" b="1" dirty="0">
+                <a:solidFill>
+                  <a:srgbClr val="E82127"/>
+                </a:solidFill>
+              </a:rPr>
+              <a:t>02  </a:t>
+            </a:r>
+            <a:pPr indent="0" marL="0">
+              <a:buNone/>
+            </a:pPr>
+            <a:r>
+              <a:rPr lang="en-US" sz="1100" dirty="0">
+                <a:solidFill>
+                  <a:srgbClr val="888899"/>
+                </a:solidFill>
+              </a:rPr>
+              <a:t>Direct-to-consumer eliminated $2,000+ dealer markup AND controlled the brand</a:t>
+            </a:r>
+            <a:endParaRPr lang="en-US" sz="1100" dirty="0"/>
+          </a:p>
+        </p:txBody>
+      </p:sp>
+      <p:sp>
+        <p:nvSpPr>
+          <p:cNvPr id="9" name="Text 7"/>
+          <p:cNvSpPr/>
+          <p:nvPr/>
+        </p:nvSpPr>
+        <p:spPr>
+          <a:xfrm>
+            <a:off x="1371600" y="3054096"/>
+            <a:ext cx="6400800" cy="347472"/>
+          </a:xfrm>
+          <a:prstGeom prst="rect">
+            <a:avLst/>
+          </a:prstGeom>
+          <a:noFill/>
+          <a:ln/>
+        </p:spPr>
+        <p:txBody>
+          <a:bodyPr wrap="square" lIns="0" tIns="0" rIns="0" bIns="0" rtlCol="0" anchor="ctr"/>
+          <a:lstStyle/>
+          <a:p>
+            <a:pPr indent="0" marL="0">
+              <a:buNone/>
+            </a:pPr>
+            <a:r>
+              <a:rPr lang="en-US" sz="1100" b="1" dirty="0">
+                <a:solidFill>
+                  <a:srgbClr val="E82127"/>
+                </a:solidFill>
+              </a:rPr>
+              <a:t>03  </a:t>
+            </a:r>
+            <a:pPr indent="0" marL="0">
+              <a:buNone/>
+            </a:pPr>
+            <a:r>
+              <a:rPr lang="en-US" sz="1100" dirty="0">
+                <a:solidFill>
+                  <a:srgbClr val="888899"/>
+                </a:solidFill>
+              </a:rPr>
+              <a:t>91% satisfaction turned buyers into the most powerful salesforce in automotive</a:t>
+            </a:r>
+            <a:endParaRPr lang="en-US" sz="1100" dirty="0"/>
+          </a:p>
+        </p:txBody>
+      </p:sp>
+      <p:sp>
+        <p:nvSpPr>
+          <p:cNvPr id="10" name="Text 8"/>
+          <p:cNvSpPr/>
+          <p:nvPr/>
+        </p:nvSpPr>
+        <p:spPr>
+          <a:xfrm>
+            <a:off x="1371600" y="3438144"/>
+            <a:ext cx="6400800" cy="347472"/>
+          </a:xfrm>
+          <a:prstGeom prst="rect">
+            <a:avLst/>
+          </a:prstGeom>
+          <a:noFill/>
+          <a:ln/>
+        </p:spPr>
+        <p:txBody>
+          <a:bodyPr wrap="square" lIns="0" tIns="0" rIns="0" bIns="0" rtlCol="0" anchor="ctr"/>
+          <a:lstStyle/>
+          <a:p>
+            <a:pPr indent="0" marL="0">
+              <a:buNone/>
+            </a:pPr>
+            <a:r>
+              <a:rPr lang="en-US" sz="1100" b="1" dirty="0">
+                <a:solidFill>
+                  <a:srgbClr val="E82127"/>
+                </a:solidFill>
+              </a:rPr>
+              <a:t>04  </a:t>
+            </a:r>
+            <a:pPr indent="0" marL="0">
+              <a:buNone/>
+            </a:pPr>
+            <a:r>
+              <a:rPr lang="en-US" sz="1100" dirty="0">
+                <a:solidFill>
+                  <a:srgbClr val="888899"/>
+                </a:solidFill>
+              </a:rPr>
+              <a:t>But the moat is eroding — BYD, Ford, and GM are closing fast</a:t>
+            </a:r>
+            <a:endParaRPr lang="en-US" sz="1100" dirty="0"/>
+          </a:p>
+        </p:txBody>
+      </p:sp>
+      <p:sp>
+        <p:nvSpPr>
+          <p:cNvPr id="11" name="Text 9"/>
+          <p:cNvSpPr/>
+          <p:nvPr/>
+        </p:nvSpPr>
+        <p:spPr>
+          <a:xfrm>
+            <a:off x="1371600" y="3822192"/>
+            <a:ext cx="6400800" cy="347472"/>
+          </a:xfrm>
+          <a:prstGeom prst="rect">
+            <a:avLst/>
+          </a:prstGeom>
+          <a:noFill/>
+          <a:ln/>
+        </p:spPr>
+        <p:txBody>
+          <a:bodyPr wrap="square" lIns="0" tIns="0" rIns="0" bIns="0" rtlCol="0" anchor="ctr"/>
+          <a:lstStyle/>
+          <a:p>
+            <a:pPr indent="0" marL="0">
+              <a:buNone/>
+            </a:pPr>
+            <a:r>
+              <a:rPr lang="en-US" sz="1100" b="1" dirty="0">
+                <a:solidFill>
+                  <a:srgbClr val="E82127"/>
+                </a:solidFill>
+              </a:rPr>
+              <a:t>05  </a:t>
+            </a:r>
+            <a:pPr indent="0" marL="0">
+              <a:buNone/>
+            </a:pPr>
+            <a:r>
+              <a:rPr lang="en-US" sz="1100" dirty="0">
+                <a:solidFill>
+                  <a:srgbClr val="888899"/>
+                </a:solidFill>
+              </a:rPr>
+              <a:t>The next chapter requires going broader, cheaper, and more inclusive</a:t>
+            </a:r>
+            <a:endParaRPr lang="en-US" sz="1100" dirty="0"/>
+          </a:p>
+        </p:txBody>
+      </p:sp>
+      <p:sp>
+        <p:nvSpPr>
+          <p:cNvPr id="12" name="Text 10"/>
+          <p:cNvSpPr/>
+          <p:nvPr/>
+        </p:nvSpPr>
+        <p:spPr>
+          <a:xfrm>
+            <a:off x="548640" y="4434840"/>
+            <a:ext cx="8046720" cy="365760"/>
+          </a:xfrm>
+          <a:prstGeom prst="rect">
+            <a:avLst/>
+          </a:prstGeom>
+          <a:noFill/>
+          <a:ln/>
+        </p:spPr>
+        <p:txBody>
+          <a:bodyPr wrap="square" lIns="0" tIns="0" rIns="0" bIns="0" rtlCol="0" anchor="ctr"/>
+          <a:lstStyle/>
+          <a:p>
+            <a:pPr indent="0" marL="0">
+              <a:buNone/>
+            </a:pPr>
+            <a:r>
+              <a:rPr lang="en-US" sz="700" dirty="0">
+                <a:solidFill>
+                  <a:srgbClr val="666677"/>
+                </a:solidFill>
+                <a:latin typeface="Arial" pitchFamily="34" charset="0"/>
+                <a:ea typeface="Arial" pitchFamily="34" charset="-122"/>
+                <a:cs typeface="Arial" pitchFamily="34" charset="-120"/>
+              </a:rPr>
+              <a:t>Sources: Statista (2025), Tesla 10-K (2024), Porter (1979), Kotler &amp; Keller (2016), IEA (2025), Bloomberg NEF (2025), McKinsey (2024), JD Power (2024), Consumer Reports (2024)</a:t>
+            </a:r>
+            <a:endParaRPr lang="en-US" sz="700" dirty="0"/>
+          </a:p>
+        </p:txBody>
+      </p:sp>
+      <p:sp>
+        <p:nvSpPr>
+          <p:cNvPr id="13" name="Text 11"/>
+          <p:cNvSpPr/>
+          <p:nvPr/>
+        </p:nvSpPr>
+        <p:spPr>
+          <a:xfrm>
+            <a:off x="0" y="4663440"/>
+            <a:ext cx="9144000" cy="320040"/>
+          </a:xfrm>
+          <a:prstGeom prst="rect">
+            <a:avLst/>
+          </a:prstGeom>
+          <a:noFill/>
+          <a:ln/>
+        </p:spPr>
+        <p:txBody>
+          <a:bodyPr wrap="square" rtlCol="0" anchor="ctr"/>
+          <a:lstStyle/>
+          <a:p>
+            <a:pPr algn="ctr" indent="0" marL="0">
+              <a:buNone/>
+            </a:pPr>
+            <a:r>
+              <a:rPr lang="en-US" sz="1600" dirty="0">
+                <a:solidFill>
+                  <a:srgbClr val="E82127"/>
                 </a:solidFill>
                 <a:latin typeface="Arial Black" pitchFamily="34" charset="0"/>
                 <a:ea typeface="Arial Black" pitchFamily="34" charset="-122"/>
                 <a:cs typeface="Arial Black" pitchFamily="34" charset="-120"/>
               </a:rPr>
-              <a:t>References</a:t>
-            </a:r>
-            <a:endParaRPr lang="en-US" sz="2600" dirty="0"/>
-          </a:p>
-        </p:txBody>
-      </p:sp>
-      <p:sp>
-        <p:nvSpPr>
-          <p:cNvPr id="6" name="Text 4"/>
-          <p:cNvSpPr/>
-          <p:nvPr/>
-        </p:nvSpPr>
-        <p:spPr>
-          <a:xfrm>
-            <a:off x="548640" y="1188720"/>
-            <a:ext cx="8046720" cy="3200400"/>
-          </a:xfrm>
-          <a:prstGeom prst="rect">
-            <a:avLst/>
-          </a:prstGeom>
-          <a:noFill/>
-          <a:ln/>
-        </p:spPr>
-        <p:txBody>
-          <a:bodyPr wrap="square" rtlCol="0" anchor="ctr"/>
-          <a:lstStyle/>
-          <a:p>
-            <a:pPr marL="342900" indent="-342900">
-              <a:buSzPct val="100000"/>
-              <a:buChar char="•"/>
-            </a:pPr>
-            <a:r>
-              <a:rPr lang="en-US" sz="850" dirty="0">
-                <a:solidFill>
-                  <a:srgbClr val="888899"/>
-                </a:solidFill>
-              </a:rPr>
-              <a:t>Statista (2025). US Electric Vehicle Market Report. Available at: statista.com/outlook/mmo/electric-vehicles/united-states</a:t>
-            </a:r>
-            <a:endParaRPr lang="en-US" sz="850" dirty="0"/>
-          </a:p>
-          <a:p>
-            <a:pPr marL="342900" indent="-342900">
-              <a:buSzPct val="100000"/>
-              <a:buChar char="•"/>
-            </a:pPr>
-            <a:r>
-              <a:rPr lang="en-US" sz="850" dirty="0">
-                <a:solidFill>
-                  <a:srgbClr val="888899"/>
-                </a:solidFill>
-              </a:rPr>
-              <a:t>Tesla Inc. (2024). Annual Report &amp; Form 10-K Filing. United States Securities and Exchange Commission.</a:t>
-            </a:r>
-            <a:endParaRPr lang="en-US" sz="850" dirty="0"/>
-          </a:p>
-          <a:p>
-            <a:pPr marL="342900" indent="-342900">
-              <a:buSzPct val="100000"/>
-              <a:buChar char="•"/>
-            </a:pPr>
-            <a:r>
-              <a:rPr lang="en-US" sz="850" dirty="0">
-                <a:solidFill>
-                  <a:srgbClr val="888899"/>
-                </a:solidFill>
-              </a:rPr>
-              <a:t>Porter, M.E. (1979). 'How Competitive Forces Shape Strategy'. Harvard Business Review, 57(2), pp.137-145.</a:t>
-            </a:r>
-            <a:endParaRPr lang="en-US" sz="850" dirty="0"/>
-          </a:p>
-          <a:p>
-            <a:pPr marL="342900" indent="-342900">
-              <a:buSzPct val="100000"/>
-              <a:buChar char="•"/>
-            </a:pPr>
-            <a:r>
-              <a:rPr lang="en-US" sz="850" dirty="0">
-                <a:solidFill>
-                  <a:srgbClr val="888899"/>
-                </a:solidFill>
-              </a:rPr>
-              <a:t>Kotler, P. &amp; Keller, K.L. (2016). Marketing Management. 15th Edition. Pearson Education Limited.</a:t>
-            </a:r>
-            <a:endParaRPr lang="en-US" sz="850" dirty="0"/>
-          </a:p>
-          <a:p>
-            <a:pPr marL="342900" indent="-342900">
-              <a:buSzPct val="100000"/>
-              <a:buChar char="•"/>
-            </a:pPr>
-            <a:r>
-              <a:rPr lang="en-US" sz="850" dirty="0">
-                <a:solidFill>
-                  <a:srgbClr val="888899"/>
-                </a:solidFill>
-              </a:rPr>
-              <a:t>International Energy Agency (2025). Global EV Outlook 2025. IEA Publications, Paris.</a:t>
-            </a:r>
-            <a:endParaRPr lang="en-US" sz="850" dirty="0"/>
-          </a:p>
-          <a:p>
-            <a:pPr marL="342900" indent="-342900">
-              <a:buSzPct val="100000"/>
-              <a:buChar char="•"/>
-            </a:pPr>
-            <a:r>
-              <a:rPr lang="en-US" sz="850" dirty="0">
-                <a:solidFill>
-                  <a:srgbClr val="888899"/>
-                </a:solidFill>
-              </a:rPr>
-              <a:t>Bloomberg NEF (2025). Electric Vehicle Market Analysis &amp; Long-Term Forecast. Bloomberg Finance LP.</a:t>
-            </a:r>
-            <a:endParaRPr lang="en-US" sz="850" dirty="0"/>
-          </a:p>
-          <a:p>
-            <a:pPr marL="342900" indent="-342900">
-              <a:buSzPct val="100000"/>
-              <a:buChar char="•"/>
-            </a:pPr>
-            <a:r>
-              <a:rPr lang="en-US" sz="850" dirty="0">
-                <a:solidFill>
-                  <a:srgbClr val="888899"/>
-                </a:solidFill>
-              </a:rPr>
-              <a:t>McKinsey &amp; Company (2024). 'The Future of Mobility: Electric Vehicles in America'. McKinsey Center for Future Mobility.</a:t>
-            </a:r>
-            <a:endParaRPr lang="en-US" sz="850" dirty="0"/>
-          </a:p>
-          <a:p>
-            <a:pPr marL="342900" indent="-342900">
-              <a:buSzPct val="100000"/>
-              <a:buChar char="•"/>
-            </a:pPr>
-            <a:r>
-              <a:rPr lang="en-US" sz="850" dirty="0">
-                <a:solidFill>
-                  <a:srgbClr val="888899"/>
-                </a:solidFill>
-              </a:rPr>
-              <a:t>Deloitte (2025). Global Automotive Consumer Study — US Market Focus. Deloitte Touche Tohmatsu Limited.</a:t>
-            </a:r>
-            <a:endParaRPr lang="en-US" sz="850" dirty="0"/>
-          </a:p>
-          <a:p>
-            <a:pPr marL="342900" indent="-342900">
-              <a:buSzPct val="100000"/>
-              <a:buChar char="•"/>
-            </a:pPr>
-            <a:r>
-              <a:rPr lang="en-US" sz="850" dirty="0">
-                <a:solidFill>
-                  <a:srgbClr val="888899"/>
-                </a:solidFill>
-              </a:rPr>
-              <a:t>JD Power (2024). US Electric Vehicle Experience Ownership Study. J.D. Power and Associates.</a:t>
-            </a:r>
-            <a:endParaRPr lang="en-US" sz="850" dirty="0"/>
-          </a:p>
-          <a:p>
-            <a:pPr marL="342900" indent="-342900">
-              <a:buSzPct val="100000"/>
-              <a:buChar char="•"/>
-            </a:pPr>
-            <a:r>
-              <a:rPr lang="en-US" sz="850" dirty="0">
-                <a:solidFill>
-                  <a:srgbClr val="888899"/>
-                </a:solidFill>
-              </a:rPr>
-              <a:t>Consumer Reports (2024). Annual Auto Reliability Survey — EV Segment Analysis.</a:t>
-            </a:r>
-            <a:endParaRPr lang="en-US" sz="850" dirty="0"/>
-          </a:p>
-          <a:p>
-            <a:pPr marL="342900" indent="-342900">
-              <a:buSzPct val="100000"/>
-              <a:buChar char="•"/>
-            </a:pPr>
-            <a:r>
-              <a:rPr lang="en-US" sz="850" dirty="0">
-                <a:solidFill>
-                  <a:srgbClr val="888899"/>
-                </a:solidFill>
-              </a:rPr>
-              <a:t>Goldman Sachs (2024). 'The Autonomous Driving Revolution: A $300B Opportunity'. GS Research.</a:t>
-            </a:r>
-            <a:endParaRPr lang="en-US" sz="850" dirty="0"/>
-          </a:p>
-          <a:p>
-            <a:pPr marL="342900" indent="-342900">
-              <a:buSzPct val="100000"/>
-              <a:buChar char="•"/>
-            </a:pPr>
-            <a:r>
-              <a:rPr lang="en-US" sz="850" dirty="0">
-                <a:solidFill>
-                  <a:srgbClr val="888899"/>
-                </a:solidFill>
-              </a:rPr>
-              <a:t>US Department of Energy (2024). Alternative Fuels Data Center — Fuel Cost Comparison Calculator.</a:t>
-            </a:r>
-            <a:endParaRPr lang="en-US" sz="850" dirty="0"/>
-          </a:p>
-        </p:txBody>
-      </p:sp>
-      <p:sp>
-        <p:nvSpPr>
-          <p:cNvPr id="7" name="Text 5"/>
-          <p:cNvSpPr/>
-          <p:nvPr/>
-        </p:nvSpPr>
-        <p:spPr>
-          <a:xfrm>
-            <a:off x="0" y="4434840"/>
-            <a:ext cx="9144000" cy="457200"/>
-          </a:xfrm>
-          <a:prstGeom prst="rect">
-            <a:avLst/>
-          </a:prstGeom>
-          <a:noFill/>
-          <a:ln/>
-        </p:spPr>
-        <p:txBody>
-          <a:bodyPr wrap="square" rtlCol="0" anchor="ctr"/>
-          <a:lstStyle/>
-          <a:p>
-            <a:pPr algn="ctr" indent="0" marL="0">
-              <a:buNone/>
-            </a:pPr>
-            <a:r>
-              <a:rPr lang="en-US" sz="2000" dirty="0">
-                <a:solidFill>
-                  <a:srgbClr val="E82127"/>
-                </a:solidFill>
-                <a:latin typeface="Arial Black" pitchFamily="34" charset="0"/>
-                <a:ea typeface="Arial Black" pitchFamily="34" charset="-122"/>
-                <a:cs typeface="Arial Black" pitchFamily="34" charset="-120"/>
-              </a:rPr>
               <a:t>Thank You</a:t>
             </a:r>
-            <a:endParaRPr lang="en-US" sz="2000" dirty="0"/>
+            <a:endParaRPr lang="en-US" sz="1600" dirty="0"/>
           </a:p>
         </p:txBody>
       </p:sp>
@@ -2414,7 +2542,7 @@
                 <a:ea typeface="Arial Black" pitchFamily="34" charset="-122"/>
                 <a:cs typeface="Arial Black" pitchFamily="34" charset="-120"/>
               </a:rPr>
-              <a:t>02</a:t>
+              <a:t>01</a:t>
             </a:r>
             <a:endParaRPr lang="en-US" sz="3200" dirty="0"/>
           </a:p>
@@ -2429,7 +2557,7 @@
         <p:spPr>
           <a:xfrm>
             <a:off x="548640" y="685800"/>
-            <a:ext cx="5486400" cy="457200"/>
+            <a:ext cx="7315200" cy="457200"/>
           </a:xfrm>
           <a:prstGeom prst="rect">
             <a:avLst/>
@@ -2453,7 +2581,7 @@
                 <a:ea typeface="Arial Black" pitchFamily="34" charset="-122"/>
                 <a:cs typeface="Arial Black" pitchFamily="34" charset="-120"/>
               </a:rPr>
-              <a:t>Executive Summary</a:t>
+              <a:t>The $67 Billion Question</a:t>
             </a:r>
             <a:endParaRPr lang="en-US" sz="2600" dirty="0"/>
           </a:p>
@@ -2461,14 +2589,53 @@
       </p:sp>
       <p:sp>
         <p:nvSpPr>
-          <p:cNvPr id="5" name="Shape 3"/>
-          <p:cNvSpPr/>
-          <p:nvPr/>
-        </p:nvSpPr>
-        <p:spPr>
-          <a:xfrm>
-            <a:off x="548640" y="1280160"/>
-            <a:ext cx="4023360" cy="3566160"/>
+          <p:cNvPr id="5" name="Text 3"/>
+          <p:cNvSpPr/>
+          <p:nvPr/>
+        </p:nvSpPr>
+        <p:spPr>
+          <a:xfrm>
+            <a:off x="548640" y="1143000"/>
+            <a:ext cx="8046720" cy="365760"/>
+          </a:xfrm>
+          <a:prstGeom prst="rect">
+            <a:avLst/>
+          </a:prstGeom>
+          <a:noFill/>
+          <a:ln/>
+        </p:spPr>
+        <p:txBody>
+          <a:bodyPr wrap="square" lIns="0" tIns="0" rIns="0" bIns="0" rtlCol="0" anchor="ctr"/>
+          <a:lstStyle/>
+          <a:p>
+            <a:pPr indent="0" marL="0">
+              <a:buNone/>
+            </a:pPr>
+            <a:r>
+              <a:rPr lang="en-US" sz="1200" i="1" dirty="0">
+                <a:solidFill>
+                  <a:srgbClr val="666677"/>
+                </a:solidFill>
+                <a:latin typeface="Georgia" pitchFamily="34" charset="0"/>
+                <a:ea typeface="Georgia" pitchFamily="34" charset="-122"/>
+                <a:cs typeface="Georgia" pitchFamily="34" charset="-120"/>
+              </a:rPr>
+              <a:t>Every automaker spends billions on ads. Tesla spends zero. Yet they own 52% of the US EV market. How?</a:t>
+            </a:r>
+            <a:endParaRPr lang="en-US" sz="1200" dirty="0"/>
+          </a:p>
+        </p:txBody>
+      </p:sp>
+      <p:sp>
+        <p:nvSpPr>
+          <p:cNvPr id="6" name="Shape 4"/>
+          <p:cNvSpPr/>
+          <p:nvPr/>
+        </p:nvSpPr>
+        <p:spPr>
+          <a:xfrm>
+            <a:off x="548640" y="1737360"/>
+            <a:ext cx="2560320" cy="2377440"/>
           </a:xfrm>
           <a:prstGeom prst="rect">
             <a:avLst/>
@@ -2488,14 +2655,14 @@
       </p:sp>
       <p:sp>
         <p:nvSpPr>
-          <p:cNvPr id="6" name="Shape 4"/>
-          <p:cNvSpPr/>
-          <p:nvPr/>
-        </p:nvSpPr>
-        <p:spPr>
-          <a:xfrm>
-            <a:off x="548640" y="1280160"/>
-            <a:ext cx="4023360" cy="36576"/>
+          <p:cNvPr id="7" name="Shape 5"/>
+          <p:cNvSpPr/>
+          <p:nvPr/>
+        </p:nvSpPr>
+        <p:spPr>
+          <a:xfrm>
+            <a:off x="548640" y="1737360"/>
+            <a:ext cx="2560320" cy="36576"/>
           </a:xfrm>
           <a:prstGeom prst="rect">
             <a:avLst/>
@@ -2506,40 +2673,16 @@
           <a:ln/>
         </p:spPr>
       </p:sp>
-      <p:pic>
-        <p:nvPicPr>
-          <p:cNvPr id="7" name="Image 0" descr="preencoded.png">    </p:cNvPr>
-          <p:cNvPicPr>
-            <a:picLocks noChangeAspect="1"/>
-          </p:cNvPicPr>
-          <p:nvPr/>
-        </p:nvPicPr>
-        <p:blipFill>
-          <a:blip r:embed="rId1"/>
-          <a:stretch>
-            <a:fillRect/>
-          </a:stretch>
-        </p:blipFill>
-        <p:spPr>
-          <a:xfrm>
-            <a:off x="777240" y="1463040"/>
-            <a:ext cx="274320" cy="274320"/>
-          </a:xfrm>
-          <a:prstGeom prst="rect">
-            <a:avLst/>
-          </a:prstGeom>
-        </p:spPr>
-      </p:pic>
-      <p:sp>
-        <p:nvSpPr>
-          <p:cNvPr id="8" name="Text 5"/>
-          <p:cNvSpPr/>
-          <p:nvPr/>
-        </p:nvSpPr>
-        <p:spPr>
-          <a:xfrm>
-            <a:off x="1143000" y="1463040"/>
-            <a:ext cx="3200400" cy="274320"/>
+      <p:sp>
+        <p:nvSpPr>
+          <p:cNvPr id="8" name="Text 6"/>
+          <p:cNvSpPr/>
+          <p:nvPr/>
+        </p:nvSpPr>
+        <p:spPr>
+          <a:xfrm>
+            <a:off x="548640" y="1920240"/>
+            <a:ext cx="2560320" cy="731520"/>
           </a:xfrm>
           <a:prstGeom prst="rect">
             <a:avLst/>
@@ -2551,19 +2694,58 @@
           <a:bodyPr wrap="square" lIns="0" tIns="0" rIns="0" bIns="0" rtlCol="0" anchor="ctr"/>
           <a:lstStyle/>
           <a:p>
-            <a:pPr indent="0" marL="0">
+            <a:pPr algn="ctr" indent="0" marL="0">
               <a:buNone/>
             </a:pPr>
             <a:r>
+              <a:rPr lang="en-US" sz="3600" dirty="0">
+                <a:solidFill>
+                  <a:srgbClr val="E82127"/>
+                </a:solidFill>
+                <a:latin typeface="Arial Black" pitchFamily="34" charset="0"/>
+                <a:ea typeface="Arial Black" pitchFamily="34" charset="-122"/>
+                <a:cs typeface="Arial Black" pitchFamily="34" charset="-120"/>
+              </a:rPr>
+              <a:t>$67B</a:t>
+            </a:r>
+            <a:endParaRPr lang="en-US" sz="3600" dirty="0"/>
+          </a:p>
+        </p:txBody>
+      </p:sp>
+      <p:sp>
+        <p:nvSpPr>
+          <p:cNvPr id="9" name="Text 7"/>
+          <p:cNvSpPr/>
+          <p:nvPr/>
+        </p:nvSpPr>
+        <p:spPr>
+          <a:xfrm>
+            <a:off x="548640" y="2606040"/>
+            <a:ext cx="2560320" cy="320040"/>
+          </a:xfrm>
+          <a:prstGeom prst="rect">
+            <a:avLst/>
+          </a:prstGeom>
+          <a:noFill/>
+          <a:ln/>
+        </p:spPr>
+        <p:txBody>
+          <a:bodyPr wrap="square" lIns="0" tIns="0" rIns="0" bIns="0" rtlCol="0" anchor="ctr"/>
+          <a:lstStyle/>
+          <a:p>
+            <a:pPr algn="ctr" indent="0" marL="0">
+              <a:buNone/>
+            </a:pPr>
+            <a:r>
               <a:rPr lang="en-US" sz="1200" b="1" dirty="0">
                 <a:solidFill>
-                  <a:srgbClr val="E82127"/>
+                  <a:srgbClr val="F0F0F0"/>
                 </a:solidFill>
                 <a:latin typeface="Arial" pitchFamily="34" charset="0"/>
                 <a:ea typeface="Arial" pitchFamily="34" charset="-122"/>
                 <a:cs typeface="Arial" pitchFamily="34" charset="-120"/>
               </a:rPr>
-              <a:t>Scope &amp; Analytical Frameworks</a:t>
+              <a:t>US EV Market Size</a:t>
             </a:r>
             <a:endParaRPr lang="en-US" sz="1200" dirty="0"/>
           </a:p>
@@ -2571,14 +2753,14 @@
       </p:sp>
       <p:sp>
         <p:nvSpPr>
-          <p:cNvPr id="9" name="Text 6"/>
-          <p:cNvSpPr/>
-          <p:nvPr/>
-        </p:nvSpPr>
-        <p:spPr>
-          <a:xfrm>
-            <a:off x="777240" y="1874520"/>
-            <a:ext cx="3611880" cy="2834640"/>
+          <p:cNvPr id="10" name="Text 8"/>
+          <p:cNvSpPr/>
+          <p:nvPr/>
+        </p:nvSpPr>
+        <p:spPr>
+          <a:xfrm>
+            <a:off x="731520" y="2971800"/>
+            <a:ext cx="2194560" cy="731520"/>
           </a:xfrm>
           <a:prstGeom prst="rect">
             <a:avLst/>
@@ -2587,140 +2769,54 @@
           <a:ln/>
         </p:spPr>
         <p:txBody>
-          <a:bodyPr wrap="square" rtlCol="0" anchor="ctr"/>
-          <a:lstStyle/>
-          <a:p>
-            <a:pPr marL="342900" indent="-342900">
-              <a:buSzPct val="100000"/>
-              <a:buChar char="•"/>
+          <a:bodyPr wrap="square" lIns="0" tIns="0" rIns="0" bIns="0" rtlCol="0" anchor="ctr"/>
+          <a:lstStyle/>
+          <a:p>
+            <a:pPr algn="ctr" indent="0" marL="0">
+              <a:buNone/>
             </a:pPr>
             <a:r>
               <a:rPr lang="en-US" sz="1000" dirty="0">
                 <a:solidFill>
-                  <a:srgbClr val="888899"/>
-                </a:solidFill>
-              </a:rPr>
-              <a:t>Comprehensive analysis of Tesla Model 3 marketing strategy in the US market</a:t>
+                  <a:srgbClr val="666677"/>
+                </a:solidFill>
+                <a:latin typeface="Arial" pitchFamily="34" charset="0"/>
+                <a:ea typeface="Arial" pitchFamily="34" charset="-122"/>
+                <a:cs typeface="Arial" pitchFamily="34" charset="-120"/>
+              </a:rPr>
+              <a:t>The prize everyone is</a:t>
             </a:r>
             <a:endParaRPr lang="en-US" sz="1000" dirty="0"/>
           </a:p>
           <a:p>
-            <a:pPr marL="342900" indent="-342900">
-              <a:buSzPct val="100000"/>
-              <a:buChar char="•"/>
+            <a:pPr algn="ctr" indent="0" marL="0">
+              <a:buNone/>
             </a:pPr>
             <a:r>
               <a:rPr lang="en-US" sz="1000" dirty="0">
                 <a:solidFill>
-                  <a:srgbClr val="888899"/>
-                </a:solidFill>
-              </a:rPr>
-              <a:t>Evaluates brand positioning in the $67B US EV market (Statista, 2025)</a:t>
+                  <a:srgbClr val="666677"/>
+                </a:solidFill>
+                <a:latin typeface="Arial" pitchFamily="34" charset="0"/>
+                <a:ea typeface="Arial" pitchFamily="34" charset="-122"/>
+                <a:cs typeface="Arial" pitchFamily="34" charset="-120"/>
+              </a:rPr>
+              <a:t>fighting for (Statista, 2025)</a:t>
             </a:r>
             <a:endParaRPr lang="en-US" sz="1000" dirty="0"/>
           </a:p>
-          <a:p>
-            <a:pPr marL="342900" indent="-342900">
-              <a:buSzPct val="100000"/>
-              <a:buChar char="•"/>
-            </a:pPr>
-            <a:r>
-              <a:rPr lang="en-US" sz="1000" dirty="0">
-                <a:solidFill>
-                  <a:srgbClr val="888899"/>
-                </a:solidFill>
-              </a:rPr>
-              <a:t>SWOT Analysis — internal strengths/weaknesses vs external landscape</a:t>
-            </a:r>
-            <a:endParaRPr lang="en-US" sz="1000" dirty="0"/>
-          </a:p>
-          <a:p>
-            <a:pPr marL="342900" indent="-342900">
-              <a:buSzPct val="100000"/>
-              <a:buChar char="•"/>
-            </a:pPr>
-            <a:r>
-              <a:rPr lang="en-US" sz="1000" dirty="0">
-                <a:solidFill>
-                  <a:srgbClr val="888899"/>
-                </a:solidFill>
-              </a:rPr>
-              <a:t>PESTEL Analysis — macro-environmental factors shaping EV adoption</a:t>
-            </a:r>
-            <a:endParaRPr lang="en-US" sz="1000" dirty="0"/>
-          </a:p>
-          <a:p>
-            <a:pPr marL="342900" indent="-342900">
-              <a:buSzPct val="100000"/>
-              <a:buChar char="•"/>
-            </a:pPr>
-            <a:r>
-              <a:rPr lang="en-US" sz="1000" dirty="0">
-                <a:solidFill>
-                  <a:srgbClr val="888899"/>
-                </a:solidFill>
-              </a:rPr>
-              <a:t>Porter's Five Forces — competitive intensity and profit potential</a:t>
-            </a:r>
-            <a:endParaRPr lang="en-US" sz="1000" dirty="0"/>
-          </a:p>
-          <a:p>
-            <a:pPr marL="342900" indent="-342900">
-              <a:buSzPct val="100000"/>
-              <a:buChar char="•"/>
-            </a:pPr>
-            <a:r>
-              <a:rPr lang="en-US" sz="1000" dirty="0">
-                <a:solidFill>
-                  <a:srgbClr val="888899"/>
-                </a:solidFill>
-              </a:rPr>
-              <a:t>STP Framework — segmentation, targeting, and positioning strategy</a:t>
-            </a:r>
-            <a:endParaRPr lang="en-US" sz="1000" dirty="0"/>
-          </a:p>
-          <a:p>
-            <a:pPr marL="342900" indent="-342900">
-              <a:buSzPct val="100000"/>
-              <a:buChar char="•"/>
-            </a:pPr>
-            <a:r>
-              <a:rPr lang="en-US" sz="1000" dirty="0">
-                <a:solidFill>
-                  <a:srgbClr val="888899"/>
-                </a:solidFill>
-              </a:rPr>
-              <a:t>Marketing Mix — 4Ps (product) and 7Ps (service) evaluation</a:t>
-            </a:r>
-            <a:endParaRPr lang="en-US" sz="1000" dirty="0"/>
-          </a:p>
-          <a:p>
-            <a:pPr marL="342900" indent="-342900">
-              <a:buSzPct val="100000"/>
-              <a:buChar char="•"/>
-            </a:pPr>
-            <a:r>
-              <a:rPr lang="en-US" sz="1000" dirty="0">
-                <a:solidFill>
-                  <a:srgbClr val="888899"/>
-                </a:solidFill>
-              </a:rPr>
-              <a:t>Actionable recommendations for sustaining competitive advantage</a:t>
-            </a:r>
-            <a:endParaRPr lang="en-US" sz="1000" dirty="0"/>
-          </a:p>
-        </p:txBody>
-      </p:sp>
-      <p:sp>
-        <p:nvSpPr>
-          <p:cNvPr id="10" name="Shape 7"/>
-          <p:cNvSpPr/>
-          <p:nvPr/>
-        </p:nvSpPr>
-        <p:spPr>
-          <a:xfrm>
-            <a:off x="4846320" y="1280160"/>
-            <a:ext cx="3931920" cy="1051560"/>
+        </p:txBody>
+      </p:sp>
+      <p:sp>
+        <p:nvSpPr>
+          <p:cNvPr id="11" name="Shape 9"/>
+          <p:cNvSpPr/>
+          <p:nvPr/>
+        </p:nvSpPr>
+        <p:spPr>
+          <a:xfrm>
+            <a:off x="3383280" y="1737360"/>
+            <a:ext cx="2560320" cy="2377440"/>
           </a:xfrm>
           <a:prstGeom prst="rect">
             <a:avLst/>
@@ -2740,14 +2836,34 @@
       </p:sp>
       <p:sp>
         <p:nvSpPr>
-          <p:cNvPr id="11" name="Text 8"/>
-          <p:cNvSpPr/>
-          <p:nvPr/>
-        </p:nvSpPr>
-        <p:spPr>
-          <a:xfrm>
-            <a:off x="5029200" y="1325880"/>
-            <a:ext cx="1371600" cy="502920"/>
+          <p:cNvPr id="12" name="Shape 10"/>
+          <p:cNvSpPr/>
+          <p:nvPr/>
+        </p:nvSpPr>
+        <p:spPr>
+          <a:xfrm>
+            <a:off x="3383280" y="1737360"/>
+            <a:ext cx="2560320" cy="36576"/>
+          </a:xfrm>
+          <a:prstGeom prst="rect">
+            <a:avLst/>
+          </a:prstGeom>
+          <a:solidFill>
+            <a:srgbClr val="E82127"/>
+          </a:solidFill>
+          <a:ln/>
+        </p:spPr>
+      </p:sp>
+      <p:sp>
+        <p:nvSpPr>
+          <p:cNvPr id="13" name="Text 11"/>
+          <p:cNvSpPr/>
+          <p:nvPr/>
+        </p:nvSpPr>
+        <p:spPr>
+          <a:xfrm>
+            <a:off x="3383280" y="1920240"/>
+            <a:ext cx="2560320" cy="731520"/>
           </a:xfrm>
           <a:prstGeom prst="rect">
             <a:avLst/>
@@ -2759,11 +2875,11 @@
           <a:bodyPr wrap="square" lIns="0" tIns="0" rIns="0" bIns="0" rtlCol="0" anchor="ctr"/>
           <a:lstStyle/>
           <a:p>
-            <a:pPr indent="0" marL="0">
+            <a:pPr algn="ctr" indent="0" marL="0">
               <a:buNone/>
             </a:pPr>
             <a:r>
-              <a:rPr lang="en-US" sz="2800" dirty="0">
+              <a:rPr lang="en-US" sz="3600" dirty="0">
                 <a:solidFill>
                   <a:srgbClr val="E82127"/>
                 </a:solidFill>
@@ -2773,20 +2889,20 @@
               </a:rPr>
               <a:t>52%</a:t>
             </a:r>
-            <a:endParaRPr lang="en-US" sz="2800" dirty="0"/>
-          </a:p>
-        </p:txBody>
-      </p:sp>
-      <p:sp>
-        <p:nvSpPr>
-          <p:cNvPr id="12" name="Text 9"/>
-          <p:cNvSpPr/>
-          <p:nvPr/>
-        </p:nvSpPr>
-        <p:spPr>
-          <a:xfrm>
-            <a:off x="5029200" y="1783080"/>
-            <a:ext cx="3566160" cy="457200"/>
+            <a:endParaRPr lang="en-US" sz="3600" dirty="0"/>
+          </a:p>
+        </p:txBody>
+      </p:sp>
+      <p:sp>
+        <p:nvSpPr>
+          <p:cNvPr id="14" name="Text 12"/>
+          <p:cNvSpPr/>
+          <p:nvPr/>
+        </p:nvSpPr>
+        <p:spPr>
+          <a:xfrm>
+            <a:off x="3383280" y="2606040"/>
+            <a:ext cx="2560320" cy="320040"/>
           </a:xfrm>
           <a:prstGeom prst="rect">
             <a:avLst/>
@@ -2798,28 +2914,50 @@
           <a:bodyPr wrap="square" lIns="0" tIns="0" rIns="0" bIns="0" rtlCol="0" anchor="ctr"/>
           <a:lstStyle/>
           <a:p>
-            <a:pPr indent="0" marL="0">
+            <a:pPr algn="ctr" indent="0" marL="0">
               <a:buNone/>
             </a:pPr>
             <a:r>
-              <a:rPr lang="en-US" sz="900" dirty="0">
-                <a:solidFill>
-                  <a:srgbClr val="666677"/>
+              <a:rPr lang="en-US" sz="1200" b="1" dirty="0">
+                <a:solidFill>
+                  <a:srgbClr val="F0F0F0"/>
                 </a:solidFill>
                 <a:latin typeface="Arial" pitchFamily="34" charset="0"/>
                 <a:ea typeface="Arial" pitchFamily="34" charset="-122"/>
                 <a:cs typeface="Arial" pitchFamily="34" charset="-120"/>
               </a:rPr>
-              <a:t>US EV market share — Tesla leads all competitors combined</a:t>
-            </a:r>
-            <a:endParaRPr lang="en-US" sz="900" dirty="0"/>
-          </a:p>
-          <a:p>
-            <a:pPr indent="0" marL="0">
+              <a:t>Tesla's Market Share</a:t>
+            </a:r>
+            <a:endParaRPr lang="en-US" sz="1200" dirty="0"/>
+          </a:p>
+        </p:txBody>
+      </p:sp>
+      <p:sp>
+        <p:nvSpPr>
+          <p:cNvPr id="15" name="Text 13"/>
+          <p:cNvSpPr/>
+          <p:nvPr/>
+        </p:nvSpPr>
+        <p:spPr>
+          <a:xfrm>
+            <a:off x="3566160" y="2971800"/>
+            <a:ext cx="2194560" cy="731520"/>
+          </a:xfrm>
+          <a:prstGeom prst="rect">
+            <a:avLst/>
+          </a:prstGeom>
+          <a:noFill/>
+          <a:ln/>
+        </p:spPr>
+        <p:txBody>
+          <a:bodyPr wrap="square" lIns="0" tIns="0" rIns="0" bIns="0" rtlCol="0" anchor="ctr"/>
+          <a:lstStyle/>
+          <a:p>
+            <a:pPr algn="ctr" indent="0" marL="0">
               <a:buNone/>
             </a:pPr>
             <a:r>
-              <a:rPr lang="en-US" sz="900" dirty="0">
+              <a:rPr lang="en-US" sz="1000" dirty="0">
                 <a:solidFill>
                   <a:srgbClr val="666677"/>
                 </a:solidFill>
@@ -2827,22 +2965,39 @@
                 <a:ea typeface="Arial" pitchFamily="34" charset="-122"/>
                 <a:cs typeface="Arial" pitchFamily="34" charset="-120"/>
               </a:rPr>
-              <a:t>(IEA Global EV Outlook, 2025)</a:t>
-            </a:r>
-            <a:endParaRPr lang="en-US" sz="900" dirty="0"/>
-          </a:p>
-        </p:txBody>
-      </p:sp>
-      <p:sp>
-        <p:nvSpPr>
-          <p:cNvPr id="13" name="Shape 10"/>
-          <p:cNvSpPr/>
-          <p:nvPr/>
-        </p:nvSpPr>
-        <p:spPr>
-          <a:xfrm>
-            <a:off x="4846320" y="2468880"/>
-            <a:ext cx="3931920" cy="1051560"/>
+              <a:t>More than all competitors</a:t>
+            </a:r>
+            <a:endParaRPr lang="en-US" sz="1000" dirty="0"/>
+          </a:p>
+          <a:p>
+            <a:pPr algn="ctr" indent="0" marL="0">
+              <a:buNone/>
+            </a:pPr>
+            <a:r>
+              <a:rPr lang="en-US" sz="1000" dirty="0">
+                <a:solidFill>
+                  <a:srgbClr val="666677"/>
+                </a:solidFill>
+                <a:latin typeface="Arial" pitchFamily="34" charset="0"/>
+                <a:ea typeface="Arial" pitchFamily="34" charset="-122"/>
+                <a:cs typeface="Arial" pitchFamily="34" charset="-120"/>
+              </a:rPr>
+              <a:t>combined — without a single ad</a:t>
+            </a:r>
+            <a:endParaRPr lang="en-US" sz="1000" dirty="0"/>
+          </a:p>
+        </p:txBody>
+      </p:sp>
+      <p:sp>
+        <p:nvSpPr>
+          <p:cNvPr id="16" name="Shape 14"/>
+          <p:cNvSpPr/>
+          <p:nvPr/>
+        </p:nvSpPr>
+        <p:spPr>
+          <a:xfrm>
+            <a:off x="6217920" y="1737360"/>
+            <a:ext cx="2560320" cy="2377440"/>
           </a:xfrm>
           <a:prstGeom prst="rect">
             <a:avLst/>
@@ -2862,14 +3017,34 @@
       </p:sp>
       <p:sp>
         <p:nvSpPr>
-          <p:cNvPr id="14" name="Text 11"/>
-          <p:cNvSpPr/>
-          <p:nvPr/>
-        </p:nvSpPr>
-        <p:spPr>
-          <a:xfrm>
-            <a:off x="5029200" y="2514600"/>
-            <a:ext cx="1371600" cy="502920"/>
+          <p:cNvPr id="17" name="Shape 15"/>
+          <p:cNvSpPr/>
+          <p:nvPr/>
+        </p:nvSpPr>
+        <p:spPr>
+          <a:xfrm>
+            <a:off x="6217920" y="1737360"/>
+            <a:ext cx="2560320" cy="36576"/>
+          </a:xfrm>
+          <a:prstGeom prst="rect">
+            <a:avLst/>
+          </a:prstGeom>
+          <a:solidFill>
+            <a:srgbClr val="E82127"/>
+          </a:solidFill>
+          <a:ln/>
+        </p:spPr>
+      </p:sp>
+      <p:sp>
+        <p:nvSpPr>
+          <p:cNvPr id="18" name="Text 16"/>
+          <p:cNvSpPr/>
+          <p:nvPr/>
+        </p:nvSpPr>
+        <p:spPr>
+          <a:xfrm>
+            <a:off x="6217920" y="1920240"/>
+            <a:ext cx="2560320" cy="731520"/>
           </a:xfrm>
           <a:prstGeom prst="rect">
             <a:avLst/>
@@ -2881,11 +3056,11 @@
           <a:bodyPr wrap="square" lIns="0" tIns="0" rIns="0" bIns="0" rtlCol="0" anchor="ctr"/>
           <a:lstStyle/>
           <a:p>
-            <a:pPr indent="0" marL="0">
+            <a:pPr algn="ctr" indent="0" marL="0">
               <a:buNone/>
             </a:pPr>
             <a:r>
-              <a:rPr lang="en-US" sz="2800" dirty="0">
+              <a:rPr lang="en-US" sz="3600" dirty="0">
                 <a:solidFill>
                   <a:srgbClr val="E82127"/>
                 </a:solidFill>
@@ -2895,20 +3070,20 @@
               </a:rPr>
               <a:t>$0</a:t>
             </a:r>
-            <a:endParaRPr lang="en-US" sz="2800" dirty="0"/>
-          </a:p>
-        </p:txBody>
-      </p:sp>
-      <p:sp>
-        <p:nvSpPr>
-          <p:cNvPr id="15" name="Text 12"/>
-          <p:cNvSpPr/>
-          <p:nvPr/>
-        </p:nvSpPr>
-        <p:spPr>
-          <a:xfrm>
-            <a:off x="5029200" y="2971800"/>
-            <a:ext cx="3566160" cy="457200"/>
+            <a:endParaRPr lang="en-US" sz="3600" dirty="0"/>
+          </a:p>
+        </p:txBody>
+      </p:sp>
+      <p:sp>
+        <p:nvSpPr>
+          <p:cNvPr id="19" name="Text 17"/>
+          <p:cNvSpPr/>
+          <p:nvPr/>
+        </p:nvSpPr>
+        <p:spPr>
+          <a:xfrm>
+            <a:off x="6217920" y="2606040"/>
+            <a:ext cx="2560320" cy="320040"/>
           </a:xfrm>
           <a:prstGeom prst="rect">
             <a:avLst/>
@@ -2920,28 +3095,50 @@
           <a:bodyPr wrap="square" lIns="0" tIns="0" rIns="0" bIns="0" rtlCol="0" anchor="ctr"/>
           <a:lstStyle/>
           <a:p>
-            <a:pPr indent="0" marL="0">
+            <a:pPr algn="ctr" indent="0" marL="0">
               <a:buNone/>
             </a:pPr>
             <a:r>
-              <a:rPr lang="en-US" sz="900" dirty="0">
-                <a:solidFill>
-                  <a:srgbClr val="666677"/>
+              <a:rPr lang="en-US" sz="1200" b="1" dirty="0">
+                <a:solidFill>
+                  <a:srgbClr val="F0F0F0"/>
                 </a:solidFill>
                 <a:latin typeface="Arial" pitchFamily="34" charset="0"/>
                 <a:ea typeface="Arial" pitchFamily="34" charset="-122"/>
                 <a:cs typeface="Arial" pitchFamily="34" charset="-120"/>
               </a:rPr>
-              <a:t>Annual advertising spend — only major automaker with zero</a:t>
-            </a:r>
-            <a:endParaRPr lang="en-US" sz="900" dirty="0"/>
-          </a:p>
-          <a:p>
-            <a:pPr indent="0" marL="0">
+              <a:t>Advertising Budget</a:t>
+            </a:r>
+            <a:endParaRPr lang="en-US" sz="1200" dirty="0"/>
+          </a:p>
+        </p:txBody>
+      </p:sp>
+      <p:sp>
+        <p:nvSpPr>
+          <p:cNvPr id="20" name="Text 18"/>
+          <p:cNvSpPr/>
+          <p:nvPr/>
+        </p:nvSpPr>
+        <p:spPr>
+          <a:xfrm>
+            <a:off x="6400800" y="2971800"/>
+            <a:ext cx="2194560" cy="731520"/>
+          </a:xfrm>
+          <a:prstGeom prst="rect">
+            <a:avLst/>
+          </a:prstGeom>
+          <a:noFill/>
+          <a:ln/>
+        </p:spPr>
+        <p:txBody>
+          <a:bodyPr wrap="square" lIns="0" tIns="0" rIns="0" bIns="0" rtlCol="0" anchor="ctr"/>
+          <a:lstStyle/>
+          <a:p>
+            <a:pPr algn="ctr" indent="0" marL="0">
               <a:buNone/>
             </a:pPr>
             <a:r>
-              <a:rPr lang="en-US" sz="900" dirty="0">
+              <a:rPr lang="en-US" sz="1000" dirty="0">
                 <a:solidFill>
                   <a:srgbClr val="666677"/>
                 </a:solidFill>
@@ -2949,104 +3146,16 @@
                 <a:ea typeface="Arial" pitchFamily="34" charset="-122"/>
                 <a:cs typeface="Arial" pitchFamily="34" charset="-120"/>
               </a:rPr>
-              <a:t>paid media budget (Bloomberg, 2024)</a:t>
-            </a:r>
-            <a:endParaRPr lang="en-US" sz="900" dirty="0"/>
-          </a:p>
-        </p:txBody>
-      </p:sp>
-      <p:sp>
-        <p:nvSpPr>
-          <p:cNvPr id="16" name="Shape 13"/>
-          <p:cNvSpPr/>
-          <p:nvPr/>
-        </p:nvSpPr>
-        <p:spPr>
-          <a:xfrm>
-            <a:off x="4846320" y="3657600"/>
-            <a:ext cx="3931920" cy="1188720"/>
-          </a:xfrm>
-          <a:prstGeom prst="rect">
-            <a:avLst/>
-          </a:prstGeom>
-          <a:solidFill>
-            <a:srgbClr val="141420"/>
-          </a:solidFill>
-          <a:ln/>
-          <a:effectLst>
-            <a:outerShdw sx="100000" sy="100000" kx="0" ky="0" algn="bl" rotWithShape="0" blurRad="101600" dist="38100" dir="8100000">
-              <a:srgbClr val="000000">
-                <a:alpha val="40000"/>
-              </a:srgbClr>
-            </a:outerShdw>
-          </a:effectLst>
-        </p:spPr>
-      </p:sp>
-      <p:sp>
-        <p:nvSpPr>
-          <p:cNvPr id="17" name="Text 14"/>
-          <p:cNvSpPr/>
-          <p:nvPr/>
-        </p:nvSpPr>
-        <p:spPr>
-          <a:xfrm>
-            <a:off x="5029200" y="3703320"/>
-            <a:ext cx="1828800" cy="502920"/>
-          </a:xfrm>
-          <a:prstGeom prst="rect">
-            <a:avLst/>
-          </a:prstGeom>
-          <a:noFill/>
-          <a:ln/>
-        </p:spPr>
-        <p:txBody>
-          <a:bodyPr wrap="square" lIns="0" tIns="0" rIns="0" bIns="0" rtlCol="0" anchor="ctr"/>
-          <a:lstStyle/>
-          <a:p>
-            <a:pPr indent="0" marL="0">
+              <a:t>While GM spends $3.5B and</a:t>
+            </a:r>
+            <a:endParaRPr lang="en-US" sz="1000" dirty="0"/>
+          </a:p>
+          <a:p>
+            <a:pPr algn="ctr" indent="0" marL="0">
               <a:buNone/>
             </a:pPr>
             <a:r>
-              <a:rPr lang="en-US" sz="2800" dirty="0">
-                <a:solidFill>
-                  <a:srgbClr val="E82127"/>
-                </a:solidFill>
-                <a:latin typeface="Arial Black" pitchFamily="34" charset="0"/>
-                <a:ea typeface="Arial Black" pitchFamily="34" charset="-122"/>
-                <a:cs typeface="Arial Black" pitchFamily="34" charset="-120"/>
-              </a:rPr>
-              <a:t>1.8M+</a:t>
-            </a:r>
-            <a:endParaRPr lang="en-US" sz="2800" dirty="0"/>
-          </a:p>
-        </p:txBody>
-      </p:sp>
-      <p:sp>
-        <p:nvSpPr>
-          <p:cNvPr id="18" name="Text 15"/>
-          <p:cNvSpPr/>
-          <p:nvPr/>
-        </p:nvSpPr>
-        <p:spPr>
-          <a:xfrm>
-            <a:off x="5029200" y="4160520"/>
-            <a:ext cx="3566160" cy="457200"/>
-          </a:xfrm>
-          <a:prstGeom prst="rect">
-            <a:avLst/>
-          </a:prstGeom>
-          <a:noFill/>
-          <a:ln/>
-        </p:spPr>
-        <p:txBody>
-          <a:bodyPr wrap="square" lIns="0" tIns="0" rIns="0" bIns="0" rtlCol="0" anchor="ctr"/>
-          <a:lstStyle/>
-          <a:p>
-            <a:pPr indent="0" marL="0">
-              <a:buNone/>
-            </a:pPr>
-            <a:r>
-              <a:rPr lang="en-US" sz="900" dirty="0">
+              <a:rPr lang="en-US" sz="1000" dirty="0">
                 <a:solidFill>
                   <a:srgbClr val="666677"/>
                 </a:solidFill>
@@ -3054,26 +3163,65 @@
                 <a:ea typeface="Arial" pitchFamily="34" charset="-122"/>
                 <a:cs typeface="Arial" pitchFamily="34" charset="-120"/>
               </a:rPr>
-              <a:t>Global deliveries in 2024; Model 3 accounts for ~40% of total</a:t>
-            </a:r>
-            <a:endParaRPr lang="en-US" sz="900" dirty="0"/>
-          </a:p>
+              <a:t>Ford $2.8B annually on ads</a:t>
+            </a:r>
+            <a:endParaRPr lang="en-US" sz="1000" dirty="0"/>
+          </a:p>
+        </p:txBody>
+      </p:sp>
+      <p:sp>
+        <p:nvSpPr>
+          <p:cNvPr id="21" name="Text 19"/>
+          <p:cNvSpPr/>
+          <p:nvPr/>
+        </p:nvSpPr>
+        <p:spPr>
+          <a:xfrm>
+            <a:off x="548640" y="4297680"/>
+            <a:ext cx="8046720" cy="548640"/>
+          </a:xfrm>
+          <a:prstGeom prst="rect">
+            <a:avLst/>
+          </a:prstGeom>
+          <a:noFill/>
+          <a:ln/>
+        </p:spPr>
+        <p:txBody>
+          <a:bodyPr wrap="square" lIns="0" tIns="0" rIns="0" bIns="0" rtlCol="0" anchor="ctr"/>
+          <a:lstStyle/>
           <a:p>
             <a:pPr indent="0" marL="0">
               <a:buNone/>
             </a:pPr>
             <a:r>
-              <a:rPr lang="en-US" sz="900" dirty="0">
+              <a:rPr lang="en-US" sz="1000" i="1" dirty="0">
                 <a:solidFill>
                   <a:srgbClr val="666677"/>
                 </a:solidFill>
-                <a:latin typeface="Arial" pitchFamily="34" charset="0"/>
-                <a:ea typeface="Arial" pitchFamily="34" charset="-122"/>
-                <a:cs typeface="Arial" pitchFamily="34" charset="-120"/>
-              </a:rPr>
-              <a:t>volume. Revenue: $96.8B (Tesla 10-K, 2024)</a:t>
-            </a:r>
-            <a:endParaRPr lang="en-US" sz="900" dirty="0"/>
+                <a:latin typeface="Georgia" pitchFamily="34" charset="0"/>
+                <a:ea typeface="Georgia" pitchFamily="34" charset="-122"/>
+                <a:cs typeface="Georgia" pitchFamily="34" charset="-120"/>
+              </a:rPr>
+              <a:t>To understand Tesla's dominance, we need to look at how they</a:t>
+            </a:r>
+            <a:endParaRPr lang="en-US" sz="1000" dirty="0"/>
+          </a:p>
+          <a:p>
+            <a:pPr indent="0" marL="0">
+              <a:buNone/>
+            </a:pPr>
+            <a:r>
+              <a:rPr lang="en-US" sz="1000" i="1" dirty="0">
+                <a:solidFill>
+                  <a:srgbClr val="666677"/>
+                </a:solidFill>
+                <a:latin typeface="Georgia" pitchFamily="34" charset="0"/>
+                <a:ea typeface="Georgia" pitchFamily="34" charset="-122"/>
+                <a:cs typeface="Georgia" pitchFamily="34" charset="-120"/>
+              </a:rPr>
+              <a:t>rewrote the rules of automotive marketing from the ground up.</a:t>
+            </a:r>
+            <a:endParaRPr lang="en-US" sz="1000" dirty="0"/>
           </a:p>
         </p:txBody>
       </p:sp>
@@ -3162,7 +3310,7 @@
                 <a:ea typeface="Arial Black" pitchFamily="34" charset="-122"/>
                 <a:cs typeface="Arial Black" pitchFamily="34" charset="-120"/>
               </a:rPr>
-              <a:t>03</a:t>
+              <a:t>02</a:t>
             </a:r>
             <a:endParaRPr lang="en-US" sz="3200" dirty="0"/>
           </a:p>
@@ -3201,7 +3349,7 @@
                 <a:ea typeface="Arial Black" pitchFamily="34" charset="-122"/>
                 <a:cs typeface="Arial Black" pitchFamily="34" charset="-120"/>
               </a:rPr>
-              <a:t>Marketing &amp; Communication</a:t>
+              <a:t>The Anti-Marketing Playbook</a:t>
             </a:r>
             <a:endParaRPr lang="en-US" sz="2600" dirty="0"/>
           </a:p>
@@ -3215,8 +3363,8 @@
         </p:nvSpPr>
         <p:spPr>
           <a:xfrm>
-            <a:off x="548640" y="1097280"/>
-            <a:ext cx="5486400" cy="274320"/>
+            <a:off x="548640" y="1143000"/>
+            <a:ext cx="8046720" cy="365760"/>
           </a:xfrm>
           <a:prstGeom prst="rect">
             <a:avLst/>
@@ -3232,17 +3380,17 @@
               <a:buNone/>
             </a:pPr>
             <a:r>
-              <a:rPr lang="en-US" sz="1100" dirty="0">
+              <a:rPr lang="en-US" sz="1200" i="1" dirty="0">
                 <a:solidFill>
                   <a:srgbClr val="666677"/>
                 </a:solidFill>
-                <a:latin typeface="Arial" pitchFamily="34" charset="0"/>
-                <a:ea typeface="Arial" pitchFamily="34" charset="-122"/>
-                <a:cs typeface="Arial" pitchFamily="34" charset="-120"/>
-              </a:rPr>
-              <a:t>Why strategic marketing is critical in the EV revolution</a:t>
-            </a:r>
-            <a:endParaRPr lang="en-US" sz="1100" dirty="0"/>
+                <a:latin typeface="Georgia" pitchFamily="34" charset="0"/>
+                <a:ea typeface="Georgia" pitchFamily="34" charset="-122"/>
+                <a:cs typeface="Georgia" pitchFamily="34" charset="-120"/>
+              </a:rPr>
+              <a:t>Tesla didn't just skip advertising — they built an entirely new model where the product markets itself.</a:t>
+            </a:r>
+            <a:endParaRPr lang="en-US" sz="1200" dirty="0"/>
           </a:p>
         </p:txBody>
       </p:sp>
@@ -3254,8 +3402,8 @@
         </p:nvSpPr>
         <p:spPr>
           <a:xfrm>
-            <a:off x="548640" y="1554480"/>
-            <a:ext cx="2560320" cy="3291840"/>
+            <a:off x="548640" y="1600200"/>
+            <a:ext cx="3931920" cy="1463040"/>
           </a:xfrm>
           <a:prstGeom prst="rect">
             <a:avLst/>
@@ -3281,8 +3429,8 @@
         </p:nvSpPr>
         <p:spPr>
           <a:xfrm>
-            <a:off x="548640" y="1554480"/>
-            <a:ext cx="2560320" cy="36576"/>
+            <a:off x="548640" y="1600200"/>
+            <a:ext cx="3931920" cy="36576"/>
           </a:xfrm>
           <a:prstGeom prst="rect">
             <a:avLst/>
@@ -3326,7 +3474,7 @@
         <p:spPr>
           <a:xfrm>
             <a:off x="1005840" y="1737360"/>
-            <a:ext cx="1828800" cy="256032"/>
+            <a:ext cx="3200400" cy="256032"/>
           </a:xfrm>
           <a:prstGeom prst="rect">
             <a:avLst/>
@@ -3342,7 +3490,7 @@
               <a:buNone/>
             </a:pPr>
             <a:r>
-              <a:rPr lang="en-US" sz="1300" dirty="0">
+              <a:rPr lang="en-US" sz="1200" dirty="0">
                 <a:solidFill>
                   <a:srgbClr val="E82127"/>
                 </a:solidFill>
@@ -3350,9 +3498,9 @@
                 <a:ea typeface="Arial Black" pitchFamily="34" charset="-122"/>
                 <a:cs typeface="Arial Black" pitchFamily="34" charset="-120"/>
               </a:rPr>
-              <a:t>WHY</a:t>
-            </a:r>
-            <a:endParaRPr lang="en-US" sz="1300" dirty="0"/>
+              <a:t>The Product IS the Ad</a:t>
+            </a:r>
+            <a:endParaRPr lang="en-US" sz="1200" dirty="0"/>
           </a:p>
         </p:txBody>
       </p:sp>
@@ -3364,8 +3512,8 @@
         </p:nvSpPr>
         <p:spPr>
           <a:xfrm>
-            <a:off x="685800" y="2148840"/>
-            <a:ext cx="2286000" cy="2560320"/>
+            <a:off x="685800" y="2057400"/>
+            <a:ext cx="3657600" cy="914400"/>
           </a:xfrm>
           <a:prstGeom prst="rect">
             <a:avLst/>
@@ -3387,7 +3535,7 @@
                   <a:srgbClr val="888899"/>
                 </a:solidFill>
               </a:rPr>
-              <a:t>EV market projected to grow 23% CAGR through 2030 (McKinsey, 2024)</a:t>
+              <a:t>91% owner satisfaction becomes word-of-mouth (JD Power)</a:t>
             </a:r>
             <a:endParaRPr lang="en-US" sz="900" dirty="0"/>
           </a:p>
@@ -3402,7 +3550,7 @@
                   <a:srgbClr val="888899"/>
                 </a:solidFill>
               </a:rPr>
-              <a:t>Brand perception drives 68% of EV purchase decisions (Deloitte, 2025)</a:t>
+              <a:t>Every Tesla on the road is a rolling billboard</a:t>
             </a:r>
             <a:endParaRPr lang="en-US" sz="900" dirty="0"/>
           </a:p>
@@ -3417,25 +3565,10 @@
                   <a:srgbClr val="888899"/>
                 </a:solidFill>
               </a:rPr>
-              <a:t>Traditional auto marketing costs $3,000-5,000 per vehicle sold — Tesla spends $0</a:t>
+              <a:t>OTA updates (40+/year) generate constant media coverage</a:t>
             </a:r>
             <a:endParaRPr lang="en-US" sz="900" dirty="0"/>
           </a:p>
-          <a:p>
-            <a:pPr marL="342900" indent="-342900">
-              <a:buSzPct val="100000"/>
-              <a:buChar char="•"/>
-            </a:pPr>
-            <a:r>
-              <a:rPr lang="en-US" sz="900" dirty="0">
-                <a:solidFill>
-                  <a:srgbClr val="888899"/>
-                </a:solidFill>
-              </a:rPr>
-              <a:t>Strategic communication builds trust in new technology adoption</a:t>
-            </a:r>
-            <a:endParaRPr lang="en-US" sz="900" dirty="0"/>
-          </a:p>
         </p:txBody>
       </p:sp>
       <p:sp>
@@ -3446,8 +3579,8 @@
         </p:nvSpPr>
         <p:spPr>
           <a:xfrm>
-            <a:off x="3383280" y="1554480"/>
-            <a:ext cx="2560320" cy="3291840"/>
+            <a:off x="4754880" y="1600200"/>
+            <a:ext cx="3931920" cy="1463040"/>
           </a:xfrm>
           <a:prstGeom prst="rect">
             <a:avLst/>
@@ -3473,8 +3606,8 @@
         </p:nvSpPr>
         <p:spPr>
           <a:xfrm>
-            <a:off x="3383280" y="1554480"/>
-            <a:ext cx="2560320" cy="36576"/>
+            <a:off x="4754880" y="1600200"/>
+            <a:ext cx="3931920" cy="36576"/>
           </a:xfrm>
           <a:prstGeom prst="rect">
             <a:avLst/>
@@ -3501,7 +3634,7 @@
         </p:blipFill>
         <p:spPr>
           <a:xfrm>
-            <a:off x="3520440" y="1737360"/>
+            <a:off x="4892040" y="1737360"/>
             <a:ext cx="256032" cy="256032"/>
           </a:xfrm>
           <a:prstGeom prst="rect">
@@ -3517,8 +3650,8 @@
         </p:nvSpPr>
         <p:spPr>
           <a:xfrm>
-            <a:off x="3840480" y="1737360"/>
-            <a:ext cx="1828800" cy="256032"/>
+            <a:off x="5212080" y="1737360"/>
+            <a:ext cx="3200400" cy="256032"/>
           </a:xfrm>
           <a:prstGeom prst="rect">
             <a:avLst/>
@@ -3534,7 +3667,7 @@
               <a:buNone/>
             </a:pPr>
             <a:r>
-              <a:rPr lang="en-US" sz="1300" dirty="0">
+              <a:rPr lang="en-US" sz="1200" dirty="0">
                 <a:solidFill>
                   <a:srgbClr val="E82127"/>
                 </a:solidFill>
@@ -3542,9 +3675,9 @@
                 <a:ea typeface="Arial Black" pitchFamily="34" charset="-122"/>
                 <a:cs typeface="Arial Black" pitchFamily="34" charset="-120"/>
               </a:rPr>
-              <a:t>WHAT</a:t>
-            </a:r>
-            <a:endParaRPr lang="en-US" sz="1300" dirty="0"/>
+              <a:t>CEO as Chief Marketer</a:t>
+            </a:r>
+            <a:endParaRPr lang="en-US" sz="1200" dirty="0"/>
           </a:p>
         </p:txBody>
       </p:sp>
@@ -3556,8 +3689,8 @@
         </p:nvSpPr>
         <p:spPr>
           <a:xfrm>
-            <a:off x="3520440" y="2148840"/>
-            <a:ext cx="2286000" cy="2560320"/>
+            <a:off x="4892040" y="2057400"/>
+            <a:ext cx="3657600" cy="914400"/>
           </a:xfrm>
           <a:prstGeom prst="rect">
             <a:avLst/>
@@ -3579,7 +3712,7 @@
                   <a:srgbClr val="888899"/>
                 </a:solidFill>
               </a:rPr>
-              <a:t>Product-led growth: the car IS the marketing — 91% owner satisfaction (JD Power)</a:t>
+              <a:t>200M+ social media followers — largest of any CEO</a:t>
             </a:r>
             <a:endParaRPr lang="en-US" sz="900" dirty="0"/>
           </a:p>
@@ -3594,7 +3727,7 @@
                   <a:srgbClr val="888899"/>
                 </a:solidFill>
               </a:rPr>
-              <a:t>CEO social media: 200M+ followers generating $19B earned media value annually</a:t>
+              <a:t>$19B in earned media value annually (Bloomberg)</a:t>
             </a:r>
             <a:endParaRPr lang="en-US" sz="900" dirty="0"/>
           </a:p>
@@ -3609,25 +3742,10 @@
                   <a:srgbClr val="888899"/>
                 </a:solidFill>
               </a:rPr>
-              <a:t>Community-powered advocacy: referral program drove 425,000+ new orders</a:t>
+              <a:t>Product launches become cultural events (250M+ impressions)</a:t>
             </a:r>
             <a:endParaRPr lang="en-US" sz="900" dirty="0"/>
           </a:p>
-          <a:p>
-            <a:pPr marL="342900" indent="-342900">
-              <a:buSzPct val="100000"/>
-              <a:buChar char="•"/>
-            </a:pPr>
-            <a:r>
-              <a:rPr lang="en-US" sz="900" dirty="0">
-                <a:solidFill>
-                  <a:srgbClr val="888899"/>
-                </a:solidFill>
-              </a:rPr>
-              <a:t>Tesla ranks #1 in brand loyalty among EV manufacturers (Consumer Reports)</a:t>
-            </a:r>
-            <a:endParaRPr lang="en-US" sz="900" dirty="0"/>
-          </a:p>
         </p:txBody>
       </p:sp>
       <p:sp>
@@ -3638,8 +3756,8 @@
         </p:nvSpPr>
         <p:spPr>
           <a:xfrm>
-            <a:off x="6217920" y="1554480"/>
-            <a:ext cx="2560320" cy="3291840"/>
+            <a:off x="548640" y="3246120"/>
+            <a:ext cx="3931920" cy="1463040"/>
           </a:xfrm>
           <a:prstGeom prst="rect">
             <a:avLst/>
@@ -3665,8 +3783,8 @@
         </p:nvSpPr>
         <p:spPr>
           <a:xfrm>
-            <a:off x="6217920" y="1554480"/>
-            <a:ext cx="2560320" cy="36576"/>
+            <a:off x="548640" y="3246120"/>
+            <a:ext cx="3931920" cy="36576"/>
           </a:xfrm>
           <a:prstGeom prst="rect">
             <a:avLst/>
@@ -3693,7 +3811,7 @@
         </p:blipFill>
         <p:spPr>
           <a:xfrm>
-            <a:off x="6355080" y="1737360"/>
+            <a:off x="685800" y="3383280"/>
             <a:ext cx="256032" cy="256032"/>
           </a:xfrm>
           <a:prstGeom prst="rect">
@@ -3709,8 +3827,8 @@
         </p:nvSpPr>
         <p:spPr>
           <a:xfrm>
-            <a:off x="6675120" y="1737360"/>
-            <a:ext cx="1828800" cy="256032"/>
+            <a:off x="1005840" y="3383280"/>
+            <a:ext cx="3200400" cy="256032"/>
           </a:xfrm>
           <a:prstGeom prst="rect">
             <a:avLst/>
@@ -3726,7 +3844,7 @@
               <a:buNone/>
             </a:pPr>
             <a:r>
-              <a:rPr lang="en-US" sz="1300" dirty="0">
+              <a:rPr lang="en-US" sz="1200" dirty="0">
                 <a:solidFill>
                   <a:srgbClr val="E82127"/>
                 </a:solidFill>
@@ -3734,9 +3852,9 @@
                 <a:ea typeface="Arial Black" pitchFamily="34" charset="-122"/>
                 <a:cs typeface="Arial Black" pitchFamily="34" charset="-120"/>
               </a:rPr>
-              <a:t>HOW</a:t>
-            </a:r>
-            <a:endParaRPr lang="en-US" sz="1300" dirty="0"/>
+              <a:t>Owners as Salesforce</a:t>
+            </a:r>
+            <a:endParaRPr lang="en-US" sz="1200" dirty="0"/>
           </a:p>
         </p:txBody>
       </p:sp>
@@ -3748,8 +3866,8 @@
         </p:nvSpPr>
         <p:spPr>
           <a:xfrm>
-            <a:off x="6355080" y="2148840"/>
-            <a:ext cx="2286000" cy="2560320"/>
+            <a:off x="685800" y="3703320"/>
+            <a:ext cx="3657600" cy="914400"/>
           </a:xfrm>
           <a:prstGeom prst="rect">
             <a:avLst/>
@@ -3771,7 +3889,7 @@
                   <a:srgbClr val="888899"/>
                 </a:solidFill>
               </a:rPr>
-              <a:t>Direct-to-consumer: eliminates dealer markup &amp; controls brand narrative</a:t>
+              <a:t>Referral program drove 425,000+ new orders</a:t>
             </a:r>
             <a:endParaRPr lang="en-US" sz="900" dirty="0"/>
           </a:p>
@@ -3786,7 +3904,7 @@
                   <a:srgbClr val="888899"/>
                 </a:solidFill>
               </a:rPr>
-              <a:t>Tesla stores in premium retail locations (malls, high streets) for exposure</a:t>
+              <a:t>Tesla ranks #1 in brand loyalty (Consumer Reports)</a:t>
             </a:r>
             <a:endParaRPr lang="en-US" sz="900" dirty="0"/>
           </a:p>
@@ -3801,10 +3919,142 @@
                   <a:srgbClr val="888899"/>
                 </a:solidFill>
               </a:rPr>
-              <a:t>Test drive events and delivery experience create emotional brand connection</a:t>
+              <a:t>Community forums and owner clubs amplify the message</a:t>
             </a:r>
             <a:endParaRPr lang="en-US" sz="900" dirty="0"/>
           </a:p>
+        </p:txBody>
+      </p:sp>
+      <p:sp>
+        <p:nvSpPr>
+          <p:cNvPr id="21" name="Shape 16"/>
+          <p:cNvSpPr/>
+          <p:nvPr/>
+        </p:nvSpPr>
+        <p:spPr>
+          <a:xfrm>
+            <a:off x="4754880" y="3246120"/>
+            <a:ext cx="3931920" cy="1463040"/>
+          </a:xfrm>
+          <a:prstGeom prst="rect">
+            <a:avLst/>
+          </a:prstGeom>
+          <a:solidFill>
+            <a:srgbClr val="141420"/>
+          </a:solidFill>
+          <a:ln/>
+          <a:effectLst>
+            <a:outerShdw sx="100000" sy="100000" kx="0" ky="0" algn="bl" rotWithShape="0" blurRad="101600" dist="38100" dir="8100000">
+              <a:srgbClr val="000000">
+                <a:alpha val="40000"/>
+              </a:srgbClr>
+            </a:outerShdw>
+          </a:effectLst>
+        </p:spPr>
+      </p:sp>
+      <p:sp>
+        <p:nvSpPr>
+          <p:cNvPr id="22" name="Shape 17"/>
+          <p:cNvSpPr/>
+          <p:nvPr/>
+        </p:nvSpPr>
+        <p:spPr>
+          <a:xfrm>
+            <a:off x="4754880" y="3246120"/>
+            <a:ext cx="3931920" cy="36576"/>
+          </a:xfrm>
+          <a:prstGeom prst="rect">
+            <a:avLst/>
+          </a:prstGeom>
+          <a:solidFill>
+            <a:srgbClr val="E82127"/>
+          </a:solidFill>
+          <a:ln/>
+        </p:spPr>
+      </p:sp>
+      <p:pic>
+        <p:nvPicPr>
+          <p:cNvPr id="23" name="Image 3" descr="preencoded.png">    </p:cNvPr>
+          <p:cNvPicPr>
+            <a:picLocks noChangeAspect="1"/>
+          </p:cNvPicPr>
+          <p:nvPr/>
+        </p:nvPicPr>
+        <p:blipFill>
+          <a:blip r:embed="rId4"/>
+          <a:stretch>
+            <a:fillRect/>
+          </a:stretch>
+        </p:blipFill>
+        <p:spPr>
+          <a:xfrm>
+            <a:off x="4892040" y="3383280"/>
+            <a:ext cx="256032" cy="256032"/>
+          </a:xfrm>
+          <a:prstGeom prst="rect">
+            <a:avLst/>
+          </a:prstGeom>
+        </p:spPr>
+      </p:pic>
+      <p:sp>
+        <p:nvSpPr>
+          <p:cNvPr id="24" name="Text 18"/>
+          <p:cNvSpPr/>
+          <p:nvPr/>
+        </p:nvSpPr>
+        <p:spPr>
+          <a:xfrm>
+            <a:off x="5212080" y="3383280"/>
+            <a:ext cx="3200400" cy="256032"/>
+          </a:xfrm>
+          <a:prstGeom prst="rect">
+            <a:avLst/>
+          </a:prstGeom>
+          <a:noFill/>
+          <a:ln/>
+        </p:spPr>
+        <p:txBody>
+          <a:bodyPr wrap="square" lIns="0" tIns="0" rIns="0" bIns="0" rtlCol="0" anchor="ctr"/>
+          <a:lstStyle/>
+          <a:p>
+            <a:pPr indent="0" marL="0">
+              <a:buNone/>
+            </a:pPr>
+            <a:r>
+              <a:rPr lang="en-US" sz="1200" dirty="0">
+                <a:solidFill>
+                  <a:srgbClr val="E82127"/>
+                </a:solidFill>
+                <a:latin typeface="Arial Black" pitchFamily="34" charset="0"/>
+                <a:ea typeface="Arial Black" pitchFamily="34" charset="-122"/>
+                <a:cs typeface="Arial Black" pitchFamily="34" charset="-120"/>
+              </a:rPr>
+              <a:t>Direct-to-Consumer</a:t>
+            </a:r>
+            <a:endParaRPr lang="en-US" sz="1200" dirty="0"/>
+          </a:p>
+        </p:txBody>
+      </p:sp>
+      <p:sp>
+        <p:nvSpPr>
+          <p:cNvPr id="25" name="Text 19"/>
+          <p:cNvSpPr/>
+          <p:nvPr/>
+        </p:nvSpPr>
+        <p:spPr>
+          <a:xfrm>
+            <a:off x="4892040" y="3703320"/>
+            <a:ext cx="3657600" cy="914400"/>
+          </a:xfrm>
+          <a:prstGeom prst="rect">
+            <a:avLst/>
+          </a:prstGeom>
+          <a:noFill/>
+          <a:ln/>
+        </p:spPr>
+        <p:txBody>
+          <a:bodyPr wrap="square" rtlCol="0" anchor="ctr"/>
+          <a:lstStyle/>
           <a:p>
             <a:pPr marL="342900" indent="-342900">
               <a:buSzPct val="100000"/>
@@ -3816,7 +4066,37 @@
                   <a:srgbClr val="888899"/>
                 </a:solidFill>
               </a:rPr>
-              <a:t>OTA updates keep product fresh — 40+ updates/year generate media coverage</a:t>
+              <a:t>No dealerships = no $2,000+ markup, no brand dilution</a:t>
+            </a:r>
+            <a:endParaRPr lang="en-US" sz="900" dirty="0"/>
+          </a:p>
+          <a:p>
+            <a:pPr marL="342900" indent="-342900">
+              <a:buSzPct val="100000"/>
+              <a:buChar char="•"/>
+            </a:pPr>
+            <a:r>
+              <a:rPr lang="en-US" sz="900" dirty="0">
+                <a:solidFill>
+                  <a:srgbClr val="888899"/>
+                </a:solidFill>
+              </a:rPr>
+              <a:t>Online ordering: configure &amp; buy in 8 minutes</a:t>
+            </a:r>
+            <a:endParaRPr lang="en-US" sz="900" dirty="0"/>
+          </a:p>
+          <a:p>
+            <a:pPr marL="342900" indent="-342900">
+              <a:buSzPct val="100000"/>
+              <a:buChar char="•"/>
+            </a:pPr>
+            <a:r>
+              <a:rPr lang="en-US" sz="900" dirty="0">
+                <a:solidFill>
+                  <a:srgbClr val="888899"/>
+                </a:solidFill>
+              </a:rPr>
+              <a:t>200+ Tesla stores in premium malls for brand exposure</a:t>
             </a:r>
             <a:endParaRPr lang="en-US" sz="900" dirty="0"/>
           </a:p>
@@ -3907,7 +4187,7 @@
                 <a:ea typeface="Arial Black" pitchFamily="34" charset="-122"/>
                 <a:cs typeface="Arial Black" pitchFamily="34" charset="-120"/>
               </a:rPr>
-              <a:t>04</a:t>
+              <a:t>03</a:t>
             </a:r>
             <a:endParaRPr lang="en-US" sz="3200" dirty="0"/>
           </a:p>
@@ -3946,7 +4226,7 @@
                 <a:ea typeface="Arial Black" pitchFamily="34" charset="-122"/>
                 <a:cs typeface="Arial Black" pitchFamily="34" charset="-120"/>
               </a:rPr>
-              <a:t>Company &amp; Product Introduction</a:t>
+              <a:t>Meet the Model 3</a:t>
             </a:r>
             <a:endParaRPr lang="en-US" sz="2600" dirty="0"/>
           </a:p>
@@ -3954,14 +4234,53 @@
       </p:sp>
       <p:sp>
         <p:nvSpPr>
-          <p:cNvPr id="5" name="Shape 3"/>
-          <p:cNvSpPr/>
-          <p:nvPr/>
-        </p:nvSpPr>
-        <p:spPr>
-          <a:xfrm>
-            <a:off x="548640" y="1280160"/>
-            <a:ext cx="4023360" cy="3566160"/>
+          <p:cNvPr id="5" name="Text 3"/>
+          <p:cNvSpPr/>
+          <p:nvPr/>
+        </p:nvSpPr>
+        <p:spPr>
+          <a:xfrm>
+            <a:off x="548640" y="1143000"/>
+            <a:ext cx="8046720" cy="365760"/>
+          </a:xfrm>
+          <a:prstGeom prst="rect">
+            <a:avLst/>
+          </a:prstGeom>
+          <a:noFill/>
+          <a:ln/>
+        </p:spPr>
+        <p:txBody>
+          <a:bodyPr wrap="square" lIns="0" tIns="0" rIns="0" bIns="0" rtlCol="0" anchor="ctr"/>
+          <a:lstStyle/>
+          <a:p>
+            <a:pPr indent="0" marL="0">
+              <a:buNone/>
+            </a:pPr>
+            <a:r>
+              <a:rPr lang="en-US" sz="1200" i="1" dirty="0">
+                <a:solidFill>
+                  <a:srgbClr val="666677"/>
+                </a:solidFill>
+                <a:latin typeface="Georgia" pitchFamily="34" charset="0"/>
+                <a:ea typeface="Georgia" pitchFamily="34" charset="-122"/>
+                <a:cs typeface="Georgia" pitchFamily="34" charset="-120"/>
+              </a:rPr>
+              <a:t>In 2017, 400,000 people paid $1,000 to reserve a car they'd never seen in person. That's not a product launch — it's a movement.</a:t>
+            </a:r>
+            <a:endParaRPr lang="en-US" sz="1200" dirty="0"/>
+          </a:p>
+        </p:txBody>
+      </p:sp>
+      <p:sp>
+        <p:nvSpPr>
+          <p:cNvPr id="6" name="Shape 4"/>
+          <p:cNvSpPr/>
+          <p:nvPr/>
+        </p:nvSpPr>
+        <p:spPr>
+          <a:xfrm>
+            <a:off x="548640" y="1691640"/>
+            <a:ext cx="4023360" cy="3200400"/>
           </a:xfrm>
           <a:prstGeom prst="rect">
             <a:avLst/>
@@ -3981,14 +4300,14 @@
       </p:sp>
       <p:sp>
         <p:nvSpPr>
-          <p:cNvPr id="6" name="Shape 4"/>
-          <p:cNvSpPr/>
-          <p:nvPr/>
-        </p:nvSpPr>
-        <p:spPr>
-          <a:xfrm>
-            <a:off x="548640" y="1280160"/>
-            <a:ext cx="54864" cy="3566160"/>
+          <p:cNvPr id="7" name="Shape 5"/>
+          <p:cNvSpPr/>
+          <p:nvPr/>
+        </p:nvSpPr>
+        <p:spPr>
+          <a:xfrm>
+            <a:off x="548640" y="1691640"/>
+            <a:ext cx="54864" cy="3200400"/>
           </a:xfrm>
           <a:prstGeom prst="rect">
             <a:avLst/>
@@ -3999,40 +4318,16 @@
           <a:ln/>
         </p:spPr>
       </p:sp>
-      <p:pic>
-        <p:nvPicPr>
-          <p:cNvPr id="7" name="Image 0" descr="preencoded.png">    </p:cNvPr>
-          <p:cNvPicPr>
-            <a:picLocks noChangeAspect="1"/>
-          </p:cNvPicPr>
-          <p:nvPr/>
-        </p:nvPicPr>
-        <p:blipFill>
-          <a:blip r:embed="rId1"/>
-          <a:stretch>
-            <a:fillRect/>
-          </a:stretch>
-        </p:blipFill>
-        <p:spPr>
-          <a:xfrm>
-            <a:off x="777240" y="1417320"/>
-            <a:ext cx="274320" cy="274320"/>
-          </a:xfrm>
-          <a:prstGeom prst="rect">
-            <a:avLst/>
-          </a:prstGeom>
-        </p:spPr>
-      </p:pic>
-      <p:sp>
-        <p:nvSpPr>
-          <p:cNvPr id="8" name="Text 5"/>
-          <p:cNvSpPr/>
-          <p:nvPr/>
-        </p:nvSpPr>
-        <p:spPr>
-          <a:xfrm>
-            <a:off x="1143000" y="1417320"/>
-            <a:ext cx="3200400" cy="274320"/>
+      <p:sp>
+        <p:nvSpPr>
+          <p:cNvPr id="8" name="Text 6"/>
+          <p:cNvSpPr/>
+          <p:nvPr/>
+        </p:nvSpPr>
+        <p:spPr>
+          <a:xfrm>
+            <a:off x="777240" y="1783080"/>
+            <a:ext cx="3474720" cy="274320"/>
           </a:xfrm>
           <a:prstGeom prst="rect">
             <a:avLst/>
@@ -4056,7 +4351,7 @@
                 <a:ea typeface="Arial" pitchFamily="34" charset="-122"/>
                 <a:cs typeface="Arial" pitchFamily="34" charset="-120"/>
               </a:rPr>
-              <a:t>Tesla Inc. — Company Background</a:t>
+              <a:t>The Car That Changed Everything</a:t>
             </a:r>
             <a:endParaRPr lang="en-US" sz="1200" dirty="0"/>
           </a:p>
@@ -4064,14 +4359,14 @@
       </p:sp>
       <p:sp>
         <p:nvSpPr>
-          <p:cNvPr id="9" name="Text 6"/>
-          <p:cNvSpPr/>
-          <p:nvPr/>
-        </p:nvSpPr>
-        <p:spPr>
-          <a:xfrm>
-            <a:off x="777240" y="1828800"/>
-            <a:ext cx="3611880" cy="2926080"/>
+          <p:cNvPr id="9" name="Text 7"/>
+          <p:cNvSpPr/>
+          <p:nvPr/>
+        </p:nvSpPr>
+        <p:spPr>
+          <a:xfrm>
+            <a:off x="777240" y="2148840"/>
+            <a:ext cx="3611880" cy="2560320"/>
           </a:xfrm>
           <a:prstGeom prst="rect">
             <a:avLst/>
@@ -4093,7 +4388,7 @@
                   <a:srgbClr val="888899"/>
                 </a:solidFill>
               </a:rPr>
-              <a:t>Founded July 2003 by Martin Eberhard &amp; Marc Tarpenning; Elon Musk joined as chairman in 2004</a:t>
+              <a:t>Launched March 2017 — 400K pre-orders in the first week</a:t>
             </a:r>
             <a:endParaRPr lang="en-US" sz="900" dirty="0"/>
           </a:p>
@@ -4108,7 +4403,7 @@
                   <a:srgbClr val="888899"/>
                 </a:solidFill>
               </a:rPr>
-              <a:t>Headquarters: Austin, Texas (moved from Palo Alto, CA in 2021)</a:t>
+              <a:t>Mission: Make EVs accessible, not just aspirational</a:t>
             </a:r>
             <a:endParaRPr lang="en-US" sz="900" dirty="0"/>
           </a:p>
@@ -4123,7 +4418,7 @@
                   <a:srgbClr val="888899"/>
                 </a:solidFill>
               </a:rPr>
-              <a:t>Mission: 'Accelerate the world's transition to sustainable energy'</a:t>
+              <a:t>Best-selling EV in the US for 6 consecutive years (2019-2024)</a:t>
             </a:r>
             <a:endParaRPr lang="en-US" sz="900" dirty="0"/>
           </a:p>
@@ -4138,7 +4433,7 @@
                   <a:srgbClr val="888899"/>
                 </a:solidFill>
               </a:rPr>
-              <a:t>Market capitalization: ~$800B+ (2025) — world's most valuable automaker</a:t>
+              <a:t>Range: 272-358 miles — eliminated 'range anxiety' narrative</a:t>
             </a:r>
             <a:endParaRPr lang="en-US" sz="900" dirty="0"/>
           </a:p>
@@ -4153,7 +4448,7 @@
                   <a:srgbClr val="888899"/>
                 </a:solidFill>
               </a:rPr>
-              <a:t>Revenue: $96.8B in FY2024, up from $81.5B in FY2023 (Tesla 10-K)</a:t>
+              <a:t>5-star NHTSA safety rating in every category tested</a:t>
             </a:r>
             <a:endParaRPr lang="en-US" sz="900" dirty="0"/>
           </a:p>
@@ -4168,7 +4463,7 @@
                   <a:srgbClr val="888899"/>
                 </a:solidFill>
               </a:rPr>
-              <a:t>Global workforce: 140,000+ employees across 6 Gigafactories worldwide</a:t>
+              <a:t>Autopilot standard; Full Self-Driving: $12K or $199/mo</a:t>
             </a:r>
             <a:endParaRPr lang="en-US" sz="900" dirty="0"/>
           </a:p>
@@ -4183,37 +4478,22 @@
                   <a:srgbClr val="888899"/>
                 </a:solidFill>
               </a:rPr>
-              <a:t>Product line: Model S, 3, X, Y, Cybertruck, Semi; also Solar &amp; Powerwall</a:t>
+              <a:t>Revenue contribution: ~40% of Tesla's $96.8B FY2024</a:t>
             </a:r>
             <a:endParaRPr lang="en-US" sz="900" dirty="0"/>
           </a:p>
-          <a:p>
-            <a:pPr marL="342900" indent="-342900">
-              <a:buSzPct val="100000"/>
-              <a:buChar char="•"/>
-            </a:pPr>
-            <a:r>
-              <a:rPr lang="en-US" sz="900" dirty="0">
-                <a:solidFill>
-                  <a:srgbClr val="888899"/>
-                </a:solidFill>
-              </a:rPr>
-              <a:t>Supercharger network: 15,000+ stations globally — becoming industry standard (NACS)</a:t>
-            </a:r>
-            <a:endParaRPr lang="en-US" sz="900" dirty="0"/>
-          </a:p>
-        </p:txBody>
-      </p:sp>
-      <p:sp>
-        <p:nvSpPr>
-          <p:cNvPr id="10" name="Shape 7"/>
-          <p:cNvSpPr/>
-          <p:nvPr/>
-        </p:nvSpPr>
-        <p:spPr>
-          <a:xfrm>
-            <a:off x="4846320" y="1280160"/>
-            <a:ext cx="3931920" cy="1645920"/>
+        </p:txBody>
+      </p:sp>
+      <p:sp>
+        <p:nvSpPr>
+          <p:cNvPr id="10" name="Shape 8"/>
+          <p:cNvSpPr/>
+          <p:nvPr/>
+        </p:nvSpPr>
+        <p:spPr>
+          <a:xfrm>
+            <a:off x="4846320" y="1691640"/>
+            <a:ext cx="3931920" cy="1371600"/>
           </a:xfrm>
           <a:prstGeom prst="rect">
             <a:avLst/>
@@ -4233,34 +4513,14 @@
       </p:sp>
       <p:sp>
         <p:nvSpPr>
-          <p:cNvPr id="11" name="Shape 8"/>
-          <p:cNvSpPr/>
-          <p:nvPr/>
-        </p:nvSpPr>
-        <p:spPr>
-          <a:xfrm>
-            <a:off x="4846320" y="1280160"/>
-            <a:ext cx="3931920" cy="36576"/>
-          </a:xfrm>
-          <a:prstGeom prst="rect">
-            <a:avLst/>
-          </a:prstGeom>
-          <a:solidFill>
-            <a:srgbClr val="E82127"/>
-          </a:solidFill>
-          <a:ln/>
-        </p:spPr>
-      </p:sp>
-      <p:sp>
-        <p:nvSpPr>
-          <p:cNvPr id="12" name="Text 9"/>
-          <p:cNvSpPr/>
-          <p:nvPr/>
-        </p:nvSpPr>
-        <p:spPr>
-          <a:xfrm>
-            <a:off x="5029200" y="1417320"/>
-            <a:ext cx="3474720" cy="274320"/>
+          <p:cNvPr id="11" name="Text 9"/>
+          <p:cNvSpPr/>
+          <p:nvPr/>
+        </p:nvSpPr>
+        <p:spPr>
+          <a:xfrm>
+            <a:off x="4846320" y="1783080"/>
+            <a:ext cx="3931920" cy="640080"/>
           </a:xfrm>
           <a:prstGeom prst="rect">
             <a:avLst/>
@@ -4272,116 +4532,73 @@
           <a:bodyPr wrap="square" lIns="0" tIns="0" rIns="0" bIns="0" rtlCol="0" anchor="ctr"/>
           <a:lstStyle/>
           <a:p>
-            <a:pPr indent="0" marL="0">
+            <a:pPr algn="ctr" indent="0" marL="0">
               <a:buNone/>
             </a:pPr>
             <a:r>
-              <a:rPr lang="en-US" sz="1200" b="1" dirty="0">
+              <a:rPr lang="en-US" sz="3800" dirty="0">
                 <a:solidFill>
                   <a:srgbClr val="E82127"/>
+                </a:solidFill>
+                <a:latin typeface="Arial Black" pitchFamily="34" charset="0"/>
+                <a:ea typeface="Arial Black" pitchFamily="34" charset="-122"/>
+                <a:cs typeface="Arial Black" pitchFamily="34" charset="-120"/>
+              </a:rPr>
+              <a:t>$38,990</a:t>
+            </a:r>
+            <a:endParaRPr lang="en-US" sz="3800" dirty="0"/>
+          </a:p>
+        </p:txBody>
+      </p:sp>
+      <p:sp>
+        <p:nvSpPr>
+          <p:cNvPr id="12" name="Text 10"/>
+          <p:cNvSpPr/>
+          <p:nvPr/>
+        </p:nvSpPr>
+        <p:spPr>
+          <a:xfrm>
+            <a:off x="5029200" y="2423160"/>
+            <a:ext cx="3566160" cy="457200"/>
+          </a:xfrm>
+          <a:prstGeom prst="rect">
+            <a:avLst/>
+          </a:prstGeom>
+          <a:noFill/>
+          <a:ln/>
+        </p:spPr>
+        <p:txBody>
+          <a:bodyPr wrap="square" lIns="0" tIns="0" rIns="0" bIns="0" rtlCol="0" anchor="ctr"/>
+          <a:lstStyle/>
+          <a:p>
+            <a:pPr algn="ctr" indent="0" marL="0">
+              <a:buNone/>
+            </a:pPr>
+            <a:r>
+              <a:rPr lang="en-US" sz="1000" dirty="0">
+                <a:solidFill>
+                  <a:srgbClr val="666677"/>
                 </a:solidFill>
                 <a:latin typeface="Arial" pitchFamily="34" charset="0"/>
                 <a:ea typeface="Arial" pitchFamily="34" charset="-122"/>
                 <a:cs typeface="Arial" pitchFamily="34" charset="-120"/>
               </a:rPr>
-              <a:t>Model 3 — Product Background</a:t>
-            </a:r>
-            <a:endParaRPr lang="en-US" sz="1200" dirty="0"/>
-          </a:p>
-        </p:txBody>
-      </p:sp>
-      <p:sp>
-        <p:nvSpPr>
-          <p:cNvPr id="13" name="Text 10"/>
-          <p:cNvSpPr/>
-          <p:nvPr/>
-        </p:nvSpPr>
-        <p:spPr>
-          <a:xfrm>
-            <a:off x="5029200" y="1783080"/>
-            <a:ext cx="3566160" cy="1005840"/>
-          </a:xfrm>
-          <a:prstGeom prst="rect">
-            <a:avLst/>
-          </a:prstGeom>
-          <a:noFill/>
-          <a:ln/>
-        </p:spPr>
-        <p:txBody>
-          <a:bodyPr wrap="square" rtlCol="0" anchor="ctr"/>
-          <a:lstStyle/>
-          <a:p>
-            <a:pPr marL="342900" indent="-342900">
-              <a:buSzPct val="100000"/>
-              <a:buChar char="•"/>
-            </a:pPr>
-            <a:r>
-              <a:rPr lang="en-US" sz="900" dirty="0">
-                <a:solidFill>
-                  <a:srgbClr val="888899"/>
-                </a:solidFill>
-              </a:rPr>
-              <a:t>Launched March 2017 — 400,000+ pre-orders in first week</a:t>
-            </a:r>
-            <a:endParaRPr lang="en-US" sz="900" dirty="0"/>
-          </a:p>
-          <a:p>
-            <a:pPr marL="342900" indent="-342900">
-              <a:buSzPct val="100000"/>
-              <a:buChar char="•"/>
-            </a:pPr>
-            <a:r>
-              <a:rPr lang="en-US" sz="900" dirty="0">
-                <a:solidFill>
-                  <a:srgbClr val="888899"/>
-                </a:solidFill>
-              </a:rPr>
-              <a:t>Starting MSRP: $38,990 (base) to $52,990 (Performance)</a:t>
-            </a:r>
-            <a:endParaRPr lang="en-US" sz="900" dirty="0"/>
-          </a:p>
-          <a:p>
-            <a:pPr marL="342900" indent="-342900">
-              <a:buSzPct val="100000"/>
-              <a:buChar char="•"/>
-            </a:pPr>
-            <a:r>
-              <a:rPr lang="en-US" sz="900" dirty="0">
-                <a:solidFill>
-                  <a:srgbClr val="888899"/>
-                </a:solidFill>
-              </a:rPr>
-              <a:t>Range: 272-358 miles; 0-60 mph in 3.1-5.8 seconds</a:t>
-            </a:r>
-            <a:endParaRPr lang="en-US" sz="900" dirty="0"/>
-          </a:p>
-          <a:p>
-            <a:pPr marL="342900" indent="-342900">
-              <a:buSzPct val="100000"/>
-              <a:buChar char="•"/>
-            </a:pPr>
-            <a:r>
-              <a:rPr lang="en-US" sz="900" dirty="0">
-                <a:solidFill>
-                  <a:srgbClr val="888899"/>
-                </a:solidFill>
-              </a:rPr>
-              <a:t>Best-selling EV in the US for 6 consecutive years (2019-2024)</a:t>
-            </a:r>
-            <a:endParaRPr lang="en-US" sz="900" dirty="0"/>
-          </a:p>
-        </p:txBody>
-      </p:sp>
-      <p:sp>
-        <p:nvSpPr>
-          <p:cNvPr id="14" name="Shape 11"/>
-          <p:cNvSpPr/>
-          <p:nvPr/>
-        </p:nvSpPr>
-        <p:spPr>
-          <a:xfrm>
-            <a:off x="4846320" y="3108960"/>
-            <a:ext cx="3931920" cy="1737360"/>
+              <a:t>Starting MSRP — or just $31,490 after $7,500 federal tax credit</a:t>
+            </a:r>
+            <a:endParaRPr lang="en-US" sz="1000" dirty="0"/>
+          </a:p>
+        </p:txBody>
+      </p:sp>
+      <p:sp>
+        <p:nvSpPr>
+          <p:cNvPr id="13" name="Shape 11"/>
+          <p:cNvSpPr/>
+          <p:nvPr/>
+        </p:nvSpPr>
+        <p:spPr>
+          <a:xfrm>
+            <a:off x="4846320" y="3246120"/>
+            <a:ext cx="3931920" cy="1645920"/>
           </a:xfrm>
           <a:prstGeom prst="rect">
             <a:avLst/>
@@ -4401,34 +4618,14 @@
       </p:sp>
       <p:sp>
         <p:nvSpPr>
-          <p:cNvPr id="15" name="Shape 12"/>
-          <p:cNvSpPr/>
-          <p:nvPr/>
-        </p:nvSpPr>
-        <p:spPr>
-          <a:xfrm>
-            <a:off x="4846320" y="3108960"/>
-            <a:ext cx="3931920" cy="36576"/>
-          </a:xfrm>
-          <a:prstGeom prst="rect">
-            <a:avLst/>
-          </a:prstGeom>
-          <a:solidFill>
-            <a:srgbClr val="E82127"/>
-          </a:solidFill>
-          <a:ln/>
-        </p:spPr>
-      </p:sp>
-      <p:sp>
-        <p:nvSpPr>
-          <p:cNvPr id="16" name="Text 13"/>
-          <p:cNvSpPr/>
-          <p:nvPr/>
-        </p:nvSpPr>
-        <p:spPr>
-          <a:xfrm>
-            <a:off x="5029200" y="3246120"/>
-            <a:ext cx="3474720" cy="274320"/>
+          <p:cNvPr id="14" name="Text 12"/>
+          <p:cNvSpPr/>
+          <p:nvPr/>
+        </p:nvSpPr>
+        <p:spPr>
+          <a:xfrm>
+            <a:off x="5029200" y="3337560"/>
+            <a:ext cx="3566160" cy="274320"/>
           </a:xfrm>
           <a:prstGeom prst="rect">
             <a:avLst/>
@@ -4452,7 +4649,7 @@
                 <a:ea typeface="Arial" pitchFamily="34" charset="-122"/>
                 <a:cs typeface="Arial" pitchFamily="34" charset="-120"/>
               </a:rPr>
-              <a:t>Value Proposition to Consumers</a:t>
+              <a:t>Why Owners Never Go Back</a:t>
             </a:r>
             <a:endParaRPr lang="en-US" sz="1200" dirty="0"/>
           </a:p>
@@ -4460,14 +4657,14 @@
       </p:sp>
       <p:sp>
         <p:nvSpPr>
-          <p:cNvPr id="17" name="Text 14"/>
-          <p:cNvSpPr/>
-          <p:nvPr/>
-        </p:nvSpPr>
-        <p:spPr>
-          <a:xfrm>
-            <a:off x="5029200" y="3611880"/>
-            <a:ext cx="3566160" cy="1188720"/>
+          <p:cNvPr id="15" name="Text 13"/>
+          <p:cNvSpPr/>
+          <p:nvPr/>
+        </p:nvSpPr>
+        <p:spPr>
+          <a:xfrm>
+            <a:off x="5029200" y="3703320"/>
+            <a:ext cx="3566160" cy="1097280"/>
           </a:xfrm>
           <a:prstGeom prst="rect">
             <a:avLst/>
@@ -4489,7 +4686,7 @@
                   <a:srgbClr val="888899"/>
                 </a:solidFill>
               </a:rPr>
-              <a:t>Total cost of ownership 35-45% lower than comparable ICE vehicles (AAA, 2024)</a:t>
+              <a:t>60% lower fuel cost — $0.04/mile vs $0.12/mile gasoline (DOE)</a:t>
             </a:r>
             <a:endParaRPr lang="en-US" sz="900" dirty="0"/>
           </a:p>
@@ -4504,7 +4701,7 @@
                   <a:srgbClr val="888899"/>
                 </a:solidFill>
               </a:rPr>
-              <a:t>60% lower fuel costs — $0.04/mile vs $0.12/mile for gasoline (DOE)</a:t>
+              <a:t>50% less maintenance — no oil changes, brakes last 100K+ mi</a:t>
             </a:r>
             <a:endParaRPr lang="en-US" sz="900" dirty="0"/>
           </a:p>
@@ -4519,7 +4716,7 @@
                   <a:srgbClr val="888899"/>
                 </a:solidFill>
               </a:rPr>
-              <a:t>50% less maintenance — no oil changes, brake pads last 100K+ miles</a:t>
+              <a:t>Car improves after purchase — 40+ OTA updates per year</a:t>
             </a:r>
             <a:endParaRPr lang="en-US" sz="900" dirty="0"/>
           </a:p>
@@ -4534,22 +4731,7 @@
                   <a:srgbClr val="888899"/>
                 </a:solidFill>
               </a:rPr>
-              <a:t>OTA software updates: car improves after purchase (Autopilot, range, features)</a:t>
-            </a:r>
-            <a:endParaRPr lang="en-US" sz="900" dirty="0"/>
-          </a:p>
-          <a:p>
-            <a:pPr marL="342900" indent="-342900">
-              <a:buSzPct val="100000"/>
-              <a:buChar char="•"/>
-            </a:pPr>
-            <a:r>
-              <a:rPr lang="en-US" sz="900" dirty="0">
-                <a:solidFill>
-                  <a:srgbClr val="888899"/>
-                </a:solidFill>
-              </a:rPr>
-              <a:t>$7,500 federal tax credit eligibility reduces effective price to $31,490</a:t>
+              <a:t>15,000+ Supercharger stations — largest fast-charging network</a:t>
             </a:r>
             <a:endParaRPr lang="en-US" sz="900" dirty="0"/>
           </a:p>
@@ -4640,7 +4822,7 @@
                 <a:ea typeface="Arial Black" pitchFamily="34" charset="-122"/>
                 <a:cs typeface="Arial Black" pitchFamily="34" charset="-120"/>
               </a:rPr>
-              <a:t>05</a:t>
+              <a:t>04</a:t>
             </a:r>
             <a:endParaRPr lang="en-US" sz="3200" dirty="0"/>
           </a:p>
@@ -4679,7 +4861,7 @@
                 <a:ea typeface="Arial Black" pitchFamily="34" charset="-122"/>
                 <a:cs typeface="Arial Black" pitchFamily="34" charset="-120"/>
               </a:rPr>
-              <a:t>SWOT &amp; PESTEL Analysis</a:t>
+              <a:t>Strengths, Cracks &amp; Crossroads</a:t>
             </a:r>
             <a:endParaRPr lang="en-US" sz="2600" dirty="0"/>
           </a:p>
@@ -4687,14 +4869,53 @@
       </p:sp>
       <p:sp>
         <p:nvSpPr>
-          <p:cNvPr id="5" name="Shape 3"/>
-          <p:cNvSpPr/>
-          <p:nvPr/>
-        </p:nvSpPr>
-        <p:spPr>
-          <a:xfrm>
-            <a:off x="548640" y="1280160"/>
-            <a:ext cx="3931920" cy="1691640"/>
+          <p:cNvPr id="5" name="Text 3"/>
+          <p:cNvSpPr/>
+          <p:nvPr/>
+        </p:nvSpPr>
+        <p:spPr>
+          <a:xfrm>
+            <a:off x="548640" y="1143000"/>
+            <a:ext cx="8046720" cy="365760"/>
+          </a:xfrm>
+          <a:prstGeom prst="rect">
+            <a:avLst/>
+          </a:prstGeom>
+          <a:noFill/>
+          <a:ln/>
+        </p:spPr>
+        <p:txBody>
+          <a:bodyPr wrap="square" lIns="0" tIns="0" rIns="0" bIns="0" rtlCol="0" anchor="ctr"/>
+          <a:lstStyle/>
+          <a:p>
+            <a:pPr indent="0" marL="0">
+              <a:buNone/>
+            </a:pPr>
+            <a:r>
+              <a:rPr lang="en-US" sz="1200" i="1" dirty="0">
+                <a:solidFill>
+                  <a:srgbClr val="666677"/>
+                </a:solidFill>
+                <a:latin typeface="Georgia" pitchFamily="34" charset="0"/>
+                <a:ea typeface="Georgia" pitchFamily="34" charset="-122"/>
+                <a:cs typeface="Georgia" pitchFamily="34" charset="-120"/>
+              </a:rPr>
+              <a:t>No company is invincible. Tesla's greatest strengths also hide its biggest vulnerabilities.</a:t>
+            </a:r>
+            <a:endParaRPr lang="en-US" sz="1200" dirty="0"/>
+          </a:p>
+        </p:txBody>
+      </p:sp>
+      <p:sp>
+        <p:nvSpPr>
+          <p:cNvPr id="6" name="Shape 4"/>
+          <p:cNvSpPr/>
+          <p:nvPr/>
+        </p:nvSpPr>
+        <p:spPr>
+          <a:xfrm>
+            <a:off x="548640" y="1600200"/>
+            <a:ext cx="3931920" cy="1554480"/>
           </a:xfrm>
           <a:prstGeom prst="rect">
             <a:avLst/>
@@ -4714,14 +4935,14 @@
       </p:sp>
       <p:sp>
         <p:nvSpPr>
-          <p:cNvPr id="6" name="Shape 4"/>
-          <p:cNvSpPr/>
-          <p:nvPr/>
-        </p:nvSpPr>
-        <p:spPr>
-          <a:xfrm>
-            <a:off x="548640" y="1280160"/>
-            <a:ext cx="54864" cy="1691640"/>
+          <p:cNvPr id="7" name="Shape 5"/>
+          <p:cNvSpPr/>
+          <p:nvPr/>
+        </p:nvSpPr>
+        <p:spPr>
+          <a:xfrm>
+            <a:off x="548640" y="1600200"/>
+            <a:ext cx="54864" cy="1554480"/>
           </a:xfrm>
           <a:prstGeom prst="rect">
             <a:avLst/>
@@ -4734,13 +4955,13 @@
       </p:sp>
       <p:sp>
         <p:nvSpPr>
-          <p:cNvPr id="7" name="Text 5"/>
-          <p:cNvSpPr/>
-          <p:nvPr/>
-        </p:nvSpPr>
-        <p:spPr>
-          <a:xfrm>
-            <a:off x="731520" y="1353312"/>
+          <p:cNvPr id="8" name="Text 6"/>
+          <p:cNvSpPr/>
+          <p:nvPr/>
+        </p:nvSpPr>
+        <p:spPr>
+          <a:xfrm>
+            <a:off x="731520" y="1673352"/>
             <a:ext cx="3474720" cy="228600"/>
           </a:xfrm>
           <a:prstGeom prst="rect">
@@ -4773,14 +4994,14 @@
       </p:sp>
       <p:sp>
         <p:nvSpPr>
-          <p:cNvPr id="8" name="Text 6"/>
-          <p:cNvSpPr/>
-          <p:nvPr/>
-        </p:nvSpPr>
-        <p:spPr>
-          <a:xfrm>
-            <a:off x="731520" y="1600200"/>
-            <a:ext cx="3566160" cy="1280160"/>
+          <p:cNvPr id="9" name="Text 7"/>
+          <p:cNvSpPr/>
+          <p:nvPr/>
+        </p:nvSpPr>
+        <p:spPr>
+          <a:xfrm>
+            <a:off x="731520" y="1947672"/>
+            <a:ext cx="3566160" cy="1097280"/>
           </a:xfrm>
           <a:prstGeom prst="rect">
             <a:avLst/>
@@ -4797,14 +5018,14 @@
               <a:buChar char="•"/>
             </a:pPr>
             <a:r>
-              <a:rPr lang="en-US" sz="850" dirty="0">
+              <a:rPr lang="en-US" sz="900" dirty="0">
                 <a:solidFill>
                   <a:srgbClr val="888899"/>
                 </a:solidFill>
               </a:rPr>
-              <a:t>Brand loyalty: 91% owner satisfaction (JD Power, 2024)</a:t>
-            </a:r>
-            <a:endParaRPr lang="en-US" sz="850" dirty="0"/>
+              <a:t>91% satisfaction — owners become evangelists</a:t>
+            </a:r>
+            <a:endParaRPr lang="en-US" sz="900" dirty="0"/>
           </a:p>
           <a:p>
             <a:pPr marL="342900" indent="-342900">
@@ -4812,14 +5033,14 @@
               <a:buChar char="•"/>
             </a:pPr>
             <a:r>
-              <a:rPr lang="en-US" sz="850" dirty="0">
+              <a:rPr lang="en-US" sz="900" dirty="0">
                 <a:solidFill>
                   <a:srgbClr val="888899"/>
                 </a:solidFill>
               </a:rPr>
-              <a:t>Technology leadership: Autopilot, FSD, OTA capabilities</a:t>
-            </a:r>
-            <a:endParaRPr lang="en-US" sz="850" dirty="0"/>
+              <a:t>Only automaker with full software-defined vehicle</a:t>
+            </a:r>
+            <a:endParaRPr lang="en-US" sz="900" dirty="0"/>
           </a:p>
           <a:p>
             <a:pPr marL="342900" indent="-342900">
@@ -4827,14 +5048,14 @@
               <a:buChar char="•"/>
             </a:pPr>
             <a:r>
-              <a:rPr lang="en-US" sz="850" dirty="0">
+              <a:rPr lang="en-US" sz="900" dirty="0">
                 <a:solidFill>
                   <a:srgbClr val="888899"/>
                 </a:solidFill>
               </a:rPr>
-              <a:t>Vertical integration: in-house battery production (4680 cells)</a:t>
-            </a:r>
-            <a:endParaRPr lang="en-US" sz="850" dirty="0"/>
+              <a:t>Vertical integration: batteries, chips, charging</a:t>
+            </a:r>
+            <a:endParaRPr lang="en-US" sz="900" dirty="0"/>
           </a:p>
           <a:p>
             <a:pPr marL="342900" indent="-342900">
@@ -4842,42 +5063,27 @@
               <a:buChar char="•"/>
             </a:pPr>
             <a:r>
-              <a:rPr lang="en-US" sz="850" dirty="0">
+              <a:rPr lang="en-US" sz="900" dirty="0">
                 <a:solidFill>
                   <a:srgbClr val="888899"/>
                 </a:solidFill>
               </a:rPr>
-              <a:t>Direct-to-consumer model eliminates $2,000+ dealer markup</a:t>
-            </a:r>
-            <a:endParaRPr lang="en-US" sz="850" dirty="0"/>
-          </a:p>
-          <a:p>
-            <a:pPr marL="342900" indent="-342900">
-              <a:buSzPct val="100000"/>
-              <a:buChar char="•"/>
-            </a:pPr>
-            <a:r>
-              <a:rPr lang="en-US" sz="850" dirty="0">
-                <a:solidFill>
-                  <a:srgbClr val="888899"/>
-                </a:solidFill>
-              </a:rPr>
-              <a:t>15,000+ Supercharger stations — largest fast-charging network</a:t>
-            </a:r>
-            <a:endParaRPr lang="en-US" sz="850" dirty="0"/>
-          </a:p>
-        </p:txBody>
-      </p:sp>
-      <p:sp>
-        <p:nvSpPr>
-          <p:cNvPr id="9" name="Shape 7"/>
-          <p:cNvSpPr/>
-          <p:nvPr/>
-        </p:nvSpPr>
-        <p:spPr>
-          <a:xfrm>
-            <a:off x="4754880" y="1280160"/>
-            <a:ext cx="3931920" cy="1691640"/>
+              <a:t>Direct sales = $2,000+ saved per car vs dealerships</a:t>
+            </a:r>
+            <a:endParaRPr lang="en-US" sz="900" dirty="0"/>
+          </a:p>
+        </p:txBody>
+      </p:sp>
+      <p:sp>
+        <p:nvSpPr>
+          <p:cNvPr id="10" name="Shape 8"/>
+          <p:cNvSpPr/>
+          <p:nvPr/>
+        </p:nvSpPr>
+        <p:spPr>
+          <a:xfrm>
+            <a:off x="4754880" y="1600200"/>
+            <a:ext cx="3931920" cy="1554480"/>
           </a:xfrm>
           <a:prstGeom prst="rect">
             <a:avLst/>
@@ -4897,14 +5103,14 @@
       </p:sp>
       <p:sp>
         <p:nvSpPr>
-          <p:cNvPr id="10" name="Shape 8"/>
-          <p:cNvSpPr/>
-          <p:nvPr/>
-        </p:nvSpPr>
-        <p:spPr>
-          <a:xfrm>
-            <a:off x="4754880" y="1280160"/>
-            <a:ext cx="54864" cy="1691640"/>
+          <p:cNvPr id="11" name="Shape 9"/>
+          <p:cNvSpPr/>
+          <p:nvPr/>
+        </p:nvSpPr>
+        <p:spPr>
+          <a:xfrm>
+            <a:off x="4754880" y="1600200"/>
+            <a:ext cx="54864" cy="1554480"/>
           </a:xfrm>
           <a:prstGeom prst="rect">
             <a:avLst/>
@@ -4917,13 +5123,13 @@
       </p:sp>
       <p:sp>
         <p:nvSpPr>
-          <p:cNvPr id="11" name="Text 9"/>
-          <p:cNvSpPr/>
-          <p:nvPr/>
-        </p:nvSpPr>
-        <p:spPr>
-          <a:xfrm>
-            <a:off x="4937760" y="1353312"/>
+          <p:cNvPr id="12" name="Text 10"/>
+          <p:cNvSpPr/>
+          <p:nvPr/>
+        </p:nvSpPr>
+        <p:spPr>
+          <a:xfrm>
+            <a:off x="4937760" y="1673352"/>
             <a:ext cx="3474720" cy="228600"/>
           </a:xfrm>
           <a:prstGeom prst="rect">
@@ -4956,14 +5162,14 @@
       </p:sp>
       <p:sp>
         <p:nvSpPr>
-          <p:cNvPr id="12" name="Text 10"/>
-          <p:cNvSpPr/>
-          <p:nvPr/>
-        </p:nvSpPr>
-        <p:spPr>
-          <a:xfrm>
-            <a:off x="4937760" y="1600200"/>
-            <a:ext cx="3566160" cy="1280160"/>
+          <p:cNvPr id="13" name="Text 11"/>
+          <p:cNvSpPr/>
+          <p:nvPr/>
+        </p:nvSpPr>
+        <p:spPr>
+          <a:xfrm>
+            <a:off x="4937760" y="1947672"/>
+            <a:ext cx="3566160" cy="1097280"/>
           </a:xfrm>
           <a:prstGeom prst="rect">
             <a:avLst/>
@@ -4980,14 +5186,14 @@
               <a:buChar char="•"/>
             </a:pPr>
             <a:r>
-              <a:rPr lang="en-US" sz="850" dirty="0">
+              <a:rPr lang="en-US" sz="900" dirty="0">
                 <a:solidFill>
                   <a:srgbClr val="888899"/>
                 </a:solidFill>
               </a:rPr>
-              <a:t>Quality control issues: panel gaps, paint defects reported by 23% of owners</a:t>
-            </a:r>
-            <a:endParaRPr lang="en-US" sz="850" dirty="0"/>
+              <a:t>Quality issues: 23% report panel gaps or paint defects</a:t>
+            </a:r>
+            <a:endParaRPr lang="en-US" sz="900" dirty="0"/>
           </a:p>
           <a:p>
             <a:pPr marL="342900" indent="-342900">
@@ -4995,14 +5201,14 @@
               <a:buChar char="•"/>
             </a:pPr>
             <a:r>
-              <a:rPr lang="en-US" sz="850" dirty="0">
+              <a:rPr lang="en-US" sz="900" dirty="0">
                 <a:solidFill>
                   <a:srgbClr val="888899"/>
                 </a:solidFill>
               </a:rPr>
-              <a:t>Limited service center network: avg 45-min drive vs 15-min for legacy OEMs</a:t>
-            </a:r>
-            <a:endParaRPr lang="en-US" sz="850" dirty="0"/>
+              <a:t>Service centers: avg 45-min drive (vs 15-min for Toyota)</a:t>
+            </a:r>
+            <a:endParaRPr lang="en-US" sz="900" dirty="0"/>
           </a:p>
           <a:p>
             <a:pPr marL="342900" indent="-342900">
@@ -5010,14 +5216,14 @@
               <a:buChar char="•"/>
             </a:pPr>
             <a:r>
-              <a:rPr lang="en-US" sz="850" dirty="0">
+              <a:rPr lang="en-US" sz="900" dirty="0">
                 <a:solidFill>
                   <a:srgbClr val="888899"/>
                 </a:solidFill>
               </a:rPr>
-              <a:t>High dependency on CEO's personal brand — PR volatility risk</a:t>
-            </a:r>
-            <a:endParaRPr lang="en-US" sz="850" dirty="0"/>
+              <a:t>CEO dependency — one tweet can move stock ±10%</a:t>
+            </a:r>
+            <a:endParaRPr lang="en-US" sz="900" dirty="0"/>
           </a:p>
           <a:p>
             <a:pPr marL="342900" indent="-342900">
@@ -5025,42 +5231,27 @@
               <a:buChar char="•"/>
             </a:pPr>
             <a:r>
-              <a:rPr lang="en-US" sz="850" dirty="0">
+              <a:rPr lang="en-US" sz="900" dirty="0">
                 <a:solidFill>
                   <a:srgbClr val="888899"/>
                 </a:solidFill>
               </a:rPr>
-              <a:t>Premium pricing excludes 60%+ of US car buyers</a:t>
-            </a:r>
-            <a:endParaRPr lang="en-US" sz="850" dirty="0"/>
-          </a:p>
-          <a:p>
-            <a:pPr marL="342900" indent="-342900">
-              <a:buSzPct val="100000"/>
-              <a:buChar char="•"/>
-            </a:pPr>
-            <a:r>
-              <a:rPr lang="en-US" sz="850" dirty="0">
-                <a:solidFill>
-                  <a:srgbClr val="888899"/>
-                </a:solidFill>
-              </a:rPr>
-              <a:t>Customer service ranked below industry average (ACSI, 2024)</a:t>
-            </a:r>
-            <a:endParaRPr lang="en-US" sz="850" dirty="0"/>
-          </a:p>
-        </p:txBody>
-      </p:sp>
-      <p:sp>
-        <p:nvSpPr>
-          <p:cNvPr id="13" name="Shape 11"/>
-          <p:cNvSpPr/>
-          <p:nvPr/>
-        </p:nvSpPr>
-        <p:spPr>
-          <a:xfrm>
-            <a:off x="548640" y="3108960"/>
-            <a:ext cx="3931920" cy="1691640"/>
+              <a:t>Customer service scored below industry avg (ACSI)</a:t>
+            </a:r>
+            <a:endParaRPr lang="en-US" sz="900" dirty="0"/>
+          </a:p>
+        </p:txBody>
+      </p:sp>
+      <p:sp>
+        <p:nvSpPr>
+          <p:cNvPr id="14" name="Shape 12"/>
+          <p:cNvSpPr/>
+          <p:nvPr/>
+        </p:nvSpPr>
+        <p:spPr>
+          <a:xfrm>
+            <a:off x="548640" y="3291840"/>
+            <a:ext cx="3931920" cy="1554480"/>
           </a:xfrm>
           <a:prstGeom prst="rect">
             <a:avLst/>
@@ -5080,14 +5271,14 @@
       </p:sp>
       <p:sp>
         <p:nvSpPr>
-          <p:cNvPr id="14" name="Shape 12"/>
-          <p:cNvSpPr/>
-          <p:nvPr/>
-        </p:nvSpPr>
-        <p:spPr>
-          <a:xfrm>
-            <a:off x="548640" y="3108960"/>
-            <a:ext cx="54864" cy="1691640"/>
+          <p:cNvPr id="15" name="Shape 13"/>
+          <p:cNvSpPr/>
+          <p:nvPr/>
+        </p:nvSpPr>
+        <p:spPr>
+          <a:xfrm>
+            <a:off x="548640" y="3291840"/>
+            <a:ext cx="54864" cy="1554480"/>
           </a:xfrm>
           <a:prstGeom prst="rect">
             <a:avLst/>
@@ -5100,13 +5291,13 @@
       </p:sp>
       <p:sp>
         <p:nvSpPr>
-          <p:cNvPr id="15" name="Text 13"/>
-          <p:cNvSpPr/>
-          <p:nvPr/>
-        </p:nvSpPr>
-        <p:spPr>
-          <a:xfrm>
-            <a:off x="731520" y="3182112"/>
+          <p:cNvPr id="16" name="Text 14"/>
+          <p:cNvSpPr/>
+          <p:nvPr/>
+        </p:nvSpPr>
+        <p:spPr>
+          <a:xfrm>
+            <a:off x="731520" y="3364992"/>
             <a:ext cx="3474720" cy="228600"/>
           </a:xfrm>
           <a:prstGeom prst="rect">
@@ -5139,14 +5330,14 @@
       </p:sp>
       <p:sp>
         <p:nvSpPr>
-          <p:cNvPr id="16" name="Text 14"/>
-          <p:cNvSpPr/>
-          <p:nvPr/>
-        </p:nvSpPr>
-        <p:spPr>
-          <a:xfrm>
-            <a:off x="731520" y="3429000"/>
-            <a:ext cx="3566160" cy="1280160"/>
+          <p:cNvPr id="17" name="Text 15"/>
+          <p:cNvSpPr/>
+          <p:nvPr/>
+        </p:nvSpPr>
+        <p:spPr>
+          <a:xfrm>
+            <a:off x="731520" y="3639312"/>
+            <a:ext cx="3566160" cy="1097280"/>
           </a:xfrm>
           <a:prstGeom prst="rect">
             <a:avLst/>
@@ -5163,14 +5354,14 @@
               <a:buChar char="•"/>
             </a:pPr>
             <a:r>
-              <a:rPr lang="en-US" sz="850" dirty="0">
+              <a:rPr lang="en-US" sz="900" dirty="0">
                 <a:solidFill>
                   <a:srgbClr val="888899"/>
                 </a:solidFill>
               </a:rPr>
-              <a:t>US EV market projected to reach $67B by 2026 (Statista)</a:t>
-            </a:r>
-            <a:endParaRPr lang="en-US" sz="850" dirty="0"/>
+              <a:t>US EV market hitting $67B by 2026 — still only 9% of auto</a:t>
+            </a:r>
+            <a:endParaRPr lang="en-US" sz="900" dirty="0"/>
           </a:p>
           <a:p>
             <a:pPr marL="342900" indent="-342900">
@@ -5178,14 +5369,14 @@
               <a:buChar char="•"/>
             </a:pPr>
             <a:r>
-              <a:rPr lang="en-US" sz="850" dirty="0">
+              <a:rPr lang="en-US" sz="900" dirty="0">
                 <a:solidFill>
                   <a:srgbClr val="888899"/>
                 </a:solidFill>
               </a:rPr>
-              <a:t>$7,500 IRA federal tax credit drives adoption since 2023</a:t>
-            </a:r>
-            <a:endParaRPr lang="en-US" sz="850" dirty="0"/>
+              <a:t>$7,500 IRA tax credit accelerating mass adoption</a:t>
+            </a:r>
+            <a:endParaRPr lang="en-US" sz="900" dirty="0"/>
           </a:p>
           <a:p>
             <a:pPr marL="342900" indent="-342900">
@@ -5193,14 +5384,14 @@
               <a:buChar char="•"/>
             </a:pPr>
             <a:r>
-              <a:rPr lang="en-US" sz="850" dirty="0">
+              <a:rPr lang="en-US" sz="900" dirty="0">
                 <a:solidFill>
                   <a:srgbClr val="888899"/>
                 </a:solidFill>
               </a:rPr>
-              <a:t>Autonomous driving TAM: $300B+ by 2030 (Goldman Sachs)</a:t>
-            </a:r>
-            <a:endParaRPr lang="en-US" sz="850" dirty="0"/>
+              <a:t>Autonomous driving: $300B TAM by 2030 (Goldman Sachs)</a:t>
+            </a:r>
+            <a:endParaRPr lang="en-US" sz="900" dirty="0"/>
           </a:p>
           <a:p>
             <a:pPr marL="342900" indent="-342900">
@@ -5208,42 +5399,27 @@
               <a:buChar char="•"/>
             </a:pPr>
             <a:r>
-              <a:rPr lang="en-US" sz="850" dirty="0">
+              <a:rPr lang="en-US" sz="900" dirty="0">
                 <a:solidFill>
                   <a:srgbClr val="888899"/>
                 </a:solidFill>
               </a:rPr>
-              <a:t>Expansion into fleet/commercial segment (ride-hailing, delivery)</a:t>
-            </a:r>
-            <a:endParaRPr lang="en-US" sz="850" dirty="0"/>
-          </a:p>
-          <a:p>
-            <a:pPr marL="342900" indent="-342900">
-              <a:buSzPct val="100000"/>
-              <a:buChar char="•"/>
-            </a:pPr>
-            <a:r>
-              <a:rPr lang="en-US" sz="850" dirty="0">
-                <a:solidFill>
-                  <a:srgbClr val="888899"/>
-                </a:solidFill>
-              </a:rPr>
-              <a:t>Energy storage + solar integration grows recurring revenue</a:t>
-            </a:r>
-            <a:endParaRPr lang="en-US" sz="850" dirty="0"/>
-          </a:p>
-        </p:txBody>
-      </p:sp>
-      <p:sp>
-        <p:nvSpPr>
-          <p:cNvPr id="17" name="Shape 15"/>
-          <p:cNvSpPr/>
-          <p:nvPr/>
-        </p:nvSpPr>
-        <p:spPr>
-          <a:xfrm>
-            <a:off x="4754880" y="3108960"/>
-            <a:ext cx="3931920" cy="1691640"/>
+              <a:t>Energy storage + solar creates recurring revenue streams</a:t>
+            </a:r>
+            <a:endParaRPr lang="en-US" sz="900" dirty="0"/>
+          </a:p>
+        </p:txBody>
+      </p:sp>
+      <p:sp>
+        <p:nvSpPr>
+          <p:cNvPr id="18" name="Shape 16"/>
+          <p:cNvSpPr/>
+          <p:nvPr/>
+        </p:nvSpPr>
+        <p:spPr>
+          <a:xfrm>
+            <a:off x="4754880" y="3291840"/>
+            <a:ext cx="3931920" cy="1554480"/>
           </a:xfrm>
           <a:prstGeom prst="rect">
             <a:avLst/>
@@ -5263,14 +5439,14 @@
       </p:sp>
       <p:sp>
         <p:nvSpPr>
-          <p:cNvPr id="18" name="Shape 16"/>
-          <p:cNvSpPr/>
-          <p:nvPr/>
-        </p:nvSpPr>
-        <p:spPr>
-          <a:xfrm>
-            <a:off x="4754880" y="3108960"/>
-            <a:ext cx="54864" cy="1691640"/>
+          <p:cNvPr id="19" name="Shape 17"/>
+          <p:cNvSpPr/>
+          <p:nvPr/>
+        </p:nvSpPr>
+        <p:spPr>
+          <a:xfrm>
+            <a:off x="4754880" y="3291840"/>
+            <a:ext cx="54864" cy="1554480"/>
           </a:xfrm>
           <a:prstGeom prst="rect">
             <a:avLst/>
@@ -5283,13 +5459,13 @@
       </p:sp>
       <p:sp>
         <p:nvSpPr>
-          <p:cNvPr id="19" name="Text 17"/>
-          <p:cNvSpPr/>
-          <p:nvPr/>
-        </p:nvSpPr>
-        <p:spPr>
-          <a:xfrm>
-            <a:off x="4937760" y="3182112"/>
+          <p:cNvPr id="20" name="Text 18"/>
+          <p:cNvSpPr/>
+          <p:nvPr/>
+        </p:nvSpPr>
+        <p:spPr>
+          <a:xfrm>
+            <a:off x="4937760" y="3364992"/>
             <a:ext cx="3474720" cy="228600"/>
           </a:xfrm>
           <a:prstGeom prst="rect">
@@ -5322,14 +5498,14 @@
       </p:sp>
       <p:sp>
         <p:nvSpPr>
-          <p:cNvPr id="20" name="Text 18"/>
-          <p:cNvSpPr/>
-          <p:nvPr/>
-        </p:nvSpPr>
-        <p:spPr>
-          <a:xfrm>
-            <a:off x="4937760" y="3429000"/>
-            <a:ext cx="3566160" cy="1280160"/>
+          <p:cNvPr id="21" name="Text 19"/>
+          <p:cNvSpPr/>
+          <p:nvPr/>
+        </p:nvSpPr>
+        <p:spPr>
+          <a:xfrm>
+            <a:off x="4937760" y="3639312"/>
+            <a:ext cx="3566160" cy="1097280"/>
           </a:xfrm>
           <a:prstGeom prst="rect">
             <a:avLst/>
@@ -5346,14 +5522,14 @@
               <a:buChar char="•"/>
             </a:pPr>
             <a:r>
-              <a:rPr lang="en-US" sz="850" dirty="0">
+              <a:rPr lang="en-US" sz="900" dirty="0">
                 <a:solidFill>
                   <a:srgbClr val="888899"/>
                 </a:solidFill>
               </a:rPr>
-              <a:t>Chinese competitors (BYD) now outsell Tesla globally</a:t>
-            </a:r>
-            <a:endParaRPr lang="en-US" sz="850" dirty="0"/>
+              <a:t>BYD outsold Tesla globally in Q4 2023 — the gap is closing</a:t>
+            </a:r>
+            <a:endParaRPr lang="en-US" sz="900" dirty="0"/>
           </a:p>
           <a:p>
             <a:pPr marL="342900" indent="-342900">
@@ -5361,14 +5537,14 @@
               <a:buChar char="•"/>
             </a:pPr>
             <a:r>
-              <a:rPr lang="en-US" sz="850" dirty="0">
+              <a:rPr lang="en-US" sz="900" dirty="0">
                 <a:solidFill>
                   <a:srgbClr val="888899"/>
                 </a:solidFill>
               </a:rPr>
-              <a:t>Legacy OEMs investing $500B+ collectively in EV transition</a:t>
-            </a:r>
-            <a:endParaRPr lang="en-US" sz="850" dirty="0"/>
+              <a:t>Legacy OEMs pouring $500B+ into EV catch-up collectively</a:t>
+            </a:r>
+            <a:endParaRPr lang="en-US" sz="900" dirty="0"/>
           </a:p>
           <a:p>
             <a:pPr marL="342900" indent="-342900">
@@ -5376,14 +5552,14 @@
               <a:buChar char="•"/>
             </a:pPr>
             <a:r>
-              <a:rPr lang="en-US" sz="850" dirty="0">
+              <a:rPr lang="en-US" sz="900" dirty="0">
                 <a:solidFill>
                   <a:srgbClr val="888899"/>
                 </a:solidFill>
               </a:rPr>
-              <a:t>Raw material costs: lithium prices rose 300% in 2022 before correction</a:t>
-            </a:r>
-            <a:endParaRPr lang="en-US" sz="850" dirty="0"/>
+              <a:t>Lithium prices swung 300% in 2022 — supply chain risk</a:t>
+            </a:r>
+            <a:endParaRPr lang="en-US" sz="900" dirty="0"/>
           </a:p>
           <a:p>
             <a:pPr marL="342900" indent="-342900">
@@ -5391,29 +5567,14 @@
               <a:buChar char="•"/>
             </a:pPr>
             <a:r>
-              <a:rPr lang="en-US" sz="850" dirty="0">
+              <a:rPr lang="en-US" sz="900" dirty="0">
                 <a:solidFill>
                   <a:srgbClr val="888899"/>
                 </a:solidFill>
               </a:rPr>
-              <a:t>Regulatory changes: potential tax credit phase-out risk</a:t>
-            </a:r>
-            <a:endParaRPr lang="en-US" sz="850" dirty="0"/>
-          </a:p>
-          <a:p>
-            <a:pPr marL="342900" indent="-342900">
-              <a:buSzPct val="100000"/>
-              <a:buChar char="•"/>
-            </a:pPr>
-            <a:r>
-              <a:rPr lang="en-US" sz="850" dirty="0">
-                <a:solidFill>
-                  <a:srgbClr val="888899"/>
-                </a:solidFill>
-              </a:rPr>
-              <a:t>Market saturation in early-adopter segments</a:t>
-            </a:r>
-            <a:endParaRPr lang="en-US" sz="850" dirty="0"/>
+              <a:t>Tax credit phase-out could eliminate $7,500 price advantage</a:t>
+            </a:r>
+            <a:endParaRPr lang="en-US" sz="900" dirty="0"/>
           </a:p>
         </p:txBody>
       </p:sp>
@@ -5502,7 +5663,7 @@
                 <a:ea typeface="Arial Black" pitchFamily="34" charset="-122"/>
                 <a:cs typeface="Arial Black" pitchFamily="34" charset="-120"/>
               </a:rPr>
-              <a:t>06</a:t>
+              <a:t>05</a:t>
             </a:r>
             <a:endParaRPr lang="en-US" sz="3200" dirty="0"/>
           </a:p>
@@ -5517,7 +5678,7 @@
         <p:spPr>
           <a:xfrm>
             <a:off x="548640" y="685800"/>
-            <a:ext cx="5486400" cy="457200"/>
+            <a:ext cx="7315200" cy="457200"/>
           </a:xfrm>
           <a:prstGeom prst="rect">
             <a:avLst/>
@@ -5541,7 +5702,7 @@
                 <a:ea typeface="Arial Black" pitchFamily="34" charset="-122"/>
                 <a:cs typeface="Arial Black" pitchFamily="34" charset="-120"/>
               </a:rPr>
-              <a:t>Porter's Five Forces</a:t>
+              <a:t>The Competitive Battlefield</a:t>
             </a:r>
             <a:endParaRPr lang="en-US" sz="2600" dirty="0"/>
           </a:p>
@@ -5555,8 +5716,8 @@
         </p:nvSpPr>
         <p:spPr>
           <a:xfrm>
-            <a:off x="548640" y="1097280"/>
-            <a:ext cx="5486400" cy="274320"/>
+            <a:off x="548640" y="1143000"/>
+            <a:ext cx="8046720" cy="365760"/>
           </a:xfrm>
           <a:prstGeom prst="rect">
             <a:avLst/>
@@ -5572,17 +5733,17 @@
               <a:buNone/>
             </a:pPr>
             <a:r>
-              <a:rPr lang="en-US" sz="1100" dirty="0">
+              <a:rPr lang="en-US" sz="1200" i="1" dirty="0">
                 <a:solidFill>
                   <a:srgbClr val="666677"/>
                 </a:solidFill>
-                <a:latin typeface="Arial" pitchFamily="34" charset="0"/>
-                <a:ea typeface="Arial" pitchFamily="34" charset="-122"/>
-                <a:cs typeface="Arial" pitchFamily="34" charset="-120"/>
-              </a:rPr>
-              <a:t>Micro &amp; Macro Competitive Environment Analysis</a:t>
-            </a:r>
-            <a:endParaRPr lang="en-US" sz="1100" dirty="0"/>
+                <a:latin typeface="Georgia" pitchFamily="34" charset="0"/>
+                <a:ea typeface="Georgia" pitchFamily="34" charset="-122"/>
+                <a:cs typeface="Georgia" pitchFamily="34" charset="-120"/>
+              </a:rPr>
+              <a:t>Tesla built a moat — but competitors are learning to swim. Here's what the competitive landscape really looks like.</a:t>
+            </a:r>
+            <a:endParaRPr lang="en-US" sz="1200" dirty="0"/>
           </a:p>
         </p:txBody>
       </p:sp>
@@ -5601,17 +5762,17 @@
           </p:nvPr>
         </p:nvGraphicFramePr>
         <p:xfrm>
-          <a:off x="548640" y="1417320"/>
-          <a:ext cx="8046720" cy="3474720"/>
+          <a:off x="548640" y="1600200"/>
+          <a:ext cx="8046720" cy="3200400"/>
         </p:xfrm>
         <a:graphic>
           <a:graphicData uri="http://schemas.openxmlformats.org/drawingml/2006/table">
             <a:tbl>
               <a:tblPr/>
               <a:tblGrid>
-                <a:gridCol w="1463040"/>
-                <a:gridCol w="822960"/>
-                <a:gridCol w="5760720"/>
+                <a:gridCol w="1371600"/>
+                <a:gridCol w="731520"/>
+                <a:gridCol w="5943600"/>
               </a:tblGrid>
               <a:tr h="365760">
                 <a:tc>
@@ -5631,7 +5792,7 @@
                           <a:ea typeface="Arial" pitchFamily="34" charset="-122"/>
                           <a:cs typeface="Arial" pitchFamily="34" charset="-120"/>
                         </a:rPr>
-                        <a:t>Force</a:t>
+                        <a:t>Competitive Force</a:t>
                       </a:r>
                       <a:endParaRPr lang="en-US" sz="1000" dirty="0">
                         <a:latin typeface="Arial" charset="0"/>
@@ -5699,7 +5860,7 @@
                           <a:ea typeface="Arial" pitchFamily="34" charset="-122"/>
                           <a:cs typeface="Arial" pitchFamily="34" charset="-120"/>
                         </a:rPr>
-                        <a:t>Impact</a:t>
+                        <a:t>Threat</a:t>
                       </a:r>
                       <a:endParaRPr lang="en-US" sz="1000" dirty="0">
                         <a:latin typeface="Arial" charset="0"/>
@@ -5767,7 +5928,7 @@
                           <a:ea typeface="Arial" pitchFamily="34" charset="-122"/>
                           <a:cs typeface="Arial" pitchFamily="34" charset="-120"/>
                         </a:rPr>
-                        <a:t>Key Factors &amp; Analysis</a:t>
+                        <a:t>What This Means for Tesla</a:t>
                       </a:r>
                       <a:endParaRPr lang="en-US" sz="1000" dirty="0">
                         <a:latin typeface="Arial" charset="0"/>
@@ -5819,7 +5980,7 @@
                   </a:tcPr>
                 </a:tc>
               </a:tr>
-              <a:tr h="621792">
+              <a:tr h="566928">
                 <a:tc>
                   <a:txBody>
                     <a:bodyPr/>
@@ -5837,28 +5998,7 @@
                           <a:ea typeface="Arial" pitchFamily="34" charset="-122"/>
                           <a:cs typeface="Arial" pitchFamily="34" charset="-120"/>
                         </a:rPr>
-                        <a:t>Bargaining Power</a:t>
-                      </a:r>
-                      <a:endParaRPr lang="en-US" sz="900" dirty="0">
-                        <a:latin typeface="Arial" charset="0"/>
-                        <a:ea typeface="Arial" charset="0"/>
-                        <a:cs typeface="Arial" charset="0"/>
-                      </a:endParaRPr>
-                    </a:p>
-                    <a:p>
-                      <a:pPr algn="l" indent="0" marL="0">
-                        <a:buNone/>
-                      </a:pPr>
-                      <a:r>
-                        <a:rPr lang="en-US" sz="900" b="1" dirty="0">
-                          <a:solidFill>
-                            <a:srgbClr val="F0F0F0"/>
-                          </a:solidFill>
-                          <a:latin typeface="Arial" pitchFamily="34" charset="0"/>
-                          <a:ea typeface="Arial" pitchFamily="34" charset="-122"/>
-                          <a:cs typeface="Arial" pitchFamily="34" charset="-120"/>
-                        </a:rPr>
-                        <a:t>of Suppliers</a:t>
+                        <a:t>Supplier Power</a:t>
                       </a:r>
                       <a:endParaRPr lang="en-US" sz="900" dirty="0">
                         <a:latin typeface="Arial" charset="0"/>
@@ -5926,7 +6066,7 @@
                           <a:ea typeface="Arial" pitchFamily="34" charset="-122"/>
                           <a:cs typeface="Arial" pitchFamily="34" charset="-120"/>
                         </a:rPr>
-                        <a:t>Moderate</a:t>
+                        <a:t>MOD</a:t>
                       </a:r>
                       <a:endParaRPr lang="en-US" sz="1000" dirty="0">
                         <a:latin typeface="Arial" charset="0"/>
@@ -5994,7 +6134,7 @@
                           <a:ea typeface="Arial" pitchFamily="34" charset="-122"/>
                           <a:cs typeface="Arial" pitchFamily="34" charset="-120"/>
                         </a:rPr>
-                        <a:t>Limited lithium/cobalt suppliers create dependency. Tesla mitigates via Gigafactory vertical integration and 4680 battery cells. Long-term supply contracts with Panasonic, CATL reduce risk.</a:t>
+                        <a:t>Battery materials are scarce, but Tesla's Gigafactories and 4680 cells reduce dependency on any single supplier</a:t>
                       </a:r>
                       <a:endParaRPr lang="en-US" sz="850" dirty="0">
                         <a:latin typeface="Arial" charset="0"/>
@@ -6046,7 +6186,7 @@
                   </a:tcPr>
                 </a:tc>
               </a:tr>
-              <a:tr h="621792">
+              <a:tr h="566928">
                 <a:tc>
                   <a:txBody>
                     <a:bodyPr/>
@@ -6064,28 +6204,7 @@
                           <a:ea typeface="Arial" pitchFamily="34" charset="-122"/>
                           <a:cs typeface="Arial" pitchFamily="34" charset="-120"/>
                         </a:rPr>
-                        <a:t>Bargaining Power</a:t>
-                      </a:r>
-                      <a:endParaRPr lang="en-US" sz="900" dirty="0">
-                        <a:latin typeface="Arial" charset="0"/>
-                        <a:ea typeface="Arial" charset="0"/>
-                        <a:cs typeface="Arial" charset="0"/>
-                      </a:endParaRPr>
-                    </a:p>
-                    <a:p>
-                      <a:pPr algn="l" indent="0" marL="0">
-                        <a:buNone/>
-                      </a:pPr>
-                      <a:r>
-                        <a:rPr lang="en-US" sz="900" b="1" dirty="0">
-                          <a:solidFill>
-                            <a:srgbClr val="F0F0F0"/>
-                          </a:solidFill>
-                          <a:latin typeface="Arial" pitchFamily="34" charset="0"/>
-                          <a:ea typeface="Arial" pitchFamily="34" charset="-122"/>
-                          <a:cs typeface="Arial" pitchFamily="34" charset="-120"/>
-                        </a:rPr>
-                        <a:t>of Buyers</a:t>
+                        <a:t>Buyer Power</a:t>
                       </a:r>
                       <a:endParaRPr lang="en-US" sz="900" dirty="0">
                         <a:latin typeface="Arial" charset="0"/>
@@ -6153,7 +6272,7 @@
                           <a:ea typeface="Arial" pitchFamily="34" charset="-122"/>
                           <a:cs typeface="Arial" pitchFamily="34" charset="-120"/>
                         </a:rPr>
-                        <a:t>Moderate</a:t>
+                        <a:t>MOD</a:t>
                       </a:r>
                       <a:endParaRPr lang="en-US" sz="1000" dirty="0">
                         <a:latin typeface="Arial" charset="0"/>
@@ -6221,7 +6340,7 @@
                           <a:ea typeface="Arial" pitchFamily="34" charset="-122"/>
                           <a:cs typeface="Arial" pitchFamily="34" charset="-120"/>
                         </a:rPr>
-                        <a:t>Growing EV alternatives (30+ models in US by 2025) increase buyer choice. However, Tesla's brand loyalty (91% satisfaction) and Supercharger lock-in reduce switching propensity.</a:t>
+                        <a:t>30+ competing EVs give buyers choice — but Tesla's 91% satisfaction and Supercharger lock-in keep them loyal</a:t>
                       </a:r>
                       <a:endParaRPr lang="en-US" sz="850" dirty="0">
                         <a:latin typeface="Arial" charset="0"/>
@@ -6273,7 +6392,7 @@
                   </a:tcPr>
                 </a:tc>
               </a:tr>
-              <a:tr h="621792">
+              <a:tr h="566928">
                 <a:tc>
                   <a:txBody>
                     <a:bodyPr/>
@@ -6291,28 +6410,7 @@
                           <a:ea typeface="Arial" pitchFamily="34" charset="-122"/>
                           <a:cs typeface="Arial" pitchFamily="34" charset="-120"/>
                         </a:rPr>
-                        <a:t>Threat of New</a:t>
-                      </a:r>
-                      <a:endParaRPr lang="en-US" sz="900" dirty="0">
-                        <a:latin typeface="Arial" charset="0"/>
-                        <a:ea typeface="Arial" charset="0"/>
-                        <a:cs typeface="Arial" charset="0"/>
-                      </a:endParaRPr>
-                    </a:p>
-                    <a:p>
-                      <a:pPr algn="l" indent="0" marL="0">
-                        <a:buNone/>
-                      </a:pPr>
-                      <a:r>
-                        <a:rPr lang="en-US" sz="900" b="1" dirty="0">
-                          <a:solidFill>
-                            <a:srgbClr val="F0F0F0"/>
-                          </a:solidFill>
-                          <a:latin typeface="Arial" pitchFamily="34" charset="0"/>
-                          <a:ea typeface="Arial" pitchFamily="34" charset="-122"/>
-                          <a:cs typeface="Arial" pitchFamily="34" charset="-120"/>
-                        </a:rPr>
-                        <a:t>Entrants</a:t>
+                        <a:t>New Entrants</a:t>
                       </a:r>
                       <a:endParaRPr lang="en-US" sz="900" dirty="0">
                         <a:latin typeface="Arial" charset="0"/>
@@ -6380,7 +6478,7 @@
                           <a:ea typeface="Arial" pitchFamily="34" charset="-122"/>
                           <a:cs typeface="Arial" pitchFamily="34" charset="-120"/>
                         </a:rPr>
-                        <a:t>Low</a:t>
+                        <a:t>LOW</a:t>
                       </a:r>
                       <a:endParaRPr lang="en-US" sz="1000" dirty="0">
                         <a:latin typeface="Arial" charset="0"/>
@@ -6448,7 +6546,7 @@
                           <a:ea typeface="Arial" pitchFamily="34" charset="-122"/>
                           <a:cs typeface="Arial" pitchFamily="34" charset="-120"/>
                         </a:rPr>
-                        <a:t>Extremely high capital requirements ($5B+ for factory). Regulatory barriers, charging infrastructure costs, and Tesla's first-mover advantage in software/autonomy create strong moat.</a:t>
+                        <a:t>Building an EV company costs $5B+ minimum. Charging infrastructure and software expertise create massive barriers</a:t>
                       </a:r>
                       <a:endParaRPr lang="en-US" sz="850" dirty="0">
                         <a:latin typeface="Arial" charset="0"/>
@@ -6500,32 +6598,11 @@
                   </a:tcPr>
                 </a:tc>
               </a:tr>
-              <a:tr h="621792">
+              <a:tr h="566928">
                 <a:tc>
                   <a:txBody>
                     <a:bodyPr/>
                     <a:lstStyle/>
-                    <a:p>
-                      <a:pPr algn="l" indent="0" marL="0">
-                        <a:buNone/>
-                      </a:pPr>
-                      <a:r>
-                        <a:rPr lang="en-US" sz="900" b="1" dirty="0">
-                          <a:solidFill>
-                            <a:srgbClr val="F0F0F0"/>
-                          </a:solidFill>
-                          <a:latin typeface="Arial" pitchFamily="34" charset="0"/>
-                          <a:ea typeface="Arial" pitchFamily="34" charset="-122"/>
-                          <a:cs typeface="Arial" pitchFamily="34" charset="-120"/>
-                        </a:rPr>
-                        <a:t>Threat of</a:t>
-                      </a:r>
-                      <a:endParaRPr lang="en-US" sz="900" dirty="0">
-                        <a:latin typeface="Arial" charset="0"/>
-                        <a:ea typeface="Arial" charset="0"/>
-                        <a:cs typeface="Arial" charset="0"/>
-                      </a:endParaRPr>
-                    </a:p>
                     <a:p>
                       <a:pPr algn="l" indent="0" marL="0">
                         <a:buNone/>
@@ -6607,7 +6684,7 @@
                           <a:ea typeface="Arial" pitchFamily="34" charset="-122"/>
                           <a:cs typeface="Arial" pitchFamily="34" charset="-120"/>
                         </a:rPr>
-                        <a:t>Moderate</a:t>
+                        <a:t>MOD</a:t>
                       </a:r>
                       <a:endParaRPr lang="en-US" sz="1000" dirty="0">
                         <a:latin typeface="Arial" charset="0"/>
@@ -6675,7 +6752,7 @@
                           <a:ea typeface="Arial" pitchFamily="34" charset="-122"/>
                           <a:cs typeface="Arial" pitchFamily="34" charset="-120"/>
                         </a:rPr>
-                        <a:t>Hybrid vehicles (Toyota RAV4 Prime), hydrogen fuel cells, and improved public transit offer alternatives. However, declining battery costs and EV policy support reduce substitution threat.</a:t>
+                        <a:t>Hybrids and hydrogen exist, but declining battery costs and government incentives are making EVs the default choice</a:t>
                       </a:r>
                       <a:endParaRPr lang="en-US" sz="850" dirty="0">
                         <a:latin typeface="Arial" charset="0"/>
@@ -6727,7 +6804,7 @@
                   </a:tcPr>
                 </a:tc>
               </a:tr>
-              <a:tr h="621792">
+              <a:tr h="566928">
                 <a:tc>
                   <a:txBody>
                     <a:bodyPr/>
@@ -6745,28 +6822,7 @@
                           <a:ea typeface="Arial" pitchFamily="34" charset="-122"/>
                           <a:cs typeface="Arial" pitchFamily="34" charset="-120"/>
                         </a:rPr>
-                        <a:t>Industry</a:t>
-                      </a:r>
-                      <a:endParaRPr lang="en-US" sz="900" dirty="0">
-                        <a:latin typeface="Arial" charset="0"/>
-                        <a:ea typeface="Arial" charset="0"/>
-                        <a:cs typeface="Arial" charset="0"/>
-                      </a:endParaRPr>
-                    </a:p>
-                    <a:p>
-                      <a:pPr algn="l" indent="0" marL="0">
-                        <a:buNone/>
-                      </a:pPr>
-                      <a:r>
-                        <a:rPr lang="en-US" sz="900" b="1" dirty="0">
-                          <a:solidFill>
-                            <a:srgbClr val="F0F0F0"/>
-                          </a:solidFill>
-                          <a:latin typeface="Arial" pitchFamily="34" charset="0"/>
-                          <a:ea typeface="Arial" pitchFamily="34" charset="-122"/>
-                          <a:cs typeface="Arial" pitchFamily="34" charset="-120"/>
-                        </a:rPr>
-                        <a:t>Rivalry</a:t>
+                        <a:t>Industry Rivalry</a:t>
                       </a:r>
                       <a:endParaRPr lang="en-US" sz="900" dirty="0">
                         <a:latin typeface="Arial" charset="0"/>
@@ -6834,7 +6890,7 @@
                           <a:ea typeface="Arial" pitchFamily="34" charset="-122"/>
                           <a:cs typeface="Arial" pitchFamily="34" charset="-120"/>
                         </a:rPr>
-                        <a:t>High</a:t>
+                        <a:t>HIGH</a:t>
                       </a:r>
                       <a:endParaRPr lang="en-US" sz="1000" dirty="0">
                         <a:latin typeface="Arial" charset="0"/>
@@ -6902,7 +6958,7 @@
                           <a:ea typeface="Arial" pitchFamily="34" charset="-122"/>
                           <a:cs typeface="Arial" pitchFamily="34" charset="-120"/>
                         </a:rPr>
-                        <a:t>Intense: BYD surpassed Tesla in global EV sales (Q4 2023). Ford, GM, Hyundai, VW investing $500B+ combined. Price wars in China compressing margins industry-wide.</a:t>
+                        <a:t>This is the real threat. BYD, Ford, GM, Hyundai, VW are spending $500B+ combined to catch Tesla</a:t>
                       </a:r>
                       <a:endParaRPr lang="en-US" sz="850" dirty="0">
                         <a:latin typeface="Arial" charset="0"/>
@@ -6958,6 +7014,45 @@
           </a:graphicData>
         </a:graphic>
       </p:graphicFrame>
+      <p:sp>
+        <p:nvSpPr>
+          <p:cNvPr id="7" name="Text 4"/>
+          <p:cNvSpPr/>
+          <p:nvPr/>
+        </p:nvSpPr>
+        <p:spPr>
+          <a:xfrm>
+            <a:off x="548640" y="4572000"/>
+            <a:ext cx="8046720" cy="320040"/>
+          </a:xfrm>
+          <a:prstGeom prst="rect">
+            <a:avLst/>
+          </a:prstGeom>
+          <a:noFill/>
+          <a:ln/>
+        </p:spPr>
+        <p:txBody>
+          <a:bodyPr wrap="square" lIns="0" tIns="0" rIns="0" bIns="0" rtlCol="0" anchor="ctr"/>
+          <a:lstStyle/>
+          <a:p>
+            <a:pPr indent="0" marL="0">
+              <a:buNone/>
+            </a:pPr>
+            <a:r>
+              <a:rPr lang="en-US" sz="1000" i="1" dirty="0">
+                <a:solidFill>
+                  <a:srgbClr val="666677"/>
+                </a:solidFill>
+                <a:latin typeface="Georgia" pitchFamily="34" charset="0"/>
+                <a:ea typeface="Georgia" pitchFamily="34" charset="-122"/>
+                <a:cs typeface="Georgia" pitchFamily="34" charset="-120"/>
+              </a:rPr>
+              <a:t>The verdict? Tesla's moat is real — but it's eroding. Speed of execution will determine the next chapter.</a:t>
+            </a:r>
+            <a:endParaRPr lang="en-US" sz="1000" dirty="0"/>
+          </a:p>
+        </p:txBody>
+      </p:sp>
     </p:spTree>
   </p:cSld>
   <p:clrMapOvr>
@@ -7043,7 +7138,7 @@
                 <a:ea typeface="Arial Black" pitchFamily="34" charset="-122"/>
                 <a:cs typeface="Arial Black" pitchFamily="34" charset="-120"/>
               </a:rPr>
-              <a:t>07</a:t>
+              <a:t>06</a:t>
             </a:r>
             <a:endParaRPr lang="en-US" sz="3200" dirty="0"/>
           </a:p>
@@ -7058,7 +7153,7 @@
         <p:spPr>
           <a:xfrm>
             <a:off x="548640" y="685800"/>
-            <a:ext cx="5486400" cy="457200"/>
+            <a:ext cx="7315200" cy="457200"/>
           </a:xfrm>
           <a:prstGeom prst="rect">
             <a:avLst/>
@@ -7082,7 +7177,7 @@
                 <a:ea typeface="Arial Black" pitchFamily="34" charset="-122"/>
                 <a:cs typeface="Arial Black" pitchFamily="34" charset="-120"/>
               </a:rPr>
-              <a:t>STP Analysis</a:t>
+              <a:t>Who Buys a Tesla — and Why</a:t>
             </a:r>
             <a:endParaRPr lang="en-US" sz="2600" dirty="0"/>
           </a:p>
@@ -7090,14 +7185,53 @@
       </p:sp>
       <p:sp>
         <p:nvSpPr>
-          <p:cNvPr id="5" name="Shape 3"/>
-          <p:cNvSpPr/>
-          <p:nvPr/>
-        </p:nvSpPr>
-        <p:spPr>
-          <a:xfrm>
-            <a:off x="548640" y="1280160"/>
-            <a:ext cx="2560320" cy="3520440"/>
+          <p:cNvPr id="5" name="Text 3"/>
+          <p:cNvSpPr/>
+          <p:nvPr/>
+        </p:nvSpPr>
+        <p:spPr>
+          <a:xfrm>
+            <a:off x="548640" y="1143000"/>
+            <a:ext cx="8046720" cy="365760"/>
+          </a:xfrm>
+          <a:prstGeom prst="rect">
+            <a:avLst/>
+          </a:prstGeom>
+          <a:noFill/>
+          <a:ln/>
+        </p:spPr>
+        <p:txBody>
+          <a:bodyPr wrap="square" lIns="0" tIns="0" rIns="0" bIns="0" rtlCol="0" anchor="ctr"/>
+          <a:lstStyle/>
+          <a:p>
+            <a:pPr indent="0" marL="0">
+              <a:buNone/>
+            </a:pPr>
+            <a:r>
+              <a:rPr lang="en-US" sz="1200" i="1" dirty="0">
+                <a:solidFill>
+                  <a:srgbClr val="666677"/>
+                </a:solidFill>
+                <a:latin typeface="Georgia" pitchFamily="34" charset="0"/>
+                <a:ea typeface="Georgia" pitchFamily="34" charset="-122"/>
+                <a:cs typeface="Georgia" pitchFamily="34" charset="-120"/>
+              </a:rPr>
+              <a:t>Tesla doesn't sell to everyone. They sell to people who want to feel like they're part of the future.</a:t>
+            </a:r>
+            <a:endParaRPr lang="en-US" sz="1200" dirty="0"/>
+          </a:p>
+        </p:txBody>
+      </p:sp>
+      <p:sp>
+        <p:nvSpPr>
+          <p:cNvPr id="6" name="Shape 4"/>
+          <p:cNvSpPr/>
+          <p:nvPr/>
+        </p:nvSpPr>
+        <p:spPr>
+          <a:xfrm>
+            <a:off x="548640" y="1600200"/>
+            <a:ext cx="2560320" cy="3200400"/>
           </a:xfrm>
           <a:prstGeom prst="rect">
             <a:avLst/>
@@ -7117,13 +7251,13 @@
       </p:sp>
       <p:sp>
         <p:nvSpPr>
-          <p:cNvPr id="6" name="Shape 4"/>
-          <p:cNvSpPr/>
-          <p:nvPr/>
-        </p:nvSpPr>
-        <p:spPr>
-          <a:xfrm>
-            <a:off x="548640" y="1280160"/>
+          <p:cNvPr id="7" name="Shape 5"/>
+          <p:cNvSpPr/>
+          <p:nvPr/>
+        </p:nvSpPr>
+        <p:spPr>
+          <a:xfrm>
+            <a:off x="548640" y="1600200"/>
             <a:ext cx="2560320" cy="36576"/>
           </a:xfrm>
           <a:prstGeom prst="rect">
@@ -7137,7 +7271,7 @@
       </p:sp>
       <p:pic>
         <p:nvPicPr>
-          <p:cNvPr id="7" name="Image 0" descr="preencoded.png">    </p:cNvPr>
+          <p:cNvPr id="8" name="Image 0" descr="preencoded.png">    </p:cNvPr>
           <p:cNvPicPr>
             <a:picLocks noChangeAspect="1"/>
           </p:cNvPicPr>
@@ -7151,7 +7285,7 @@
         </p:blipFill>
         <p:spPr>
           <a:xfrm>
-            <a:off x="685800" y="1463040"/>
+            <a:off x="685800" y="1783080"/>
             <a:ext cx="256032" cy="256032"/>
           </a:xfrm>
           <a:prstGeom prst="rect">
@@ -7161,13 +7295,13 @@
       </p:pic>
       <p:sp>
         <p:nvSpPr>
-          <p:cNvPr id="8" name="Text 5"/>
-          <p:cNvSpPr/>
-          <p:nvPr/>
-        </p:nvSpPr>
-        <p:spPr>
-          <a:xfrm>
-            <a:off x="1005840" y="1463040"/>
+          <p:cNvPr id="9" name="Text 6"/>
+          <p:cNvSpPr/>
+          <p:nvPr/>
+        </p:nvSpPr>
+        <p:spPr>
+          <a:xfrm>
+            <a:off x="1005840" y="1783080"/>
             <a:ext cx="1828800" cy="256032"/>
           </a:xfrm>
           <a:prstGeom prst="rect">
@@ -7192,7 +7326,7 @@
                 <a:ea typeface="Arial Black" pitchFamily="34" charset="-122"/>
                 <a:cs typeface="Arial Black" pitchFamily="34" charset="-120"/>
               </a:rPr>
-              <a:t>SEGMENTATION</a:t>
+              <a:t>WHO THEY ARE</a:t>
             </a:r>
             <a:endParaRPr lang="en-US" sz="1100" dirty="0"/>
           </a:p>
@@ -7200,14 +7334,14 @@
       </p:sp>
       <p:sp>
         <p:nvSpPr>
-          <p:cNvPr id="9" name="Text 6"/>
-          <p:cNvSpPr/>
-          <p:nvPr/>
-        </p:nvSpPr>
-        <p:spPr>
-          <a:xfrm>
-            <a:off x="685800" y="1874520"/>
-            <a:ext cx="2286000" cy="2743200"/>
+          <p:cNvPr id="10" name="Text 7"/>
+          <p:cNvSpPr/>
+          <p:nvPr/>
+        </p:nvSpPr>
+        <p:spPr>
+          <a:xfrm>
+            <a:off x="685800" y="2194560"/>
+            <a:ext cx="2286000" cy="2377440"/>
           </a:xfrm>
           <a:prstGeom prst="rect">
             <a:avLst/>
@@ -7224,14 +7358,14 @@
               <a:buChar char="•"/>
             </a:pPr>
             <a:r>
-              <a:rPr lang="en-US" sz="850" dirty="0">
+              <a:rPr lang="en-US" sz="900" dirty="0">
                 <a:solidFill>
                   <a:srgbClr val="888899"/>
                 </a:solidFill>
               </a:rPr>
-              <a:t>Demographic: Age 25-45, HHI $75K+, 72% male, college-educated urban professionals</a:t>
-            </a:r>
-            <a:endParaRPr lang="en-US" sz="850" dirty="0"/>
+              <a:t>Age 25-45, household income $75K+, 72% male</a:t>
+            </a:r>
+            <a:endParaRPr lang="en-US" sz="900" dirty="0"/>
           </a:p>
           <a:p>
             <a:pPr marL="342900" indent="-342900">
@@ -7239,14 +7373,14 @@
               <a:buChar char="•"/>
             </a:pPr>
             <a:r>
-              <a:rPr lang="en-US" sz="850" dirty="0">
+              <a:rPr lang="en-US" sz="900" dirty="0">
                 <a:solidFill>
                   <a:srgbClr val="888899"/>
                 </a:solidFill>
               </a:rPr>
-              <a:t>Psychographic: Tech-forward lifestyle, environmentally conscious values, status-seeking</a:t>
-            </a:r>
-            <a:endParaRPr lang="en-US" sz="850" dirty="0"/>
+              <a:t>College-educated, urban professionals</a:t>
+            </a:r>
+            <a:endParaRPr lang="en-US" sz="900" dirty="0"/>
           </a:p>
           <a:p>
             <a:pPr marL="342900" indent="-342900">
@@ -7254,14 +7388,14 @@
               <a:buChar char="•"/>
             </a:pPr>
             <a:r>
-              <a:rPr lang="en-US" sz="850" dirty="0">
+              <a:rPr lang="en-US" sz="900" dirty="0">
                 <a:solidFill>
                   <a:srgbClr val="888899"/>
                 </a:solidFill>
               </a:rPr>
-              <a:t>Behavioral: Early adopters (Rogers diffusion curve), heavy digital users, 3.2x more likely to own smart home devices</a:t>
-            </a:r>
-            <a:endParaRPr lang="en-US" sz="850" dirty="0"/>
+              <a:t>3.2x more likely to own smart home devices</a:t>
+            </a:r>
+            <a:endParaRPr lang="en-US" sz="900" dirty="0"/>
           </a:p>
           <a:p>
             <a:pPr marL="342900" indent="-342900">
@@ -7269,27 +7403,27 @@
               <a:buChar char="•"/>
             </a:pPr>
             <a:r>
-              <a:rPr lang="en-US" sz="850" dirty="0">
+              <a:rPr lang="en-US" sz="900" dirty="0">
                 <a:solidFill>
                   <a:srgbClr val="888899"/>
                 </a:solidFill>
               </a:rPr>
-              <a:t>Geographic: Concentrated in CA (28%), TX, FL, NY, WA — top 5 states = 52% of sales</a:t>
-            </a:r>
-            <a:endParaRPr lang="en-US" sz="850" dirty="0"/>
-          </a:p>
-        </p:txBody>
-      </p:sp>
-      <p:sp>
-        <p:nvSpPr>
-          <p:cNvPr id="10" name="Shape 7"/>
-          <p:cNvSpPr/>
-          <p:nvPr/>
-        </p:nvSpPr>
-        <p:spPr>
-          <a:xfrm>
-            <a:off x="3383280" y="1280160"/>
-            <a:ext cx="2560320" cy="3520440"/>
+              <a:t>Top 5 states = 52% of sales (CA, TX, FL, NY, WA)</a:t>
+            </a:r>
+            <a:endParaRPr lang="en-US" sz="900" dirty="0"/>
+          </a:p>
+        </p:txBody>
+      </p:sp>
+      <p:sp>
+        <p:nvSpPr>
+          <p:cNvPr id="11" name="Shape 8"/>
+          <p:cNvSpPr/>
+          <p:nvPr/>
+        </p:nvSpPr>
+        <p:spPr>
+          <a:xfrm>
+            <a:off x="3383280" y="1600200"/>
+            <a:ext cx="2560320" cy="3200400"/>
           </a:xfrm>
           <a:prstGeom prst="rect">
             <a:avLst/>
@@ -7309,13 +7443,13 @@
       </p:sp>
       <p:sp>
         <p:nvSpPr>
-          <p:cNvPr id="11" name="Shape 8"/>
-          <p:cNvSpPr/>
-          <p:nvPr/>
-        </p:nvSpPr>
-        <p:spPr>
-          <a:xfrm>
-            <a:off x="3383280" y="1280160"/>
+          <p:cNvPr id="12" name="Shape 9"/>
+          <p:cNvSpPr/>
+          <p:nvPr/>
+        </p:nvSpPr>
+        <p:spPr>
+          <a:xfrm>
+            <a:off x="3383280" y="1600200"/>
             <a:ext cx="2560320" cy="36576"/>
           </a:xfrm>
           <a:prstGeom prst="rect">
@@ -7329,7 +7463,7 @@
       </p:sp>
       <p:pic>
         <p:nvPicPr>
-          <p:cNvPr id="12" name="Image 1" descr="preencoded.png">    </p:cNvPr>
+          <p:cNvPr id="13" name="Image 1" descr="preencoded.png">    </p:cNvPr>
           <p:cNvPicPr>
             <a:picLocks noChangeAspect="1"/>
           </p:cNvPicPr>
@@ -7343,7 +7477,7 @@
         </p:blipFill>
         <p:spPr>
           <a:xfrm>
-            <a:off x="3520440" y="1463040"/>
+            <a:off x="3520440" y="1783080"/>
             <a:ext cx="256032" cy="256032"/>
           </a:xfrm>
           <a:prstGeom prst="rect">
@@ -7353,13 +7487,13 @@
       </p:pic>
       <p:sp>
         <p:nvSpPr>
-          <p:cNvPr id="13" name="Text 9"/>
-          <p:cNvSpPr/>
-          <p:nvPr/>
-        </p:nvSpPr>
-        <p:spPr>
-          <a:xfrm>
-            <a:off x="3840480" y="1463040"/>
+          <p:cNvPr id="14" name="Text 10"/>
+          <p:cNvSpPr/>
+          <p:nvPr/>
+        </p:nvSpPr>
+        <p:spPr>
+          <a:xfrm>
+            <a:off x="3840480" y="1783080"/>
             <a:ext cx="1828800" cy="256032"/>
           </a:xfrm>
           <a:prstGeom prst="rect">
@@ -7384,7 +7518,7 @@
                 <a:ea typeface="Arial Black" pitchFamily="34" charset="-122"/>
                 <a:cs typeface="Arial Black" pitchFamily="34" charset="-120"/>
               </a:rPr>
-              <a:t>TARGETING</a:t>
+              <a:t>WHAT DRIVES THEM</a:t>
             </a:r>
             <a:endParaRPr lang="en-US" sz="1100" dirty="0"/>
           </a:p>
@@ -7392,14 +7526,14 @@
       </p:sp>
       <p:sp>
         <p:nvSpPr>
-          <p:cNvPr id="14" name="Text 10"/>
-          <p:cNvSpPr/>
-          <p:nvPr/>
-        </p:nvSpPr>
-        <p:spPr>
-          <a:xfrm>
-            <a:off x="3520440" y="1874520"/>
-            <a:ext cx="2286000" cy="2743200"/>
+          <p:cNvPr id="15" name="Text 11"/>
+          <p:cNvSpPr/>
+          <p:nvPr/>
+        </p:nvSpPr>
+        <p:spPr>
+          <a:xfrm>
+            <a:off x="3520440" y="2194560"/>
+            <a:ext cx="2286000" cy="2377440"/>
           </a:xfrm>
           <a:prstGeom prst="rect">
             <a:avLst/>
@@ -7416,14 +7550,14 @@
               <a:buChar char="•"/>
             </a:pPr>
             <a:r>
-              <a:rPr lang="en-US" sz="850" dirty="0">
+              <a:rPr lang="en-US" sz="900" dirty="0">
                 <a:solidFill>
                   <a:srgbClr val="888899"/>
                 </a:solidFill>
               </a:rPr>
-              <a:t>Primary: Urban tech professionals, 28-40, $100K+ income, Silicon Valley/Austin/NYC archetype</a:t>
-            </a:r>
-            <a:endParaRPr lang="en-US" sz="850" dirty="0"/>
+              <a:t>Tech-forward: they buy innovation, not transportation</a:t>
+            </a:r>
+            <a:endParaRPr lang="en-US" sz="900" dirty="0"/>
           </a:p>
           <a:p>
             <a:pPr marL="342900" indent="-342900">
@@ -7431,14 +7565,14 @@
               <a:buChar char="•"/>
             </a:pPr>
             <a:r>
-              <a:rPr lang="en-US" sz="850" dirty="0">
+              <a:rPr lang="en-US" sz="900" dirty="0">
                 <a:solidFill>
                   <a:srgbClr val="888899"/>
                 </a:solidFill>
               </a:rPr>
-              <a:t>Secondary: Eco-conscious families, dual-income, suburban, prioritize safety + sustainability</a:t>
-            </a:r>
-            <a:endParaRPr lang="en-US" sz="850" dirty="0"/>
+              <a:t>Eco-conscious: sustainability is identity, not feature</a:t>
+            </a:r>
+            <a:endParaRPr lang="en-US" sz="900" dirty="0"/>
           </a:p>
           <a:p>
             <a:pPr marL="342900" indent="-342900">
@@ -7446,14 +7580,14 @@
               <a:buChar char="•"/>
             </a:pPr>
             <a:r>
-              <a:rPr lang="en-US" sz="850" dirty="0">
+              <a:rPr lang="en-US" sz="900" dirty="0">
                 <a:solidFill>
                   <a:srgbClr val="888899"/>
                 </a:solidFill>
               </a:rPr>
-              <a:t>Tertiary: Fleet operators (Uber/Lyft drivers, corporate fleets targeting ESG goals)</a:t>
-            </a:r>
-            <a:endParaRPr lang="en-US" sz="850" dirty="0"/>
+              <a:t>Status-seeking: Tesla is a lifestyle statement</a:t>
+            </a:r>
+            <a:endParaRPr lang="en-US" sz="900" dirty="0"/>
           </a:p>
           <a:p>
             <a:pPr marL="342900" indent="-342900">
@@ -7461,27 +7595,27 @@
               <a:buChar char="•"/>
             </a:pPr>
             <a:r>
-              <a:rPr lang="en-US" sz="850" dirty="0">
+              <a:rPr lang="en-US" sz="900" dirty="0">
                 <a:solidFill>
                   <a:srgbClr val="888899"/>
                 </a:solidFill>
               </a:rPr>
-              <a:t>Differentiated targeting: Model 3 Standard for value-seekers; Performance for enthusiasts</a:t>
-            </a:r>
-            <a:endParaRPr lang="en-US" sz="850" dirty="0"/>
-          </a:p>
-        </p:txBody>
-      </p:sp>
-      <p:sp>
-        <p:nvSpPr>
-          <p:cNvPr id="15" name="Shape 11"/>
-          <p:cNvSpPr/>
-          <p:nvPr/>
-        </p:nvSpPr>
-        <p:spPr>
-          <a:xfrm>
-            <a:off x="6217920" y="1280160"/>
-            <a:ext cx="2560320" cy="3520440"/>
+              <a:t>Early adopters on the Rogers diffusion curve</a:t>
+            </a:r>
+            <a:endParaRPr lang="en-US" sz="900" dirty="0"/>
+          </a:p>
+        </p:txBody>
+      </p:sp>
+      <p:sp>
+        <p:nvSpPr>
+          <p:cNvPr id="16" name="Shape 12"/>
+          <p:cNvSpPr/>
+          <p:nvPr/>
+        </p:nvSpPr>
+        <p:spPr>
+          <a:xfrm>
+            <a:off x="6217920" y="1600200"/>
+            <a:ext cx="2560320" cy="3200400"/>
           </a:xfrm>
           <a:prstGeom prst="rect">
             <a:avLst/>
@@ -7501,13 +7635,13 @@
       </p:sp>
       <p:sp>
         <p:nvSpPr>
-          <p:cNvPr id="16" name="Shape 12"/>
-          <p:cNvSpPr/>
-          <p:nvPr/>
-        </p:nvSpPr>
-        <p:spPr>
-          <a:xfrm>
-            <a:off x="6217920" y="1280160"/>
+          <p:cNvPr id="17" name="Shape 13"/>
+          <p:cNvSpPr/>
+          <p:nvPr/>
+        </p:nvSpPr>
+        <p:spPr>
+          <a:xfrm>
+            <a:off x="6217920" y="1600200"/>
             <a:ext cx="2560320" cy="36576"/>
           </a:xfrm>
           <a:prstGeom prst="rect">
@@ -7521,7 +7655,7 @@
       </p:sp>
       <p:pic>
         <p:nvPicPr>
-          <p:cNvPr id="17" name="Image 2" descr="preencoded.png">    </p:cNvPr>
+          <p:cNvPr id="18" name="Image 2" descr="preencoded.png">    </p:cNvPr>
           <p:cNvPicPr>
             <a:picLocks noChangeAspect="1"/>
           </p:cNvPicPr>
@@ -7535,7 +7669,7 @@
         </p:blipFill>
         <p:spPr>
           <a:xfrm>
-            <a:off x="6355080" y="1463040"/>
+            <a:off x="6355080" y="1783080"/>
             <a:ext cx="256032" cy="256032"/>
           </a:xfrm>
           <a:prstGeom prst="rect">
@@ -7545,13 +7679,13 @@
       </p:pic>
       <p:sp>
         <p:nvSpPr>
-          <p:cNvPr id="18" name="Text 13"/>
-          <p:cNvSpPr/>
-          <p:nvPr/>
-        </p:nvSpPr>
-        <p:spPr>
-          <a:xfrm>
-            <a:off x="6675120" y="1463040"/>
+          <p:cNvPr id="19" name="Text 14"/>
+          <p:cNvSpPr/>
+          <p:nvPr/>
+        </p:nvSpPr>
+        <p:spPr>
+          <a:xfrm>
+            <a:off x="6675120" y="1783080"/>
             <a:ext cx="1828800" cy="256032"/>
           </a:xfrm>
           <a:prstGeom prst="rect">
@@ -7576,7 +7710,7 @@
                 <a:ea typeface="Arial Black" pitchFamily="34" charset="-122"/>
                 <a:cs typeface="Arial Black" pitchFamily="34" charset="-120"/>
               </a:rPr>
-              <a:t>POSITIONING</a:t>
+              <a:t>WHERE TESLA POSITIONS</a:t>
             </a:r>
             <a:endParaRPr lang="en-US" sz="1100" dirty="0"/>
           </a:p>
@@ -7584,14 +7718,14 @@
       </p:sp>
       <p:sp>
         <p:nvSpPr>
-          <p:cNvPr id="19" name="Text 14"/>
-          <p:cNvSpPr/>
-          <p:nvPr/>
-        </p:nvSpPr>
-        <p:spPr>
-          <a:xfrm>
-            <a:off x="6355080" y="1874520"/>
-            <a:ext cx="2286000" cy="2743200"/>
+          <p:cNvPr id="20" name="Text 15"/>
+          <p:cNvSpPr/>
+          <p:nvPr/>
+        </p:nvSpPr>
+        <p:spPr>
+          <a:xfrm>
+            <a:off x="6355080" y="2194560"/>
+            <a:ext cx="2286000" cy="2377440"/>
           </a:xfrm>
           <a:prstGeom prst="rect">
             <a:avLst/>
@@ -7608,14 +7742,14 @@
               <a:buChar char="•"/>
             </a:pPr>
             <a:r>
-              <a:rPr lang="en-US" sz="850" dirty="0">
+              <a:rPr lang="en-US" sz="900" dirty="0">
                 <a:solidFill>
                   <a:srgbClr val="888899"/>
                 </a:solidFill>
               </a:rPr>
-              <a:t>Innovation leader at accessible price — premium tech brand, not just automaker</a:t>
-            </a:r>
-            <a:endParaRPr lang="en-US" sz="850" dirty="0"/>
+              <a:t>Intersection of HIGH innovation + MID price</a:t>
+            </a:r>
+            <a:endParaRPr lang="en-US" sz="900" dirty="0"/>
           </a:p>
           <a:p>
             <a:pPr marL="342900" indent="-342900">
@@ -7623,14 +7757,14 @@
               <a:buChar char="•"/>
             </a:pPr>
             <a:r>
-              <a:rPr lang="en-US" sz="850" dirty="0">
+              <a:rPr lang="en-US" sz="900" dirty="0">
                 <a:solidFill>
                   <a:srgbClr val="888899"/>
                 </a:solidFill>
               </a:rPr>
-              <a:t>Positioned at intersection of high innovation + mid-price vs competitors (positioning map)</a:t>
-            </a:r>
-            <a:endParaRPr lang="en-US" sz="850" dirty="0"/>
+              <a:t>Premium tech brand — not 'just another automaker'</a:t>
+            </a:r>
+            <a:endParaRPr lang="en-US" sz="900" dirty="0"/>
           </a:p>
           <a:p>
             <a:pPr marL="342900" indent="-342900">
@@ -7638,14 +7772,14 @@
               <a:buChar char="•"/>
             </a:pPr>
             <a:r>
-              <a:rPr lang="en-US" sz="850" dirty="0">
+              <a:rPr lang="en-US" sz="900" dirty="0">
                 <a:solidFill>
                   <a:srgbClr val="888899"/>
                 </a:solidFill>
               </a:rPr>
-              <a:t>Brand mantra: 'The future of driving' — sustainability as identity, not feature</a:t>
-            </a:r>
-            <a:endParaRPr lang="en-US" sz="850" dirty="0"/>
+              <a:t>Only EV with integrated ecosystem (car + energy + charging)</a:t>
+            </a:r>
+            <a:endParaRPr lang="en-US" sz="900" dirty="0"/>
           </a:p>
           <a:p>
             <a:pPr marL="342900" indent="-342900">
@@ -7653,14 +7787,14 @@
               <a:buChar char="•"/>
             </a:pPr>
             <a:r>
-              <a:rPr lang="en-US" sz="850" dirty="0">
+              <a:rPr lang="en-US" sz="900" dirty="0">
                 <a:solidFill>
                   <a:srgbClr val="888899"/>
                 </a:solidFill>
               </a:rPr>
-              <a:t>Competitive edge: only EV brand with integrated ecosystem (car + energy + charging + insurance)</a:t>
-            </a:r>
-            <a:endParaRPr lang="en-US" sz="850" dirty="0"/>
+              <a:t>Primary: Urban tech pros / Secondary: Eco families</a:t>
+            </a:r>
+            <a:endParaRPr lang="en-US" sz="900" dirty="0"/>
           </a:p>
         </p:txBody>
       </p:sp>
@@ -7749,7 +7883,7 @@
                 <a:ea typeface="Arial Black" pitchFamily="34" charset="-122"/>
                 <a:cs typeface="Arial Black" pitchFamily="34" charset="-120"/>
               </a:rPr>
-              <a:t>08</a:t>
+              <a:t>07</a:t>
             </a:r>
             <a:endParaRPr lang="en-US" sz="3200" dirty="0"/>
           </a:p>
@@ -7788,7 +7922,7 @@
                 <a:ea typeface="Arial Black" pitchFamily="34" charset="-122"/>
                 <a:cs typeface="Arial Black" pitchFamily="34" charset="-120"/>
               </a:rPr>
-              <a:t>Marketing Mix — 4Ps Strategy</a:t>
+              <a:t>The 4P Playbook</a:t>
             </a:r>
             <a:endParaRPr lang="en-US" sz="2600" dirty="0"/>
           </a:p>
@@ -7796,14 +7930,53 @@
       </p:sp>
       <p:sp>
         <p:nvSpPr>
-          <p:cNvPr id="5" name="Shape 3"/>
-          <p:cNvSpPr/>
-          <p:nvPr/>
-        </p:nvSpPr>
-        <p:spPr>
-          <a:xfrm>
-            <a:off x="548640" y="1280160"/>
-            <a:ext cx="3931920" cy="1691640"/>
+          <p:cNvPr id="5" name="Text 3"/>
+          <p:cNvSpPr/>
+          <p:nvPr/>
+        </p:nvSpPr>
+        <p:spPr>
+          <a:xfrm>
+            <a:off x="548640" y="1143000"/>
+            <a:ext cx="8046720" cy="365760"/>
+          </a:xfrm>
+          <a:prstGeom prst="rect">
+            <a:avLst/>
+          </a:prstGeom>
+          <a:noFill/>
+          <a:ln/>
+        </p:spPr>
+        <p:txBody>
+          <a:bodyPr wrap="square" lIns="0" tIns="0" rIns="0" bIns="0" rtlCol="0" anchor="ctr"/>
+          <a:lstStyle/>
+          <a:p>
+            <a:pPr indent="0" marL="0">
+              <a:buNone/>
+            </a:pPr>
+            <a:r>
+              <a:rPr lang="en-US" sz="1200" i="1" dirty="0">
+                <a:solidFill>
+                  <a:srgbClr val="666677"/>
+                </a:solidFill>
+                <a:latin typeface="Georgia" pitchFamily="34" charset="0"/>
+                <a:ea typeface="Georgia" pitchFamily="34" charset="-122"/>
+                <a:cs typeface="Georgia" pitchFamily="34" charset="-120"/>
+              </a:rPr>
+              <a:t>Most companies optimize their marketing mix. Tesla reinvented it — every P breaks an industry convention.</a:t>
+            </a:r>
+            <a:endParaRPr lang="en-US" sz="1200" dirty="0"/>
+          </a:p>
+        </p:txBody>
+      </p:sp>
+      <p:sp>
+        <p:nvSpPr>
+          <p:cNvPr id="6" name="Shape 4"/>
+          <p:cNvSpPr/>
+          <p:nvPr/>
+        </p:nvSpPr>
+        <p:spPr>
+          <a:xfrm>
+            <a:off x="548640" y="1600200"/>
+            <a:ext cx="3931920" cy="1463040"/>
           </a:xfrm>
           <a:prstGeom prst="rect">
             <a:avLst/>
@@ -7823,13 +7996,13 @@
       </p:sp>
       <p:sp>
         <p:nvSpPr>
-          <p:cNvPr id="6" name="Shape 4"/>
-          <p:cNvSpPr/>
-          <p:nvPr/>
-        </p:nvSpPr>
-        <p:spPr>
-          <a:xfrm>
-            <a:off x="548640" y="1280160"/>
+          <p:cNvPr id="7" name="Shape 5"/>
+          <p:cNvSpPr/>
+          <p:nvPr/>
+        </p:nvSpPr>
+        <p:spPr>
+          <a:xfrm>
+            <a:off x="548640" y="1600200"/>
             <a:ext cx="3931920" cy="36576"/>
           </a:xfrm>
           <a:prstGeom prst="rect">
@@ -7843,7 +8016,7 @@
       </p:sp>
       <p:pic>
         <p:nvPicPr>
-          <p:cNvPr id="7" name="Image 0" descr="preencoded.png">    </p:cNvPr>
+          <p:cNvPr id="8" name="Image 0" descr="preencoded.png">    </p:cNvPr>
           <p:cNvPicPr>
             <a:picLocks noChangeAspect="1"/>
           </p:cNvPicPr>
@@ -7857,8 +8030,8 @@
         </p:blipFill>
         <p:spPr>
           <a:xfrm>
-            <a:off x="685800" y="1417320"/>
-            <a:ext cx="256032" cy="256032"/>
+            <a:off x="685800" y="1737360"/>
+            <a:ext cx="228600" cy="228600"/>
           </a:xfrm>
           <a:prstGeom prst="rect">
             <a:avLst/>
@@ -7867,14 +8040,14 @@
       </p:pic>
       <p:sp>
         <p:nvSpPr>
-          <p:cNvPr id="8" name="Text 5"/>
-          <p:cNvSpPr/>
-          <p:nvPr/>
-        </p:nvSpPr>
-        <p:spPr>
-          <a:xfrm>
-            <a:off x="1005840" y="1417320"/>
-            <a:ext cx="2743200" cy="256032"/>
+          <p:cNvPr id="9" name="Text 6"/>
+          <p:cNvSpPr/>
+          <p:nvPr/>
+        </p:nvSpPr>
+        <p:spPr>
+          <a:xfrm>
+            <a:off x="960120" y="1719072"/>
+            <a:ext cx="3383280" cy="256032"/>
           </a:xfrm>
           <a:prstGeom prst="rect">
             <a:avLst/>
@@ -7890,7 +8063,7 @@
               <a:buNone/>
             </a:pPr>
             <a:r>
-              <a:rPr lang="en-US" sz="1200" dirty="0">
+              <a:rPr lang="en-US" sz="1100" dirty="0">
                 <a:solidFill>
                   <a:srgbClr val="E82127"/>
                 </a:solidFill>
@@ -7898,22 +8071,22 @@
                 <a:ea typeface="Arial Black" pitchFamily="34" charset="-122"/>
                 <a:cs typeface="Arial Black" pitchFamily="34" charset="-120"/>
               </a:rPr>
-              <a:t>PRODUCT</a:t>
-            </a:r>
-            <a:endParaRPr lang="en-US" sz="1200" dirty="0"/>
-          </a:p>
-        </p:txBody>
-      </p:sp>
-      <p:sp>
-        <p:nvSpPr>
-          <p:cNvPr id="9" name="Text 6"/>
-          <p:cNvSpPr/>
-          <p:nvPr/>
-        </p:nvSpPr>
-        <p:spPr>
-          <a:xfrm>
-            <a:off x="685800" y="1737360"/>
-            <a:ext cx="3657600" cy="1188720"/>
+              <a:t>PRODUCT — The Car Sells Itself</a:t>
+            </a:r>
+            <a:endParaRPr lang="en-US" sz="1100" dirty="0"/>
+          </a:p>
+        </p:txBody>
+      </p:sp>
+      <p:sp>
+        <p:nvSpPr>
+          <p:cNvPr id="10" name="Text 7"/>
+          <p:cNvSpPr/>
+          <p:nvPr/>
+        </p:nvSpPr>
+        <p:spPr>
+          <a:xfrm>
+            <a:off x="685800" y="2039112"/>
+            <a:ext cx="3657600" cy="960120"/>
           </a:xfrm>
           <a:prstGeom prst="rect">
             <a:avLst/>
@@ -7930,14 +8103,14 @@
               <a:buChar char="•"/>
             </a:pPr>
             <a:r>
-              <a:rPr lang="en-US" sz="850" dirty="0">
+              <a:rPr lang="en-US" sz="900" dirty="0">
                 <a:solidFill>
                   <a:srgbClr val="888899"/>
                 </a:solidFill>
               </a:rPr>
-              <a:t>Premium EV: 358mi range, 15-inch touchscreen, minimalist interior</a:t>
-            </a:r>
-            <a:endParaRPr lang="en-US" sz="850" dirty="0"/>
+              <a:t>358mi range, 15" touchscreen, minimalist interior</a:t>
+            </a:r>
+            <a:endParaRPr lang="en-US" sz="900" dirty="0"/>
           </a:p>
           <a:p>
             <a:pPr marL="342900" indent="-342900">
@@ -7945,14 +8118,14 @@
               <a:buChar char="•"/>
             </a:pPr>
             <a:r>
-              <a:rPr lang="en-US" sz="850" dirty="0">
+              <a:rPr lang="en-US" sz="900" dirty="0">
                 <a:solidFill>
                   <a:srgbClr val="888899"/>
                 </a:solidFill>
               </a:rPr>
-              <a:t>Autopilot standard; Full Self-Driving (FSD) $12K add-on or $199/mo subscription</a:t>
-            </a:r>
-            <a:endParaRPr lang="en-US" sz="850" dirty="0"/>
+              <a:t>Autopilot + FSD = car improves after you buy it</a:t>
+            </a:r>
+            <a:endParaRPr lang="en-US" sz="900" dirty="0"/>
           </a:p>
           <a:p>
             <a:pPr marL="342900" indent="-342900">
@@ -7960,14 +8133,14 @@
               <a:buChar char="•"/>
             </a:pPr>
             <a:r>
-              <a:rPr lang="en-US" sz="850" dirty="0">
+              <a:rPr lang="en-US" sz="900" dirty="0">
                 <a:solidFill>
                   <a:srgbClr val="888899"/>
                 </a:solidFill>
               </a:rPr>
-              <a:t>OTA updates: 40+ per year — car improves post-purchase (unique in auto industry)</a:t>
-            </a:r>
-            <a:endParaRPr lang="en-US" sz="850" dirty="0"/>
+              <a:t>40+ OTA updates/year — no other automaker does this</a:t>
+            </a:r>
+            <a:endParaRPr lang="en-US" sz="900" dirty="0"/>
           </a:p>
           <a:p>
             <a:pPr marL="342900" indent="-342900">
@@ -7975,27 +8148,27 @@
               <a:buChar char="•"/>
             </a:pPr>
             <a:r>
-              <a:rPr lang="en-US" sz="850" dirty="0">
+              <a:rPr lang="en-US" sz="900" dirty="0">
                 <a:solidFill>
                   <a:srgbClr val="888899"/>
                 </a:solidFill>
               </a:rPr>
-              <a:t>Safety: 5-star NHTSA rating in every category, lowest rollover risk of any car tested</a:t>
-            </a:r>
-            <a:endParaRPr lang="en-US" sz="850" dirty="0"/>
-          </a:p>
-        </p:txBody>
-      </p:sp>
-      <p:sp>
-        <p:nvSpPr>
-          <p:cNvPr id="10" name="Shape 7"/>
-          <p:cNvSpPr/>
-          <p:nvPr/>
-        </p:nvSpPr>
-        <p:spPr>
-          <a:xfrm>
-            <a:off x="4754880" y="1280160"/>
-            <a:ext cx="3931920" cy="1691640"/>
+              <a:t>5-star NHTSA rating in every single category</a:t>
+            </a:r>
+            <a:endParaRPr lang="en-US" sz="900" dirty="0"/>
+          </a:p>
+        </p:txBody>
+      </p:sp>
+      <p:sp>
+        <p:nvSpPr>
+          <p:cNvPr id="11" name="Shape 8"/>
+          <p:cNvSpPr/>
+          <p:nvPr/>
+        </p:nvSpPr>
+        <p:spPr>
+          <a:xfrm>
+            <a:off x="4754880" y="1600200"/>
+            <a:ext cx="3931920" cy="1463040"/>
           </a:xfrm>
           <a:prstGeom prst="rect">
             <a:avLst/>
@@ -8015,13 +8188,13 @@
       </p:sp>
       <p:sp>
         <p:nvSpPr>
-          <p:cNvPr id="11" name="Shape 8"/>
-          <p:cNvSpPr/>
-          <p:nvPr/>
-        </p:nvSpPr>
-        <p:spPr>
-          <a:xfrm>
-            <a:off x="4754880" y="1280160"/>
+          <p:cNvPr id="12" name="Shape 9"/>
+          <p:cNvSpPr/>
+          <p:nvPr/>
+        </p:nvSpPr>
+        <p:spPr>
+          <a:xfrm>
+            <a:off x="4754880" y="1600200"/>
             <a:ext cx="3931920" cy="36576"/>
           </a:xfrm>
           <a:prstGeom prst="rect">
@@ -8035,7 +8208,7 @@
       </p:sp>
       <p:pic>
         <p:nvPicPr>
-          <p:cNvPr id="12" name="Image 1" descr="preencoded.png">    </p:cNvPr>
+          <p:cNvPr id="13" name="Image 1" descr="preencoded.png">    </p:cNvPr>
           <p:cNvPicPr>
             <a:picLocks noChangeAspect="1"/>
           </p:cNvPicPr>
@@ -8049,8 +8222,8 @@
         </p:blipFill>
         <p:spPr>
           <a:xfrm>
-            <a:off x="4892040" y="1417320"/>
-            <a:ext cx="256032" cy="256032"/>
+            <a:off x="4892040" y="1737360"/>
+            <a:ext cx="228600" cy="228600"/>
           </a:xfrm>
           <a:prstGeom prst="rect">
             <a:avLst/>
@@ -8059,14 +8232,14 @@
       </p:pic>
       <p:sp>
         <p:nvSpPr>
-          <p:cNvPr id="13" name="Text 9"/>
-          <p:cNvSpPr/>
-          <p:nvPr/>
-        </p:nvSpPr>
-        <p:spPr>
-          <a:xfrm>
-            <a:off x="5212080" y="1417320"/>
-            <a:ext cx="2743200" cy="256032"/>
+          <p:cNvPr id="14" name="Text 10"/>
+          <p:cNvSpPr/>
+          <p:nvPr/>
+        </p:nvSpPr>
+        <p:spPr>
+          <a:xfrm>
+            <a:off x="5166360" y="1719072"/>
+            <a:ext cx="3383280" cy="256032"/>
           </a:xfrm>
           <a:prstGeom prst="rect">
             <a:avLst/>
@@ -8082,7 +8255,7 @@
               <a:buNone/>
             </a:pPr>
             <a:r>
-              <a:rPr lang="en-US" sz="1200" dirty="0">
+              <a:rPr lang="en-US" sz="1100" dirty="0">
                 <a:solidFill>
                   <a:srgbClr val="E82127"/>
                 </a:solidFill>
@@ -8090,22 +8263,22 @@
                 <a:ea typeface="Arial Black" pitchFamily="34" charset="-122"/>
                 <a:cs typeface="Arial Black" pitchFamily="34" charset="-120"/>
               </a:rPr>
-              <a:t>PRICE</a:t>
-            </a:r>
-            <a:endParaRPr lang="en-US" sz="1200" dirty="0"/>
-          </a:p>
-        </p:txBody>
-      </p:sp>
-      <p:sp>
-        <p:nvSpPr>
-          <p:cNvPr id="14" name="Text 10"/>
-          <p:cNvSpPr/>
-          <p:nvPr/>
-        </p:nvSpPr>
-        <p:spPr>
-          <a:xfrm>
-            <a:off x="4892040" y="1737360"/>
-            <a:ext cx="3657600" cy="1188720"/>
+              <a:t>PRICE — Transparent &amp; Disruptive</a:t>
+            </a:r>
+            <a:endParaRPr lang="en-US" sz="1100" dirty="0"/>
+          </a:p>
+        </p:txBody>
+      </p:sp>
+      <p:sp>
+        <p:nvSpPr>
+          <p:cNvPr id="15" name="Text 11"/>
+          <p:cNvSpPr/>
+          <p:nvPr/>
+        </p:nvSpPr>
+        <p:spPr>
+          <a:xfrm>
+            <a:off x="4892040" y="2039112"/>
+            <a:ext cx="3657600" cy="960120"/>
           </a:xfrm>
           <a:prstGeom prst="rect">
             <a:avLst/>
@@ -8122,14 +8295,14 @@
               <a:buChar char="•"/>
             </a:pPr>
             <a:r>
-              <a:rPr lang="en-US" sz="850" dirty="0">
+              <a:rPr lang="en-US" sz="900" dirty="0">
                 <a:solidFill>
                   <a:srgbClr val="888899"/>
                 </a:solidFill>
               </a:rPr>
-              <a:t>Base: $38,990 (Standard) / $45,990 (Long Range) / $52,990 (Performance)</a:t>
-            </a:r>
-            <a:endParaRPr lang="en-US" sz="850" dirty="0"/>
+              <a:t>$38,990 base — or $31,490 after $7,500 tax credit</a:t>
+            </a:r>
+            <a:endParaRPr lang="en-US" sz="900" dirty="0"/>
           </a:p>
           <a:p>
             <a:pPr marL="342900" indent="-342900">
@@ -8137,14 +8310,14 @@
               <a:buChar char="•"/>
             </a:pPr>
             <a:r>
-              <a:rPr lang="en-US" sz="850" dirty="0">
+              <a:rPr lang="en-US" sz="900" dirty="0">
                 <a:solidFill>
                   <a:srgbClr val="888899"/>
                 </a:solidFill>
               </a:rPr>
-              <a:t>Transparent pricing: no haggling, no dealer markup — same price for everyone</a:t>
-            </a:r>
-            <a:endParaRPr lang="en-US" sz="850" dirty="0"/>
+              <a:t>Same price for everyone — no haggling, no dealer games</a:t>
+            </a:r>
+            <a:endParaRPr lang="en-US" sz="900" dirty="0"/>
           </a:p>
           <a:p>
             <a:pPr marL="342900" indent="-342900">
@@ -8152,14 +8325,14 @@
               <a:buChar char="•"/>
             </a:pPr>
             <a:r>
-              <a:rPr lang="en-US" sz="850" dirty="0">
+              <a:rPr lang="en-US" sz="900" dirty="0">
                 <a:solidFill>
                   <a:srgbClr val="888899"/>
                 </a:solidFill>
               </a:rPr>
-              <a:t>$7,500 federal tax credit + state incentives reduce effective price to ~$31,490</a:t>
-            </a:r>
-            <a:endParaRPr lang="en-US" sz="850" dirty="0"/>
+              <a:t>TCO saves $6,000-8,000 over 5yr vs BMW 3 Series</a:t>
+            </a:r>
+            <a:endParaRPr lang="en-US" sz="900" dirty="0"/>
           </a:p>
           <a:p>
             <a:pPr marL="342900" indent="-342900">
@@ -8167,27 +8340,27 @@
               <a:buChar char="•"/>
             </a:pPr>
             <a:r>
-              <a:rPr lang="en-US" sz="850" dirty="0">
+              <a:rPr lang="en-US" sz="900" dirty="0">
                 <a:solidFill>
                   <a:srgbClr val="888899"/>
                 </a:solidFill>
               </a:rPr>
-              <a:t>TCO advantage: saves $6,000-8,000 over 5 years vs comparable BMW 3 Series (Edmunds)</a:t>
-            </a:r>
-            <a:endParaRPr lang="en-US" sz="850" dirty="0"/>
-          </a:p>
-        </p:txBody>
-      </p:sp>
-      <p:sp>
-        <p:nvSpPr>
-          <p:cNvPr id="15" name="Shape 11"/>
-          <p:cNvSpPr/>
-          <p:nvPr/>
-        </p:nvSpPr>
-        <p:spPr>
-          <a:xfrm>
-            <a:off x="548640" y="3108960"/>
-            <a:ext cx="3931920" cy="1691640"/>
+              <a:t>Insurance through Tesla at 20-30% lower rates</a:t>
+            </a:r>
+            <a:endParaRPr lang="en-US" sz="900" dirty="0"/>
+          </a:p>
+        </p:txBody>
+      </p:sp>
+      <p:sp>
+        <p:nvSpPr>
+          <p:cNvPr id="16" name="Shape 12"/>
+          <p:cNvSpPr/>
+          <p:nvPr/>
+        </p:nvSpPr>
+        <p:spPr>
+          <a:xfrm>
+            <a:off x="548640" y="3246120"/>
+            <a:ext cx="3931920" cy="1463040"/>
           </a:xfrm>
           <a:prstGeom prst="rect">
             <a:avLst/>
@@ -8207,13 +8380,13 @@
       </p:sp>
       <p:sp>
         <p:nvSpPr>
-          <p:cNvPr id="16" name="Shape 12"/>
-          <p:cNvSpPr/>
-          <p:nvPr/>
-        </p:nvSpPr>
-        <p:spPr>
-          <a:xfrm>
-            <a:off x="548640" y="3108960"/>
+          <p:cNvPr id="17" name="Shape 13"/>
+          <p:cNvSpPr/>
+          <p:nvPr/>
+        </p:nvSpPr>
+        <p:spPr>
+          <a:xfrm>
+            <a:off x="548640" y="3246120"/>
             <a:ext cx="3931920" cy="36576"/>
           </a:xfrm>
           <a:prstGeom prst="rect">
@@ -8227,7 +8400,7 @@
       </p:sp>
       <p:pic>
         <p:nvPicPr>
-          <p:cNvPr id="17" name="Image 2" descr="preencoded.png">    </p:cNvPr>
+          <p:cNvPr id="18" name="Image 2" descr="preencoded.png">    </p:cNvPr>
           <p:cNvPicPr>
             <a:picLocks noChangeAspect="1"/>
           </p:cNvPicPr>
@@ -8241,8 +8414,8 @@
         </p:blipFill>
         <p:spPr>
           <a:xfrm>
-            <a:off x="685800" y="3246120"/>
-            <a:ext cx="256032" cy="256032"/>
+            <a:off x="685800" y="3383280"/>
+            <a:ext cx="228600" cy="228600"/>
           </a:xfrm>
           <a:prstGeom prst="rect">
             <a:avLst/>
@@ -8251,14 +8424,14 @@
       </p:pic>
       <p:sp>
         <p:nvSpPr>
-          <p:cNvPr id="18" name="Text 13"/>
-          <p:cNvSpPr/>
-          <p:nvPr/>
-        </p:nvSpPr>
-        <p:spPr>
-          <a:xfrm>
-            <a:off x="1005840" y="3246120"/>
-            <a:ext cx="2743200" cy="256032"/>
+          <p:cNvPr id="19" name="Text 14"/>
+          <p:cNvSpPr/>
+          <p:nvPr/>
+        </p:nvSpPr>
+        <p:spPr>
+          <a:xfrm>
+            <a:off x="960120" y="3364992"/>
+            <a:ext cx="3383280" cy="256032"/>
           </a:xfrm>
           <a:prstGeom prst="rect">
             <a:avLst/>
@@ -8274,7 +8447,7 @@
               <a:buNone/>
             </a:pPr>
             <a:r>
-              <a:rPr lang="en-US" sz="1200" dirty="0">
+              <a:rPr lang="en-US" sz="1100" dirty="0">
                 <a:solidFill>
                   <a:srgbClr val="E82127"/>
                 </a:solidFill>
@@ -8282,22 +8455,22 @@
                 <a:ea typeface="Arial Black" pitchFamily="34" charset="-122"/>
                 <a:cs typeface="Arial Black" pitchFamily="34" charset="-120"/>
               </a:rPr>
-              <a:t>PLACE</a:t>
-            </a:r>
-            <a:endParaRPr lang="en-US" sz="1200" dirty="0"/>
-          </a:p>
-        </p:txBody>
-      </p:sp>
-      <p:sp>
-        <p:nvSpPr>
-          <p:cNvPr id="19" name="Text 14"/>
-          <p:cNvSpPr/>
-          <p:nvPr/>
-        </p:nvSpPr>
-        <p:spPr>
-          <a:xfrm>
-            <a:off x="685800" y="3566160"/>
-            <a:ext cx="3657600" cy="1188720"/>
+              <a:t>PLACE — Cut Out the Middleman</a:t>
+            </a:r>
+            <a:endParaRPr lang="en-US" sz="1100" dirty="0"/>
+          </a:p>
+        </p:txBody>
+      </p:sp>
+      <p:sp>
+        <p:nvSpPr>
+          <p:cNvPr id="20" name="Text 15"/>
+          <p:cNvSpPr/>
+          <p:nvPr/>
+        </p:nvSpPr>
+        <p:spPr>
+          <a:xfrm>
+            <a:off x="685800" y="3685032"/>
+            <a:ext cx="3657600" cy="960120"/>
           </a:xfrm>
           <a:prstGeom prst="rect">
             <a:avLst/>
@@ -8314,14 +8487,14 @@
               <a:buChar char="•"/>
             </a:pPr>
             <a:r>
-              <a:rPr lang="en-US" sz="850" dirty="0">
+              <a:rPr lang="en-US" sz="900" dirty="0">
                 <a:solidFill>
                   <a:srgbClr val="888899"/>
                 </a:solidFill>
               </a:rPr>
-              <a:t>100% direct-to-consumer — bypasses traditional dealership model entirely</a:t>
-            </a:r>
-            <a:endParaRPr lang="en-US" sz="850" dirty="0"/>
+              <a:t>100% direct-to-consumer — first automaker to do this</a:t>
+            </a:r>
+            <a:endParaRPr lang="en-US" sz="900" dirty="0"/>
           </a:p>
           <a:p>
             <a:pPr marL="342900" indent="-342900">
@@ -8329,14 +8502,14 @@
               <a:buChar char="•"/>
             </a:pPr>
             <a:r>
-              <a:rPr lang="en-US" sz="850" dirty="0">
+              <a:rPr lang="en-US" sz="900" dirty="0">
                 <a:solidFill>
                   <a:srgbClr val="888899"/>
                 </a:solidFill>
               </a:rPr>
-              <a:t>Online ordering: configure &amp; buy in 8 minutes avg; home delivery available</a:t>
-            </a:r>
-            <a:endParaRPr lang="en-US" sz="850" dirty="0"/>
+              <a:t>Buy online in 8 minutes, delivered to your driveway</a:t>
+            </a:r>
+            <a:endParaRPr lang="en-US" sz="900" dirty="0"/>
           </a:p>
           <a:p>
             <a:pPr marL="342900" indent="-342900">
@@ -8344,14 +8517,14 @@
               <a:buChar char="•"/>
             </a:pPr>
             <a:r>
-              <a:rPr lang="en-US" sz="850" dirty="0">
+              <a:rPr lang="en-US" sz="900" dirty="0">
                 <a:solidFill>
                   <a:srgbClr val="888899"/>
                 </a:solidFill>
               </a:rPr>
-              <a:t>200+ Tesla stores/galleries in premium retail locations for brand exposure</a:t>
-            </a:r>
-            <a:endParaRPr lang="en-US" sz="850" dirty="0"/>
+              <a:t>200+ stores in malls — test drive, don't get sold to</a:t>
+            </a:r>
+            <a:endParaRPr lang="en-US" sz="900" dirty="0"/>
           </a:p>
           <a:p>
             <a:pPr marL="342900" indent="-342900">
@@ -8359,27 +8532,27 @@
               <a:buChar char="•"/>
             </a:pPr>
             <a:r>
-              <a:rPr lang="en-US" sz="850" dirty="0">
+              <a:rPr lang="en-US" sz="900" dirty="0">
                 <a:solidFill>
                   <a:srgbClr val="888899"/>
                 </a:solidFill>
               </a:rPr>
-              <a:t>15,000+ Supercharger stations worldwide; NACS adopted as US charging standard</a:t>
-            </a:r>
-            <a:endParaRPr lang="en-US" sz="850" dirty="0"/>
-          </a:p>
-        </p:txBody>
-      </p:sp>
-      <p:sp>
-        <p:nvSpPr>
-          <p:cNvPr id="20" name="Shape 15"/>
-          <p:cNvSpPr/>
-          <p:nvPr/>
-        </p:nvSpPr>
-        <p:spPr>
-          <a:xfrm>
-            <a:off x="4754880" y="3108960"/>
-            <a:ext cx="3931920" cy="1691640"/>
+              <a:t>15,000+ Superchargers now the US standard (NACS)</a:t>
+            </a:r>
+            <a:endParaRPr lang="en-US" sz="900" dirty="0"/>
+          </a:p>
+        </p:txBody>
+      </p:sp>
+      <p:sp>
+        <p:nvSpPr>
+          <p:cNvPr id="21" name="Shape 16"/>
+          <p:cNvSpPr/>
+          <p:nvPr/>
+        </p:nvSpPr>
+        <p:spPr>
+          <a:xfrm>
+            <a:off x="4754880" y="3246120"/>
+            <a:ext cx="3931920" cy="1463040"/>
           </a:xfrm>
           <a:prstGeom prst="rect">
             <a:avLst/>
@@ -8399,13 +8572,13 @@
       </p:sp>
       <p:sp>
         <p:nvSpPr>
-          <p:cNvPr id="21" name="Shape 16"/>
-          <p:cNvSpPr/>
-          <p:nvPr/>
-        </p:nvSpPr>
-        <p:spPr>
-          <a:xfrm>
-            <a:off x="4754880" y="3108960"/>
+          <p:cNvPr id="22" name="Shape 17"/>
+          <p:cNvSpPr/>
+          <p:nvPr/>
+        </p:nvSpPr>
+        <p:spPr>
+          <a:xfrm>
+            <a:off x="4754880" y="3246120"/>
             <a:ext cx="3931920" cy="36576"/>
           </a:xfrm>
           <a:prstGeom prst="rect">
@@ -8419,7 +8592,7 @@
       </p:sp>
       <p:pic>
         <p:nvPicPr>
-          <p:cNvPr id="22" name="Image 3" descr="preencoded.png">    </p:cNvPr>
+          <p:cNvPr id="23" name="Image 3" descr="preencoded.png">    </p:cNvPr>
           <p:cNvPicPr>
             <a:picLocks noChangeAspect="1"/>
           </p:cNvPicPr>
@@ -8433,8 +8606,8 @@
         </p:blipFill>
         <p:spPr>
           <a:xfrm>
-            <a:off x="4892040" y="3246120"/>
-            <a:ext cx="256032" cy="256032"/>
+            <a:off x="4892040" y="3383280"/>
+            <a:ext cx="228600" cy="228600"/>
           </a:xfrm>
           <a:prstGeom prst="rect">
             <a:avLst/>
@@ -8443,14 +8616,14 @@
       </p:pic>
       <p:sp>
         <p:nvSpPr>
-          <p:cNvPr id="23" name="Text 17"/>
-          <p:cNvSpPr/>
-          <p:nvPr/>
-        </p:nvSpPr>
-        <p:spPr>
-          <a:xfrm>
-            <a:off x="5212080" y="3246120"/>
-            <a:ext cx="2743200" cy="256032"/>
+          <p:cNvPr id="24" name="Text 18"/>
+          <p:cNvSpPr/>
+          <p:nvPr/>
+        </p:nvSpPr>
+        <p:spPr>
+          <a:xfrm>
+            <a:off x="5166360" y="3364992"/>
+            <a:ext cx="3383280" cy="256032"/>
           </a:xfrm>
           <a:prstGeom prst="rect">
             <a:avLst/>
@@ -8466,7 +8639,7 @@
               <a:buNone/>
             </a:pPr>
             <a:r>
-              <a:rPr lang="en-US" sz="1200" dirty="0">
+              <a:rPr lang="en-US" sz="1100" dirty="0">
                 <a:solidFill>
                   <a:srgbClr val="E82127"/>
                 </a:solidFill>
@@ -8474,22 +8647,22 @@
                 <a:ea typeface="Arial Black" pitchFamily="34" charset="-122"/>
                 <a:cs typeface="Arial Black" pitchFamily="34" charset="-120"/>
               </a:rPr>
-              <a:t>PROMOTION</a:t>
-            </a:r>
-            <a:endParaRPr lang="en-US" sz="1200" dirty="0"/>
-          </a:p>
-        </p:txBody>
-      </p:sp>
-      <p:sp>
-        <p:nvSpPr>
-          <p:cNvPr id="24" name="Text 18"/>
-          <p:cNvSpPr/>
-          <p:nvPr/>
-        </p:nvSpPr>
-        <p:spPr>
-          <a:xfrm>
-            <a:off x="4892040" y="3566160"/>
-            <a:ext cx="3657600" cy="1188720"/>
+              <a:t>PROMOTION — Let Others Do It</a:t>
+            </a:r>
+            <a:endParaRPr lang="en-US" sz="1100" dirty="0"/>
+          </a:p>
+        </p:txBody>
+      </p:sp>
+      <p:sp>
+        <p:nvSpPr>
+          <p:cNvPr id="25" name="Text 19"/>
+          <p:cNvSpPr/>
+          <p:nvPr/>
+        </p:nvSpPr>
+        <p:spPr>
+          <a:xfrm>
+            <a:off x="4892040" y="3685032"/>
+            <a:ext cx="3657600" cy="960120"/>
           </a:xfrm>
           <a:prstGeom prst="rect">
             <a:avLst/>
@@ -8506,14 +8679,14 @@
               <a:buChar char="•"/>
             </a:pPr>
             <a:r>
-              <a:rPr lang="en-US" sz="850" dirty="0">
+              <a:rPr lang="en-US" sz="900" dirty="0">
                 <a:solidFill>
                   <a:srgbClr val="888899"/>
                 </a:solidFill>
               </a:rPr>
-              <a:t>$0 paid advertising — only major automaker with zero traditional media spend</a:t>
-            </a:r>
-            <a:endParaRPr lang="en-US" sz="850" dirty="0"/>
+              <a:t>$0 ad spend — while competitors burn $3-5B annually</a:t>
+            </a:r>
+            <a:endParaRPr lang="en-US" sz="900" dirty="0"/>
           </a:p>
           <a:p>
             <a:pPr marL="342900" indent="-342900">
@@ -8521,14 +8694,14 @@
               <a:buChar char="•"/>
             </a:pPr>
             <a:r>
-              <a:rPr lang="en-US" sz="850" dirty="0">
+              <a:rPr lang="en-US" sz="900" dirty="0">
                 <a:solidFill>
                   <a:srgbClr val="888899"/>
                 </a:solidFill>
               </a:rPr>
-              <a:t>Earned media: $19B annually from CEO social media (200M+ followers) and press coverage</a:t>
-            </a:r>
-            <a:endParaRPr lang="en-US" sz="850" dirty="0"/>
+              <a:t>CEO's tweets = $19B earned media value (Bloomberg)</a:t>
+            </a:r>
+            <a:endParaRPr lang="en-US" sz="900" dirty="0"/>
           </a:p>
           <a:p>
             <a:pPr marL="342900" indent="-342900">
@@ -8536,14 +8709,14 @@
               <a:buChar char="•"/>
             </a:pPr>
             <a:r>
-              <a:rPr lang="en-US" sz="850" dirty="0">
+              <a:rPr lang="en-US" sz="900" dirty="0">
                 <a:solidFill>
                   <a:srgbClr val="888899"/>
                 </a:solidFill>
               </a:rPr>
-              <a:t>Referral program: owners earn rewards for referrals — drove 425K+ sales</a:t>
-            </a:r>
-            <a:endParaRPr lang="en-US" sz="850" dirty="0"/>
+              <a:t>Referral program alone drove 425K+ vehicle sales</a:t>
+            </a:r>
+            <a:endParaRPr lang="en-US" sz="900" dirty="0"/>
           </a:p>
           <a:p>
             <a:pPr marL="342900" indent="-342900">
@@ -8551,14 +8724,14 @@
               <a:buChar char="•"/>
             </a:pPr>
             <a:r>
-              <a:rPr lang="en-US" sz="850" dirty="0">
+              <a:rPr lang="en-US" sz="900" dirty="0">
                 <a:solidFill>
                   <a:srgbClr val="888899"/>
                 </a:solidFill>
               </a:rPr>
-              <a:t>Product launches as cultural events: Cybertruck unveil = 250M+ social impressions</a:t>
-            </a:r>
-            <a:endParaRPr lang="en-US" sz="850" dirty="0"/>
+              <a:t>Every launch is a cultural moment, not a commercial</a:t>
+            </a:r>
+            <a:endParaRPr lang="en-US" sz="900" dirty="0"/>
           </a:p>
         </p:txBody>
       </p:sp>
@@ -8647,7 +8820,7 @@
                 <a:ea typeface="Arial Black" pitchFamily="34" charset="-122"/>
                 <a:cs typeface="Arial Black" pitchFamily="34" charset="-120"/>
               </a:rPr>
-              <a:t>09</a:t>
+              <a:t>08</a:t>
             </a:r>
             <a:endParaRPr lang="en-US" sz="3200" dirty="0"/>
           </a:p>
@@ -8662,7 +8835,7 @@
         <p:spPr>
           <a:xfrm>
             <a:off x="548640" y="685800"/>
-            <a:ext cx="5486400" cy="457200"/>
+            <a:ext cx="7315200" cy="457200"/>
           </a:xfrm>
           <a:prstGeom prst="rect">
             <a:avLst/>
@@ -8686,7 +8859,7 @@
                 <a:ea typeface="Arial Black" pitchFamily="34" charset="-122"/>
                 <a:cs typeface="Arial Black" pitchFamily="34" charset="-120"/>
               </a:rPr>
-              <a:t>Recommendations</a:t>
+              <a:t>What Tesla Should Do Next</a:t>
             </a:r>
             <a:endParaRPr lang="en-US" sz="2600" dirty="0"/>
           </a:p>
@@ -8694,14 +8867,53 @@
       </p:sp>
       <p:sp>
         <p:nvSpPr>
-          <p:cNvPr id="5" name="Shape 3"/>
-          <p:cNvSpPr/>
-          <p:nvPr/>
-        </p:nvSpPr>
-        <p:spPr>
-          <a:xfrm>
-            <a:off x="548640" y="1234440"/>
-            <a:ext cx="3931920" cy="3657600"/>
+          <p:cNvPr id="5" name="Text 3"/>
+          <p:cNvSpPr/>
+          <p:nvPr/>
+        </p:nvSpPr>
+        <p:spPr>
+          <a:xfrm>
+            <a:off x="548640" y="1143000"/>
+            <a:ext cx="8046720" cy="365760"/>
+          </a:xfrm>
+          <a:prstGeom prst="rect">
+            <a:avLst/>
+          </a:prstGeom>
+          <a:noFill/>
+          <a:ln/>
+        </p:spPr>
+        <p:txBody>
+          <a:bodyPr wrap="square" lIns="0" tIns="0" rIns="0" bIns="0" rtlCol="0" anchor="ctr"/>
+          <a:lstStyle/>
+          <a:p>
+            <a:pPr indent="0" marL="0">
+              <a:buNone/>
+            </a:pPr>
+            <a:r>
+              <a:rPr lang="en-US" sz="1200" i="1" dirty="0">
+                <a:solidFill>
+                  <a:srgbClr val="666677"/>
+                </a:solidFill>
+                <a:latin typeface="Georgia" pitchFamily="34" charset="0"/>
+                <a:ea typeface="Georgia" pitchFamily="34" charset="-122"/>
+                <a:cs typeface="Georgia" pitchFamily="34" charset="-120"/>
+              </a:rPr>
+              <a:t>The playbook that got Tesla here won't be enough for what's coming. Here's how to stay ahead.</a:t>
+            </a:r>
+            <a:endParaRPr lang="en-US" sz="1200" dirty="0"/>
+          </a:p>
+        </p:txBody>
+      </p:sp>
+      <p:sp>
+        <p:nvSpPr>
+          <p:cNvPr id="6" name="Shape 4"/>
+          <p:cNvSpPr/>
+          <p:nvPr/>
+        </p:nvSpPr>
+        <p:spPr>
+          <a:xfrm>
+            <a:off x="548640" y="1600200"/>
+            <a:ext cx="3931920" cy="3291840"/>
           </a:xfrm>
           <a:prstGeom prst="rect">
             <a:avLst/>
@@ -8721,14 +8933,14 @@
       </p:sp>
       <p:sp>
         <p:nvSpPr>
-          <p:cNvPr id="6" name="Shape 4"/>
-          <p:cNvSpPr/>
-          <p:nvPr/>
-        </p:nvSpPr>
-        <p:spPr>
-          <a:xfrm>
-            <a:off x="548640" y="1234440"/>
-            <a:ext cx="54864" cy="3657600"/>
+          <p:cNvPr id="7" name="Shape 5"/>
+          <p:cNvSpPr/>
+          <p:nvPr/>
+        </p:nvSpPr>
+        <p:spPr>
+          <a:xfrm>
+            <a:off x="548640" y="1600200"/>
+            <a:ext cx="54864" cy="3291840"/>
           </a:xfrm>
           <a:prstGeom prst="rect">
             <a:avLst/>
@@ -8741,13 +8953,13 @@
       </p:sp>
       <p:sp>
         <p:nvSpPr>
-          <p:cNvPr id="7" name="Text 5"/>
-          <p:cNvSpPr/>
-          <p:nvPr/>
-        </p:nvSpPr>
-        <p:spPr>
-          <a:xfrm>
-            <a:off x="777240" y="1325880"/>
+          <p:cNvPr id="8" name="Text 6"/>
+          <p:cNvSpPr/>
+          <p:nvPr/>
+        </p:nvSpPr>
+        <p:spPr>
+          <a:xfrm>
+            <a:off x="777240" y="1691640"/>
             <a:ext cx="3474720" cy="274320"/>
           </a:xfrm>
           <a:prstGeom prst="rect">
@@ -8764,7 +8976,7 @@
               <a:buNone/>
             </a:pPr>
             <a:r>
-              <a:rPr lang="en-US" sz="1100" b="1" dirty="0">
+              <a:rPr lang="en-US" sz="1200" b="1" dirty="0">
                 <a:solidFill>
                   <a:srgbClr val="E82127"/>
                 </a:solidFill>
@@ -8772,22 +8984,22 @@
                 <a:ea typeface="Arial" pitchFamily="34" charset="-122"/>
                 <a:cs typeface="Arial" pitchFamily="34" charset="-120"/>
               </a:rPr>
-              <a:t>Marketing Mix Recommendations (4Ps + 7Ps)</a:t>
-            </a:r>
-            <a:endParaRPr lang="en-US" sz="1100" dirty="0"/>
-          </a:p>
-        </p:txBody>
-      </p:sp>
-      <p:sp>
-        <p:nvSpPr>
-          <p:cNvPr id="8" name="Text 6"/>
-          <p:cNvSpPr/>
-          <p:nvPr/>
-        </p:nvSpPr>
-        <p:spPr>
-          <a:xfrm>
-            <a:off x="777240" y="1691640"/>
-            <a:ext cx="3520440" cy="1737360"/>
+              <a:t>Fix the Gaps (4Ps + 7Ps)</a:t>
+            </a:r>
+            <a:endParaRPr lang="en-US" sz="1200" dirty="0"/>
+          </a:p>
+        </p:txBody>
+      </p:sp>
+      <p:sp>
+        <p:nvSpPr>
+          <p:cNvPr id="9" name="Text 7"/>
+          <p:cNvSpPr/>
+          <p:nvPr/>
+        </p:nvSpPr>
+        <p:spPr>
+          <a:xfrm>
+            <a:off x="777240" y="2057400"/>
+            <a:ext cx="3520440" cy="2651760"/>
           </a:xfrm>
           <a:prstGeom prst="rect">
             <a:avLst/>
@@ -8804,14 +9016,14 @@
               <a:buChar char="•"/>
             </a:pPr>
             <a:r>
-              <a:rPr lang="en-US" sz="850" dirty="0">
+              <a:rPr lang="en-US" sz="900" dirty="0">
                 <a:solidFill>
                   <a:srgbClr val="888899"/>
                 </a:solidFill>
               </a:rPr>
-              <a:t>Product: Launch sub-$30K Model Q/2 to capture 60% of market currently priced out</a:t>
-            </a:r>
-            <a:endParaRPr lang="en-US" sz="850" dirty="0"/>
+              <a:t>Product: Launch a sub-$30K model — 60% of buyers are priced out</a:t>
+            </a:r>
+            <a:endParaRPr lang="en-US" sz="900" dirty="0"/>
           </a:p>
           <a:p>
             <a:pPr marL="342900" indent="-342900">
@@ -8819,14 +9031,14 @@
               <a:buChar char="•"/>
             </a:pPr>
             <a:r>
-              <a:rPr lang="en-US" sz="850" dirty="0">
+              <a:rPr lang="en-US" sz="900" dirty="0">
                 <a:solidFill>
                   <a:srgbClr val="888899"/>
                 </a:solidFill>
               </a:rPr>
-              <a:t>Product: Expand FSD to achieve Level 4 autonomy — $300B TAM (Goldman Sachs)</a:t>
-            </a:r>
-            <a:endParaRPr lang="en-US" sz="850" dirty="0"/>
+              <a:t>Price: Dynamic pricing based on demand (like airlines, not cars)</a:t>
+            </a:r>
+            <a:endParaRPr lang="en-US" sz="900" dirty="0"/>
           </a:p>
           <a:p>
             <a:pPr marL="342900" indent="-342900">
@@ -8834,14 +9046,14 @@
               <a:buChar char="•"/>
             </a:pPr>
             <a:r>
-              <a:rPr lang="en-US" sz="850" dirty="0">
+              <a:rPr lang="en-US" sz="900" dirty="0">
                 <a:solidFill>
                   <a:srgbClr val="888899"/>
                 </a:solidFill>
               </a:rPr>
-              <a:t>Price: Implement dynamic pricing based on demand signals and inventory levels</a:t>
-            </a:r>
-            <a:endParaRPr lang="en-US" sz="850" dirty="0"/>
+              <a:t>Place: 40% more service centers — current 2-3 week wait is unacceptable</a:t>
+            </a:r>
+            <a:endParaRPr lang="en-US" sz="900" dirty="0"/>
           </a:p>
           <a:p>
             <a:pPr marL="342900" indent="-342900">
@@ -8849,14 +9061,14 @@
               <a:buChar char="•"/>
             </a:pPr>
             <a:r>
-              <a:rPr lang="en-US" sz="850" dirty="0">
+              <a:rPr lang="en-US" sz="900" dirty="0">
                 <a:solidFill>
                   <a:srgbClr val="888899"/>
                 </a:solidFill>
               </a:rPr>
-              <a:t>Price: Introduce leasing with battery-as-a-service to lower monthly payments</a:t>
-            </a:r>
-            <a:endParaRPr lang="en-US" sz="850" dirty="0"/>
+              <a:t>Promotion: Targeted TikTok/YouTube for Gen Z — the next wave of buyers</a:t>
+            </a:r>
+            <a:endParaRPr lang="en-US" sz="900" dirty="0"/>
           </a:p>
           <a:p>
             <a:pPr marL="342900" indent="-342900">
@@ -8864,14 +9076,14 @@
               <a:buChar char="•"/>
             </a:pPr>
             <a:r>
-              <a:rPr lang="en-US" sz="850" dirty="0">
+              <a:rPr lang="en-US" sz="900" dirty="0">
                 <a:solidFill>
                   <a:srgbClr val="888899"/>
                 </a:solidFill>
               </a:rPr>
-              <a:t>Place: Expand service centers by 40% — current wait times avg 2-3 weeks</a:t>
-            </a:r>
-            <a:endParaRPr lang="en-US" sz="850" dirty="0"/>
+              <a:t>People: Service training overhaul — ACSI score is below industry average</a:t>
+            </a:r>
+            <a:endParaRPr lang="en-US" sz="900" dirty="0"/>
           </a:p>
           <a:p>
             <a:pPr marL="342900" indent="-342900">
@@ -8879,14 +9091,14 @@
               <a:buChar char="•"/>
             </a:pPr>
             <a:r>
-              <a:rPr lang="en-US" sz="850" dirty="0">
+              <a:rPr lang="en-US" sz="900" dirty="0">
                 <a:solidFill>
                   <a:srgbClr val="888899"/>
                 </a:solidFill>
               </a:rPr>
-              <a:t>Place: Partner with 3rd-party charging networks to reduce range anxiety</a:t>
-            </a:r>
-            <a:endParaRPr lang="en-US" sz="850" dirty="0"/>
+              <a:t>Process: Mobile service fleet should handle 80% of repairs at home</a:t>
+            </a:r>
+            <a:endParaRPr lang="en-US" sz="900" dirty="0"/>
           </a:p>
           <a:p>
             <a:pPr marL="342900" indent="-342900">
@@ -8894,148 +9106,27 @@
               <a:buChar char="•"/>
             </a:pPr>
             <a:r>
-              <a:rPr lang="en-US" sz="850" dirty="0">
+              <a:rPr lang="en-US" sz="900" dirty="0">
                 <a:solidFill>
                   <a:srgbClr val="888899"/>
                 </a:solidFill>
               </a:rPr>
-              <a:t>Promotion: Targeted digital campaigns on YouTube/TikTok for Gen Z audience</a:t>
-            </a:r>
-            <a:endParaRPr lang="en-US" sz="850" dirty="0"/>
-          </a:p>
-          <a:p>
-            <a:pPr marL="342900" indent="-342900">
-              <a:buSzPct val="100000"/>
-              <a:buChar char="•"/>
-            </a:pPr>
-            <a:r>
-              <a:rPr lang="en-US" sz="850" dirty="0">
-                <a:solidFill>
-                  <a:srgbClr val="888899"/>
-                </a:solidFill>
-              </a:rPr>
-              <a:t>Promotion: Launch owner-ambassador program to formalize word-of-mouth</a:t>
-            </a:r>
-            <a:endParaRPr lang="en-US" sz="850" dirty="0"/>
-          </a:p>
-        </p:txBody>
-      </p:sp>
-      <p:sp>
-        <p:nvSpPr>
-          <p:cNvPr id="9" name="Text 7"/>
-          <p:cNvSpPr/>
-          <p:nvPr/>
-        </p:nvSpPr>
-        <p:spPr>
-          <a:xfrm>
-            <a:off x="777240" y="3383280"/>
-            <a:ext cx="3474720" cy="274320"/>
-          </a:xfrm>
-          <a:prstGeom prst="rect">
-            <a:avLst/>
-          </a:prstGeom>
-          <a:noFill/>
-          <a:ln/>
-        </p:spPr>
-        <p:txBody>
-          <a:bodyPr wrap="square" lIns="0" tIns="0" rIns="0" bIns="0" rtlCol="0" anchor="ctr"/>
-          <a:lstStyle/>
-          <a:p>
-            <a:pPr indent="0" marL="0">
-              <a:buNone/>
-            </a:pPr>
-            <a:r>
-              <a:rPr lang="en-US" sz="1100" b="1" dirty="0">
-                <a:solidFill>
-                  <a:srgbClr val="E82127"/>
-                </a:solidFill>
-                <a:latin typeface="Arial" pitchFamily="34" charset="0"/>
-                <a:ea typeface="Arial" pitchFamily="34" charset="-122"/>
-                <a:cs typeface="Arial" pitchFamily="34" charset="-120"/>
-              </a:rPr>
-              <a:t>7Ps — Services Extension</a:t>
-            </a:r>
-            <a:endParaRPr lang="en-US" sz="1100" dirty="0"/>
-          </a:p>
-        </p:txBody>
-      </p:sp>
-      <p:sp>
-        <p:nvSpPr>
-          <p:cNvPr id="10" name="Text 8"/>
-          <p:cNvSpPr/>
-          <p:nvPr/>
-        </p:nvSpPr>
-        <p:spPr>
-          <a:xfrm>
-            <a:off x="777240" y="3703320"/>
-            <a:ext cx="3520440" cy="1005840"/>
-          </a:xfrm>
-          <a:prstGeom prst="rect">
-            <a:avLst/>
-          </a:prstGeom>
-          <a:noFill/>
-          <a:ln/>
-        </p:spPr>
-        <p:txBody>
-          <a:bodyPr wrap="square" rtlCol="0" anchor="ctr"/>
-          <a:lstStyle/>
-          <a:p>
-            <a:pPr marL="342900" indent="-342900">
-              <a:buSzPct val="100000"/>
-              <a:buChar char="•"/>
-            </a:pPr>
-            <a:r>
-              <a:rPr lang="en-US" sz="850" dirty="0">
-                <a:solidFill>
-                  <a:srgbClr val="888899"/>
-                </a:solidFill>
-              </a:rPr>
-              <a:t>People: Invest in customer service training — current ACSI score below industry avg</a:t>
-            </a:r>
-            <a:endParaRPr lang="en-US" sz="850" dirty="0"/>
-          </a:p>
-          <a:p>
-            <a:pPr marL="342900" indent="-342900">
-              <a:buSzPct val="100000"/>
-              <a:buChar char="•"/>
-            </a:pPr>
-            <a:r>
-              <a:rPr lang="en-US" sz="850" dirty="0">
-                <a:solidFill>
-                  <a:srgbClr val="888899"/>
-                </a:solidFill>
-              </a:rPr>
-              <a:t>Process: Streamline mobile service fleet; reduce repair wait from 3 weeks to 5 days</a:t>
-            </a:r>
-            <a:endParaRPr lang="en-US" sz="850" dirty="0"/>
-          </a:p>
-          <a:p>
-            <a:pPr marL="342900" indent="-342900">
-              <a:buSzPct val="100000"/>
-              <a:buChar char="•"/>
-            </a:pPr>
-            <a:r>
-              <a:rPr lang="en-US" sz="850" dirty="0">
-                <a:solidFill>
-                  <a:srgbClr val="888899"/>
-                </a:solidFill>
-              </a:rPr>
-              <a:t>Physical Evidence: Redesign showrooms with VR test drives and lifestyle zones</a:t>
-            </a:r>
-            <a:endParaRPr lang="en-US" sz="850" dirty="0"/>
-          </a:p>
-        </p:txBody>
-      </p:sp>
-      <p:sp>
-        <p:nvSpPr>
-          <p:cNvPr id="11" name="Shape 9"/>
-          <p:cNvSpPr/>
-          <p:nvPr/>
-        </p:nvSpPr>
-        <p:spPr>
-          <a:xfrm>
-            <a:off x="4754880" y="1234440"/>
-            <a:ext cx="4023360" cy="3657600"/>
+              <a:t>Physical: VR test drives in showrooms — let people experience the future</a:t>
+            </a:r>
+            <a:endParaRPr lang="en-US" sz="900" dirty="0"/>
+          </a:p>
+        </p:txBody>
+      </p:sp>
+      <p:sp>
+        <p:nvSpPr>
+          <p:cNvPr id="10" name="Shape 8"/>
+          <p:cNvSpPr/>
+          <p:nvPr/>
+        </p:nvSpPr>
+        <p:spPr>
+          <a:xfrm>
+            <a:off x="4754880" y="1600200"/>
+            <a:ext cx="4023360" cy="3291840"/>
           </a:xfrm>
           <a:prstGeom prst="rect">
             <a:avLst/>
@@ -9055,14 +9146,14 @@
       </p:sp>
       <p:sp>
         <p:nvSpPr>
-          <p:cNvPr id="12" name="Shape 10"/>
-          <p:cNvSpPr/>
-          <p:nvPr/>
-        </p:nvSpPr>
-        <p:spPr>
-          <a:xfrm>
-            <a:off x="4754880" y="1234440"/>
-            <a:ext cx="54864" cy="3657600"/>
+          <p:cNvPr id="11" name="Shape 9"/>
+          <p:cNvSpPr/>
+          <p:nvPr/>
+        </p:nvSpPr>
+        <p:spPr>
+          <a:xfrm>
+            <a:off x="4754880" y="1600200"/>
+            <a:ext cx="54864" cy="3291840"/>
           </a:xfrm>
           <a:prstGeom prst="rect">
             <a:avLst/>
@@ -9075,13 +9166,13 @@
       </p:sp>
       <p:sp>
         <p:nvSpPr>
-          <p:cNvPr id="13" name="Text 11"/>
-          <p:cNvSpPr/>
-          <p:nvPr/>
-        </p:nvSpPr>
-        <p:spPr>
-          <a:xfrm>
-            <a:off x="4983480" y="1325880"/>
+          <p:cNvPr id="12" name="Text 10"/>
+          <p:cNvSpPr/>
+          <p:nvPr/>
+        </p:nvSpPr>
+        <p:spPr>
+          <a:xfrm>
+            <a:off x="4983480" y="1691640"/>
             <a:ext cx="3474720" cy="274320"/>
           </a:xfrm>
           <a:prstGeom prst="rect">
@@ -9098,7 +9189,7 @@
               <a:buNone/>
             </a:pPr>
             <a:r>
-              <a:rPr lang="en-US" sz="1100" b="1" dirty="0">
+              <a:rPr lang="en-US" sz="1200" b="1" dirty="0">
                 <a:solidFill>
                   <a:srgbClr val="5C9CE6"/>
                 </a:solidFill>
@@ -9106,22 +9197,22 @@
                 <a:ea typeface="Arial" pitchFamily="34" charset="-122"/>
                 <a:cs typeface="Arial" pitchFamily="34" charset="-120"/>
               </a:rPr>
-              <a:t>STP Strategy Recommendations</a:t>
-            </a:r>
-            <a:endParaRPr lang="en-US" sz="1100" dirty="0"/>
-          </a:p>
-        </p:txBody>
-      </p:sp>
-      <p:sp>
-        <p:nvSpPr>
-          <p:cNvPr id="14" name="Text 12"/>
-          <p:cNvSpPr/>
-          <p:nvPr/>
-        </p:nvSpPr>
-        <p:spPr>
-          <a:xfrm>
-            <a:off x="4983480" y="1691640"/>
-            <a:ext cx="3611880" cy="3017520"/>
+              <a:t>Expand the Story (STP)</a:t>
+            </a:r>
+            <a:endParaRPr lang="en-US" sz="1200" dirty="0"/>
+          </a:p>
+        </p:txBody>
+      </p:sp>
+      <p:sp>
+        <p:nvSpPr>
+          <p:cNvPr id="13" name="Text 11"/>
+          <p:cNvSpPr/>
+          <p:nvPr/>
+        </p:nvSpPr>
+        <p:spPr>
+          <a:xfrm>
+            <a:off x="4983480" y="2057400"/>
+            <a:ext cx="3611880" cy="2651760"/>
           </a:xfrm>
           <a:prstGeom prst="rect">
             <a:avLst/>
@@ -9138,14 +9229,14 @@
               <a:buChar char="•"/>
             </a:pPr>
             <a:r>
-              <a:rPr lang="en-US" sz="850" dirty="0">
+              <a:rPr lang="en-US" sz="900" dirty="0">
                 <a:solidFill>
                   <a:srgbClr val="888899"/>
                 </a:solidFill>
               </a:rPr>
-              <a:t>Broaden targeting to include mid-income consumers ($50-75K HHI) via affordable model</a:t>
-            </a:r>
-            <a:endParaRPr lang="en-US" sz="850" dirty="0"/>
+              <a:t>Go broader: mid-income ($50-75K) is a massive untapped segment</a:t>
+            </a:r>
+            <a:endParaRPr lang="en-US" sz="900" dirty="0"/>
           </a:p>
           <a:p>
             <a:pPr marL="342900" indent="-342900">
@@ -9153,14 +9244,14 @@
               <a:buChar char="•"/>
             </a:pPr>
             <a:r>
-              <a:rPr lang="en-US" sz="850" dirty="0">
+              <a:rPr lang="en-US" sz="900" dirty="0">
                 <a:solidFill>
                   <a:srgbClr val="888899"/>
                 </a:solidFill>
               </a:rPr>
-              <a:t>Strengthen positioning vs Chinese EVs (BYD Seal, MG4) on software and safety</a:t>
-            </a:r>
-            <a:endParaRPr lang="en-US" sz="850" dirty="0"/>
+              <a:t>Go global: strengthen positioning vs BYD and Chinese EVs before they dominate</a:t>
+            </a:r>
+            <a:endParaRPr lang="en-US" sz="900" dirty="0"/>
           </a:p>
           <a:p>
             <a:pPr marL="342900" indent="-342900">
@@ -9168,14 +9259,14 @@
               <a:buChar char="•"/>
             </a:pPr>
             <a:r>
-              <a:rPr lang="en-US" sz="850" dirty="0">
+              <a:rPr lang="en-US" sz="900" dirty="0">
                 <a:solidFill>
                   <a:srgbClr val="888899"/>
                 </a:solidFill>
               </a:rPr>
-              <a:t>Develop dedicated fleet/B2B segment — corporate ESG mandates driving demand</a:t>
-            </a:r>
-            <a:endParaRPr lang="en-US" sz="850" dirty="0"/>
+              <a:t>Go corporate: fleet/B2B for companies with ESG mandates</a:t>
+            </a:r>
+            <a:endParaRPr lang="en-US" sz="900" dirty="0"/>
           </a:p>
           <a:p>
             <a:pPr marL="342900" indent="-342900">
@@ -9183,14 +9274,14 @@
               <a:buChar char="•"/>
             </a:pPr>
             <a:r>
-              <a:rPr lang="en-US" sz="850" dirty="0">
+              <a:rPr lang="en-US" sz="900" dirty="0">
                 <a:solidFill>
                   <a:srgbClr val="888899"/>
                 </a:solidFill>
               </a:rPr>
-              <a:t>Localize marketing for regional US differences (rural range anxiety vs urban charging)</a:t>
-            </a:r>
-            <a:endParaRPr lang="en-US" sz="850" dirty="0"/>
+              <a:t>Go inclusive: only 28% of buyers are women — huge opportunity</a:t>
+            </a:r>
+            <a:endParaRPr lang="en-US" sz="900" dirty="0"/>
           </a:p>
           <a:p>
             <a:pPr marL="342900" indent="-342900">
@@ -9198,14 +9289,14 @@
               <a:buChar char="•"/>
             </a:pPr>
             <a:r>
-              <a:rPr lang="en-US" sz="850" dirty="0">
+              <a:rPr lang="en-US" sz="900" dirty="0">
                 <a:solidFill>
                   <a:srgbClr val="888899"/>
                 </a:solidFill>
               </a:rPr>
-              <a:t>Leverage 91% satisfaction score in testimonial-based positioning campaigns</a:t>
-            </a:r>
-            <a:endParaRPr lang="en-US" sz="850" dirty="0"/>
+              <a:t>Go younger: all-inclusive subscription model for Gen Z/Millennials</a:t>
+            </a:r>
+            <a:endParaRPr lang="en-US" sz="900" dirty="0"/>
           </a:p>
           <a:p>
             <a:pPr marL="342900" indent="-342900">
@@ -9213,14 +9304,14 @@
               <a:buChar char="•"/>
             </a:pPr>
             <a:r>
-              <a:rPr lang="en-US" sz="850" dirty="0">
+              <a:rPr lang="en-US" sz="900" dirty="0">
                 <a:solidFill>
                   <a:srgbClr val="888899"/>
                 </a:solidFill>
               </a:rPr>
-              <a:t>Expand female buyer targeting — currently only 28% of Model 3 buyers are women</a:t>
-            </a:r>
-            <a:endParaRPr lang="en-US" sz="850" dirty="0"/>
+              <a:t>Go local: tailor messaging for rural (range) vs urban (charging) markets</a:t>
+            </a:r>
+            <a:endParaRPr lang="en-US" sz="900" dirty="0"/>
           </a:p>
           <a:p>
             <a:pPr marL="342900" indent="-342900">
@@ -9228,29 +9319,14 @@
               <a:buChar char="•"/>
             </a:pPr>
             <a:r>
-              <a:rPr lang="en-US" sz="850" dirty="0">
+              <a:rPr lang="en-US" sz="900" dirty="0">
                 <a:solidFill>
                   <a:srgbClr val="888899"/>
                 </a:solidFill>
               </a:rPr>
-              <a:t>Position Model 3 as 'best value in class' not 'cheapest Tesla' to protect brand equity</a:t>
-            </a:r>
-            <a:endParaRPr lang="en-US" sz="850" dirty="0"/>
-          </a:p>
-          <a:p>
-            <a:pPr marL="342900" indent="-342900">
-              <a:buSzPct val="100000"/>
-              <a:buChar char="•"/>
-            </a:pPr>
-            <a:r>
-              <a:rPr lang="en-US" sz="850" dirty="0">
-                <a:solidFill>
-                  <a:srgbClr val="888899"/>
-                </a:solidFill>
-              </a:rPr>
-              <a:t>Create subscription tier for younger buyers: all-inclusive monthly EV package</a:t>
-            </a:r>
-            <a:endParaRPr lang="en-US" sz="850" dirty="0"/>
+              <a:t>Reposition: 'best value in class' not 'cheapest Tesla' to protect brand</a:t>
+            </a:r>
+            <a:endParaRPr lang="en-US" sz="900" dirty="0"/>
           </a:p>
         </p:txBody>
       </p:sp>

--- a/Tesla_Model3_Marketing.pptx
+++ b/Tesla_Model3_Marketing.pptx
@@ -11,9 +11,10 @@
     <p:sldId id="259" r:id="rId5"/>
     <p:sldId id="260" r:id="rId6"/>
     <p:sldId id="261" r:id="rId7"/>
+    <p:sldId id="262" r:id="rId8"/>
   </p:sldIdLst>
   <p:notesMasterIdLst>
-    <p:notesMasterId r:id="rId8"/>
+    <p:notesMasterId r:id="rId9"/>
   </p:notesMasterIdLst>
   <p:sldSz cx="9144000" cy="5143500"/>
   <p:notesSz cx="5143500" cy="9144000"/>
@@ -971,6 +972,94 @@
             <a:fld id="{F7021451-1387-4CA6-816F-3879F97B5CBC}" type="slidenum">
               <a:rPr lang="en-US"/>
               <a:t>6</a:t>
+            </a:fld>
+            <a:endParaRPr lang="en-US"/>
+          </a:p>
+        </p:txBody>
+      </p:sp>
+    </p:spTree>
+    <p:extLst>
+      <p:ext uri="{BB962C8B-B14F-4D97-AF65-F5344CB8AC3E}">
+        <p14:creationId xmlns:p14="http://schemas.microsoft.com/office/powerpoint/2010/main" val="1024086991"/>
+      </p:ext>
+    </p:extLst>
+  </p:cSld>
+  <p:clrMapOvr>
+    <a:masterClrMapping/>
+  </p:clrMapOvr>
+</p:notes>
+</file>
+
+<file path=ppt/notesSlides/notesSlide7.xml><?xml version="1.0" encoding="utf-8"?>
+<p:notes xmlns:a="http://schemas.openxmlformats.org/drawingml/2006/main" xmlns:r="http://schemas.openxmlformats.org/officeDocument/2006/relationships" xmlns:p="http://schemas.openxmlformats.org/presentationml/2006/main">
+  <p:cSld>
+    <p:spTree>
+      <p:nvGrpSpPr>
+        <p:cNvPr id="1" name=""/>
+        <p:cNvGrpSpPr/>
+        <p:nvPr/>
+      </p:nvGrpSpPr>
+      <p:grpSpPr>
+        <a:xfrm>
+          <a:off x="0" y="0"/>
+          <a:ext cx="0" cy="0"/>
+          <a:chOff x="0" y="0"/>
+          <a:chExt cx="0" cy="0"/>
+        </a:xfrm>
+      </p:grpSpPr>
+      <p:sp>
+        <p:nvSpPr>
+          <p:cNvPr id="2" name="Slide Image Placeholder 1"/>
+          <p:cNvSpPr>
+            <a:spLocks noGrp="1" noRot="1" noChangeAspect="1"/>
+          </p:cNvSpPr>
+          <p:nvPr>
+            <p:ph type="sldImg"/>
+          </p:nvPr>
+        </p:nvSpPr>
+        <p:spPr/>
+      </p:sp>
+      <p:sp>
+        <p:nvSpPr>
+          <p:cNvPr id="3" name="Notes Placeholder 2"/>
+          <p:cNvSpPr>
+            <a:spLocks noGrp="1"/>
+          </p:cNvSpPr>
+          <p:nvPr>
+            <p:ph type="body" idx="1"/>
+          </p:nvPr>
+        </p:nvSpPr>
+        <p:spPr/>
+        <p:txBody>
+          <a:bodyPr/>
+          <a:lstStyle/>
+          <a:p>
+            <a:r>
+              <a:rPr lang="en-US" dirty="0"/>
+              <a:t/>
+            </a:r>
+            <a:endParaRPr lang="en-US" dirty="0"/>
+          </a:p>
+        </p:txBody>
+      </p:sp>
+      <p:sp>
+        <p:nvSpPr>
+          <p:cNvPr id="4" name="Slide Number Placeholder 3"/>
+          <p:cNvSpPr>
+            <a:spLocks noGrp="1"/>
+          </p:cNvSpPr>
+          <p:nvPr>
+            <p:ph type="sldNum" sz="quarter" idx="10"/>
+          </p:nvPr>
+        </p:nvSpPr>
+        <p:spPr/>
+        <p:txBody>
+          <a:bodyPr/>
+          <a:lstStyle/>
+          <a:p>
+            <a:fld id="{F7021451-1387-4CA6-816F-3879F97B5CBC}" type="slidenum">
+              <a:rPr lang="en-US"/>
+              <a:t>7</a:t>
             </a:fld>
             <a:endParaRPr lang="en-US"/>
           </a:p>
@@ -8169,34 +8258,14 @@
       </p:sp>
       <p:sp>
         <p:nvSpPr>
-          <p:cNvPr id="3" name="Shape 1"/>
-          <p:cNvSpPr/>
-          <p:nvPr/>
-        </p:nvSpPr>
-        <p:spPr>
-          <a:xfrm>
-            <a:off x="0" y="5116068"/>
-            <a:ext cx="9144000" cy="27432"/>
-          </a:xfrm>
-          <a:prstGeom prst="rect">
-            <a:avLst/>
-          </a:prstGeom>
-          <a:solidFill>
-            <a:srgbClr val="E82127"/>
-          </a:solidFill>
-          <a:ln/>
-        </p:spPr>
-      </p:sp>
-      <p:sp>
-        <p:nvSpPr>
-          <p:cNvPr id="4" name="Text 2"/>
-          <p:cNvSpPr/>
-          <p:nvPr/>
-        </p:nvSpPr>
-        <p:spPr>
-          <a:xfrm>
-            <a:off x="457200" y="365760"/>
-            <a:ext cx="8229600" cy="457200"/>
+          <p:cNvPr id="3" name="Text 1"/>
+          <p:cNvSpPr/>
+          <p:nvPr/>
+        </p:nvSpPr>
+        <p:spPr>
+          <a:xfrm>
+            <a:off x="457200" y="137160"/>
+            <a:ext cx="731520" cy="502920"/>
           </a:xfrm>
           <a:prstGeom prst="rect">
             <a:avLst/>
@@ -8208,11 +8277,50 @@
           <a:bodyPr wrap="square" lIns="0" tIns="0" rIns="0" bIns="0" rtlCol="0" anchor="ctr"/>
           <a:lstStyle/>
           <a:p>
-            <a:pPr algn="ctr" indent="0" marL="0">
+            <a:pPr indent="0" marL="0">
               <a:buNone/>
             </a:pPr>
             <a:r>
-              <a:rPr lang="en-US" sz="2400" dirty="0">
+              <a:rPr lang="en-US" sz="2800" dirty="0">
+                <a:solidFill>
+                  <a:srgbClr val="E82127"/>
+                </a:solidFill>
+                <a:latin typeface="Arial Black" pitchFamily="34" charset="0"/>
+                <a:ea typeface="Arial Black" pitchFamily="34" charset="-122"/>
+                <a:cs typeface="Arial Black" pitchFamily="34" charset="-120"/>
+              </a:rPr>
+              <a:t>05</a:t>
+            </a:r>
+            <a:endParaRPr lang="en-US" sz="2800" dirty="0"/>
+          </a:p>
+        </p:txBody>
+      </p:sp>
+      <p:sp>
+        <p:nvSpPr>
+          <p:cNvPr id="4" name="Text 2"/>
+          <p:cNvSpPr/>
+          <p:nvPr/>
+        </p:nvSpPr>
+        <p:spPr>
+          <a:xfrm>
+            <a:off x="457200" y="502920"/>
+            <a:ext cx="8229600" cy="411480"/>
+          </a:xfrm>
+          <a:prstGeom prst="rect">
+            <a:avLst/>
+          </a:prstGeom>
+          <a:noFill/>
+          <a:ln/>
+        </p:spPr>
+        <p:txBody>
+          <a:bodyPr wrap="square" lIns="0" tIns="0" rIns="0" bIns="0" rtlCol="0" anchor="ctr"/>
+          <a:lstStyle/>
+          <a:p>
+            <a:pPr indent="0" marL="0">
+              <a:buNone/>
+            </a:pPr>
+            <a:r>
+              <a:rPr lang="en-US" sz="2200" dirty="0">
                 <a:solidFill>
                   <a:srgbClr val="F0F0F0"/>
                 </a:solidFill>
@@ -8222,20 +8330,67 @@
               </a:rPr>
               <a:t>Executive Summary</a:t>
             </a:r>
-            <a:endParaRPr lang="en-US" sz="2400" dirty="0"/>
-          </a:p>
-        </p:txBody>
-      </p:sp>
-      <p:sp>
-        <p:nvSpPr>
-          <p:cNvPr id="5" name="Text 3"/>
-          <p:cNvSpPr/>
-          <p:nvPr/>
-        </p:nvSpPr>
-        <p:spPr>
-          <a:xfrm>
-            <a:off x="914400" y="960120"/>
-            <a:ext cx="7315200" cy="365760"/>
+            <a:endParaRPr lang="en-US" sz="2200" dirty="0"/>
+          </a:p>
+        </p:txBody>
+      </p:sp>
+      <p:sp>
+        <p:nvSpPr>
+          <p:cNvPr id="5" name="Shape 3"/>
+          <p:cNvSpPr/>
+          <p:nvPr/>
+        </p:nvSpPr>
+        <p:spPr>
+          <a:xfrm>
+            <a:off x="457200" y="1188720"/>
+            <a:ext cx="8229600" cy="3657600"/>
+          </a:xfrm>
+          <a:prstGeom prst="rect">
+            <a:avLst/>
+          </a:prstGeom>
+          <a:solidFill>
+            <a:srgbClr val="141420"/>
+          </a:solidFill>
+          <a:ln/>
+          <a:effectLst>
+            <a:outerShdw sx="100000" sy="100000" kx="0" ky="0" algn="bl" rotWithShape="0" blurRad="76200" dist="25400" dir="8100000">
+              <a:srgbClr val="000000">
+                <a:alpha val="35000"/>
+              </a:srgbClr>
+            </a:outerShdw>
+          </a:effectLst>
+        </p:spPr>
+      </p:sp>
+      <p:sp>
+        <p:nvSpPr>
+          <p:cNvPr id="6" name="Shape 4"/>
+          <p:cNvSpPr/>
+          <p:nvPr/>
+        </p:nvSpPr>
+        <p:spPr>
+          <a:xfrm>
+            <a:off x="457200" y="1188720"/>
+            <a:ext cx="8229600" cy="32004"/>
+          </a:xfrm>
+          <a:prstGeom prst="rect">
+            <a:avLst/>
+          </a:prstGeom>
+          <a:solidFill>
+            <a:srgbClr val="E82127"/>
+          </a:solidFill>
+          <a:ln/>
+        </p:spPr>
+      </p:sp>
+      <p:sp>
+        <p:nvSpPr>
+          <p:cNvPr id="7" name="Text 5"/>
+          <p:cNvSpPr/>
+          <p:nvPr/>
+        </p:nvSpPr>
+        <p:spPr>
+          <a:xfrm>
+            <a:off x="594360" y="1280160"/>
+            <a:ext cx="3657600" cy="201168"/>
           </a:xfrm>
           <a:prstGeom prst="rect">
             <a:avLst/>
@@ -8255,12 +8410,37 @@
                 <a:solidFill>
                   <a:srgbClr val="E82127"/>
                 </a:solidFill>
-                <a:latin typeface="Arial Black" pitchFamily="34" charset="0"/>
-                <a:ea typeface="Arial Black" pitchFamily="34" charset="-122"/>
-                <a:cs typeface="Arial Black" pitchFamily="34" charset="-120"/>
+                <a:latin typeface="Arial" pitchFamily="34" charset="0"/>
+                <a:ea typeface="Arial" pitchFamily="34" charset="-122"/>
+                <a:cs typeface="Arial" pitchFamily="34" charset="-120"/>
               </a:rPr>
-              <a:t>01  </a:t>
-            </a:r>
+              <a:t>Executive Summary</a:t>
+            </a:r>
+            <a:endParaRPr lang="en-US" sz="1000" dirty="0"/>
+          </a:p>
+        </p:txBody>
+      </p:sp>
+      <p:sp>
+        <p:nvSpPr>
+          <p:cNvPr id="8" name="Text 6"/>
+          <p:cNvSpPr/>
+          <p:nvPr/>
+        </p:nvSpPr>
+        <p:spPr>
+          <a:xfrm>
+            <a:off x="594360" y="1554480"/>
+            <a:ext cx="7955280" cy="3108960"/>
+          </a:xfrm>
+          <a:prstGeom prst="rect">
+            <a:avLst/>
+          </a:prstGeom>
+          <a:noFill/>
+          <a:ln/>
+        </p:spPr>
+        <p:txBody>
+          <a:bodyPr wrap="square" lIns="0" tIns="0" rIns="0" bIns="0" rtlCol="0" anchor="ctr"/>
+          <a:lstStyle/>
+          <a:p>
             <a:pPr indent="0" marL="0">
               <a:buNone/>
             </a:pPr>
@@ -8275,20 +8455,92 @@
               </a:rPr>
               <a:t>(content to be added)</a:t>
             </a:r>
-            <a:endParaRPr lang="en-US" sz="1000" dirty="0"/>
-          </a:p>
-        </p:txBody>
-      </p:sp>
-      <p:sp>
-        <p:nvSpPr>
-          <p:cNvPr id="6" name="Text 4"/>
-          <p:cNvSpPr/>
-          <p:nvPr/>
-        </p:nvSpPr>
-        <p:spPr>
-          <a:xfrm>
-            <a:off x="914400" y="1371600"/>
-            <a:ext cx="7315200" cy="365760"/>
+            <a:endParaRPr lang="en-US" sz="900" dirty="0"/>
+          </a:p>
+        </p:txBody>
+      </p:sp>
+    </p:spTree>
+  </p:cSld>
+  <p:clrMapOvr>
+    <a:masterClrMapping/>
+  </p:clrMapOvr>
+</p:sld>
+</file>
+
+<file path=ppt/slides/slide7.xml><?xml version="1.0" encoding="utf-8"?>
+<p:sld xmlns:a="http://schemas.openxmlformats.org/drawingml/2006/main" xmlns:r="http://schemas.openxmlformats.org/officeDocument/2006/relationships" xmlns:p="http://schemas.openxmlformats.org/presentationml/2006/main">
+  <p:cSld name="Slide 7">
+    <p:bg>
+      <p:bgPr>
+        <a:solidFill>
+          <a:srgbClr val="0A0A0F"/>
+        </a:solidFill>
+      </p:bgPr>
+    </p:bg>
+    <p:spTree>
+      <p:nvGrpSpPr>
+        <p:cNvPr id="1" name=""/>
+        <p:cNvGrpSpPr/>
+        <p:nvPr/>
+      </p:nvGrpSpPr>
+      <p:grpSpPr>
+        <a:xfrm>
+          <a:off x="0" y="0"/>
+          <a:ext cx="0" cy="0"/>
+          <a:chOff x="0" y="0"/>
+          <a:chExt cx="0" cy="0"/>
+        </a:xfrm>
+      </p:grpSpPr>
+      <p:sp>
+        <p:nvSpPr>
+          <p:cNvPr id="2" name="Shape 0"/>
+          <p:cNvSpPr/>
+          <p:nvPr/>
+        </p:nvSpPr>
+        <p:spPr>
+          <a:xfrm>
+            <a:off x="0" y="0"/>
+            <a:ext cx="9144000" cy="27432"/>
+          </a:xfrm>
+          <a:prstGeom prst="rect">
+            <a:avLst/>
+          </a:prstGeom>
+          <a:solidFill>
+            <a:srgbClr val="E82127"/>
+          </a:solidFill>
+          <a:ln/>
+        </p:spPr>
+      </p:sp>
+      <p:sp>
+        <p:nvSpPr>
+          <p:cNvPr id="3" name="Shape 1"/>
+          <p:cNvSpPr/>
+          <p:nvPr/>
+        </p:nvSpPr>
+        <p:spPr>
+          <a:xfrm>
+            <a:off x="0" y="5116068"/>
+            <a:ext cx="9144000" cy="27432"/>
+          </a:xfrm>
+          <a:prstGeom prst="rect">
+            <a:avLst/>
+          </a:prstGeom>
+          <a:solidFill>
+            <a:srgbClr val="E82127"/>
+          </a:solidFill>
+          <a:ln/>
+        </p:spPr>
+      </p:sp>
+      <p:sp>
+        <p:nvSpPr>
+          <p:cNvPr id="4" name="Text 2"/>
+          <p:cNvSpPr/>
+          <p:nvPr/>
+        </p:nvSpPr>
+        <p:spPr>
+          <a:xfrm>
+            <a:off x="457200" y="137160"/>
+            <a:ext cx="731520" cy="502920"/>
           </a:xfrm>
           <a:prstGeom prst="rect">
             <a:avLst/>
@@ -8304,7 +8556,7 @@
               <a:buNone/>
             </a:pPr>
             <a:r>
-              <a:rPr lang="en-US" sz="1000" b="1" dirty="0">
+              <a:rPr lang="en-US" sz="2800" dirty="0">
                 <a:solidFill>
                   <a:srgbClr val="E82127"/>
                 </a:solidFill>
@@ -8312,8 +8564,197 @@
                 <a:ea typeface="Arial Black" pitchFamily="34" charset="-122"/>
                 <a:cs typeface="Arial Black" pitchFamily="34" charset="-120"/>
               </a:rPr>
-              <a:t>02  </a:t>
-            </a:r>
+              <a:t>06</a:t>
+            </a:r>
+            <a:endParaRPr lang="en-US" sz="2800" dirty="0"/>
+          </a:p>
+        </p:txBody>
+      </p:sp>
+      <p:sp>
+        <p:nvSpPr>
+          <p:cNvPr id="5" name="Text 3"/>
+          <p:cNvSpPr/>
+          <p:nvPr/>
+        </p:nvSpPr>
+        <p:spPr>
+          <a:xfrm>
+            <a:off x="457200" y="502920"/>
+            <a:ext cx="8229600" cy="411480"/>
+          </a:xfrm>
+          <a:prstGeom prst="rect">
+            <a:avLst/>
+          </a:prstGeom>
+          <a:noFill/>
+          <a:ln/>
+        </p:spPr>
+        <p:txBody>
+          <a:bodyPr wrap="square" lIns="0" tIns="0" rIns="0" bIns="0" rtlCol="0" anchor="ctr"/>
+          <a:lstStyle/>
+          <a:p>
+            <a:pPr indent="0" marL="0">
+              <a:buNone/>
+            </a:pPr>
+            <a:r>
+              <a:rPr lang="en-US" sz="2200" dirty="0">
+                <a:solidFill>
+                  <a:srgbClr val="F0F0F0"/>
+                </a:solidFill>
+                <a:latin typeface="Arial Black" pitchFamily="34" charset="0"/>
+                <a:ea typeface="Arial Black" pitchFamily="34" charset="-122"/>
+                <a:cs typeface="Arial Black" pitchFamily="34" charset="-120"/>
+              </a:rPr>
+              <a:t>References</a:t>
+            </a:r>
+            <a:endParaRPr lang="en-US" sz="2200" dirty="0"/>
+          </a:p>
+        </p:txBody>
+      </p:sp>
+      <p:sp>
+        <p:nvSpPr>
+          <p:cNvPr id="6" name="Text 4"/>
+          <p:cNvSpPr/>
+          <p:nvPr/>
+        </p:nvSpPr>
+        <p:spPr>
+          <a:xfrm>
+            <a:off x="457200" y="868680"/>
+            <a:ext cx="7315200" cy="274320"/>
+          </a:xfrm>
+          <a:prstGeom prst="rect">
+            <a:avLst/>
+          </a:prstGeom>
+          <a:noFill/>
+          <a:ln/>
+        </p:spPr>
+        <p:txBody>
+          <a:bodyPr wrap="square" lIns="0" tIns="0" rIns="0" bIns="0" rtlCol="0" anchor="ctr"/>
+          <a:lstStyle/>
+          <a:p>
+            <a:pPr indent="0" marL="0">
+              <a:buNone/>
+            </a:pPr>
+            <a:r>
+              <a:rPr lang="en-US" sz="1000" i="1" dirty="0">
+                <a:solidFill>
+                  <a:srgbClr val="666677"/>
+                </a:solidFill>
+                <a:latin typeface="Georgia" pitchFamily="34" charset="0"/>
+                <a:ea typeface="Georgia" pitchFamily="34" charset="-122"/>
+                <a:cs typeface="Georgia" pitchFamily="34" charset="-120"/>
+              </a:rPr>
+              <a:t>Sources &amp; Citations</a:t>
+            </a:r>
+            <a:endParaRPr lang="en-US" sz="1000" dirty="0"/>
+          </a:p>
+        </p:txBody>
+      </p:sp>
+      <p:sp>
+        <p:nvSpPr>
+          <p:cNvPr id="7" name="Shape 5"/>
+          <p:cNvSpPr/>
+          <p:nvPr/>
+        </p:nvSpPr>
+        <p:spPr>
+          <a:xfrm>
+            <a:off x="457200" y="1188720"/>
+            <a:ext cx="8229600" cy="3200400"/>
+          </a:xfrm>
+          <a:prstGeom prst="rect">
+            <a:avLst/>
+          </a:prstGeom>
+          <a:solidFill>
+            <a:srgbClr val="141420"/>
+          </a:solidFill>
+          <a:ln/>
+          <a:effectLst>
+            <a:outerShdw sx="100000" sy="100000" kx="0" ky="0" algn="bl" rotWithShape="0" blurRad="76200" dist="25400" dir="8100000">
+              <a:srgbClr val="000000">
+                <a:alpha val="35000"/>
+              </a:srgbClr>
+            </a:outerShdw>
+          </a:effectLst>
+        </p:spPr>
+      </p:sp>
+      <p:sp>
+        <p:nvSpPr>
+          <p:cNvPr id="8" name="Shape 6"/>
+          <p:cNvSpPr/>
+          <p:nvPr/>
+        </p:nvSpPr>
+        <p:spPr>
+          <a:xfrm>
+            <a:off x="457200" y="1188720"/>
+            <a:ext cx="8229600" cy="32004"/>
+          </a:xfrm>
+          <a:prstGeom prst="rect">
+            <a:avLst/>
+          </a:prstGeom>
+          <a:solidFill>
+            <a:srgbClr val="E82127"/>
+          </a:solidFill>
+          <a:ln/>
+        </p:spPr>
+      </p:sp>
+      <p:sp>
+        <p:nvSpPr>
+          <p:cNvPr id="9" name="Text 7"/>
+          <p:cNvSpPr/>
+          <p:nvPr/>
+        </p:nvSpPr>
+        <p:spPr>
+          <a:xfrm>
+            <a:off x="594360" y="1280160"/>
+            <a:ext cx="3657600" cy="201168"/>
+          </a:xfrm>
+          <a:prstGeom prst="rect">
+            <a:avLst/>
+          </a:prstGeom>
+          <a:noFill/>
+          <a:ln/>
+        </p:spPr>
+        <p:txBody>
+          <a:bodyPr wrap="square" lIns="0" tIns="0" rIns="0" bIns="0" rtlCol="0" anchor="ctr"/>
+          <a:lstStyle/>
+          <a:p>
+            <a:pPr indent="0" marL="0">
+              <a:buNone/>
+            </a:pPr>
+            <a:r>
+              <a:rPr lang="en-US" sz="1000" b="1" dirty="0">
+                <a:solidFill>
+                  <a:srgbClr val="E82127"/>
+                </a:solidFill>
+                <a:latin typeface="Arial" pitchFamily="34" charset="0"/>
+                <a:ea typeface="Arial" pitchFamily="34" charset="-122"/>
+                <a:cs typeface="Arial" pitchFamily="34" charset="-120"/>
+              </a:rPr>
+              <a:t>References</a:t>
+            </a:r>
+            <a:endParaRPr lang="en-US" sz="1000" dirty="0"/>
+          </a:p>
+        </p:txBody>
+      </p:sp>
+      <p:sp>
+        <p:nvSpPr>
+          <p:cNvPr id="10" name="Text 8"/>
+          <p:cNvSpPr/>
+          <p:nvPr/>
+        </p:nvSpPr>
+        <p:spPr>
+          <a:xfrm>
+            <a:off x="594360" y="1554480"/>
+            <a:ext cx="7955280" cy="2651760"/>
+          </a:xfrm>
+          <a:prstGeom prst="rect">
+            <a:avLst/>
+          </a:prstGeom>
+          <a:noFill/>
+          <a:ln/>
+        </p:spPr>
+        <p:txBody>
+          <a:bodyPr wrap="square" lIns="0" tIns="0" rIns="0" bIns="0" rtlCol="0" anchor="ctr"/>
+          <a:lstStyle/>
+          <a:p>
             <a:pPr indent="0" marL="0">
               <a:buNone/>
             </a:pPr>
@@ -8328,219 +8769,7 @@
               </a:rPr>
               <a:t>(content to be added)</a:t>
             </a:r>
-            <a:endParaRPr lang="en-US" sz="1000" dirty="0"/>
-          </a:p>
-        </p:txBody>
-      </p:sp>
-      <p:sp>
-        <p:nvSpPr>
-          <p:cNvPr id="7" name="Text 5"/>
-          <p:cNvSpPr/>
-          <p:nvPr/>
-        </p:nvSpPr>
-        <p:spPr>
-          <a:xfrm>
-            <a:off x="914400" y="1783080"/>
-            <a:ext cx="7315200" cy="365760"/>
-          </a:xfrm>
-          <a:prstGeom prst="rect">
-            <a:avLst/>
-          </a:prstGeom>
-          <a:noFill/>
-          <a:ln/>
-        </p:spPr>
-        <p:txBody>
-          <a:bodyPr wrap="square" lIns="0" tIns="0" rIns="0" bIns="0" rtlCol="0" anchor="ctr"/>
-          <a:lstStyle/>
-          <a:p>
-            <a:pPr indent="0" marL="0">
-              <a:buNone/>
-            </a:pPr>
-            <a:r>
-              <a:rPr lang="en-US" sz="1000" b="1" dirty="0">
-                <a:solidFill>
-                  <a:srgbClr val="E82127"/>
-                </a:solidFill>
-                <a:latin typeface="Arial Black" pitchFamily="34" charset="0"/>
-                <a:ea typeface="Arial Black" pitchFamily="34" charset="-122"/>
-                <a:cs typeface="Arial Black" pitchFamily="34" charset="-120"/>
-              </a:rPr>
-              <a:t>03  </a:t>
-            </a:r>
-            <a:pPr indent="0" marL="0">
-              <a:buNone/>
-            </a:pPr>
-            <a:r>
-              <a:rPr lang="en-US" sz="900" dirty="0">
-                <a:solidFill>
-                  <a:srgbClr val="666677"/>
-                </a:solidFill>
-                <a:latin typeface="Arial" pitchFamily="34" charset="0"/>
-                <a:ea typeface="Arial" pitchFamily="34" charset="-122"/>
-                <a:cs typeface="Arial" pitchFamily="34" charset="-120"/>
-              </a:rPr>
-              <a:t>(content to be added)</a:t>
-            </a:r>
-            <a:endParaRPr lang="en-US" sz="1000" dirty="0"/>
-          </a:p>
-        </p:txBody>
-      </p:sp>
-      <p:sp>
-        <p:nvSpPr>
-          <p:cNvPr id="8" name="Text 6"/>
-          <p:cNvSpPr/>
-          <p:nvPr/>
-        </p:nvSpPr>
-        <p:spPr>
-          <a:xfrm>
-            <a:off x="914400" y="2194560"/>
-            <a:ext cx="7315200" cy="365760"/>
-          </a:xfrm>
-          <a:prstGeom prst="rect">
-            <a:avLst/>
-          </a:prstGeom>
-          <a:noFill/>
-          <a:ln/>
-        </p:spPr>
-        <p:txBody>
-          <a:bodyPr wrap="square" lIns="0" tIns="0" rIns="0" bIns="0" rtlCol="0" anchor="ctr"/>
-          <a:lstStyle/>
-          <a:p>
-            <a:pPr indent="0" marL="0">
-              <a:buNone/>
-            </a:pPr>
-            <a:r>
-              <a:rPr lang="en-US" sz="1000" b="1" dirty="0">
-                <a:solidFill>
-                  <a:srgbClr val="E82127"/>
-                </a:solidFill>
-                <a:latin typeface="Arial Black" pitchFamily="34" charset="0"/>
-                <a:ea typeface="Arial Black" pitchFamily="34" charset="-122"/>
-                <a:cs typeface="Arial Black" pitchFamily="34" charset="-120"/>
-              </a:rPr>
-              <a:t>04  </a:t>
-            </a:r>
-            <a:pPr indent="0" marL="0">
-              <a:buNone/>
-            </a:pPr>
-            <a:r>
-              <a:rPr lang="en-US" sz="900" dirty="0">
-                <a:solidFill>
-                  <a:srgbClr val="666677"/>
-                </a:solidFill>
-                <a:latin typeface="Arial" pitchFamily="34" charset="0"/>
-                <a:ea typeface="Arial" pitchFamily="34" charset="-122"/>
-                <a:cs typeface="Arial" pitchFamily="34" charset="-120"/>
-              </a:rPr>
-              <a:t>(content to be added)</a:t>
-            </a:r>
-            <a:endParaRPr lang="en-US" sz="1000" dirty="0"/>
-          </a:p>
-        </p:txBody>
-      </p:sp>
-      <p:sp>
-        <p:nvSpPr>
-          <p:cNvPr id="9" name="Text 7"/>
-          <p:cNvSpPr/>
-          <p:nvPr/>
-        </p:nvSpPr>
-        <p:spPr>
-          <a:xfrm>
-            <a:off x="914400" y="2606040"/>
-            <a:ext cx="7315200" cy="365760"/>
-          </a:xfrm>
-          <a:prstGeom prst="rect">
-            <a:avLst/>
-          </a:prstGeom>
-          <a:noFill/>
-          <a:ln/>
-        </p:spPr>
-        <p:txBody>
-          <a:bodyPr wrap="square" lIns="0" tIns="0" rIns="0" bIns="0" rtlCol="0" anchor="ctr"/>
-          <a:lstStyle/>
-          <a:p>
-            <a:pPr indent="0" marL="0">
-              <a:buNone/>
-            </a:pPr>
-            <a:r>
-              <a:rPr lang="en-US" sz="1000" b="1" dirty="0">
-                <a:solidFill>
-                  <a:srgbClr val="E82127"/>
-                </a:solidFill>
-                <a:latin typeface="Arial Black" pitchFamily="34" charset="0"/>
-                <a:ea typeface="Arial Black" pitchFamily="34" charset="-122"/>
-                <a:cs typeface="Arial Black" pitchFamily="34" charset="-120"/>
-              </a:rPr>
-              <a:t>05  </a:t>
-            </a:r>
-            <a:pPr indent="0" marL="0">
-              <a:buNone/>
-            </a:pPr>
-            <a:r>
-              <a:rPr lang="en-US" sz="900" dirty="0">
-                <a:solidFill>
-                  <a:srgbClr val="666677"/>
-                </a:solidFill>
-                <a:latin typeface="Arial" pitchFamily="34" charset="0"/>
-                <a:ea typeface="Arial" pitchFamily="34" charset="-122"/>
-                <a:cs typeface="Arial" pitchFamily="34" charset="-120"/>
-              </a:rPr>
-              <a:t>(content to be added)</a:t>
-            </a:r>
-            <a:endParaRPr lang="en-US" sz="1000" dirty="0"/>
-          </a:p>
-        </p:txBody>
-      </p:sp>
-      <p:sp>
-        <p:nvSpPr>
-          <p:cNvPr id="10" name="Text 8"/>
-          <p:cNvSpPr/>
-          <p:nvPr/>
-        </p:nvSpPr>
-        <p:spPr>
-          <a:xfrm>
-            <a:off x="914400" y="3017520"/>
-            <a:ext cx="7315200" cy="365760"/>
-          </a:xfrm>
-          <a:prstGeom prst="rect">
-            <a:avLst/>
-          </a:prstGeom>
-          <a:noFill/>
-          <a:ln/>
-        </p:spPr>
-        <p:txBody>
-          <a:bodyPr wrap="square" lIns="0" tIns="0" rIns="0" bIns="0" rtlCol="0" anchor="ctr"/>
-          <a:lstStyle/>
-          <a:p>
-            <a:pPr indent="0" marL="0">
-              <a:buNone/>
-            </a:pPr>
-            <a:r>
-              <a:rPr lang="en-US" sz="1000" b="1" dirty="0">
-                <a:solidFill>
-                  <a:srgbClr val="E82127"/>
-                </a:solidFill>
-                <a:latin typeface="Arial Black" pitchFamily="34" charset="0"/>
-                <a:ea typeface="Arial Black" pitchFamily="34" charset="-122"/>
-                <a:cs typeface="Arial Black" pitchFamily="34" charset="-120"/>
-              </a:rPr>
-              <a:t>06  </a:t>
-            </a:r>
-            <a:pPr indent="0" marL="0">
-              <a:buNone/>
-            </a:pPr>
-            <a:r>
-              <a:rPr lang="en-US" sz="900" dirty="0">
-                <a:solidFill>
-                  <a:srgbClr val="666677"/>
-                </a:solidFill>
-                <a:latin typeface="Arial" pitchFamily="34" charset="0"/>
-                <a:ea typeface="Arial" pitchFamily="34" charset="-122"/>
-                <a:cs typeface="Arial" pitchFamily="34" charset="-120"/>
-              </a:rPr>
-              <a:t>(content to be added)</a:t>
-            </a:r>
-            <a:endParaRPr lang="en-US" sz="1000" dirty="0"/>
+            <a:endParaRPr lang="en-US" sz="900" dirty="0"/>
           </a:p>
         </p:txBody>
       </p:sp>
@@ -8552,159 +8781,8 @@
         </p:nvSpPr>
         <p:spPr>
           <a:xfrm>
-            <a:off x="914400" y="3429000"/>
-            <a:ext cx="7315200" cy="365760"/>
-          </a:xfrm>
-          <a:prstGeom prst="rect">
-            <a:avLst/>
-          </a:prstGeom>
-          <a:noFill/>
-          <a:ln/>
-        </p:spPr>
-        <p:txBody>
-          <a:bodyPr wrap="square" lIns="0" tIns="0" rIns="0" bIns="0" rtlCol="0" anchor="ctr"/>
-          <a:lstStyle/>
-          <a:p>
-            <a:pPr indent="0" marL="0">
-              <a:buNone/>
-            </a:pPr>
-            <a:r>
-              <a:rPr lang="en-US" sz="1000" b="1" dirty="0">
-                <a:solidFill>
-                  <a:srgbClr val="E82127"/>
-                </a:solidFill>
-                <a:latin typeface="Arial Black" pitchFamily="34" charset="0"/>
-                <a:ea typeface="Arial Black" pitchFamily="34" charset="-122"/>
-                <a:cs typeface="Arial Black" pitchFamily="34" charset="-120"/>
-              </a:rPr>
-              <a:t>07  </a:t>
-            </a:r>
-            <a:pPr indent="0" marL="0">
-              <a:buNone/>
-            </a:pPr>
-            <a:r>
-              <a:rPr lang="en-US" sz="900" dirty="0">
-                <a:solidFill>
-                  <a:srgbClr val="666677"/>
-                </a:solidFill>
-                <a:latin typeface="Arial" pitchFamily="34" charset="0"/>
-                <a:ea typeface="Arial" pitchFamily="34" charset="-122"/>
-                <a:cs typeface="Arial" pitchFamily="34" charset="-120"/>
-              </a:rPr>
-              <a:t>(content to be added)</a:t>
-            </a:r>
-            <a:endParaRPr lang="en-US" sz="1000" dirty="0"/>
-          </a:p>
-        </p:txBody>
-      </p:sp>
-      <p:sp>
-        <p:nvSpPr>
-          <p:cNvPr id="12" name="Shape 10"/>
-          <p:cNvSpPr/>
-          <p:nvPr/>
-        </p:nvSpPr>
-        <p:spPr>
-          <a:xfrm>
-            <a:off x="457200" y="3931920"/>
-            <a:ext cx="8229600" cy="27432"/>
-          </a:xfrm>
-          <a:prstGeom prst="rect">
-            <a:avLst/>
-          </a:prstGeom>
-          <a:solidFill>
-            <a:srgbClr val="2A2A3A"/>
-          </a:solidFill>
-          <a:ln/>
-        </p:spPr>
-      </p:sp>
-      <p:sp>
-        <p:nvSpPr>
-          <p:cNvPr id="13" name="Text 11"/>
-          <p:cNvSpPr/>
-          <p:nvPr/>
-        </p:nvSpPr>
-        <p:spPr>
-          <a:xfrm>
-            <a:off x="457200" y="4005072"/>
-            <a:ext cx="2743200" cy="182880"/>
-          </a:xfrm>
-          <a:prstGeom prst="rect">
-            <a:avLst/>
-          </a:prstGeom>
-          <a:noFill/>
-          <a:ln/>
-        </p:spPr>
-        <p:txBody>
-          <a:bodyPr wrap="square" lIns="0" tIns="0" rIns="0" bIns="0" rtlCol="0" anchor="ctr"/>
-          <a:lstStyle/>
-          <a:p>
-            <a:pPr indent="0" marL="0">
-              <a:buNone/>
-            </a:pPr>
-            <a:r>
-              <a:rPr lang="en-US" sz="800" b="1" spc="300" kern="0" dirty="0">
-                <a:solidFill>
-                  <a:srgbClr val="E82127"/>
-                </a:solidFill>
-                <a:latin typeface="Arial" pitchFamily="34" charset="0"/>
-                <a:ea typeface="Arial" pitchFamily="34" charset="-122"/>
-                <a:cs typeface="Arial" pitchFamily="34" charset="-120"/>
-              </a:rPr>
-              <a:t>REFERENCES</a:t>
-            </a:r>
-            <a:endParaRPr lang="en-US" sz="800" dirty="0"/>
-          </a:p>
-        </p:txBody>
-      </p:sp>
-      <p:sp>
-        <p:nvSpPr>
-          <p:cNvPr id="14" name="Text 12"/>
-          <p:cNvSpPr/>
-          <p:nvPr/>
-        </p:nvSpPr>
-        <p:spPr>
-          <a:xfrm>
-            <a:off x="457200" y="4206240"/>
-            <a:ext cx="8229600" cy="502920"/>
-          </a:xfrm>
-          <a:prstGeom prst="rect">
-            <a:avLst/>
-          </a:prstGeom>
-          <a:noFill/>
-          <a:ln/>
-        </p:spPr>
-        <p:txBody>
-          <a:bodyPr wrap="square" lIns="0" tIns="0" rIns="0" bIns="0" rtlCol="0" anchor="ctr"/>
-          <a:lstStyle/>
-          <a:p>
-            <a:pPr indent="0" marL="0">
-              <a:buNone/>
-            </a:pPr>
-            <a:r>
-              <a:rPr lang="en-US" sz="700" dirty="0">
-                <a:solidFill>
-                  <a:srgbClr val="666677"/>
-                </a:solidFill>
-                <a:latin typeface="Arial" pitchFamily="34" charset="0"/>
-                <a:ea typeface="Arial" pitchFamily="34" charset="-122"/>
-                <a:cs typeface="Arial" pitchFamily="34" charset="-120"/>
-              </a:rPr>
-              <a:t>(content to be added)</a:t>
-            </a:r>
-            <a:endParaRPr lang="en-US" sz="700" dirty="0"/>
-          </a:p>
-        </p:txBody>
-      </p:sp>
-      <p:sp>
-        <p:nvSpPr>
-          <p:cNvPr id="15" name="Text 13"/>
-          <p:cNvSpPr/>
-          <p:nvPr/>
-        </p:nvSpPr>
-        <p:spPr>
-          <a:xfrm>
-            <a:off x="0" y="4754880"/>
-            <a:ext cx="9144000" cy="274320"/>
+            <a:off x="0" y="4663440"/>
+            <a:ext cx="9144000" cy="320040"/>
           </a:xfrm>
           <a:prstGeom prst="rect">
             <a:avLst/>
@@ -8720,7 +8798,7 @@
               <a:buNone/>
             </a:pPr>
             <a:r>
-              <a:rPr lang="en-US" sz="1600" dirty="0">
+              <a:rPr lang="en-US" sz="1800" dirty="0">
                 <a:solidFill>
                   <a:srgbClr val="E82127"/>
                 </a:solidFill>
@@ -8730,7 +8808,7 @@
               </a:rPr>
               <a:t>Thank You</a:t>
             </a:r>
-            <a:endParaRPr lang="en-US" sz="1600" dirty="0"/>
+            <a:endParaRPr lang="en-US" sz="1800" dirty="0"/>
           </a:p>
         </p:txBody>
       </p:sp>

--- a/Tesla_Model3_Marketing.pptx
+++ b/Tesla_Model3_Marketing.pptx
@@ -11,10 +11,9 @@
     <p:sldId id="259" r:id="rId5"/>
     <p:sldId id="260" r:id="rId6"/>
     <p:sldId id="261" r:id="rId7"/>
-    <p:sldId id="262" r:id="rId8"/>
   </p:sldIdLst>
   <p:notesMasterIdLst>
-    <p:notesMasterId r:id="rId9"/>
+    <p:notesMasterId r:id="rId8"/>
   </p:notesMasterIdLst>
   <p:sldSz cx="9144000" cy="5143500"/>
   <p:notesSz cx="5143500" cy="9144000"/>
@@ -972,94 +971,6 @@
             <a:fld id="{F7021451-1387-4CA6-816F-3879F97B5CBC}" type="slidenum">
               <a:rPr lang="en-US"/>
               <a:t>6</a:t>
-            </a:fld>
-            <a:endParaRPr lang="en-US"/>
-          </a:p>
-        </p:txBody>
-      </p:sp>
-    </p:spTree>
-    <p:extLst>
-      <p:ext uri="{BB962C8B-B14F-4D97-AF65-F5344CB8AC3E}">
-        <p14:creationId xmlns:p14="http://schemas.microsoft.com/office/powerpoint/2010/main" val="1024086991"/>
-      </p:ext>
-    </p:extLst>
-  </p:cSld>
-  <p:clrMapOvr>
-    <a:masterClrMapping/>
-  </p:clrMapOvr>
-</p:notes>
-</file>
-
-<file path=ppt/notesSlides/notesSlide7.xml><?xml version="1.0" encoding="utf-8"?>
-<p:notes xmlns:a="http://schemas.openxmlformats.org/drawingml/2006/main" xmlns:r="http://schemas.openxmlformats.org/officeDocument/2006/relationships" xmlns:p="http://schemas.openxmlformats.org/presentationml/2006/main">
-  <p:cSld>
-    <p:spTree>
-      <p:nvGrpSpPr>
-        <p:cNvPr id="1" name=""/>
-        <p:cNvGrpSpPr/>
-        <p:nvPr/>
-      </p:nvGrpSpPr>
-      <p:grpSpPr>
-        <a:xfrm>
-          <a:off x="0" y="0"/>
-          <a:ext cx="0" cy="0"/>
-          <a:chOff x="0" y="0"/>
-          <a:chExt cx="0" cy="0"/>
-        </a:xfrm>
-      </p:grpSpPr>
-      <p:sp>
-        <p:nvSpPr>
-          <p:cNvPr id="2" name="Slide Image Placeholder 1"/>
-          <p:cNvSpPr>
-            <a:spLocks noGrp="1" noRot="1" noChangeAspect="1"/>
-          </p:cNvSpPr>
-          <p:nvPr>
-            <p:ph type="sldImg"/>
-          </p:nvPr>
-        </p:nvSpPr>
-        <p:spPr/>
-      </p:sp>
-      <p:sp>
-        <p:nvSpPr>
-          <p:cNvPr id="3" name="Notes Placeholder 2"/>
-          <p:cNvSpPr>
-            <a:spLocks noGrp="1"/>
-          </p:cNvSpPr>
-          <p:nvPr>
-            <p:ph type="body" idx="1"/>
-          </p:nvPr>
-        </p:nvSpPr>
-        <p:spPr/>
-        <p:txBody>
-          <a:bodyPr/>
-          <a:lstStyle/>
-          <a:p>
-            <a:r>
-              <a:rPr lang="en-US" dirty="0"/>
-              <a:t/>
-            </a:r>
-            <a:endParaRPr lang="en-US" dirty="0"/>
-          </a:p>
-        </p:txBody>
-      </p:sp>
-      <p:sp>
-        <p:nvSpPr>
-          <p:cNvPr id="4" name="Slide Number Placeholder 3"/>
-          <p:cNvSpPr>
-            <a:spLocks noGrp="1"/>
-          </p:cNvSpPr>
-          <p:nvPr>
-            <p:ph type="sldNum" sz="quarter" idx="10"/>
-          </p:nvPr>
-        </p:nvSpPr>
-        <p:spPr/>
-        <p:txBody>
-          <a:bodyPr/>
-          <a:lstStyle/>
-          <a:p>
-            <a:fld id="{F7021451-1387-4CA6-816F-3879F97B5CBC}" type="slidenum">
-              <a:rPr lang="en-US"/>
-              <a:t>7</a:t>
             </a:fld>
             <a:endParaRPr lang="en-US"/>
           </a:p>
@@ -1853,7 +1764,7 @@
                   <a:srgbClr val="999999"/>
                 </a:solidFill>
               </a:rPr>
-              <a:t>Part 4: Analysis of Marketing Mix (7Ps) &amp; Recommendations</a:t>
+              <a:t>Part 4: Analysis of Marketing Mix (4Ps) &amp; Recommendations</a:t>
             </a:r>
             <a:endParaRPr lang="en-US" sz="900" dirty="0"/>
           </a:p>
@@ -1900,7 +1811,7 @@
                   <a:srgbClr val="999999"/>
                 </a:solidFill>
               </a:rPr>
-              <a:t>Executive Summary &amp; References</a:t>
+              <a:t>References</a:t>
             </a:r>
             <a:endParaRPr lang="en-US" sz="900" dirty="0"/>
           </a:p>
@@ -2130,8 +2041,8 @@
         </p:nvSpPr>
         <p:spPr>
           <a:xfrm>
-            <a:off x="594360" y="1627632"/>
-            <a:ext cx="3611880" cy="1325880"/>
+            <a:off x="594360" y="1600200"/>
+            <a:ext cx="3611880" cy="1371600"/>
           </a:xfrm>
           <a:prstGeom prst="rect">
             <a:avLst/>
@@ -2143,21 +2054,94 @@
           <a:bodyPr wrap="square" lIns="0" tIns="0" rIns="0" bIns="0" rtlCol="0" anchor="ctr"/>
           <a:lstStyle/>
           <a:p>
-            <a:pPr indent="0" marL="0">
-              <a:buNone/>
-            </a:pPr>
-            <a:r>
-              <a:rPr lang="en-US" sz="900" dirty="0">
-                <a:solidFill>
-                  <a:srgbClr val="666677"/>
+            <a:pPr marL="342900" indent="-342900">
+              <a:buSzPct val="100000"/>
+              <a:buChar char="•"/>
+            </a:pPr>
+            <a:r>
+              <a:rPr lang="en-US" sz="800" dirty="0">
+                <a:solidFill>
+                  <a:srgbClr val="999999"/>
                 </a:solidFill>
                 <a:latin typeface="Arial" pitchFamily="34" charset="0"/>
                 <a:ea typeface="Arial" pitchFamily="34" charset="-122"/>
                 <a:cs typeface="Arial" pitchFamily="34" charset="-120"/>
               </a:rPr>
-              <a:t>(content to be added)</a:t>
-            </a:r>
-            <a:endParaRPr lang="en-US" sz="900" dirty="0"/>
+              <a:t>2003 – Started with investment of $6.3 million by Elon Musk</a:t>
+            </a:r>
+            <a:endParaRPr lang="en-US" sz="800" dirty="0"/>
+          </a:p>
+          <a:p>
+            <a:pPr marL="342900" indent="-342900">
+              <a:buSzPct val="100000"/>
+              <a:buChar char="•"/>
+            </a:pPr>
+            <a:r>
+              <a:rPr lang="en-US" sz="800" dirty="0">
+                <a:solidFill>
+                  <a:srgbClr val="999999"/>
+                </a:solidFill>
+                <a:latin typeface="Arial" pitchFamily="34" charset="0"/>
+                <a:ea typeface="Arial" pitchFamily="34" charset="-122"/>
+                <a:cs typeface="Arial" pitchFamily="34" charset="-120"/>
+              </a:rPr>
+              <a:t>2008 – Tesla Roadster Launched (0-60mph in 3.7s, 395km range, lithium-ion battery)</a:t>
+            </a:r>
+            <a:endParaRPr lang="en-US" sz="800" dirty="0"/>
+          </a:p>
+          <a:p>
+            <a:pPr marL="342900" indent="-342900">
+              <a:buSzPct val="100000"/>
+              <a:buChar char="•"/>
+            </a:pPr>
+            <a:r>
+              <a:rPr lang="en-US" sz="800" dirty="0">
+                <a:solidFill>
+                  <a:srgbClr val="999999"/>
+                </a:solidFill>
+                <a:latin typeface="Arial" pitchFamily="34" charset="0"/>
+                <a:ea typeface="Arial" pitchFamily="34" charset="-122"/>
+                <a:cs typeface="Arial" pitchFamily="34" charset="-120"/>
+              </a:rPr>
+              <a:t>2012 – Model S, World's first premium electric sedan</a:t>
+            </a:r>
+            <a:endParaRPr lang="en-US" sz="800" dirty="0"/>
+          </a:p>
+          <a:p>
+            <a:pPr marL="342900" indent="-342900">
+              <a:buSzPct val="100000"/>
+              <a:buChar char="•"/>
+            </a:pPr>
+            <a:r>
+              <a:rPr lang="en-US" sz="800" dirty="0">
+                <a:solidFill>
+                  <a:srgbClr val="999999"/>
+                </a:solidFill>
+                <a:latin typeface="Arial" pitchFamily="34" charset="0"/>
+                <a:ea typeface="Arial" pitchFamily="34" charset="-122"/>
+                <a:cs typeface="Arial" pitchFamily="34" charset="-120"/>
+              </a:rPr>
+              <a:t>2015 – Model X released with Autopilot for Model S</a:t>
+            </a:r>
+            <a:endParaRPr lang="en-US" sz="800" dirty="0"/>
+          </a:p>
+          <a:p>
+            <a:pPr marL="342900" indent="-342900">
+              <a:buSzPct val="100000"/>
+              <a:buChar char="•"/>
+            </a:pPr>
+            <a:r>
+              <a:rPr lang="en-US" sz="800" dirty="0">
+                <a:solidFill>
+                  <a:srgbClr val="999999"/>
+                </a:solidFill>
+                <a:latin typeface="Arial" pitchFamily="34" charset="0"/>
+                <a:ea typeface="Arial" pitchFamily="34" charset="-122"/>
+                <a:cs typeface="Arial" pitchFamily="34" charset="-120"/>
+              </a:rPr>
+              <a:t>2017 – Model 3 released</a:t>
+            </a:r>
+            <a:endParaRPr lang="en-US" sz="800" dirty="0"/>
           </a:p>
         </p:txBody>
       </p:sp>
@@ -2255,8 +2239,8 @@
         </p:nvSpPr>
         <p:spPr>
           <a:xfrm>
-            <a:off x="4892040" y="1627632"/>
-            <a:ext cx="3611880" cy="1325880"/>
+            <a:off x="4892040" y="1600200"/>
+            <a:ext cx="3611880" cy="1371600"/>
           </a:xfrm>
           <a:prstGeom prst="rect">
             <a:avLst/>
@@ -2268,21 +2252,94 @@
           <a:bodyPr wrap="square" lIns="0" tIns="0" rIns="0" bIns="0" rtlCol="0" anchor="ctr"/>
           <a:lstStyle/>
           <a:p>
-            <a:pPr indent="0" marL="0">
-              <a:buNone/>
-            </a:pPr>
-            <a:r>
-              <a:rPr lang="en-US" sz="900" dirty="0">
-                <a:solidFill>
-                  <a:srgbClr val="666677"/>
+            <a:pPr marL="342900" indent="-342900">
+              <a:buSzPct val="100000"/>
+              <a:buChar char="•"/>
+            </a:pPr>
+            <a:r>
+              <a:rPr lang="en-US" sz="800" dirty="0">
+                <a:solidFill>
+                  <a:srgbClr val="999999"/>
                 </a:solidFill>
                 <a:latin typeface="Arial" pitchFamily="34" charset="0"/>
                 <a:ea typeface="Arial" pitchFamily="34" charset="-122"/>
                 <a:cs typeface="Arial" pitchFamily="34" charset="-120"/>
               </a:rPr>
-              <a:t>(content to be added)</a:t>
-            </a:r>
-            <a:endParaRPr lang="en-US" sz="900" dirty="0"/>
+              <a:t>Hinted in 2006 as an affordable car</a:t>
+            </a:r>
+            <a:endParaRPr lang="en-US" sz="800" dirty="0"/>
+          </a:p>
+          <a:p>
+            <a:pPr marL="342900" indent="-342900">
+              <a:buSzPct val="100000"/>
+              <a:buChar char="•"/>
+            </a:pPr>
+            <a:r>
+              <a:rPr lang="en-US" sz="800" dirty="0">
+                <a:solidFill>
+                  <a:srgbClr val="999999"/>
+                </a:solidFill>
+                <a:latin typeface="Arial" pitchFamily="34" charset="0"/>
+                <a:ea typeface="Arial" pitchFamily="34" charset="-122"/>
+                <a:cs typeface="Arial" pitchFamily="34" charset="-120"/>
+              </a:rPr>
+              <a:t>In 2008, announced to be a family car</a:t>
+            </a:r>
+            <a:endParaRPr lang="en-US" sz="800" dirty="0"/>
+          </a:p>
+          <a:p>
+            <a:pPr marL="342900" indent="-342900">
+              <a:buSzPct val="100000"/>
+              <a:buChar char="•"/>
+            </a:pPr>
+            <a:r>
+              <a:rPr lang="en-US" sz="800" dirty="0">
+                <a:solidFill>
+                  <a:srgbClr val="999999"/>
+                </a:solidFill>
+                <a:latin typeface="Arial" pitchFamily="34" charset="0"/>
+                <a:ea typeface="Arial" pitchFamily="34" charset="-122"/>
+                <a:cs typeface="Arial" pitchFamily="34" charset="-120"/>
+              </a:rPr>
+              <a:t>Unveiled in 2016, 325,000 reservation within a week</a:t>
+            </a:r>
+            <a:endParaRPr lang="en-US" sz="800" dirty="0"/>
+          </a:p>
+          <a:p>
+            <a:pPr marL="342900" indent="-342900">
+              <a:buSzPct val="100000"/>
+              <a:buChar char="•"/>
+            </a:pPr>
+            <a:r>
+              <a:rPr lang="en-US" sz="800" dirty="0">
+                <a:solidFill>
+                  <a:srgbClr val="999999"/>
+                </a:solidFill>
+                <a:latin typeface="Arial" pitchFamily="34" charset="0"/>
+                <a:ea typeface="Arial" pitchFamily="34" charset="-122"/>
+                <a:cs typeface="Arial" pitchFamily="34" charset="-120"/>
+              </a:rPr>
+              <a:t>By August 2017, 455,000 reservations made</a:t>
+            </a:r>
+            <a:endParaRPr lang="en-US" sz="800" dirty="0"/>
+          </a:p>
+          <a:p>
+            <a:pPr marL="342900" indent="-342900">
+              <a:buSzPct val="100000"/>
+              <a:buChar char="•"/>
+            </a:pPr>
+            <a:r>
+              <a:rPr lang="en-US" sz="800" dirty="0">
+                <a:solidFill>
+                  <a:srgbClr val="999999"/>
+                </a:solidFill>
+                <a:latin typeface="Arial" pitchFamily="34" charset="0"/>
+                <a:ea typeface="Arial" pitchFamily="34" charset="-122"/>
+                <a:cs typeface="Arial" pitchFamily="34" charset="-120"/>
+              </a:rPr>
+              <a:t>2020 Model 3 best selling EV worldwide</a:t>
+            </a:r>
+            <a:endParaRPr lang="en-US" sz="800" dirty="0"/>
           </a:p>
         </p:txBody>
       </p:sp>
@@ -2381,7 +2438,7 @@
         <p:spPr>
           <a:xfrm>
             <a:off x="658368" y="3566160"/>
-            <a:ext cx="7772400" cy="1234440"/>
+            <a:ext cx="7772400" cy="1280160"/>
           </a:xfrm>
           <a:prstGeom prst="rect">
             <a:avLst/>
@@ -2393,21 +2450,94 @@
           <a:bodyPr wrap="square" lIns="0" tIns="0" rIns="0" bIns="0" rtlCol="0" anchor="ctr"/>
           <a:lstStyle/>
           <a:p>
-            <a:pPr indent="0" marL="0">
-              <a:buNone/>
-            </a:pPr>
-            <a:r>
-              <a:rPr lang="en-US" sz="900" dirty="0">
-                <a:solidFill>
-                  <a:srgbClr val="666677"/>
+            <a:pPr marL="342900" indent="-342900">
+              <a:buSzPct val="100000"/>
+              <a:buChar char="•"/>
+            </a:pPr>
+            <a:r>
+              <a:rPr lang="en-US" sz="800" dirty="0">
+                <a:solidFill>
+                  <a:srgbClr val="999999"/>
                 </a:solidFill>
                 <a:latin typeface="Arial" pitchFamily="34" charset="0"/>
                 <a:ea typeface="Arial" pitchFamily="34" charset="-122"/>
                 <a:cs typeface="Arial" pitchFamily="34" charset="-120"/>
               </a:rPr>
-              <a:t>(content to be added)</a:t>
-            </a:r>
-            <a:endParaRPr lang="en-US" sz="900" dirty="0"/>
+              <a:t>Design and Technology – Elon believed in building a good product rather than spending on marketing. Let product do its own marketing.</a:t>
+            </a:r>
+            <a:endParaRPr lang="en-US" sz="800" dirty="0"/>
+          </a:p>
+          <a:p>
+            <a:pPr marL="342900" indent="-342900">
+              <a:buSzPct val="100000"/>
+              <a:buChar char="•"/>
+            </a:pPr>
+            <a:r>
+              <a:rPr lang="en-US" sz="800" dirty="0">
+                <a:solidFill>
+                  <a:srgbClr val="999999"/>
+                </a:solidFill>
+                <a:latin typeface="Arial" pitchFamily="34" charset="0"/>
+                <a:ea typeface="Arial" pitchFamily="34" charset="-122"/>
+                <a:cs typeface="Arial" pitchFamily="34" charset="-120"/>
+              </a:rPr>
+              <a:t>5 Star NCAP safety rating</a:t>
+            </a:r>
+            <a:endParaRPr lang="en-US" sz="800" dirty="0"/>
+          </a:p>
+          <a:p>
+            <a:pPr marL="342900" indent="-342900">
+              <a:buSzPct val="100000"/>
+              <a:buChar char="•"/>
+            </a:pPr>
+            <a:r>
+              <a:rPr lang="en-US" sz="800" dirty="0">
+                <a:solidFill>
+                  <a:srgbClr val="999999"/>
+                </a:solidFill>
+                <a:latin typeface="Arial" pitchFamily="34" charset="0"/>
+                <a:ea typeface="Arial" pitchFamily="34" charset="-122"/>
+                <a:cs typeface="Arial" pitchFamily="34" charset="-120"/>
+              </a:rPr>
+              <a:t>Priced above middle-income range but subsidy made it affordable for middle class.</a:t>
+            </a:r>
+            <a:endParaRPr lang="en-US" sz="800" dirty="0"/>
+          </a:p>
+          <a:p>
+            <a:pPr marL="342900" indent="-342900">
+              <a:buSzPct val="100000"/>
+              <a:buChar char="•"/>
+            </a:pPr>
+            <a:r>
+              <a:rPr lang="en-US" sz="800" dirty="0">
+                <a:solidFill>
+                  <a:srgbClr val="999999"/>
+                </a:solidFill>
+                <a:latin typeface="Arial" pitchFamily="34" charset="0"/>
+                <a:ea typeface="Arial" pitchFamily="34" charset="-122"/>
+                <a:cs typeface="Arial" pitchFamily="34" charset="-120"/>
+              </a:rPr>
+              <a:t>Elon Musk Branding [Brand Recognition, Brand Loyalty, Similar to Apple]</a:t>
+            </a:r>
+            <a:endParaRPr lang="en-US" sz="800" dirty="0"/>
+          </a:p>
+          <a:p>
+            <a:pPr marL="342900" indent="-342900">
+              <a:buSzPct val="100000"/>
+              <a:buChar char="•"/>
+            </a:pPr>
+            <a:r>
+              <a:rPr lang="en-US" sz="800" dirty="0">
+                <a:solidFill>
+                  <a:srgbClr val="999999"/>
+                </a:solidFill>
+                <a:latin typeface="Arial" pitchFamily="34" charset="0"/>
+                <a:ea typeface="Arial" pitchFamily="34" charset="-122"/>
+                <a:cs typeface="Arial" pitchFamily="34" charset="-120"/>
+              </a:rPr>
+              <a:t>Autopilot and Full Self Driving</a:t>
+            </a:r>
+            <a:endParaRPr lang="en-US" sz="800" dirty="0"/>
           </a:p>
         </p:txBody>
       </p:sp>
@@ -2635,8 +2765,8 @@
         </p:nvSpPr>
         <p:spPr>
           <a:xfrm>
-            <a:off x="594360" y="1600200"/>
-            <a:ext cx="3611880" cy="822960"/>
+            <a:off x="594360" y="1572768"/>
+            <a:ext cx="3611880" cy="777240"/>
           </a:xfrm>
           <a:prstGeom prst="rect">
             <a:avLst/>
@@ -2648,21 +2778,76 @@
           <a:bodyPr wrap="square" lIns="0" tIns="0" rIns="0" bIns="0" rtlCol="0" anchor="ctr"/>
           <a:lstStyle/>
           <a:p>
-            <a:pPr indent="0" marL="0">
-              <a:buNone/>
-            </a:pPr>
-            <a:r>
-              <a:rPr lang="en-US" sz="900" dirty="0">
-                <a:solidFill>
-                  <a:srgbClr val="666677"/>
+            <a:pPr marL="342900" indent="-342900">
+              <a:buSzPct val="100000"/>
+              <a:buChar char="•"/>
+            </a:pPr>
+            <a:r>
+              <a:rPr lang="en-US" sz="800" dirty="0">
+                <a:solidFill>
+                  <a:srgbClr val="999999"/>
                 </a:solidFill>
                 <a:latin typeface="Arial" pitchFamily="34" charset="0"/>
                 <a:ea typeface="Arial" pitchFamily="34" charset="-122"/>
                 <a:cs typeface="Arial" pitchFamily="34" charset="-120"/>
               </a:rPr>
-              <a:t>(content to be added)</a:t>
-            </a:r>
-            <a:endParaRPr lang="en-US" sz="900" dirty="0"/>
+              <a:t>People being more environmental conscious</a:t>
+            </a:r>
+            <a:endParaRPr lang="en-US" sz="800" dirty="0"/>
+          </a:p>
+          <a:p>
+            <a:pPr marL="342900" indent="-342900">
+              <a:buSzPct val="100000"/>
+              <a:buChar char="•"/>
+            </a:pPr>
+            <a:r>
+              <a:rPr lang="en-US" sz="800" dirty="0">
+                <a:solidFill>
+                  <a:srgbClr val="999999"/>
+                </a:solidFill>
+                <a:latin typeface="Arial" pitchFamily="34" charset="0"/>
+                <a:ea typeface="Arial" pitchFamily="34" charset="-122"/>
+                <a:cs typeface="Arial" pitchFamily="34" charset="-120"/>
+              </a:rPr>
+              <a:t>Shift to green energy cars</a:t>
+            </a:r>
+            <a:endParaRPr lang="en-US" sz="800" dirty="0"/>
+          </a:p>
+          <a:p>
+            <a:pPr marL="342900" indent="-342900">
+              <a:buSzPct val="100000"/>
+              <a:buChar char="•"/>
+            </a:pPr>
+            <a:r>
+              <a:rPr lang="en-US" sz="800" dirty="0">
+                <a:solidFill>
+                  <a:srgbClr val="999999"/>
+                </a:solidFill>
+                <a:latin typeface="Arial" pitchFamily="34" charset="0"/>
+                <a:ea typeface="Arial" pitchFamily="34" charset="-122"/>
+                <a:cs typeface="Arial" pitchFamily="34" charset="-120"/>
+              </a:rPr>
+              <a:t>Cheaper maintenance and running costs</a:t>
+            </a:r>
+            <a:endParaRPr lang="en-US" sz="800" dirty="0"/>
+          </a:p>
+          <a:p>
+            <a:pPr marL="342900" indent="-342900">
+              <a:buSzPct val="100000"/>
+              <a:buChar char="•"/>
+            </a:pPr>
+            <a:r>
+              <a:rPr lang="en-US" sz="800" dirty="0">
+                <a:solidFill>
+                  <a:srgbClr val="999999"/>
+                </a:solidFill>
+                <a:latin typeface="Arial" pitchFamily="34" charset="0"/>
+                <a:ea typeface="Arial" pitchFamily="34" charset="-122"/>
+                <a:cs typeface="Arial" pitchFamily="34" charset="-120"/>
+              </a:rPr>
+              <a:t>Government subsidies</a:t>
+            </a:r>
+            <a:endParaRPr lang="en-US" sz="800" dirty="0"/>
           </a:p>
         </p:txBody>
       </p:sp>
@@ -2674,7 +2859,7 @@
         </p:nvSpPr>
         <p:spPr>
           <a:xfrm>
-            <a:off x="594360" y="2468880"/>
+            <a:off x="594360" y="2423160"/>
             <a:ext cx="2743200" cy="201168"/>
           </a:xfrm>
           <a:prstGeom prst="rect">
@@ -2720,8 +2905,8 @@
           </p:nvPr>
         </p:nvGraphicFramePr>
         <p:xfrm>
-          <a:off x="594360" y="2697480"/>
-          <a:ext cx="3611880" cy="2103120"/>
+          <a:off x="594360" y="2651760"/>
+          <a:ext cx="3611880" cy="2194560"/>
         </p:xfrm>
         <a:graphic>
           <a:graphicData uri="http://schemas.openxmlformats.org/drawingml/2006/table">
@@ -2938,7 +3123,7 @@
                   </a:tcPr>
                 </a:tc>
               </a:tr>
-              <a:tr h="301752">
+              <a:tr h="320040">
                 <a:tc>
                   <a:txBody>
                     <a:bodyPr/>
@@ -3016,15 +3201,15 @@
                         <a:buNone/>
                       </a:pPr>
                       <a:r>
-                        <a:rPr lang="en-US" sz="750" dirty="0">
+                        <a:rPr lang="en-US" sz="750" b="1" dirty="0">
                           <a:solidFill>
-                            <a:srgbClr val="FFB74D"/>
+                            <a:srgbClr val="FF5252"/>
                           </a:solidFill>
                           <a:latin typeface="Arial" pitchFamily="34" charset="0"/>
                           <a:ea typeface="Arial" pitchFamily="34" charset="-122"/>
                           <a:cs typeface="Arial" pitchFamily="34" charset="-120"/>
                         </a:rPr>
-                        <a:t>—</a:t>
+                        <a:t>High</a:t>
                       </a:r>
                       <a:endParaRPr lang="en-US" sz="750" dirty="0">
                         <a:latin typeface="Arial" charset="0"/>
@@ -3092,7 +3277,7 @@
                           <a:ea typeface="Arial" pitchFamily="34" charset="-122"/>
                           <a:cs typeface="Arial" pitchFamily="34" charset="-120"/>
                         </a:rPr>
-                        <a:t>(content to be added)</a:t>
+                        <a:t>Support from government since made in US and pure EV.</a:t>
                       </a:r>
                       <a:endParaRPr lang="en-US" sz="700" dirty="0">
                         <a:latin typeface="Arial" charset="0"/>
@@ -3144,7 +3329,7 @@
                   </a:tcPr>
                 </a:tc>
               </a:tr>
-              <a:tr h="301752">
+              <a:tr h="320040">
                 <a:tc>
                   <a:txBody>
                     <a:bodyPr/>
@@ -3222,7 +3407,7 @@
                         <a:buNone/>
                       </a:pPr>
                       <a:r>
-                        <a:rPr lang="en-US" sz="750" dirty="0">
+                        <a:rPr lang="en-US" sz="750" b="1" dirty="0">
                           <a:solidFill>
                             <a:srgbClr val="FFB74D"/>
                           </a:solidFill>
@@ -3230,7 +3415,7 @@
                           <a:ea typeface="Arial" pitchFamily="34" charset="-122"/>
                           <a:cs typeface="Arial" pitchFamily="34" charset="-120"/>
                         </a:rPr>
-                        <a:t>—</a:t>
+                        <a:t>Moderate</a:t>
                       </a:r>
                       <a:endParaRPr lang="en-US" sz="750" dirty="0">
                         <a:latin typeface="Arial" charset="0"/>
@@ -3298,7 +3483,7 @@
                           <a:ea typeface="Arial" pitchFamily="34" charset="-122"/>
                           <a:cs typeface="Arial" pitchFamily="34" charset="-120"/>
                         </a:rPr>
-                        <a:t>(content to be added)</a:t>
+                        <a:t>Made in USA and priced affordably</a:t>
                       </a:r>
                       <a:endParaRPr lang="en-US" sz="700" dirty="0">
                         <a:latin typeface="Arial" charset="0"/>
@@ -3350,7 +3535,7 @@
                   </a:tcPr>
                 </a:tc>
               </a:tr>
-              <a:tr h="301752">
+              <a:tr h="320040">
                 <a:tc>
                   <a:txBody>
                     <a:bodyPr/>
@@ -3428,15 +3613,15 @@
                         <a:buNone/>
                       </a:pPr>
                       <a:r>
-                        <a:rPr lang="en-US" sz="750" dirty="0">
+                        <a:rPr lang="en-US" sz="750" b="1" dirty="0">
                           <a:solidFill>
-                            <a:srgbClr val="FFB74D"/>
+                            <a:srgbClr val="FF5252"/>
                           </a:solidFill>
                           <a:latin typeface="Arial" pitchFamily="34" charset="0"/>
                           <a:ea typeface="Arial" pitchFamily="34" charset="-122"/>
                           <a:cs typeface="Arial" pitchFamily="34" charset="-120"/>
                         </a:rPr>
-                        <a:t>—</a:t>
+                        <a:t>High</a:t>
                       </a:r>
                       <a:endParaRPr lang="en-US" sz="750" dirty="0">
                         <a:latin typeface="Arial" charset="0"/>
@@ -3504,7 +3689,7 @@
                           <a:ea typeface="Arial" pitchFamily="34" charset="-122"/>
                           <a:cs typeface="Arial" pitchFamily="34" charset="-120"/>
                         </a:rPr>
-                        <a:t>(content to be added)</a:t>
+                        <a:t>Change in market from ICE to EV due to many benefits.</a:t>
                       </a:r>
                       <a:endParaRPr lang="en-US" sz="700" dirty="0">
                         <a:latin typeface="Arial" charset="0"/>
@@ -3556,7 +3741,7 @@
                   </a:tcPr>
                 </a:tc>
               </a:tr>
-              <a:tr h="301752">
+              <a:tr h="320040">
                 <a:tc>
                   <a:txBody>
                     <a:bodyPr/>
@@ -3634,15 +3819,15 @@
                         <a:buNone/>
                       </a:pPr>
                       <a:r>
-                        <a:rPr lang="en-US" sz="750" dirty="0">
+                        <a:rPr lang="en-US" sz="750" b="1" dirty="0">
                           <a:solidFill>
-                            <a:srgbClr val="FFB74D"/>
+                            <a:srgbClr val="FF5252"/>
                           </a:solidFill>
                           <a:latin typeface="Arial" pitchFamily="34" charset="0"/>
                           <a:ea typeface="Arial" pitchFamily="34" charset="-122"/>
                           <a:cs typeface="Arial" pitchFamily="34" charset="-120"/>
                         </a:rPr>
-                        <a:t>—</a:t>
+                        <a:t>High</a:t>
                       </a:r>
                       <a:endParaRPr lang="en-US" sz="750" dirty="0">
                         <a:latin typeface="Arial" charset="0"/>
@@ -3710,7 +3895,7 @@
                           <a:ea typeface="Arial" pitchFamily="34" charset="-122"/>
                           <a:cs typeface="Arial" pitchFamily="34" charset="-120"/>
                         </a:rPr>
-                        <a:t>(content to be added)</a:t>
+                        <a:t>Minimalist design, Innovative features, Regular software updates, digital display for all controls.</a:t>
                       </a:r>
                       <a:endParaRPr lang="en-US" sz="700" dirty="0">
                         <a:latin typeface="Arial" charset="0"/>
@@ -3762,7 +3947,7 @@
                   </a:tcPr>
                 </a:tc>
               </a:tr>
-              <a:tr h="301752">
+              <a:tr h="320040">
                 <a:tc>
                   <a:txBody>
                     <a:bodyPr/>
@@ -3840,15 +4025,15 @@
                         <a:buNone/>
                       </a:pPr>
                       <a:r>
-                        <a:rPr lang="en-US" sz="750" dirty="0">
+                        <a:rPr lang="en-US" sz="750" b="1" dirty="0">
                           <a:solidFill>
-                            <a:srgbClr val="FFB74D"/>
+                            <a:srgbClr val="FF5252"/>
                           </a:solidFill>
                           <a:latin typeface="Arial" pitchFamily="34" charset="0"/>
                           <a:ea typeface="Arial" pitchFamily="34" charset="-122"/>
                           <a:cs typeface="Arial" pitchFamily="34" charset="-120"/>
                         </a:rPr>
-                        <a:t>—</a:t>
+                        <a:t>High</a:t>
                       </a:r>
                       <a:endParaRPr lang="en-US" sz="750" dirty="0">
                         <a:latin typeface="Arial" charset="0"/>
@@ -3916,7 +4101,7 @@
                           <a:ea typeface="Arial" pitchFamily="34" charset="-122"/>
                           <a:cs typeface="Arial" pitchFamily="34" charset="-120"/>
                         </a:rPr>
-                        <a:t>(content to be added)</a:t>
+                        <a:t>Pure EV, hence uses renewable source of energy. No pollution from burning of fuels.</a:t>
                       </a:r>
                       <a:endParaRPr lang="en-US" sz="700" dirty="0">
                         <a:latin typeface="Arial" charset="0"/>
@@ -3968,7 +4153,7 @@
                   </a:tcPr>
                 </a:tc>
               </a:tr>
-              <a:tr h="301752">
+              <a:tr h="320040">
                 <a:tc>
                   <a:txBody>
                     <a:bodyPr/>
@@ -4046,7 +4231,7 @@
                         <a:buNone/>
                       </a:pPr>
                       <a:r>
-                        <a:rPr lang="en-US" sz="750" dirty="0">
+                        <a:rPr lang="en-US" sz="750" b="1" dirty="0">
                           <a:solidFill>
                             <a:srgbClr val="FFB74D"/>
                           </a:solidFill>
@@ -4054,7 +4239,7 @@
                           <a:ea typeface="Arial" pitchFamily="34" charset="-122"/>
                           <a:cs typeface="Arial" pitchFamily="34" charset="-120"/>
                         </a:rPr>
-                        <a:t>—</a:t>
+                        <a:t>Moderate</a:t>
                       </a:r>
                       <a:endParaRPr lang="en-US" sz="750" dirty="0">
                         <a:latin typeface="Arial" charset="0"/>
@@ -4122,7 +4307,7 @@
                           <a:ea typeface="Arial" pitchFamily="34" charset="-122"/>
                           <a:cs typeface="Arial" pitchFamily="34" charset="-120"/>
                         </a:rPr>
-                        <a:t>(content to be added)</a:t>
+                        <a:t>Issues due to FSD and cybersecurity</a:t>
                       </a:r>
                       <a:endParaRPr lang="en-US" sz="700" dirty="0">
                         <a:latin typeface="Arial" charset="0"/>
@@ -4583,7 +4768,7 @@
                           <a:ea typeface="Arial" pitchFamily="34" charset="-122"/>
                           <a:cs typeface="Arial" pitchFamily="34" charset="-120"/>
                         </a:rPr>
-                        <a:t>—</a:t>
+                        <a:t>Moderate</a:t>
                       </a:r>
                       <a:endParaRPr lang="en-US" sz="800" dirty="0">
                         <a:latin typeface="Arial" charset="0"/>
@@ -4651,7 +4836,7 @@
                           <a:ea typeface="Arial" pitchFamily="34" charset="-122"/>
                           <a:cs typeface="Arial" pitchFamily="34" charset="-120"/>
                         </a:rPr>
-                        <a:t>(content to be added)</a:t>
+                        <a:t>Most of the materials self manufactured</a:t>
                       </a:r>
                       <a:endParaRPr lang="en-US" sz="750" dirty="0">
                         <a:latin typeface="Arial" charset="0"/>
@@ -4789,7 +4974,7 @@
                           <a:ea typeface="Arial" pitchFamily="34" charset="-122"/>
                           <a:cs typeface="Arial" pitchFamily="34" charset="-120"/>
                         </a:rPr>
-                        <a:t>—</a:t>
+                        <a:t>Moderate</a:t>
                       </a:r>
                       <a:endParaRPr lang="en-US" sz="800" dirty="0">
                         <a:latin typeface="Arial" charset="0"/>
@@ -4857,7 +5042,7 @@
                           <a:ea typeface="Arial" pitchFamily="34" charset="-122"/>
                           <a:cs typeface="Arial" pitchFamily="34" charset="-120"/>
                         </a:rPr>
-                        <a:t>(content to be added)</a:t>
+                        <a:t>Have many options.</a:t>
                       </a:r>
                       <a:endParaRPr lang="en-US" sz="750" dirty="0">
                         <a:latin typeface="Arial" charset="0"/>
@@ -4995,7 +5180,7 @@
                           <a:ea typeface="Arial" pitchFamily="34" charset="-122"/>
                           <a:cs typeface="Arial" pitchFamily="34" charset="-120"/>
                         </a:rPr>
-                        <a:t>—</a:t>
+                        <a:t>Moderate</a:t>
                       </a:r>
                       <a:endParaRPr lang="en-US" sz="800" dirty="0">
                         <a:latin typeface="Arial" charset="0"/>
@@ -5063,7 +5248,7 @@
                           <a:ea typeface="Arial" pitchFamily="34" charset="-122"/>
                           <a:cs typeface="Arial" pitchFamily="34" charset="-120"/>
                         </a:rPr>
-                        <a:t>(content to be added)</a:t>
+                        <a:t>Difficult since requires high investment and innovative technology.</a:t>
                       </a:r>
                       <a:endParaRPr lang="en-US" sz="750" dirty="0">
                         <a:latin typeface="Arial" charset="0"/>
@@ -5195,13 +5380,13 @@
                       <a:r>
                         <a:rPr lang="en-US" sz="800" b="1" dirty="0">
                           <a:solidFill>
-                            <a:srgbClr val="FFB74D"/>
+                            <a:srgbClr val="66BB6A"/>
                           </a:solidFill>
                           <a:latin typeface="Arial" pitchFamily="34" charset="0"/>
                           <a:ea typeface="Arial" pitchFamily="34" charset="-122"/>
                           <a:cs typeface="Arial" pitchFamily="34" charset="-120"/>
                         </a:rPr>
-                        <a:t>—</a:t>
+                        <a:t>Low</a:t>
                       </a:r>
                       <a:endParaRPr lang="en-US" sz="800" dirty="0">
                         <a:latin typeface="Arial" charset="0"/>
@@ -5269,7 +5454,7 @@
                           <a:ea typeface="Arial" pitchFamily="34" charset="-122"/>
                           <a:cs typeface="Arial" pitchFamily="34" charset="-120"/>
                         </a:rPr>
-                        <a:t>(content to be added)</a:t>
+                        <a:t>Better tech and cost alternative to ICE and hybrid</a:t>
                       </a:r>
                       <a:endParaRPr lang="en-US" sz="750" dirty="0">
                         <a:latin typeface="Arial" charset="0"/>
@@ -5401,13 +5586,13 @@
                       <a:r>
                         <a:rPr lang="en-US" sz="800" b="1" dirty="0">
                           <a:solidFill>
-                            <a:srgbClr val="FFB74D"/>
+                            <a:srgbClr val="FF5252"/>
                           </a:solidFill>
                           <a:latin typeface="Arial" pitchFamily="34" charset="0"/>
                           <a:ea typeface="Arial" pitchFamily="34" charset="-122"/>
                           <a:cs typeface="Arial" pitchFamily="34" charset="-120"/>
                         </a:rPr>
-                        <a:t>—</a:t>
+                        <a:t>High</a:t>
                       </a:r>
                       <a:endParaRPr lang="en-US" sz="800" dirty="0">
                         <a:latin typeface="Arial" charset="0"/>
@@ -5475,7 +5660,7 @@
                           <a:ea typeface="Arial" pitchFamily="34" charset="-122"/>
                           <a:cs typeface="Arial" pitchFamily="34" charset="-120"/>
                         </a:rPr>
-                        <a:t>(content to be added)</a:t>
+                        <a:t>Competitive market, fast tech advancements</a:t>
                       </a:r>
                       <a:endParaRPr lang="en-US" sz="750" dirty="0">
                         <a:latin typeface="Arial" charset="0"/>
@@ -5709,7 +5894,24 @@
                 <a:ea typeface="Arial" pitchFamily="34" charset="-122"/>
                 <a:cs typeface="Arial" pitchFamily="34" charset="-120"/>
               </a:rPr>
-              <a:t>(content to be added)</a:t>
+              <a:t>Good Product</a:t>
+            </a:r>
+            <a:endParaRPr lang="en-US" sz="650" dirty="0"/>
+          </a:p>
+          <a:p>
+            <a:pPr indent="0" marL="0">
+              <a:buNone/>
+            </a:pPr>
+            <a:r>
+              <a:rPr lang="en-US" sz="650" dirty="0">
+                <a:solidFill>
+                  <a:srgbClr val="666677"/>
+                </a:solidFill>
+                <a:latin typeface="Arial" pitchFamily="34" charset="0"/>
+                <a:ea typeface="Arial" pitchFamily="34" charset="-122"/>
+                <a:cs typeface="Arial" pitchFamily="34" charset="-120"/>
+              </a:rPr>
+              <a:t>Brand Loyalty</a:t>
             </a:r>
             <a:endParaRPr lang="en-US" sz="650" dirty="0"/>
           </a:p>
@@ -5827,7 +6029,24 @@
                 <a:ea typeface="Arial" pitchFamily="34" charset="-122"/>
                 <a:cs typeface="Arial" pitchFamily="34" charset="-120"/>
               </a:rPr>
-              <a:t>(content to be added)</a:t>
+              <a:t>Production Delays</a:t>
+            </a:r>
+            <a:endParaRPr lang="en-US" sz="650" dirty="0"/>
+          </a:p>
+          <a:p>
+            <a:pPr indent="0" marL="0">
+              <a:buNone/>
+            </a:pPr>
+            <a:r>
+              <a:rPr lang="en-US" sz="650" dirty="0">
+                <a:solidFill>
+                  <a:srgbClr val="666677"/>
+                </a:solidFill>
+                <a:latin typeface="Arial" pitchFamily="34" charset="0"/>
+                <a:ea typeface="Arial" pitchFamily="34" charset="-122"/>
+                <a:cs typeface="Arial" pitchFamily="34" charset="-120"/>
+              </a:rPr>
+              <a:t>Quality Control Issues</a:t>
             </a:r>
             <a:endParaRPr lang="en-US" sz="650" dirty="0"/>
           </a:p>
@@ -5945,7 +6164,24 @@
                 <a:ea typeface="Arial" pitchFamily="34" charset="-122"/>
                 <a:cs typeface="Arial" pitchFamily="34" charset="-120"/>
               </a:rPr>
-              <a:t>(content to be added)</a:t>
+              <a:t>Robotaxi, FSD</a:t>
+            </a:r>
+            <a:endParaRPr lang="en-US" sz="650" dirty="0"/>
+          </a:p>
+          <a:p>
+            <a:pPr indent="0" marL="0">
+              <a:buNone/>
+            </a:pPr>
+            <a:r>
+              <a:rPr lang="en-US" sz="650" dirty="0">
+                <a:solidFill>
+                  <a:srgbClr val="666677"/>
+                </a:solidFill>
+                <a:latin typeface="Arial" pitchFamily="34" charset="0"/>
+                <a:ea typeface="Arial" pitchFamily="34" charset="-122"/>
+                <a:cs typeface="Arial" pitchFamily="34" charset="-120"/>
+              </a:rPr>
+              <a:t>Emerging Market</a:t>
             </a:r>
             <a:endParaRPr lang="en-US" sz="650" dirty="0"/>
           </a:p>
@@ -6063,7 +6299,24 @@
                 <a:ea typeface="Arial" pitchFamily="34" charset="-122"/>
                 <a:cs typeface="Arial" pitchFamily="34" charset="-120"/>
               </a:rPr>
-              <a:t>(content to be added)</a:t>
+              <a:t>Competitive Market</a:t>
+            </a:r>
+            <a:endParaRPr lang="en-US" sz="650" dirty="0"/>
+          </a:p>
+          <a:p>
+            <a:pPr indent="0" marL="0">
+              <a:buNone/>
+            </a:pPr>
+            <a:r>
+              <a:rPr lang="en-US" sz="650" dirty="0">
+                <a:solidFill>
+                  <a:srgbClr val="666677"/>
+                </a:solidFill>
+                <a:latin typeface="Arial" pitchFamily="34" charset="0"/>
+                <a:ea typeface="Arial" pitchFamily="34" charset="-122"/>
+                <a:cs typeface="Arial" pitchFamily="34" charset="-120"/>
+              </a:rPr>
+              <a:t>Cybersecurity and FSD liability risk</a:t>
             </a:r>
             <a:endParaRPr lang="en-US" sz="650" dirty="0"/>
           </a:p>
@@ -6306,21 +6559,40 @@
           <a:bodyPr wrap="square" lIns="0" tIns="0" rIns="0" bIns="0" rtlCol="0" anchor="ctr"/>
           <a:lstStyle/>
           <a:p>
-            <a:pPr indent="0" marL="0">
-              <a:buNone/>
-            </a:pPr>
-            <a:r>
-              <a:rPr lang="en-US" sz="900" dirty="0">
-                <a:solidFill>
-                  <a:srgbClr val="666677"/>
+            <a:pPr marL="342900" indent="-342900">
+              <a:buSzPct val="100000"/>
+              <a:buChar char="•"/>
+            </a:pPr>
+            <a:r>
+              <a:rPr lang="en-US" sz="800" dirty="0">
+                <a:solidFill>
+                  <a:srgbClr val="999999"/>
                 </a:solidFill>
                 <a:latin typeface="Arial" pitchFamily="34" charset="0"/>
                 <a:ea typeface="Arial" pitchFamily="34" charset="-122"/>
                 <a:cs typeface="Arial" pitchFamily="34" charset="-120"/>
               </a:rPr>
-              <a:t>(content to be added)</a:t>
-            </a:r>
-            <a:endParaRPr lang="en-US" sz="900" dirty="0"/>
+              <a:t>Mostly Male buyers than female</a:t>
+            </a:r>
+            <a:endParaRPr lang="en-US" sz="800" dirty="0"/>
+          </a:p>
+          <a:p>
+            <a:pPr marL="342900" indent="-342900">
+              <a:buSzPct val="100000"/>
+              <a:buChar char="•"/>
+            </a:pPr>
+            <a:r>
+              <a:rPr lang="en-US" sz="800" dirty="0">
+                <a:solidFill>
+                  <a:srgbClr val="999999"/>
+                </a:solidFill>
+                <a:latin typeface="Arial" pitchFamily="34" charset="0"/>
+                <a:ea typeface="Arial" pitchFamily="34" charset="-122"/>
+                <a:cs typeface="Arial" pitchFamily="34" charset="-120"/>
+              </a:rPr>
+              <a:t>30-40 are major buyers</a:t>
+            </a:r>
+            <a:endParaRPr lang="en-US" sz="800" dirty="0"/>
           </a:p>
         </p:txBody>
       </p:sp>
@@ -6431,21 +6703,40 @@
           <a:bodyPr wrap="square" lIns="0" tIns="0" rIns="0" bIns="0" rtlCol="0" anchor="ctr"/>
           <a:lstStyle/>
           <a:p>
-            <a:pPr indent="0" marL="0">
-              <a:buNone/>
-            </a:pPr>
-            <a:r>
-              <a:rPr lang="en-US" sz="900" dirty="0">
-                <a:solidFill>
-                  <a:srgbClr val="666677"/>
+            <a:pPr marL="342900" indent="-342900">
+              <a:buSzPct val="100000"/>
+              <a:buChar char="•"/>
+            </a:pPr>
+            <a:r>
+              <a:rPr lang="en-US" sz="800" dirty="0">
+                <a:solidFill>
+                  <a:srgbClr val="999999"/>
                 </a:solidFill>
                 <a:latin typeface="Arial" pitchFamily="34" charset="0"/>
                 <a:ea typeface="Arial" pitchFamily="34" charset="-122"/>
                 <a:cs typeface="Arial" pitchFamily="34" charset="-120"/>
               </a:rPr>
-              <a:t>(content to be added)</a:t>
-            </a:r>
-            <a:endParaRPr lang="en-US" sz="900" dirty="0"/>
+              <a:t>High brand recognition</a:t>
+            </a:r>
+            <a:endParaRPr lang="en-US" sz="800" dirty="0"/>
+          </a:p>
+          <a:p>
+            <a:pPr marL="342900" indent="-342900">
+              <a:buSzPct val="100000"/>
+              <a:buChar char="•"/>
+            </a:pPr>
+            <a:r>
+              <a:rPr lang="en-US" sz="800" dirty="0">
+                <a:solidFill>
+                  <a:srgbClr val="999999"/>
+                </a:solidFill>
+                <a:latin typeface="Arial" pitchFamily="34" charset="0"/>
+                <a:ea typeface="Arial" pitchFamily="34" charset="-122"/>
+                <a:cs typeface="Arial" pitchFamily="34" charset="-120"/>
+              </a:rPr>
+              <a:t>Brand loyalty</a:t>
+            </a:r>
+            <a:endParaRPr lang="en-US" sz="800" dirty="0"/>
           </a:p>
         </p:txBody>
       </p:sp>
@@ -6556,21 +6847,76 @@
           <a:bodyPr wrap="square" lIns="0" tIns="0" rIns="0" bIns="0" rtlCol="0" anchor="ctr"/>
           <a:lstStyle/>
           <a:p>
-            <a:pPr indent="0" marL="0">
-              <a:buNone/>
-            </a:pPr>
-            <a:r>
-              <a:rPr lang="en-US" sz="900" dirty="0">
-                <a:solidFill>
-                  <a:srgbClr val="666677"/>
+            <a:pPr marL="342900" indent="-342900">
+              <a:buSzPct val="100000"/>
+              <a:buChar char="•"/>
+            </a:pPr>
+            <a:r>
+              <a:rPr lang="en-US" sz="800" dirty="0">
+                <a:solidFill>
+                  <a:srgbClr val="999999"/>
                 </a:solidFill>
                 <a:latin typeface="Arial" pitchFamily="34" charset="0"/>
                 <a:ea typeface="Arial" pitchFamily="34" charset="-122"/>
                 <a:cs typeface="Arial" pitchFamily="34" charset="-120"/>
               </a:rPr>
-              <a:t>(content to be added)</a:t>
-            </a:r>
-            <a:endParaRPr lang="en-US" sz="900" dirty="0"/>
+              <a:t>Innovative ideas</a:t>
+            </a:r>
+            <a:endParaRPr lang="en-US" sz="800" dirty="0"/>
+          </a:p>
+          <a:p>
+            <a:pPr marL="342900" indent="-342900">
+              <a:buSzPct val="100000"/>
+              <a:buChar char="•"/>
+            </a:pPr>
+            <a:r>
+              <a:rPr lang="en-US" sz="800" dirty="0">
+                <a:solidFill>
+                  <a:srgbClr val="999999"/>
+                </a:solidFill>
+                <a:latin typeface="Arial" pitchFamily="34" charset="0"/>
+                <a:ea typeface="Arial" pitchFamily="34" charset="-122"/>
+                <a:cs typeface="Arial" pitchFamily="34" charset="-120"/>
+              </a:rPr>
+              <a:t>Touch Screen display [Netflix, Games]</a:t>
+            </a:r>
+            <a:endParaRPr lang="en-US" sz="800" dirty="0"/>
+          </a:p>
+          <a:p>
+            <a:pPr marL="342900" indent="-342900">
+              <a:buSzPct val="100000"/>
+              <a:buChar char="•"/>
+            </a:pPr>
+            <a:r>
+              <a:rPr lang="en-US" sz="800" dirty="0">
+                <a:solidFill>
+                  <a:srgbClr val="999999"/>
+                </a:solidFill>
+                <a:latin typeface="Arial" pitchFamily="34" charset="0"/>
+                <a:ea typeface="Arial" pitchFamily="34" charset="-122"/>
+                <a:cs typeface="Arial" pitchFamily="34" charset="-120"/>
+              </a:rPr>
+              <a:t>Connects to PS5</a:t>
+            </a:r>
+            <a:endParaRPr lang="en-US" sz="800" dirty="0"/>
+          </a:p>
+          <a:p>
+            <a:pPr marL="342900" indent="-342900">
+              <a:buSzPct val="100000"/>
+              <a:buChar char="•"/>
+            </a:pPr>
+            <a:r>
+              <a:rPr lang="en-US" sz="800" dirty="0">
+                <a:solidFill>
+                  <a:srgbClr val="999999"/>
+                </a:solidFill>
+                <a:latin typeface="Arial" pitchFamily="34" charset="0"/>
+                <a:ea typeface="Arial" pitchFamily="34" charset="-122"/>
+                <a:cs typeface="Arial" pitchFamily="34" charset="-120"/>
+              </a:rPr>
+              <a:t>Many new fun features</a:t>
+            </a:r>
+            <a:endParaRPr lang="en-US" sz="800" dirty="0"/>
           </a:p>
         </p:txBody>
       </p:sp>
@@ -6668,8 +7014,8 @@
         </p:nvSpPr>
         <p:spPr>
           <a:xfrm>
-            <a:off x="640080" y="3154680"/>
-            <a:ext cx="3566160" cy="731520"/>
+            <a:off x="640080" y="3182112"/>
+            <a:ext cx="3566160" cy="640080"/>
           </a:xfrm>
           <a:prstGeom prst="rect">
             <a:avLst/>
@@ -6681,21 +7027,22 @@
           <a:bodyPr wrap="square" lIns="0" tIns="0" rIns="0" bIns="0" rtlCol="0" anchor="ctr"/>
           <a:lstStyle/>
           <a:p>
-            <a:pPr indent="0" marL="0">
-              <a:buNone/>
-            </a:pPr>
-            <a:r>
-              <a:rPr lang="en-US" sz="900" dirty="0">
-                <a:solidFill>
-                  <a:srgbClr val="666677"/>
+            <a:pPr marL="342900" indent="-342900">
+              <a:buSzPct val="100000"/>
+              <a:buChar char="•"/>
+            </a:pPr>
+            <a:r>
+              <a:rPr lang="en-US" sz="800" dirty="0">
+                <a:solidFill>
+                  <a:srgbClr val="999999"/>
                 </a:solidFill>
                 <a:latin typeface="Arial" pitchFamily="34" charset="0"/>
                 <a:ea typeface="Arial" pitchFamily="34" charset="-122"/>
                 <a:cs typeface="Arial" pitchFamily="34" charset="-120"/>
               </a:rPr>
-              <a:t>(content to be added)</a:t>
-            </a:r>
-            <a:endParaRPr lang="en-US" sz="900" dirty="0"/>
+              <a:t>Young People in their 20s and 30s</a:t>
+            </a:r>
+            <a:endParaRPr lang="en-US" sz="800" dirty="0"/>
           </a:p>
         </p:txBody>
       </p:sp>
@@ -6793,8 +7140,8 @@
         </p:nvSpPr>
         <p:spPr>
           <a:xfrm>
-            <a:off x="4937760" y="3154680"/>
-            <a:ext cx="3566160" cy="731520"/>
+            <a:off x="4937760" y="3182112"/>
+            <a:ext cx="3566160" cy="640080"/>
           </a:xfrm>
           <a:prstGeom prst="rect">
             <a:avLst/>
@@ -6806,21 +7153,58 @@
           <a:bodyPr wrap="square" lIns="0" tIns="0" rIns="0" bIns="0" rtlCol="0" anchor="ctr"/>
           <a:lstStyle/>
           <a:p>
-            <a:pPr indent="0" marL="0">
-              <a:buNone/>
-            </a:pPr>
-            <a:r>
-              <a:rPr lang="en-US" sz="900" dirty="0">
-                <a:solidFill>
-                  <a:srgbClr val="666677"/>
+            <a:pPr marL="342900" indent="-342900">
+              <a:buSzPct val="100000"/>
+              <a:buChar char="•"/>
+            </a:pPr>
+            <a:r>
+              <a:rPr lang="en-US" sz="800" dirty="0">
+                <a:solidFill>
+                  <a:srgbClr val="999999"/>
                 </a:solidFill>
                 <a:latin typeface="Arial" pitchFamily="34" charset="0"/>
                 <a:ea typeface="Arial" pitchFamily="34" charset="-122"/>
                 <a:cs typeface="Arial" pitchFamily="34" charset="-120"/>
               </a:rPr>
-              <a:t>(content to be added)</a:t>
-            </a:r>
-            <a:endParaRPr lang="en-US" sz="900" dirty="0"/>
+              <a:t>Eco Friendly</a:t>
+            </a:r>
+            <a:endParaRPr lang="en-US" sz="800" dirty="0"/>
+          </a:p>
+          <a:p>
+            <a:pPr marL="342900" indent="-342900">
+              <a:buSzPct val="100000"/>
+              <a:buChar char="•"/>
+            </a:pPr>
+            <a:r>
+              <a:rPr lang="en-US" sz="800" dirty="0">
+                <a:solidFill>
+                  <a:srgbClr val="999999"/>
+                </a:solidFill>
+                <a:latin typeface="Arial" pitchFamily="34" charset="0"/>
+                <a:ea typeface="Arial" pitchFamily="34" charset="-122"/>
+                <a:cs typeface="Arial" pitchFamily="34" charset="-120"/>
+              </a:rPr>
+              <a:t>Tech Savvy</a:t>
+            </a:r>
+            <a:endParaRPr lang="en-US" sz="800" dirty="0"/>
+          </a:p>
+          <a:p>
+            <a:pPr marL="342900" indent="-342900">
+              <a:buSzPct val="100000"/>
+              <a:buChar char="•"/>
+            </a:pPr>
+            <a:r>
+              <a:rPr lang="en-US" sz="800" dirty="0">
+                <a:solidFill>
+                  <a:srgbClr val="999999"/>
+                </a:solidFill>
+                <a:latin typeface="Arial" pitchFamily="34" charset="0"/>
+                <a:ea typeface="Arial" pitchFamily="34" charset="-122"/>
+                <a:cs typeface="Arial" pitchFamily="34" charset="-120"/>
+              </a:rPr>
+              <a:t>Entry Level Buyer for Electric Luxury Car</a:t>
+            </a:r>
+            <a:endParaRPr lang="en-US" sz="800" dirty="0"/>
           </a:p>
         </p:txBody>
       </p:sp>
@@ -6931,21 +7315,22 @@
           <a:bodyPr wrap="square" lIns="0" tIns="0" rIns="0" bIns="0" rtlCol="0" anchor="ctr"/>
           <a:lstStyle/>
           <a:p>
-            <a:pPr indent="0" marL="0">
-              <a:buNone/>
-            </a:pPr>
-            <a:r>
-              <a:rPr lang="en-US" sz="900" dirty="0">
-                <a:solidFill>
-                  <a:srgbClr val="666677"/>
+            <a:pPr marL="342900" indent="-342900">
+              <a:buSzPct val="100000"/>
+              <a:buChar char="•"/>
+            </a:pPr>
+            <a:r>
+              <a:rPr lang="en-US" sz="800" dirty="0">
+                <a:solidFill>
+                  <a:srgbClr val="999999"/>
                 </a:solidFill>
                 <a:latin typeface="Arial" pitchFamily="34" charset="0"/>
                 <a:ea typeface="Arial" pitchFamily="34" charset="-122"/>
                 <a:cs typeface="Arial" pitchFamily="34" charset="-120"/>
               </a:rPr>
-              <a:t>(content to be added)</a:t>
-            </a:r>
-            <a:endParaRPr lang="en-US" sz="900" dirty="0"/>
+              <a:t>Ultra high End &gt; High End &gt; SUV &gt; Mid Level [Priced at $35,000]</a:t>
+            </a:r>
+            <a:endParaRPr lang="en-US" sz="800" dirty="0"/>
           </a:p>
         </p:txBody>
       </p:sp>
@@ -7056,21 +7441,40 @@
           <a:bodyPr wrap="square" lIns="0" tIns="0" rIns="0" bIns="0" rtlCol="0" anchor="ctr"/>
           <a:lstStyle/>
           <a:p>
-            <a:pPr indent="0" marL="0">
-              <a:buNone/>
-            </a:pPr>
-            <a:r>
-              <a:rPr lang="en-US" sz="900" dirty="0">
-                <a:solidFill>
-                  <a:srgbClr val="666677"/>
+            <a:pPr marL="342900" indent="-342900">
+              <a:buSzPct val="100000"/>
+              <a:buChar char="•"/>
+            </a:pPr>
+            <a:r>
+              <a:rPr lang="en-US" sz="800" dirty="0">
+                <a:solidFill>
+                  <a:srgbClr val="999999"/>
                 </a:solidFill>
                 <a:latin typeface="Arial" pitchFamily="34" charset="0"/>
                 <a:ea typeface="Arial" pitchFamily="34" charset="-122"/>
                 <a:cs typeface="Arial" pitchFamily="34" charset="-120"/>
               </a:rPr>
-              <a:t>(content to be added)</a:t>
-            </a:r>
-            <a:endParaRPr lang="en-US" sz="900" dirty="0"/>
+              <a:t>Target Women</a:t>
+            </a:r>
+            <a:endParaRPr lang="en-US" sz="800" dirty="0"/>
+          </a:p>
+          <a:p>
+            <a:pPr marL="342900" indent="-342900">
+              <a:buSzPct val="100000"/>
+              <a:buChar char="•"/>
+            </a:pPr>
+            <a:r>
+              <a:rPr lang="en-US" sz="800" dirty="0">
+                <a:solidFill>
+                  <a:srgbClr val="999999"/>
+                </a:solidFill>
+                <a:latin typeface="Arial" pitchFamily="34" charset="0"/>
+                <a:ea typeface="Arial" pitchFamily="34" charset="-122"/>
+                <a:cs typeface="Arial" pitchFamily="34" charset="-120"/>
+              </a:rPr>
+              <a:t>More affordable car options for lower income market</a:t>
+            </a:r>
+            <a:endParaRPr lang="en-US" sz="800" dirty="0"/>
           </a:p>
         </p:txBody>
       </p:sp>
@@ -7198,7 +7602,7 @@
                 <a:ea typeface="Arial Black" pitchFamily="34" charset="-122"/>
                 <a:cs typeface="Arial Black" pitchFamily="34" charset="-120"/>
               </a:rPr>
-              <a:t>Marketing Mix — 7Ps &amp; Recommendations</a:t>
+              <a:t>Marketing Mix — 4Ps &amp; Recommendations</a:t>
             </a:r>
             <a:endParaRPr lang="en-US" sz="2200" dirty="0"/>
           </a:p>
@@ -7213,7 +7617,7 @@
         <p:spPr>
           <a:xfrm>
             <a:off x="457200" y="1188720"/>
-            <a:ext cx="1938528" cy="1691640"/>
+            <a:ext cx="3931920" cy="1600200"/>
           </a:xfrm>
           <a:prstGeom prst="rect">
             <a:avLst/>
@@ -7240,7 +7644,7 @@
         <p:spPr>
           <a:xfrm>
             <a:off x="457200" y="1188720"/>
-            <a:ext cx="1938528" cy="32004"/>
+            <a:ext cx="3931920" cy="32004"/>
           </a:xfrm>
           <a:prstGeom prst="rect">
             <a:avLst/>
@@ -7259,8 +7663,8 @@
         </p:nvSpPr>
         <p:spPr>
           <a:xfrm>
-            <a:off x="548640" y="1252728"/>
-            <a:ext cx="1737360" cy="182880"/>
+            <a:off x="594360" y="1261872"/>
+            <a:ext cx="3200400" cy="201168"/>
           </a:xfrm>
           <a:prstGeom prst="rect">
             <a:avLst/>
@@ -7276,7 +7680,7 @@
               <a:buNone/>
             </a:pPr>
             <a:r>
-              <a:rPr lang="en-US" sz="850" b="1" dirty="0">
+              <a:rPr lang="en-US" sz="1000" b="1" dirty="0">
                 <a:solidFill>
                   <a:srgbClr val="E82127"/>
                 </a:solidFill>
@@ -7286,7 +7690,7 @@
               </a:rPr>
               <a:t>4.1 Product</a:t>
             </a:r>
-            <a:endParaRPr lang="en-US" sz="850" dirty="0"/>
+            <a:endParaRPr lang="en-US" sz="1000" dirty="0"/>
           </a:p>
         </p:txBody>
       </p:sp>
@@ -7298,8 +7702,8 @@
         </p:nvSpPr>
         <p:spPr>
           <a:xfrm>
-            <a:off x="548640" y="1463040"/>
-            <a:ext cx="1737360" cy="1325880"/>
+            <a:off x="594360" y="1508760"/>
+            <a:ext cx="3657600" cy="1188720"/>
           </a:xfrm>
           <a:prstGeom prst="rect">
             <a:avLst/>
@@ -7311,21 +7715,76 @@
           <a:bodyPr wrap="square" lIns="0" tIns="0" rIns="0" bIns="0" rtlCol="0" anchor="ctr"/>
           <a:lstStyle/>
           <a:p>
-            <a:pPr indent="0" marL="0">
-              <a:buNone/>
-            </a:pPr>
-            <a:r>
-              <a:rPr lang="en-US" sz="900" dirty="0">
-                <a:solidFill>
-                  <a:srgbClr val="666677"/>
+            <a:pPr marL="342900" indent="-342900">
+              <a:buSzPct val="100000"/>
+              <a:buChar char="•"/>
+            </a:pPr>
+            <a:r>
+              <a:rPr lang="en-US" sz="850" dirty="0">
+                <a:solidFill>
+                  <a:srgbClr val="999999"/>
                 </a:solidFill>
                 <a:latin typeface="Arial" pitchFamily="34" charset="0"/>
                 <a:ea typeface="Arial" pitchFamily="34" charset="-122"/>
                 <a:cs typeface="Arial" pitchFamily="34" charset="-120"/>
               </a:rPr>
-              <a:t>(content to be added)</a:t>
-            </a:r>
-            <a:endParaRPr lang="en-US" sz="900" dirty="0"/>
+              <a:t>Great EV product</a:t>
+            </a:r>
+            <a:endParaRPr lang="en-US" sz="850" dirty="0"/>
+          </a:p>
+          <a:p>
+            <a:pPr marL="342900" indent="-342900">
+              <a:buSzPct val="100000"/>
+              <a:buChar char="•"/>
+            </a:pPr>
+            <a:r>
+              <a:rPr lang="en-US" sz="850" dirty="0">
+                <a:solidFill>
+                  <a:srgbClr val="999999"/>
+                </a:solidFill>
+                <a:latin typeface="Arial" pitchFamily="34" charset="0"/>
+                <a:ea typeface="Arial" pitchFamily="34" charset="-122"/>
+                <a:cs typeface="Arial" pitchFamily="34" charset="-120"/>
+              </a:rPr>
+              <a:t>Pure Electric</a:t>
+            </a:r>
+            <a:endParaRPr lang="en-US" sz="850" dirty="0"/>
+          </a:p>
+          <a:p>
+            <a:pPr marL="342900" indent="-342900">
+              <a:buSzPct val="100000"/>
+              <a:buChar char="•"/>
+            </a:pPr>
+            <a:r>
+              <a:rPr lang="en-US" sz="850" dirty="0">
+                <a:solidFill>
+                  <a:srgbClr val="999999"/>
+                </a:solidFill>
+                <a:latin typeface="Arial" pitchFamily="34" charset="0"/>
+                <a:ea typeface="Arial" pitchFamily="34" charset="-122"/>
+                <a:cs typeface="Arial" pitchFamily="34" charset="-120"/>
+              </a:rPr>
+              <a:t>Simple Structure</a:t>
+            </a:r>
+            <a:endParaRPr lang="en-US" sz="850" dirty="0"/>
+          </a:p>
+          <a:p>
+            <a:pPr marL="342900" indent="-342900">
+              <a:buSzPct val="100000"/>
+              <a:buChar char="•"/>
+            </a:pPr>
+            <a:r>
+              <a:rPr lang="en-US" sz="850" dirty="0">
+                <a:solidFill>
+                  <a:srgbClr val="999999"/>
+                </a:solidFill>
+                <a:latin typeface="Arial" pitchFamily="34" charset="0"/>
+                <a:ea typeface="Arial" pitchFamily="34" charset="-122"/>
+                <a:cs typeface="Arial" pitchFamily="34" charset="-120"/>
+              </a:rPr>
+              <a:t>Minimalist Design</a:t>
+            </a:r>
+            <a:endParaRPr lang="en-US" sz="850" dirty="0"/>
           </a:p>
         </p:txBody>
       </p:sp>
@@ -7337,8 +7796,8 @@
         </p:nvSpPr>
         <p:spPr>
           <a:xfrm>
-            <a:off x="2578608" y="1188720"/>
-            <a:ext cx="1938528" cy="1691640"/>
+            <a:off x="4663440" y="1188720"/>
+            <a:ext cx="3931920" cy="1600200"/>
           </a:xfrm>
           <a:prstGeom prst="rect">
             <a:avLst/>
@@ -7364,8 +7823,8 @@
         </p:nvSpPr>
         <p:spPr>
           <a:xfrm>
-            <a:off x="2578608" y="1188720"/>
-            <a:ext cx="1938528" cy="32004"/>
+            <a:off x="4663440" y="1188720"/>
+            <a:ext cx="3931920" cy="32004"/>
           </a:xfrm>
           <a:prstGeom prst="rect">
             <a:avLst/>
@@ -7384,8 +7843,8 @@
         </p:nvSpPr>
         <p:spPr>
           <a:xfrm>
-            <a:off x="2670048" y="1252728"/>
-            <a:ext cx="1737360" cy="182880"/>
+            <a:off x="4800600" y="1261872"/>
+            <a:ext cx="3200400" cy="201168"/>
           </a:xfrm>
           <a:prstGeom prst="rect">
             <a:avLst/>
@@ -7401,7 +7860,7 @@
               <a:buNone/>
             </a:pPr>
             <a:r>
-              <a:rPr lang="en-US" sz="850" b="1" dirty="0">
+              <a:rPr lang="en-US" sz="1000" b="1" dirty="0">
                 <a:solidFill>
                   <a:srgbClr val="E82127"/>
                 </a:solidFill>
@@ -7411,7 +7870,7 @@
               </a:rPr>
               <a:t>4.2 Pricing</a:t>
             </a:r>
-            <a:endParaRPr lang="en-US" sz="850" dirty="0"/>
+            <a:endParaRPr lang="en-US" sz="1000" dirty="0"/>
           </a:p>
         </p:txBody>
       </p:sp>
@@ -7423,8 +7882,8 @@
         </p:nvSpPr>
         <p:spPr>
           <a:xfrm>
-            <a:off x="2670048" y="1463040"/>
-            <a:ext cx="1737360" cy="1325880"/>
+            <a:off x="4800600" y="1508760"/>
+            <a:ext cx="3657600" cy="1188720"/>
           </a:xfrm>
           <a:prstGeom prst="rect">
             <a:avLst/>
@@ -7436,21 +7895,58 @@
           <a:bodyPr wrap="square" lIns="0" tIns="0" rIns="0" bIns="0" rtlCol="0" anchor="ctr"/>
           <a:lstStyle/>
           <a:p>
-            <a:pPr indent="0" marL="0">
-              <a:buNone/>
-            </a:pPr>
-            <a:r>
-              <a:rPr lang="en-US" sz="900" dirty="0">
-                <a:solidFill>
-                  <a:srgbClr val="666677"/>
+            <a:pPr marL="342900" indent="-342900">
+              <a:buSzPct val="100000"/>
+              <a:buChar char="•"/>
+            </a:pPr>
+            <a:r>
+              <a:rPr lang="en-US" sz="850" dirty="0">
+                <a:solidFill>
+                  <a:srgbClr val="999999"/>
                 </a:solidFill>
                 <a:latin typeface="Arial" pitchFamily="34" charset="0"/>
                 <a:ea typeface="Arial" pitchFamily="34" charset="-122"/>
                 <a:cs typeface="Arial" pitchFamily="34" charset="-120"/>
               </a:rPr>
-              <a:t>(content to be added)</a:t>
-            </a:r>
-            <a:endParaRPr lang="en-US" sz="900" dirty="0"/>
+              <a:t>Priced Slightly higher than affordable range</a:t>
+            </a:r>
+            <a:endParaRPr lang="en-US" sz="850" dirty="0"/>
+          </a:p>
+          <a:p>
+            <a:pPr marL="342900" indent="-342900">
+              <a:buSzPct val="100000"/>
+              <a:buChar char="•"/>
+            </a:pPr>
+            <a:r>
+              <a:rPr lang="en-US" sz="850" dirty="0">
+                <a:solidFill>
+                  <a:srgbClr val="999999"/>
+                </a:solidFill>
+                <a:latin typeface="Arial" pitchFamily="34" charset="0"/>
+                <a:ea typeface="Arial" pitchFamily="34" charset="-122"/>
+                <a:cs typeface="Arial" pitchFamily="34" charset="-120"/>
+              </a:rPr>
+              <a:t>But due to subsidy</a:t>
+            </a:r>
+            <a:endParaRPr lang="en-US" sz="850" dirty="0"/>
+          </a:p>
+          <a:p>
+            <a:pPr marL="342900" indent="-342900">
+              <a:buSzPct val="100000"/>
+              <a:buChar char="•"/>
+            </a:pPr>
+            <a:r>
+              <a:rPr lang="en-US" sz="850" dirty="0">
+                <a:solidFill>
+                  <a:srgbClr val="999999"/>
+                </a:solidFill>
+                <a:latin typeface="Arial" pitchFamily="34" charset="0"/>
+                <a:ea typeface="Arial" pitchFamily="34" charset="-122"/>
+                <a:cs typeface="Arial" pitchFamily="34" charset="-120"/>
+              </a:rPr>
+              <a:t>Feels premium but affordable</a:t>
+            </a:r>
+            <a:endParaRPr lang="en-US" sz="850" dirty="0"/>
           </a:p>
         </p:txBody>
       </p:sp>
@@ -7462,8 +7958,8 @@
         </p:nvSpPr>
         <p:spPr>
           <a:xfrm>
-            <a:off x="4700016" y="1188720"/>
-            <a:ext cx="1938528" cy="1691640"/>
+            <a:off x="457200" y="2971800"/>
+            <a:ext cx="3931920" cy="1600200"/>
           </a:xfrm>
           <a:prstGeom prst="rect">
             <a:avLst/>
@@ -7489,8 +7985,8 @@
         </p:nvSpPr>
         <p:spPr>
           <a:xfrm>
-            <a:off x="4700016" y="1188720"/>
-            <a:ext cx="1938528" cy="32004"/>
+            <a:off x="457200" y="2971800"/>
+            <a:ext cx="3931920" cy="32004"/>
           </a:xfrm>
           <a:prstGeom prst="rect">
             <a:avLst/>
@@ -7509,8 +8005,8 @@
         </p:nvSpPr>
         <p:spPr>
           <a:xfrm>
-            <a:off x="4791456" y="1252728"/>
-            <a:ext cx="1737360" cy="182880"/>
+            <a:off x="594360" y="3044952"/>
+            <a:ext cx="3200400" cy="201168"/>
           </a:xfrm>
           <a:prstGeom prst="rect">
             <a:avLst/>
@@ -7526,7 +8022,7 @@
               <a:buNone/>
             </a:pPr>
             <a:r>
-              <a:rPr lang="en-US" sz="850" b="1" dirty="0">
+              <a:rPr lang="en-US" sz="1000" b="1" dirty="0">
                 <a:solidFill>
                   <a:srgbClr val="E82127"/>
                 </a:solidFill>
@@ -7534,9 +8030,9 @@
                 <a:ea typeface="Arial" pitchFamily="34" charset="-122"/>
                 <a:cs typeface="Arial" pitchFamily="34" charset="-120"/>
               </a:rPr>
-              <a:t>4.3 Distribution</a:t>
-            </a:r>
-            <a:endParaRPr lang="en-US" sz="850" dirty="0"/>
+              <a:t>4.3 Place</a:t>
+            </a:r>
+            <a:endParaRPr lang="en-US" sz="1000" dirty="0"/>
           </a:p>
         </p:txBody>
       </p:sp>
@@ -7548,8 +8044,8 @@
         </p:nvSpPr>
         <p:spPr>
           <a:xfrm>
-            <a:off x="4791456" y="1463040"/>
-            <a:ext cx="1737360" cy="1325880"/>
+            <a:off x="594360" y="3291840"/>
+            <a:ext cx="3657600" cy="1188720"/>
           </a:xfrm>
           <a:prstGeom prst="rect">
             <a:avLst/>
@@ -7561,21 +8057,58 @@
           <a:bodyPr wrap="square" lIns="0" tIns="0" rIns="0" bIns="0" rtlCol="0" anchor="ctr"/>
           <a:lstStyle/>
           <a:p>
-            <a:pPr indent="0" marL="0">
-              <a:buNone/>
-            </a:pPr>
-            <a:r>
-              <a:rPr lang="en-US" sz="900" dirty="0">
-                <a:solidFill>
-                  <a:srgbClr val="666677"/>
+            <a:pPr marL="342900" indent="-342900">
+              <a:buSzPct val="100000"/>
+              <a:buChar char="•"/>
+            </a:pPr>
+            <a:r>
+              <a:rPr lang="en-US" sz="850" dirty="0">
+                <a:solidFill>
+                  <a:srgbClr val="999999"/>
                 </a:solidFill>
                 <a:latin typeface="Arial" pitchFamily="34" charset="0"/>
                 <a:ea typeface="Arial" pitchFamily="34" charset="-122"/>
                 <a:cs typeface="Arial" pitchFamily="34" charset="-120"/>
               </a:rPr>
-              <a:t>(content to be added)</a:t>
-            </a:r>
-            <a:endParaRPr lang="en-US" sz="900" dirty="0"/>
+              <a:t>Online Shopping</a:t>
+            </a:r>
+            <a:endParaRPr lang="en-US" sz="850" dirty="0"/>
+          </a:p>
+          <a:p>
+            <a:pPr marL="342900" indent="-342900">
+              <a:buSzPct val="100000"/>
+              <a:buChar char="•"/>
+            </a:pPr>
+            <a:r>
+              <a:rPr lang="en-US" sz="850" dirty="0">
+                <a:solidFill>
+                  <a:srgbClr val="999999"/>
+                </a:solidFill>
+                <a:latin typeface="Arial" pitchFamily="34" charset="0"/>
+                <a:ea typeface="Arial" pitchFamily="34" charset="-122"/>
+                <a:cs typeface="Arial" pitchFamily="34" charset="-120"/>
+              </a:rPr>
+              <a:t>No External Dealerships</a:t>
+            </a:r>
+            <a:endParaRPr lang="en-US" sz="850" dirty="0"/>
+          </a:p>
+          <a:p>
+            <a:pPr marL="342900" indent="-342900">
+              <a:buSzPct val="100000"/>
+              <a:buChar char="•"/>
+            </a:pPr>
+            <a:r>
+              <a:rPr lang="en-US" sz="850" dirty="0">
+                <a:solidFill>
+                  <a:srgbClr val="999999"/>
+                </a:solidFill>
+                <a:latin typeface="Arial" pitchFamily="34" charset="0"/>
+                <a:ea typeface="Arial" pitchFamily="34" charset="-122"/>
+                <a:cs typeface="Arial" pitchFamily="34" charset="-120"/>
+              </a:rPr>
+              <a:t>All Stores owned and managed by Tesla</a:t>
+            </a:r>
+            <a:endParaRPr lang="en-US" sz="850" dirty="0"/>
           </a:p>
         </p:txBody>
       </p:sp>
@@ -7587,8 +8120,8 @@
         </p:nvSpPr>
         <p:spPr>
           <a:xfrm>
-            <a:off x="6821424" y="1188720"/>
-            <a:ext cx="1938528" cy="1691640"/>
+            <a:off x="4663440" y="2971800"/>
+            <a:ext cx="3931920" cy="1600200"/>
           </a:xfrm>
           <a:prstGeom prst="rect">
             <a:avLst/>
@@ -7614,8 +8147,8 @@
         </p:nvSpPr>
         <p:spPr>
           <a:xfrm>
-            <a:off x="6821424" y="1188720"/>
-            <a:ext cx="1938528" cy="32004"/>
+            <a:off x="4663440" y="2971800"/>
+            <a:ext cx="3931920" cy="32004"/>
           </a:xfrm>
           <a:prstGeom prst="rect">
             <a:avLst/>
@@ -7634,8 +8167,8 @@
         </p:nvSpPr>
         <p:spPr>
           <a:xfrm>
-            <a:off x="6912864" y="1252728"/>
-            <a:ext cx="1737360" cy="182880"/>
+            <a:off x="4800600" y="3044952"/>
+            <a:ext cx="3200400" cy="201168"/>
           </a:xfrm>
           <a:prstGeom prst="rect">
             <a:avLst/>
@@ -7651,7 +8184,7 @@
               <a:buNone/>
             </a:pPr>
             <a:r>
-              <a:rPr lang="en-US" sz="850" b="1" dirty="0">
+              <a:rPr lang="en-US" sz="1000" b="1" dirty="0">
                 <a:solidFill>
                   <a:srgbClr val="E82127"/>
                 </a:solidFill>
@@ -7661,7 +8194,7 @@
               </a:rPr>
               <a:t>4.4 Promotion</a:t>
             </a:r>
-            <a:endParaRPr lang="en-US" sz="850" dirty="0"/>
+            <a:endParaRPr lang="en-US" sz="1000" dirty="0"/>
           </a:p>
         </p:txBody>
       </p:sp>
@@ -7673,8 +8206,8 @@
         </p:nvSpPr>
         <p:spPr>
           <a:xfrm>
-            <a:off x="6912864" y="1463040"/>
-            <a:ext cx="1737360" cy="1325880"/>
+            <a:off x="4800600" y="3291840"/>
+            <a:ext cx="3657600" cy="1188720"/>
           </a:xfrm>
           <a:prstGeom prst="rect">
             <a:avLst/>
@@ -7686,21 +8219,76 @@
           <a:bodyPr wrap="square" lIns="0" tIns="0" rIns="0" bIns="0" rtlCol="0" anchor="ctr"/>
           <a:lstStyle/>
           <a:p>
-            <a:pPr indent="0" marL="0">
-              <a:buNone/>
-            </a:pPr>
-            <a:r>
-              <a:rPr lang="en-US" sz="900" dirty="0">
-                <a:solidFill>
-                  <a:srgbClr val="666677"/>
+            <a:pPr marL="342900" indent="-342900">
+              <a:buSzPct val="100000"/>
+              <a:buChar char="•"/>
+            </a:pPr>
+            <a:r>
+              <a:rPr lang="en-US" sz="850" dirty="0">
+                <a:solidFill>
+                  <a:srgbClr val="999999"/>
                 </a:solidFill>
                 <a:latin typeface="Arial" pitchFamily="34" charset="0"/>
                 <a:ea typeface="Arial" pitchFamily="34" charset="-122"/>
                 <a:cs typeface="Arial" pitchFamily="34" charset="-120"/>
               </a:rPr>
-              <a:t>(content to be added)</a:t>
-            </a:r>
-            <a:endParaRPr lang="en-US" sz="900" dirty="0"/>
+              <a:t>$0 ad spent</a:t>
+            </a:r>
+            <a:endParaRPr lang="en-US" sz="850" dirty="0"/>
+          </a:p>
+          <a:p>
+            <a:pPr marL="342900" indent="-342900">
+              <a:buSzPct val="100000"/>
+              <a:buChar char="•"/>
+            </a:pPr>
+            <a:r>
+              <a:rPr lang="en-US" sz="850" dirty="0">
+                <a:solidFill>
+                  <a:srgbClr val="999999"/>
+                </a:solidFill>
+                <a:latin typeface="Arial" pitchFamily="34" charset="0"/>
+                <a:ea typeface="Arial" pitchFamily="34" charset="-122"/>
+                <a:cs typeface="Arial" pitchFamily="34" charset="-120"/>
+              </a:rPr>
+              <a:t>Elon Musk (200m followers)</a:t>
+            </a:r>
+            <a:endParaRPr lang="en-US" sz="850" dirty="0"/>
+          </a:p>
+          <a:p>
+            <a:pPr marL="342900" indent="-342900">
+              <a:buSzPct val="100000"/>
+              <a:buChar char="•"/>
+            </a:pPr>
+            <a:r>
+              <a:rPr lang="en-US" sz="850" dirty="0">
+                <a:solidFill>
+                  <a:srgbClr val="999999"/>
+                </a:solidFill>
+                <a:latin typeface="Arial" pitchFamily="34" charset="0"/>
+                <a:ea typeface="Arial" pitchFamily="34" charset="-122"/>
+                <a:cs typeface="Arial" pitchFamily="34" charset="-120"/>
+              </a:rPr>
+              <a:t>Bring in $19B of ad value</a:t>
+            </a:r>
+            <a:endParaRPr lang="en-US" sz="850" dirty="0"/>
+          </a:p>
+          <a:p>
+            <a:pPr marL="342900" indent="-342900">
+              <a:buSzPct val="100000"/>
+              <a:buChar char="•"/>
+            </a:pPr>
+            <a:r>
+              <a:rPr lang="en-US" sz="850" dirty="0">
+                <a:solidFill>
+                  <a:srgbClr val="999999"/>
+                </a:solidFill>
+                <a:latin typeface="Arial" pitchFamily="34" charset="0"/>
+                <a:ea typeface="Arial" pitchFamily="34" charset="-122"/>
+                <a:cs typeface="Arial" pitchFamily="34" charset="-120"/>
+              </a:rPr>
+              <a:t>Referral programs</a:t>
+            </a:r>
+            <a:endParaRPr lang="en-US" sz="850" dirty="0"/>
           </a:p>
         </p:txBody>
       </p:sp>
@@ -7712,8 +8300,8 @@
         </p:nvSpPr>
         <p:spPr>
           <a:xfrm>
-            <a:off x="457200" y="3063240"/>
-            <a:ext cx="2606040" cy="1234440"/>
+            <a:off x="457200" y="4663440"/>
+            <a:ext cx="8229600" cy="365760"/>
           </a:xfrm>
           <a:prstGeom prst="rect">
             <a:avLst/>
@@ -7739,14 +8327,14 @@
         </p:nvSpPr>
         <p:spPr>
           <a:xfrm>
-            <a:off x="457200" y="3063240"/>
-            <a:ext cx="2606040" cy="32004"/>
+            <a:off x="457200" y="4663440"/>
+            <a:ext cx="45720" cy="365760"/>
           </a:xfrm>
           <a:prstGeom prst="rect">
             <a:avLst/>
           </a:prstGeom>
           <a:solidFill>
-            <a:srgbClr val="E82127"/>
+            <a:srgbClr val="E65100"/>
           </a:solidFill>
           <a:ln/>
         </p:spPr>
@@ -7759,8 +8347,8 @@
         </p:nvSpPr>
         <p:spPr>
           <a:xfrm>
-            <a:off x="548640" y="3127248"/>
-            <a:ext cx="2377440" cy="182880"/>
+            <a:off x="640080" y="4681728"/>
+            <a:ext cx="1645920" cy="164592"/>
           </a:xfrm>
           <a:prstGeom prst="rect">
             <a:avLst/>
@@ -7776,17 +8364,17 @@
               <a:buNone/>
             </a:pPr>
             <a:r>
-              <a:rPr lang="en-US" sz="850" b="1" dirty="0">
-                <a:solidFill>
-                  <a:srgbClr val="E82127"/>
+              <a:rPr lang="en-US" sz="800" b="1" dirty="0">
+                <a:solidFill>
+                  <a:srgbClr val="FF9800"/>
                 </a:solidFill>
                 <a:latin typeface="Arial" pitchFamily="34" charset="0"/>
                 <a:ea typeface="Arial" pitchFamily="34" charset="-122"/>
                 <a:cs typeface="Arial" pitchFamily="34" charset="-120"/>
               </a:rPr>
-              <a:t>4.5 People</a:t>
-            </a:r>
-            <a:endParaRPr lang="en-US" sz="850" dirty="0"/>
+              <a:t>4.5 Recommendations</a:t>
+            </a:r>
+            <a:endParaRPr lang="en-US" sz="800" dirty="0"/>
           </a:p>
         </p:txBody>
       </p:sp>
@@ -7798,8 +8386,8 @@
         </p:nvSpPr>
         <p:spPr>
           <a:xfrm>
-            <a:off x="548640" y="3337560"/>
-            <a:ext cx="2377440" cy="914400"/>
+            <a:off x="2377440" y="4681728"/>
+            <a:ext cx="6035040" cy="274320"/>
           </a:xfrm>
           <a:prstGeom prst="rect">
             <a:avLst/>
@@ -7815,7 +8403,7 @@
               <a:buNone/>
             </a:pPr>
             <a:r>
-              <a:rPr lang="en-US" sz="900" dirty="0">
+              <a:rPr lang="en-US" sz="800" dirty="0">
                 <a:solidFill>
                   <a:srgbClr val="666677"/>
                 </a:solidFill>
@@ -7823,384 +8411,9 @@
                 <a:ea typeface="Arial" pitchFamily="34" charset="-122"/>
                 <a:cs typeface="Arial" pitchFamily="34" charset="-120"/>
               </a:rPr>
-              <a:t>(content to be added)</a:t>
-            </a:r>
-            <a:endParaRPr lang="en-US" sz="900" dirty="0"/>
-          </a:p>
-        </p:txBody>
-      </p:sp>
-      <p:sp>
-        <p:nvSpPr>
-          <p:cNvPr id="25" name="Shape 23"/>
-          <p:cNvSpPr/>
-          <p:nvPr/>
-        </p:nvSpPr>
-        <p:spPr>
-          <a:xfrm>
-            <a:off x="3291840" y="3063240"/>
-            <a:ext cx="2606040" cy="1234440"/>
-          </a:xfrm>
-          <a:prstGeom prst="rect">
-            <a:avLst/>
-          </a:prstGeom>
-          <a:solidFill>
-            <a:srgbClr val="141420"/>
-          </a:solidFill>
-          <a:ln/>
-          <a:effectLst>
-            <a:outerShdw sx="100000" sy="100000" kx="0" ky="0" algn="bl" rotWithShape="0" blurRad="76200" dist="25400" dir="8100000">
-              <a:srgbClr val="000000">
-                <a:alpha val="35000"/>
-              </a:srgbClr>
-            </a:outerShdw>
-          </a:effectLst>
-        </p:spPr>
-      </p:sp>
-      <p:sp>
-        <p:nvSpPr>
-          <p:cNvPr id="26" name="Shape 24"/>
-          <p:cNvSpPr/>
-          <p:nvPr/>
-        </p:nvSpPr>
-        <p:spPr>
-          <a:xfrm>
-            <a:off x="3291840" y="3063240"/>
-            <a:ext cx="2606040" cy="32004"/>
-          </a:xfrm>
-          <a:prstGeom prst="rect">
-            <a:avLst/>
-          </a:prstGeom>
-          <a:solidFill>
-            <a:srgbClr val="E82127"/>
-          </a:solidFill>
-          <a:ln/>
-        </p:spPr>
-      </p:sp>
-      <p:sp>
-        <p:nvSpPr>
-          <p:cNvPr id="27" name="Text 25"/>
-          <p:cNvSpPr/>
-          <p:nvPr/>
-        </p:nvSpPr>
-        <p:spPr>
-          <a:xfrm>
-            <a:off x="3383280" y="3127248"/>
-            <a:ext cx="2377440" cy="182880"/>
-          </a:xfrm>
-          <a:prstGeom prst="rect">
-            <a:avLst/>
-          </a:prstGeom>
-          <a:noFill/>
-          <a:ln/>
-        </p:spPr>
-        <p:txBody>
-          <a:bodyPr wrap="square" lIns="0" tIns="0" rIns="0" bIns="0" rtlCol="0" anchor="ctr"/>
-          <a:lstStyle/>
-          <a:p>
-            <a:pPr indent="0" marL="0">
-              <a:buNone/>
-            </a:pPr>
-            <a:r>
-              <a:rPr lang="en-US" sz="850" b="1" dirty="0">
-                <a:solidFill>
-                  <a:srgbClr val="E82127"/>
-                </a:solidFill>
-                <a:latin typeface="Arial" pitchFamily="34" charset="0"/>
-                <a:ea typeface="Arial" pitchFamily="34" charset="-122"/>
-                <a:cs typeface="Arial" pitchFamily="34" charset="-120"/>
-              </a:rPr>
-              <a:t>4.6 Process</a:t>
-            </a:r>
-            <a:endParaRPr lang="en-US" sz="850" dirty="0"/>
-          </a:p>
-        </p:txBody>
-      </p:sp>
-      <p:sp>
-        <p:nvSpPr>
-          <p:cNvPr id="28" name="Text 26"/>
-          <p:cNvSpPr/>
-          <p:nvPr/>
-        </p:nvSpPr>
-        <p:spPr>
-          <a:xfrm>
-            <a:off x="3383280" y="3337560"/>
-            <a:ext cx="2377440" cy="914400"/>
-          </a:xfrm>
-          <a:prstGeom prst="rect">
-            <a:avLst/>
-          </a:prstGeom>
-          <a:noFill/>
-          <a:ln/>
-        </p:spPr>
-        <p:txBody>
-          <a:bodyPr wrap="square" lIns="0" tIns="0" rIns="0" bIns="0" rtlCol="0" anchor="ctr"/>
-          <a:lstStyle/>
-          <a:p>
-            <a:pPr indent="0" marL="0">
-              <a:buNone/>
-            </a:pPr>
-            <a:r>
-              <a:rPr lang="en-US" sz="900" dirty="0">
-                <a:solidFill>
-                  <a:srgbClr val="666677"/>
-                </a:solidFill>
-                <a:latin typeface="Arial" pitchFamily="34" charset="0"/>
-                <a:ea typeface="Arial" pitchFamily="34" charset="-122"/>
-                <a:cs typeface="Arial" pitchFamily="34" charset="-120"/>
-              </a:rPr>
-              <a:t>(content to be added)</a:t>
-            </a:r>
-            <a:endParaRPr lang="en-US" sz="900" dirty="0"/>
-          </a:p>
-        </p:txBody>
-      </p:sp>
-      <p:sp>
-        <p:nvSpPr>
-          <p:cNvPr id="29" name="Shape 27"/>
-          <p:cNvSpPr/>
-          <p:nvPr/>
-        </p:nvSpPr>
-        <p:spPr>
-          <a:xfrm>
-            <a:off x="6126480" y="3063240"/>
-            <a:ext cx="2606040" cy="1234440"/>
-          </a:xfrm>
-          <a:prstGeom prst="rect">
-            <a:avLst/>
-          </a:prstGeom>
-          <a:solidFill>
-            <a:srgbClr val="141420"/>
-          </a:solidFill>
-          <a:ln/>
-          <a:effectLst>
-            <a:outerShdw sx="100000" sy="100000" kx="0" ky="0" algn="bl" rotWithShape="0" blurRad="76200" dist="25400" dir="8100000">
-              <a:srgbClr val="000000">
-                <a:alpha val="35000"/>
-              </a:srgbClr>
-            </a:outerShdw>
-          </a:effectLst>
-        </p:spPr>
-      </p:sp>
-      <p:sp>
-        <p:nvSpPr>
-          <p:cNvPr id="30" name="Shape 28"/>
-          <p:cNvSpPr/>
-          <p:nvPr/>
-        </p:nvSpPr>
-        <p:spPr>
-          <a:xfrm>
-            <a:off x="6126480" y="3063240"/>
-            <a:ext cx="2606040" cy="32004"/>
-          </a:xfrm>
-          <a:prstGeom prst="rect">
-            <a:avLst/>
-          </a:prstGeom>
-          <a:solidFill>
-            <a:srgbClr val="E82127"/>
-          </a:solidFill>
-          <a:ln/>
-        </p:spPr>
-      </p:sp>
-      <p:sp>
-        <p:nvSpPr>
-          <p:cNvPr id="31" name="Text 29"/>
-          <p:cNvSpPr/>
-          <p:nvPr/>
-        </p:nvSpPr>
-        <p:spPr>
-          <a:xfrm>
-            <a:off x="6217920" y="3127248"/>
-            <a:ext cx="2377440" cy="182880"/>
-          </a:xfrm>
-          <a:prstGeom prst="rect">
-            <a:avLst/>
-          </a:prstGeom>
-          <a:noFill/>
-          <a:ln/>
-        </p:spPr>
-        <p:txBody>
-          <a:bodyPr wrap="square" lIns="0" tIns="0" rIns="0" bIns="0" rtlCol="0" anchor="ctr"/>
-          <a:lstStyle/>
-          <a:p>
-            <a:pPr indent="0" marL="0">
-              <a:buNone/>
-            </a:pPr>
-            <a:r>
-              <a:rPr lang="en-US" sz="850" b="1" dirty="0">
-                <a:solidFill>
-                  <a:srgbClr val="E82127"/>
-                </a:solidFill>
-                <a:latin typeface="Arial" pitchFamily="34" charset="0"/>
-                <a:ea typeface="Arial" pitchFamily="34" charset="-122"/>
-                <a:cs typeface="Arial" pitchFamily="34" charset="-120"/>
-              </a:rPr>
-              <a:t>4.7 Physical Evidence</a:t>
-            </a:r>
-            <a:endParaRPr lang="en-US" sz="850" dirty="0"/>
-          </a:p>
-        </p:txBody>
-      </p:sp>
-      <p:sp>
-        <p:nvSpPr>
-          <p:cNvPr id="32" name="Text 30"/>
-          <p:cNvSpPr/>
-          <p:nvPr/>
-        </p:nvSpPr>
-        <p:spPr>
-          <a:xfrm>
-            <a:off x="6217920" y="3337560"/>
-            <a:ext cx="2377440" cy="914400"/>
-          </a:xfrm>
-          <a:prstGeom prst="rect">
-            <a:avLst/>
-          </a:prstGeom>
-          <a:noFill/>
-          <a:ln/>
-        </p:spPr>
-        <p:txBody>
-          <a:bodyPr wrap="square" lIns="0" tIns="0" rIns="0" bIns="0" rtlCol="0" anchor="ctr"/>
-          <a:lstStyle/>
-          <a:p>
-            <a:pPr indent="0" marL="0">
-              <a:buNone/>
-            </a:pPr>
-            <a:r>
-              <a:rPr lang="en-US" sz="900" dirty="0">
-                <a:solidFill>
-                  <a:srgbClr val="666677"/>
-                </a:solidFill>
-                <a:latin typeface="Arial" pitchFamily="34" charset="0"/>
-                <a:ea typeface="Arial" pitchFamily="34" charset="-122"/>
-                <a:cs typeface="Arial" pitchFamily="34" charset="-120"/>
-              </a:rPr>
-              <a:t>(content to be added)</a:t>
-            </a:r>
-            <a:endParaRPr lang="en-US" sz="900" dirty="0"/>
-          </a:p>
-        </p:txBody>
-      </p:sp>
-      <p:sp>
-        <p:nvSpPr>
-          <p:cNvPr id="33" name="Shape 31"/>
-          <p:cNvSpPr/>
-          <p:nvPr/>
-        </p:nvSpPr>
-        <p:spPr>
-          <a:xfrm>
-            <a:off x="457200" y="4434840"/>
-            <a:ext cx="8229600" cy="548640"/>
-          </a:xfrm>
-          <a:prstGeom prst="rect">
-            <a:avLst/>
-          </a:prstGeom>
-          <a:solidFill>
-            <a:srgbClr val="141420"/>
-          </a:solidFill>
-          <a:ln/>
-          <a:effectLst>
-            <a:outerShdw sx="100000" sy="100000" kx="0" ky="0" algn="bl" rotWithShape="0" blurRad="76200" dist="25400" dir="8100000">
-              <a:srgbClr val="000000">
-                <a:alpha val="35000"/>
-              </a:srgbClr>
-            </a:outerShdw>
-          </a:effectLst>
-        </p:spPr>
-      </p:sp>
-      <p:sp>
-        <p:nvSpPr>
-          <p:cNvPr id="34" name="Shape 32"/>
-          <p:cNvSpPr/>
-          <p:nvPr/>
-        </p:nvSpPr>
-        <p:spPr>
-          <a:xfrm>
-            <a:off x="457200" y="4434840"/>
-            <a:ext cx="45720" cy="548640"/>
-          </a:xfrm>
-          <a:prstGeom prst="rect">
-            <a:avLst/>
-          </a:prstGeom>
-          <a:solidFill>
-            <a:srgbClr val="E65100"/>
-          </a:solidFill>
-          <a:ln/>
-        </p:spPr>
-      </p:sp>
-      <p:sp>
-        <p:nvSpPr>
-          <p:cNvPr id="35" name="Text 33"/>
-          <p:cNvSpPr/>
-          <p:nvPr/>
-        </p:nvSpPr>
-        <p:spPr>
-          <a:xfrm>
-            <a:off x="640080" y="4462272"/>
-            <a:ext cx="1828800" cy="182880"/>
-          </a:xfrm>
-          <a:prstGeom prst="rect">
-            <a:avLst/>
-          </a:prstGeom>
-          <a:noFill/>
-          <a:ln/>
-        </p:spPr>
-        <p:txBody>
-          <a:bodyPr wrap="square" lIns="0" tIns="0" rIns="0" bIns="0" rtlCol="0" anchor="ctr"/>
-          <a:lstStyle/>
-          <a:p>
-            <a:pPr indent="0" marL="0">
-              <a:buNone/>
-            </a:pPr>
-            <a:r>
-              <a:rPr lang="en-US" sz="800" b="1" dirty="0">
-                <a:solidFill>
-                  <a:srgbClr val="FF9800"/>
-                </a:solidFill>
-                <a:latin typeface="Arial" pitchFamily="34" charset="0"/>
-                <a:ea typeface="Arial" pitchFamily="34" charset="-122"/>
-                <a:cs typeface="Arial" pitchFamily="34" charset="-120"/>
-              </a:rPr>
-              <a:t>4.8 Recommendations</a:t>
+              <a:t>Spend more on digital ads, more product options, more customizations options</a:t>
             </a:r>
             <a:endParaRPr lang="en-US" sz="800" dirty="0"/>
-          </a:p>
-        </p:txBody>
-      </p:sp>
-      <p:sp>
-        <p:nvSpPr>
-          <p:cNvPr id="36" name="Text 34"/>
-          <p:cNvSpPr/>
-          <p:nvPr/>
-        </p:nvSpPr>
-        <p:spPr>
-          <a:xfrm>
-            <a:off x="640080" y="4645152"/>
-            <a:ext cx="7863840" cy="274320"/>
-          </a:xfrm>
-          <a:prstGeom prst="rect">
-            <a:avLst/>
-          </a:prstGeom>
-          <a:noFill/>
-          <a:ln/>
-        </p:spPr>
-        <p:txBody>
-          <a:bodyPr wrap="square" lIns="0" tIns="0" rIns="0" bIns="0" rtlCol="0" anchor="ctr"/>
-          <a:lstStyle/>
-          <a:p>
-            <a:pPr indent="0" marL="0">
-              <a:buNone/>
-            </a:pPr>
-            <a:r>
-              <a:rPr lang="en-US" sz="900" dirty="0">
-                <a:solidFill>
-                  <a:srgbClr val="666677"/>
-                </a:solidFill>
-                <a:latin typeface="Arial" pitchFamily="34" charset="0"/>
-                <a:ea typeface="Arial" pitchFamily="34" charset="-122"/>
-                <a:cs typeface="Arial" pitchFamily="34" charset="-120"/>
-              </a:rPr>
-              <a:t>(content to be added)</a:t>
-            </a:r>
-            <a:endParaRPr lang="en-US" sz="900" dirty="0"/>
           </a:p>
         </p:txBody>
       </p:sp>
@@ -8258,7 +8471,27 @@
       </p:sp>
       <p:sp>
         <p:nvSpPr>
-          <p:cNvPr id="3" name="Text 1"/>
+          <p:cNvPr id="3" name="Shape 1"/>
+          <p:cNvSpPr/>
+          <p:nvPr/>
+        </p:nvSpPr>
+        <p:spPr>
+          <a:xfrm>
+            <a:off x="0" y="5116068"/>
+            <a:ext cx="9144000" cy="27432"/>
+          </a:xfrm>
+          <a:prstGeom prst="rect">
+            <a:avLst/>
+          </a:prstGeom>
+          <a:solidFill>
+            <a:srgbClr val="E82127"/>
+          </a:solidFill>
+          <a:ln/>
+        </p:spPr>
+      </p:sp>
+      <p:sp>
+        <p:nvSpPr>
+          <p:cNvPr id="4" name="Text 2"/>
           <p:cNvSpPr/>
           <p:nvPr/>
         </p:nvSpPr>
@@ -8297,7 +8530,7 @@
       </p:sp>
       <p:sp>
         <p:nvSpPr>
-          <p:cNvPr id="4" name="Text 2"/>
+          <p:cNvPr id="5" name="Text 3"/>
           <p:cNvSpPr/>
           <p:nvPr/>
         </p:nvSpPr>
@@ -8328,7 +8561,7 @@
                 <a:ea typeface="Arial Black" pitchFamily="34" charset="-122"/>
                 <a:cs typeface="Arial Black" pitchFamily="34" charset="-120"/>
               </a:rPr>
-              <a:t>Executive Summary</a:t>
+              <a:t>References</a:t>
             </a:r>
             <a:endParaRPr lang="en-US" sz="2200" dirty="0"/>
           </a:p>
@@ -8336,14 +8569,53 @@
       </p:sp>
       <p:sp>
         <p:nvSpPr>
-          <p:cNvPr id="5" name="Shape 3"/>
+          <p:cNvPr id="6" name="Text 4"/>
+          <p:cNvSpPr/>
+          <p:nvPr/>
+        </p:nvSpPr>
+        <p:spPr>
+          <a:xfrm>
+            <a:off x="457200" y="868680"/>
+            <a:ext cx="7315200" cy="274320"/>
+          </a:xfrm>
+          <a:prstGeom prst="rect">
+            <a:avLst/>
+          </a:prstGeom>
+          <a:noFill/>
+          <a:ln/>
+        </p:spPr>
+        <p:txBody>
+          <a:bodyPr wrap="square" lIns="0" tIns="0" rIns="0" bIns="0" rtlCol="0" anchor="ctr"/>
+          <a:lstStyle/>
+          <a:p>
+            <a:pPr indent="0" marL="0">
+              <a:buNone/>
+            </a:pPr>
+            <a:r>
+              <a:rPr lang="en-US" sz="1000" i="1" dirty="0">
+                <a:solidFill>
+                  <a:srgbClr val="666677"/>
+                </a:solidFill>
+                <a:latin typeface="Georgia" pitchFamily="34" charset="0"/>
+                <a:ea typeface="Georgia" pitchFamily="34" charset="-122"/>
+                <a:cs typeface="Georgia" pitchFamily="34" charset="-120"/>
+              </a:rPr>
+              <a:t>Sources &amp; Citations</a:t>
+            </a:r>
+            <a:endParaRPr lang="en-US" sz="1000" dirty="0"/>
+          </a:p>
+        </p:txBody>
+      </p:sp>
+      <p:sp>
+        <p:nvSpPr>
+          <p:cNvPr id="7" name="Shape 5"/>
           <p:cNvSpPr/>
           <p:nvPr/>
         </p:nvSpPr>
         <p:spPr>
           <a:xfrm>
             <a:off x="457200" y="1188720"/>
-            <a:ext cx="8229600" cy="3657600"/>
+            <a:ext cx="8229600" cy="3200400"/>
           </a:xfrm>
           <a:prstGeom prst="rect">
             <a:avLst/>
@@ -8363,7 +8635,7 @@
       </p:sp>
       <p:sp>
         <p:nvSpPr>
-          <p:cNvPr id="6" name="Shape 4"/>
+          <p:cNvPr id="8" name="Shape 6"/>
           <p:cNvSpPr/>
           <p:nvPr/>
         </p:nvSpPr>
@@ -8383,7 +8655,7 @@
       </p:sp>
       <p:sp>
         <p:nvSpPr>
-          <p:cNvPr id="7" name="Text 5"/>
+          <p:cNvPr id="9" name="Text 7"/>
           <p:cNvSpPr/>
           <p:nvPr/>
         </p:nvSpPr>
@@ -8414,7 +8686,7 @@
                 <a:ea typeface="Arial" pitchFamily="34" charset="-122"/>
                 <a:cs typeface="Arial" pitchFamily="34" charset="-120"/>
               </a:rPr>
-              <a:t>Executive Summary</a:t>
+              <a:t>References</a:t>
             </a:r>
             <a:endParaRPr lang="en-US" sz="1000" dirty="0"/>
           </a:p>
@@ -8422,14 +8694,14 @@
       </p:sp>
       <p:sp>
         <p:nvSpPr>
-          <p:cNvPr id="8" name="Text 6"/>
+          <p:cNvPr id="10" name="Text 8"/>
           <p:cNvSpPr/>
           <p:nvPr/>
         </p:nvSpPr>
         <p:spPr>
           <a:xfrm>
             <a:off x="594360" y="1554480"/>
-            <a:ext cx="7955280" cy="3108960"/>
+            <a:ext cx="7955280" cy="2651760"/>
           </a:xfrm>
           <a:prstGeom prst="rect">
             <a:avLst/>
@@ -8441,335 +8713,130 @@
           <a:bodyPr wrap="square" lIns="0" tIns="0" rIns="0" bIns="0" rtlCol="0" anchor="ctr"/>
           <a:lstStyle/>
           <a:p>
-            <a:pPr indent="0" marL="0">
-              <a:buNone/>
-            </a:pPr>
-            <a:r>
-              <a:rPr lang="en-US" sz="900" dirty="0">
-                <a:solidFill>
-                  <a:srgbClr val="666677"/>
+            <a:pPr marL="342900" indent="-342900">
+              <a:buSzPct val="100000"/>
+              <a:buChar char="•"/>
+            </a:pPr>
+            <a:r>
+              <a:rPr lang="en-US" sz="700" dirty="0">
+                <a:solidFill>
+                  <a:srgbClr val="999999"/>
                 </a:solidFill>
                 <a:latin typeface="Arial" pitchFamily="34" charset="0"/>
                 <a:ea typeface="Arial" pitchFamily="34" charset="-122"/>
                 <a:cs typeface="Arial" pitchFamily="34" charset="-120"/>
               </a:rPr>
-              <a:t>(content to be added)</a:t>
-            </a:r>
-            <a:endParaRPr lang="en-US" sz="900" dirty="0"/>
-          </a:p>
-        </p:txBody>
-      </p:sp>
-    </p:spTree>
-  </p:cSld>
-  <p:clrMapOvr>
-    <a:masterClrMapping/>
-  </p:clrMapOvr>
-</p:sld>
-</file>
-
-<file path=ppt/slides/slide7.xml><?xml version="1.0" encoding="utf-8"?>
-<p:sld xmlns:a="http://schemas.openxmlformats.org/drawingml/2006/main" xmlns:r="http://schemas.openxmlformats.org/officeDocument/2006/relationships" xmlns:p="http://schemas.openxmlformats.org/presentationml/2006/main">
-  <p:cSld name="Slide 7">
-    <p:bg>
-      <p:bgPr>
-        <a:solidFill>
-          <a:srgbClr val="0A0A0F"/>
-        </a:solidFill>
-      </p:bgPr>
-    </p:bg>
-    <p:spTree>
-      <p:nvGrpSpPr>
-        <p:cNvPr id="1" name=""/>
-        <p:cNvGrpSpPr/>
-        <p:nvPr/>
-      </p:nvGrpSpPr>
-      <p:grpSpPr>
-        <a:xfrm>
-          <a:off x="0" y="0"/>
-          <a:ext cx="0" cy="0"/>
-          <a:chOff x="0" y="0"/>
-          <a:chExt cx="0" cy="0"/>
-        </a:xfrm>
-      </p:grpSpPr>
-      <p:sp>
-        <p:nvSpPr>
-          <p:cNvPr id="2" name="Shape 0"/>
-          <p:cNvSpPr/>
-          <p:nvPr/>
-        </p:nvSpPr>
-        <p:spPr>
-          <a:xfrm>
-            <a:off x="0" y="0"/>
-            <a:ext cx="9144000" cy="27432"/>
-          </a:xfrm>
-          <a:prstGeom prst="rect">
-            <a:avLst/>
-          </a:prstGeom>
-          <a:solidFill>
-            <a:srgbClr val="E82127"/>
-          </a:solidFill>
-          <a:ln/>
-        </p:spPr>
-      </p:sp>
-      <p:sp>
-        <p:nvSpPr>
-          <p:cNvPr id="3" name="Shape 1"/>
-          <p:cNvSpPr/>
-          <p:nvPr/>
-        </p:nvSpPr>
-        <p:spPr>
-          <a:xfrm>
-            <a:off x="0" y="5116068"/>
-            <a:ext cx="9144000" cy="27432"/>
-          </a:xfrm>
-          <a:prstGeom prst="rect">
-            <a:avLst/>
-          </a:prstGeom>
-          <a:solidFill>
-            <a:srgbClr val="E82127"/>
-          </a:solidFill>
-          <a:ln/>
-        </p:spPr>
-      </p:sp>
-      <p:sp>
-        <p:nvSpPr>
-          <p:cNvPr id="4" name="Text 2"/>
-          <p:cNvSpPr/>
-          <p:nvPr/>
-        </p:nvSpPr>
-        <p:spPr>
-          <a:xfrm>
-            <a:off x="457200" y="137160"/>
-            <a:ext cx="731520" cy="502920"/>
-          </a:xfrm>
-          <a:prstGeom prst="rect">
-            <a:avLst/>
-          </a:prstGeom>
-          <a:noFill/>
-          <a:ln/>
-        </p:spPr>
-        <p:txBody>
-          <a:bodyPr wrap="square" lIns="0" tIns="0" rIns="0" bIns="0" rtlCol="0" anchor="ctr"/>
-          <a:lstStyle/>
-          <a:p>
-            <a:pPr indent="0" marL="0">
-              <a:buNone/>
-            </a:pPr>
-            <a:r>
-              <a:rPr lang="en-US" sz="2800" dirty="0">
-                <a:solidFill>
-                  <a:srgbClr val="E82127"/>
-                </a:solidFill>
-                <a:latin typeface="Arial Black" pitchFamily="34" charset="0"/>
-                <a:ea typeface="Arial Black" pitchFamily="34" charset="-122"/>
-                <a:cs typeface="Arial Black" pitchFamily="34" charset="-120"/>
-              </a:rPr>
-              <a:t>06</a:t>
-            </a:r>
-            <a:endParaRPr lang="en-US" sz="2800" dirty="0"/>
-          </a:p>
-        </p:txBody>
-      </p:sp>
-      <p:sp>
-        <p:nvSpPr>
-          <p:cNvPr id="5" name="Text 3"/>
-          <p:cNvSpPr/>
-          <p:nvPr/>
-        </p:nvSpPr>
-        <p:spPr>
-          <a:xfrm>
-            <a:off x="457200" y="502920"/>
-            <a:ext cx="8229600" cy="411480"/>
-          </a:xfrm>
-          <a:prstGeom prst="rect">
-            <a:avLst/>
-          </a:prstGeom>
-          <a:noFill/>
-          <a:ln/>
-        </p:spPr>
-        <p:txBody>
-          <a:bodyPr wrap="square" lIns="0" tIns="0" rIns="0" bIns="0" rtlCol="0" anchor="ctr"/>
-          <a:lstStyle/>
-          <a:p>
-            <a:pPr indent="0" marL="0">
-              <a:buNone/>
-            </a:pPr>
-            <a:r>
-              <a:rPr lang="en-US" sz="2200" dirty="0">
-                <a:solidFill>
-                  <a:srgbClr val="F0F0F0"/>
-                </a:solidFill>
-                <a:latin typeface="Arial Black" pitchFamily="34" charset="0"/>
-                <a:ea typeface="Arial Black" pitchFamily="34" charset="-122"/>
-                <a:cs typeface="Arial Black" pitchFamily="34" charset="-120"/>
-              </a:rPr>
-              <a:t>References</a:t>
-            </a:r>
-            <a:endParaRPr lang="en-US" sz="2200" dirty="0"/>
-          </a:p>
-        </p:txBody>
-      </p:sp>
-      <p:sp>
-        <p:nvSpPr>
-          <p:cNvPr id="6" name="Text 4"/>
-          <p:cNvSpPr/>
-          <p:nvPr/>
-        </p:nvSpPr>
-        <p:spPr>
-          <a:xfrm>
-            <a:off x="457200" y="868680"/>
-            <a:ext cx="7315200" cy="274320"/>
-          </a:xfrm>
-          <a:prstGeom prst="rect">
-            <a:avLst/>
-          </a:prstGeom>
-          <a:noFill/>
-          <a:ln/>
-        </p:spPr>
-        <p:txBody>
-          <a:bodyPr wrap="square" lIns="0" tIns="0" rIns="0" bIns="0" rtlCol="0" anchor="ctr"/>
-          <a:lstStyle/>
-          <a:p>
-            <a:pPr indent="0" marL="0">
-              <a:buNone/>
-            </a:pPr>
-            <a:r>
-              <a:rPr lang="en-US" sz="1000" i="1" dirty="0">
-                <a:solidFill>
-                  <a:srgbClr val="666677"/>
-                </a:solidFill>
-                <a:latin typeface="Georgia" pitchFamily="34" charset="0"/>
-                <a:ea typeface="Georgia" pitchFamily="34" charset="-122"/>
-                <a:cs typeface="Georgia" pitchFamily="34" charset="-120"/>
-              </a:rPr>
-              <a:t>Sources &amp; Citations</a:t>
-            </a:r>
-            <a:endParaRPr lang="en-US" sz="1000" dirty="0"/>
-          </a:p>
-        </p:txBody>
-      </p:sp>
-      <p:sp>
-        <p:nvSpPr>
-          <p:cNvPr id="7" name="Shape 5"/>
-          <p:cNvSpPr/>
-          <p:nvPr/>
-        </p:nvSpPr>
-        <p:spPr>
-          <a:xfrm>
-            <a:off x="457200" y="1188720"/>
-            <a:ext cx="8229600" cy="3200400"/>
-          </a:xfrm>
-          <a:prstGeom prst="rect">
-            <a:avLst/>
-          </a:prstGeom>
-          <a:solidFill>
-            <a:srgbClr val="141420"/>
-          </a:solidFill>
-          <a:ln/>
-          <a:effectLst>
-            <a:outerShdw sx="100000" sy="100000" kx="0" ky="0" algn="bl" rotWithShape="0" blurRad="76200" dist="25400" dir="8100000">
-              <a:srgbClr val="000000">
-                <a:alpha val="35000"/>
-              </a:srgbClr>
-            </a:outerShdw>
-          </a:effectLst>
-        </p:spPr>
-      </p:sp>
-      <p:sp>
-        <p:nvSpPr>
-          <p:cNvPr id="8" name="Shape 6"/>
-          <p:cNvSpPr/>
-          <p:nvPr/>
-        </p:nvSpPr>
-        <p:spPr>
-          <a:xfrm>
-            <a:off x="457200" y="1188720"/>
-            <a:ext cx="8229600" cy="32004"/>
-          </a:xfrm>
-          <a:prstGeom prst="rect">
-            <a:avLst/>
-          </a:prstGeom>
-          <a:solidFill>
-            <a:srgbClr val="E82127"/>
-          </a:solidFill>
-          <a:ln/>
-        </p:spPr>
-      </p:sp>
-      <p:sp>
-        <p:nvSpPr>
-          <p:cNvPr id="9" name="Text 7"/>
-          <p:cNvSpPr/>
-          <p:nvPr/>
-        </p:nvSpPr>
-        <p:spPr>
-          <a:xfrm>
-            <a:off x="594360" y="1280160"/>
-            <a:ext cx="3657600" cy="201168"/>
-          </a:xfrm>
-          <a:prstGeom prst="rect">
-            <a:avLst/>
-          </a:prstGeom>
-          <a:noFill/>
-          <a:ln/>
-        </p:spPr>
-        <p:txBody>
-          <a:bodyPr wrap="square" lIns="0" tIns="0" rIns="0" bIns="0" rtlCol="0" anchor="ctr"/>
-          <a:lstStyle/>
-          <a:p>
-            <a:pPr indent="0" marL="0">
-              <a:buNone/>
-            </a:pPr>
-            <a:r>
-              <a:rPr lang="en-US" sz="1000" b="1" dirty="0">
-                <a:solidFill>
-                  <a:srgbClr val="E82127"/>
+              <a:t>Model 3 – sports electric sedan | Tesla. Available at: https://www.tesla.com/model3 (Accessed: 23 March 2026).</a:t>
+            </a:r>
+            <a:endParaRPr lang="en-US" sz="700" dirty="0"/>
+          </a:p>
+          <a:p>
+            <a:pPr marL="342900" indent="-342900">
+              <a:buSzPct val="100000"/>
+              <a:buChar char="•"/>
+            </a:pPr>
+            <a:r>
+              <a:rPr lang="en-US" sz="700" dirty="0">
+                <a:solidFill>
+                  <a:srgbClr val="999999"/>
                 </a:solidFill>
                 <a:latin typeface="Arial" pitchFamily="34" charset="0"/>
                 <a:ea typeface="Arial" pitchFamily="34" charset="-122"/>
                 <a:cs typeface="Arial" pitchFamily="34" charset="-120"/>
               </a:rPr>
-              <a:t>References</a:t>
-            </a:r>
-            <a:endParaRPr lang="en-US" sz="1000" dirty="0"/>
-          </a:p>
-        </p:txBody>
-      </p:sp>
-      <p:sp>
-        <p:nvSpPr>
-          <p:cNvPr id="10" name="Text 8"/>
-          <p:cNvSpPr/>
-          <p:nvPr/>
-        </p:nvSpPr>
-        <p:spPr>
-          <a:xfrm>
-            <a:off x="594360" y="1554480"/>
-            <a:ext cx="7955280" cy="2651760"/>
-          </a:xfrm>
-          <a:prstGeom prst="rect">
-            <a:avLst/>
-          </a:prstGeom>
-          <a:noFill/>
-          <a:ln/>
-        </p:spPr>
-        <p:txBody>
-          <a:bodyPr wrap="square" lIns="0" tIns="0" rIns="0" bIns="0" rtlCol="0" anchor="ctr"/>
-          <a:lstStyle/>
-          <a:p>
-            <a:pPr indent="0" marL="0">
-              <a:buNone/>
-            </a:pPr>
-            <a:r>
-              <a:rPr lang="en-US" sz="900" dirty="0">
-                <a:solidFill>
-                  <a:srgbClr val="666677"/>
+              <a:t>Admin (2025) Tesla’s marketing strategy and its impact on EV Growth, Aeternus. Available at: https://www.aeternus.rs/driving-innovation-teslas-marketing-strategy-and-its-impact-on-electric-vehicle-adoption/ (Accessed: 24 March 2026).</a:t>
+            </a:r>
+            <a:endParaRPr lang="en-US" sz="700" dirty="0"/>
+          </a:p>
+          <a:p>
+            <a:pPr marL="342900" indent="-342900">
+              <a:buSzPct val="100000"/>
+              <a:buChar char="•"/>
+            </a:pPr>
+            <a:r>
+              <a:rPr lang="en-US" sz="700" dirty="0">
+                <a:solidFill>
+                  <a:srgbClr val="999999"/>
                 </a:solidFill>
                 <a:latin typeface="Arial" pitchFamily="34" charset="0"/>
                 <a:ea typeface="Arial" pitchFamily="34" charset="-122"/>
                 <a:cs typeface="Arial" pitchFamily="34" charset="-120"/>
               </a:rPr>
-              <a:t>(content to be added)</a:t>
-            </a:r>
-            <a:endParaRPr lang="en-US" sz="900" dirty="0"/>
+              <a:t>Hu, J. (2025) ‘Research on the marketing strategy of Tesla marketing based on the 4P Theory and SWOT analytical method’, Advances in Economics, Management and Political Sciences, 240(1), pp. 81–90.</a:t>
+            </a:r>
+            <a:endParaRPr lang="en-US" sz="700" dirty="0"/>
+          </a:p>
+          <a:p>
+            <a:pPr marL="342900" indent="-342900">
+              <a:buSzPct val="100000"/>
+              <a:buChar char="•"/>
+            </a:pPr>
+            <a:r>
+              <a:rPr lang="en-US" sz="700" dirty="0">
+                <a:solidFill>
+                  <a:srgbClr val="999999"/>
+                </a:solidFill>
+                <a:latin typeface="Arial" pitchFamily="34" charset="0"/>
+                <a:ea typeface="Arial" pitchFamily="34" charset="-122"/>
+                <a:cs typeface="Arial" pitchFamily="34" charset="-120"/>
+              </a:rPr>
+              <a:t>Hu, Z. (2022) ‘Research on the consumer behavior characteristics and marketing strategy of new energy vehicles’, BCP Business &amp; Management, 31, pp. 168–175.</a:t>
+            </a:r>
+            <a:endParaRPr lang="en-US" sz="700" dirty="0"/>
+          </a:p>
+          <a:p>
+            <a:pPr marL="342900" indent="-342900">
+              <a:buSzPct val="100000"/>
+              <a:buChar char="•"/>
+            </a:pPr>
+            <a:r>
+              <a:rPr lang="en-US" sz="700" dirty="0">
+                <a:solidFill>
+                  <a:srgbClr val="999999"/>
+                </a:solidFill>
+                <a:latin typeface="Arial" pitchFamily="34" charset="0"/>
+                <a:ea typeface="Arial" pitchFamily="34" charset="-122"/>
+                <a:cs typeface="Arial" pitchFamily="34" charset="-120"/>
+              </a:rPr>
+              <a:t>Mangram, M.E. (2012) ‘The globalization of Tesla Motors: A strategic marketing plan analysis’, Journal of Strategic Marketing, 20(4), pp. 289–312.</a:t>
+            </a:r>
+            <a:endParaRPr lang="en-US" sz="700" dirty="0"/>
+          </a:p>
+          <a:p>
+            <a:pPr marL="342900" indent="-342900">
+              <a:buSzPct val="100000"/>
+              <a:buChar char="•"/>
+            </a:pPr>
+            <a:r>
+              <a:rPr lang="en-US" sz="700" dirty="0">
+                <a:solidFill>
+                  <a:srgbClr val="999999"/>
+                </a:solidFill>
+                <a:latin typeface="Arial" pitchFamily="34" charset="0"/>
+                <a:ea typeface="Arial" pitchFamily="34" charset="-122"/>
+                <a:cs typeface="Arial" pitchFamily="34" charset="-120"/>
+              </a:rPr>
+              <a:t>Young, J., Fattah, A. and Clark, P. (2020) Tesla: Direct Marketing Vs Franchising [Preprint].</a:t>
+            </a:r>
+            <a:endParaRPr lang="en-US" sz="700" dirty="0"/>
+          </a:p>
+          <a:p>
+            <a:pPr marL="342900" indent="-342900">
+              <a:buSzPct val="100000"/>
+              <a:buChar char="•"/>
+            </a:pPr>
+            <a:r>
+              <a:rPr lang="en-US" sz="700" dirty="0">
+                <a:solidFill>
+                  <a:srgbClr val="999999"/>
+                </a:solidFill>
+                <a:latin typeface="Arial" pitchFamily="34" charset="0"/>
+                <a:ea typeface="Arial" pitchFamily="34" charset="-122"/>
+                <a:cs typeface="Arial" pitchFamily="34" charset="-120"/>
+              </a:rPr>
+              <a:t>‘Tesla marketing analysis’ (2023) Academic Journal of Business &amp; Management, 5(2).</a:t>
+            </a:r>
+            <a:endParaRPr lang="en-US" sz="700" dirty="0"/>
           </a:p>
         </p:txBody>
       </p:sp>
